--- a/docs/final/coursework-defense-presentation.pptx
+++ b/docs/final/coursework-defense-presentation.pptx
@@ -1836,7 +1836,7 @@
     <p:bg>
       <p:bgPr>
         <a:solidFill>
-          <a:srgbClr val="F7FAF8"/>
+          <a:srgbClr val="F8F9F8"/>
         </a:solidFill>
       </p:bgPr>
     </p:bg>
@@ -1869,11 +1869,11 @@
             <a:avLst/>
           </a:prstGeom>
           <a:solidFill>
-            <a:srgbClr val="F7FAF8"/>
+            <a:srgbClr val="F8F9F8"/>
           </a:solidFill>
           <a:ln w="12700">
             <a:solidFill>
-              <a:srgbClr val="F7FAF8"/>
+              <a:srgbClr val="F8F9F8"/>
             </a:solidFill>
             <a:prstDash val="solid"/>
           </a:ln>
@@ -1888,7 +1888,7 @@
         <p:spPr>
           <a:xfrm>
             <a:off x="0" y="0"/>
-            <a:ext cx="12191695" cy="914400"/>
+            <a:ext cx="12191695" cy="658368"/>
           </a:xfrm>
           <a:prstGeom prst="rect">
             <a:avLst/>
@@ -1912,8 +1912,86 @@
         </p:nvSpPr>
         <p:spPr>
           <a:xfrm>
-            <a:off x="685800" y="1600200"/>
-            <a:ext cx="9966960" cy="1600200"/>
+            <a:off x="685800" y="219456"/>
+            <a:ext cx="10789920" cy="182880"/>
+          </a:xfrm>
+          <a:prstGeom prst="rect">
+            <a:avLst/>
+          </a:prstGeom>
+          <a:noFill/>
+          <a:ln/>
+        </p:spPr>
+        <p:txBody>
+          <a:bodyPr wrap="square" lIns="0" tIns="0" rIns="0" bIns="0" rtlCol="0" anchor="ctr"/>
+          <a:lstStyle/>
+          <a:p>
+            <a:pPr algn="ctr" indent="0" marL="0">
+              <a:buNone/>
+            </a:pPr>
+            <a:r>
+              <a:rPr lang="en-US" sz="1050" b="1" dirty="0">
+                <a:solidFill>
+                  <a:srgbClr val="FFFFFF"/>
+                </a:solidFill>
+                <a:latin typeface="Arial" pitchFamily="34" charset="0"/>
+                <a:ea typeface="Arial" pitchFamily="34" charset="-122"/>
+                <a:cs typeface="Arial" pitchFamily="34" charset="-120"/>
+              </a:rPr>
+              <a:t>Финансовый университет при Правительстве РФ</a:t>
+            </a:r>
+            <a:endParaRPr lang="en-US" sz="1050" dirty="0"/>
+          </a:p>
+        </p:txBody>
+      </p:sp>
+      <p:sp>
+        <p:nvSpPr>
+          <p:cNvPr id="5" name="Text 3"/>
+          <p:cNvSpPr/>
+          <p:nvPr/>
+        </p:nvSpPr>
+        <p:spPr>
+          <a:xfrm>
+            <a:off x="685800" y="1207008"/>
+            <a:ext cx="10789920" cy="256032"/>
+          </a:xfrm>
+          <a:prstGeom prst="rect">
+            <a:avLst/>
+          </a:prstGeom>
+          <a:noFill/>
+          <a:ln/>
+        </p:spPr>
+        <p:txBody>
+          <a:bodyPr wrap="square" lIns="0" tIns="0" rIns="0" bIns="0" rtlCol="0" anchor="ctr"/>
+          <a:lstStyle/>
+          <a:p>
+            <a:pPr algn="ctr" indent="0" marL="0">
+              <a:buNone/>
+            </a:pPr>
+            <a:r>
+              <a:rPr lang="en-US" sz="1400" b="1" dirty="0">
+                <a:solidFill>
+                  <a:srgbClr val="0F5132"/>
+                </a:solidFill>
+                <a:latin typeface="Arial" pitchFamily="34" charset="0"/>
+                <a:ea typeface="Arial" pitchFamily="34" charset="-122"/>
+                <a:cs typeface="Arial" pitchFamily="34" charset="-120"/>
+              </a:rPr>
+              <a:t>КУРСОВАЯ РАБОТА</a:t>
+            </a:r>
+            <a:endParaRPr lang="en-US" sz="1400" dirty="0"/>
+          </a:p>
+        </p:txBody>
+      </p:sp>
+      <p:sp>
+        <p:nvSpPr>
+          <p:cNvPr id="6" name="Text 4"/>
+          <p:cNvSpPr/>
+          <p:nvPr/>
+        </p:nvSpPr>
+        <p:spPr>
+          <a:xfrm>
+            <a:off x="1005840" y="1737360"/>
+            <a:ext cx="10149840" cy="1417320"/>
           </a:xfrm>
           <a:prstGeom prst="rect">
             <a:avLst/>
@@ -1927,119 +2005,149 @@
           </a:bodyPr>
           <a:lstStyle/>
           <a:p>
+            <a:pPr algn="ctr" indent="0" marL="0">
+              <a:buNone/>
+            </a:pPr>
+            <a:r>
+              <a:rPr lang="en-US" sz="2800" b="1" dirty="0">
+                <a:solidFill>
+                  <a:srgbClr val="111111"/>
+                </a:solidFill>
+                <a:latin typeface="Arial" pitchFamily="34" charset="0"/>
+                <a:ea typeface="Arial" pitchFamily="34" charset="-122"/>
+                <a:cs typeface="Arial" pitchFamily="34" charset="-120"/>
+              </a:rPr>
+              <a:t>Разработка автоматической диалоговой системы</a:t>
+            </a:r>
+            <a:endParaRPr lang="en-US" sz="2800" dirty="0"/>
+          </a:p>
+          <a:p>
+            <a:pPr algn="ctr" indent="0" marL="0">
+              <a:buNone/>
+            </a:pPr>
+            <a:r>
+              <a:rPr lang="en-US" sz="2800" b="1" dirty="0">
+                <a:solidFill>
+                  <a:srgbClr val="111111"/>
+                </a:solidFill>
+                <a:latin typeface="Arial" pitchFamily="34" charset="0"/>
+                <a:ea typeface="Arial" pitchFamily="34" charset="-122"/>
+                <a:cs typeface="Arial" pitchFamily="34" charset="-120"/>
+              </a:rPr>
+              <a:t>на основе языковой модели для анализа</a:t>
+            </a:r>
+            <a:endParaRPr lang="en-US" sz="2800" dirty="0"/>
+          </a:p>
+          <a:p>
+            <a:pPr algn="ctr" indent="0" marL="0">
+              <a:buNone/>
+            </a:pPr>
+            <a:r>
+              <a:rPr lang="en-US" sz="2800" b="1" dirty="0">
+                <a:solidFill>
+                  <a:srgbClr val="111111"/>
+                </a:solidFill>
+                <a:latin typeface="Arial" pitchFamily="34" charset="0"/>
+                <a:ea typeface="Arial" pitchFamily="34" charset="-122"/>
+                <a:cs typeface="Arial" pitchFamily="34" charset="-120"/>
+              </a:rPr>
+              <a:t>экономических новостей</a:t>
+            </a:r>
+            <a:endParaRPr lang="en-US" sz="2800" dirty="0"/>
+          </a:p>
+        </p:txBody>
+      </p:sp>
+      <p:sp>
+        <p:nvSpPr>
+          <p:cNvPr id="7" name="Text 5"/>
+          <p:cNvSpPr/>
+          <p:nvPr/>
+        </p:nvSpPr>
+        <p:spPr>
+          <a:xfrm>
+            <a:off x="6537960" y="3886200"/>
+            <a:ext cx="4480560" cy="777240"/>
+          </a:xfrm>
+          <a:prstGeom prst="rect">
+            <a:avLst/>
+          </a:prstGeom>
+          <a:noFill/>
+          <a:ln/>
+        </p:spPr>
+        <p:txBody>
+          <a:bodyPr wrap="square" lIns="0" tIns="0" rIns="0" bIns="0" rtlCol="0" anchor="ctr"/>
+          <a:lstStyle/>
+          <a:p>
             <a:pPr indent="0" marL="0">
               <a:buNone/>
             </a:pPr>
             <a:r>
-              <a:rPr lang="en-US" sz="3000" b="1" dirty="0">
-                <a:solidFill>
-                  <a:srgbClr val="17211D"/>
-                </a:solidFill>
-                <a:latin typeface="Arial" pitchFamily="34" charset="0"/>
-                <a:ea typeface="Arial" pitchFamily="34" charset="-122"/>
-                <a:cs typeface="Arial" pitchFamily="34" charset="-120"/>
-              </a:rPr>
-              <a:t>Разработка автоматической диалоговой системы</a:t>
-            </a:r>
-            <a:endParaRPr lang="en-US" sz="3000" dirty="0"/>
+              <a:rPr lang="en-US" sz="1300" dirty="0">
+                <a:solidFill>
+                  <a:srgbClr val="111111"/>
+                </a:solidFill>
+                <a:latin typeface="Arial" pitchFamily="34" charset="0"/>
+                <a:ea typeface="Arial" pitchFamily="34" charset="-122"/>
+                <a:cs typeface="Arial" pitchFamily="34" charset="-120"/>
+              </a:rPr>
+              <a:t>Выполнил: Прудиев Алексей Сергеевич</a:t>
+            </a:r>
+            <a:endParaRPr lang="en-US" sz="1300" dirty="0"/>
           </a:p>
           <a:p>
             <a:pPr indent="0" marL="0">
               <a:buNone/>
             </a:pPr>
             <a:r>
-              <a:rPr lang="en-US" sz="3000" b="1" dirty="0">
-                <a:solidFill>
-                  <a:srgbClr val="17211D"/>
-                </a:solidFill>
-                <a:latin typeface="Arial" pitchFamily="34" charset="0"/>
-                <a:ea typeface="Arial" pitchFamily="34" charset="-122"/>
-                <a:cs typeface="Arial" pitchFamily="34" charset="-120"/>
-              </a:rPr>
-              <a:t>на основе языковой модели для анализа</a:t>
-            </a:r>
-            <a:endParaRPr lang="en-US" sz="3000" dirty="0"/>
+              <a:rPr lang="en-US" sz="1300" dirty="0">
+                <a:solidFill>
+                  <a:srgbClr val="111111"/>
+                </a:solidFill>
+                <a:latin typeface="Arial" pitchFamily="34" charset="0"/>
+                <a:ea typeface="Arial" pitchFamily="34" charset="-122"/>
+                <a:cs typeface="Arial" pitchFamily="34" charset="-120"/>
+              </a:rPr>
+              <a:t>Группа: ПМ23-4</a:t>
+            </a:r>
+            <a:endParaRPr lang="en-US" sz="1300" dirty="0"/>
           </a:p>
           <a:p>
             <a:pPr indent="0" marL="0">
               <a:buNone/>
             </a:pPr>
             <a:r>
-              <a:rPr lang="en-US" sz="3000" b="1" dirty="0">
-                <a:solidFill>
-                  <a:srgbClr val="17211D"/>
-                </a:solidFill>
-                <a:latin typeface="Arial" pitchFamily="34" charset="0"/>
-                <a:ea typeface="Arial" pitchFamily="34" charset="-122"/>
-                <a:cs typeface="Arial" pitchFamily="34" charset="-120"/>
-              </a:rPr>
-              <a:t>экономических новостей</a:t>
-            </a:r>
-            <a:endParaRPr lang="en-US" sz="3000" dirty="0"/>
-          </a:p>
-        </p:txBody>
-      </p:sp>
-      <p:sp>
-        <p:nvSpPr>
-          <p:cNvPr id="5" name="Text 3"/>
-          <p:cNvSpPr/>
-          <p:nvPr/>
-        </p:nvSpPr>
-        <p:spPr>
-          <a:xfrm>
-            <a:off x="713232" y="3401568"/>
-            <a:ext cx="8961120" cy="274320"/>
-          </a:xfrm>
-          <a:prstGeom prst="rect">
-            <a:avLst/>
-          </a:prstGeom>
-          <a:noFill/>
-          <a:ln/>
-        </p:spPr>
-        <p:txBody>
-          <a:bodyPr wrap="square" lIns="0" tIns="0" rIns="0" bIns="0" rtlCol="0" anchor="ctr"/>
-          <a:lstStyle/>
-          <a:p>
-            <a:pPr indent="0" marL="0">
-              <a:buNone/>
-            </a:pPr>
-            <a:r>
-              <a:rPr lang="en-US" sz="1400" dirty="0">
-                <a:solidFill>
-                  <a:srgbClr val="60706A"/>
-                </a:solidFill>
-                <a:latin typeface="Arial" pitchFamily="34" charset="0"/>
-                <a:ea typeface="Arial" pitchFamily="34" charset="-122"/>
-                <a:cs typeface="Arial" pitchFamily="34" charset="-120"/>
-              </a:rPr>
-              <a:t>Курсовая работа · ФИО, группа, руководитель, 2026</a:t>
-            </a:r>
-            <a:endParaRPr lang="en-US" sz="1400" dirty="0"/>
-          </a:p>
-        </p:txBody>
-      </p:sp>
-      <p:sp>
-        <p:nvSpPr>
-          <p:cNvPr id="6" name="Shape 4"/>
-          <p:cNvSpPr/>
-          <p:nvPr/>
-        </p:nvSpPr>
-        <p:spPr>
-          <a:xfrm>
-            <a:off x="731520" y="4160520"/>
-            <a:ext cx="2011680" cy="402336"/>
-          </a:xfrm>
-          <a:prstGeom prst="roundRect">
-            <a:avLst>
-              <a:gd name="adj" fmla="val 11364"/>
-            </a:avLst>
-          </a:prstGeom>
-          <a:solidFill>
-            <a:srgbClr val="EAF4EF"/>
-          </a:solidFill>
+              <a:rPr lang="en-US" sz="1300" dirty="0">
+                <a:solidFill>
+                  <a:srgbClr val="111111"/>
+                </a:solidFill>
+                <a:latin typeface="Arial" pitchFamily="34" charset="0"/>
+                <a:ea typeface="Arial" pitchFamily="34" charset="-122"/>
+                <a:cs typeface="Arial" pitchFamily="34" charset="-120"/>
+              </a:rPr>
+              <a:t>Руководитель: ____________________</a:t>
+            </a:r>
+            <a:endParaRPr lang="en-US" sz="1300" dirty="0"/>
+          </a:p>
+        </p:txBody>
+      </p:sp>
+      <p:sp>
+        <p:nvSpPr>
+          <p:cNvPr id="8" name="Shape 6"/>
+          <p:cNvSpPr/>
+          <p:nvPr/>
+        </p:nvSpPr>
+        <p:spPr>
+          <a:xfrm>
+            <a:off x="1005840" y="5212080"/>
+            <a:ext cx="10149840" cy="0"/>
+          </a:xfrm>
+          <a:prstGeom prst="line">
+            <a:avLst/>
+          </a:prstGeom>
+          <a:noFill/>
           <a:ln w="12700">
             <a:solidFill>
-              <a:srgbClr val="C8D8D1"/>
+              <a:srgbClr val="B7C6C0"/>
             </a:solidFill>
             <a:prstDash val="solid"/>
           </a:ln>
@@ -2047,252 +2155,46 @@
       </p:sp>
       <p:sp>
         <p:nvSpPr>
-          <p:cNvPr id="7" name="Text 5"/>
-          <p:cNvSpPr/>
-          <p:nvPr/>
-        </p:nvSpPr>
-        <p:spPr>
-          <a:xfrm>
-            <a:off x="841248" y="4261104"/>
-            <a:ext cx="1792224" cy="164592"/>
-          </a:xfrm>
-          <a:prstGeom prst="rect">
-            <a:avLst/>
-          </a:prstGeom>
-          <a:noFill/>
-          <a:ln/>
-        </p:spPr>
-        <p:txBody>
-          <a:bodyPr wrap="square" lIns="0" tIns="0" rIns="0" bIns="0" rtlCol="0" anchor="ctr">
-            <a:normAutofit/>
-          </a:bodyPr>
-          <a:lstStyle/>
-          <a:p>
-            <a:pPr indent="0" marL="0">
-              <a:buNone/>
-            </a:pPr>
-            <a:r>
-              <a:rPr lang="en-US" sz="1050" b="1" dirty="0">
-                <a:solidFill>
-                  <a:srgbClr val="0F5132"/>
-                </a:solidFill>
-                <a:latin typeface="Arial" pitchFamily="34" charset="0"/>
-                <a:ea typeface="Arial" pitchFamily="34" charset="-122"/>
-                <a:cs typeface="Arial" pitchFamily="34" charset="-120"/>
-              </a:rPr>
-              <a:t>локальный RAG pipeline</a:t>
-            </a:r>
-            <a:endParaRPr lang="en-US" sz="1050" dirty="0"/>
-          </a:p>
-        </p:txBody>
-      </p:sp>
-      <p:sp>
-        <p:nvSpPr>
-          <p:cNvPr id="8" name="Shape 6"/>
-          <p:cNvSpPr/>
-          <p:nvPr/>
-        </p:nvSpPr>
-        <p:spPr>
-          <a:xfrm>
-            <a:off x="2971800" y="4160520"/>
-            <a:ext cx="1600200" cy="402336"/>
-          </a:xfrm>
-          <a:prstGeom prst="roundRect">
-            <a:avLst>
-              <a:gd name="adj" fmla="val 11364"/>
-            </a:avLst>
-          </a:prstGeom>
-          <a:solidFill>
-            <a:srgbClr val="EAF4EF"/>
-          </a:solidFill>
-          <a:ln w="12700">
-            <a:solidFill>
-              <a:srgbClr val="C8D8D1"/>
-            </a:solidFill>
-            <a:prstDash val="solid"/>
-          </a:ln>
-        </p:spPr>
-      </p:sp>
-      <p:sp>
-        <p:nvSpPr>
           <p:cNvPr id="9" name="Text 7"/>
           <p:cNvSpPr/>
           <p:nvPr/>
         </p:nvSpPr>
         <p:spPr>
           <a:xfrm>
-            <a:off x="3081528" y="4261104"/>
-            <a:ext cx="1380744" cy="164592"/>
-          </a:xfrm>
-          <a:prstGeom prst="rect">
-            <a:avLst/>
-          </a:prstGeom>
-          <a:noFill/>
-          <a:ln/>
-        </p:spPr>
-        <p:txBody>
-          <a:bodyPr wrap="square" lIns="0" tIns="0" rIns="0" bIns="0" rtlCol="0" anchor="ctr">
-            <a:normAutofit/>
-          </a:bodyPr>
-          <a:lstStyle/>
-          <a:p>
-            <a:pPr indent="0" marL="0">
-              <a:buNone/>
-            </a:pPr>
-            <a:r>
-              <a:rPr lang="en-US" sz="1050" b="1" dirty="0">
-                <a:solidFill>
-                  <a:srgbClr val="0F5132"/>
-                </a:solidFill>
-                <a:latin typeface="Arial" pitchFamily="34" charset="0"/>
-                <a:ea typeface="Arial" pitchFamily="34" charset="-122"/>
-                <a:cs typeface="Arial" pitchFamily="34" charset="-120"/>
-              </a:rPr>
-              <a:t>микросервисы</a:t>
-            </a:r>
-            <a:endParaRPr lang="en-US" sz="1050" dirty="0"/>
-          </a:p>
-        </p:txBody>
-      </p:sp>
-      <p:sp>
-        <p:nvSpPr>
-          <p:cNvPr id="10" name="Shape 8"/>
-          <p:cNvSpPr/>
-          <p:nvPr/>
-        </p:nvSpPr>
-        <p:spPr>
-          <a:xfrm>
-            <a:off x="4800600" y="4160520"/>
-            <a:ext cx="1737360" cy="402336"/>
-          </a:xfrm>
-          <a:prstGeom prst="roundRect">
-            <a:avLst>
-              <a:gd name="adj" fmla="val 11364"/>
-            </a:avLst>
-          </a:prstGeom>
-          <a:solidFill>
-            <a:srgbClr val="EAF4EF"/>
-          </a:solidFill>
-          <a:ln w="12700">
-            <a:solidFill>
-              <a:srgbClr val="C8D8D1"/>
-            </a:solidFill>
-            <a:prstDash val="solid"/>
-          </a:ln>
-        </p:spPr>
-      </p:sp>
-      <p:sp>
-        <p:nvSpPr>
-          <p:cNvPr id="11" name="Text 9"/>
-          <p:cNvSpPr/>
-          <p:nvPr/>
-        </p:nvSpPr>
-        <p:spPr>
-          <a:xfrm>
-            <a:off x="4910328" y="4261104"/>
-            <a:ext cx="1517904" cy="164592"/>
-          </a:xfrm>
-          <a:prstGeom prst="rect">
-            <a:avLst/>
-          </a:prstGeom>
-          <a:noFill/>
-          <a:ln/>
-        </p:spPr>
-        <p:txBody>
-          <a:bodyPr wrap="square" lIns="0" tIns="0" rIns="0" bIns="0" rtlCol="0" anchor="ctr">
-            <a:normAutofit/>
-          </a:bodyPr>
-          <a:lstStyle/>
-          <a:p>
-            <a:pPr indent="0" marL="0">
-              <a:buNone/>
-            </a:pPr>
-            <a:r>
-              <a:rPr lang="en-US" sz="1050" b="1" dirty="0">
-                <a:solidFill>
-                  <a:srgbClr val="0F5132"/>
-                </a:solidFill>
-                <a:latin typeface="Arial" pitchFamily="34" charset="0"/>
-                <a:ea typeface="Arial" pitchFamily="34" charset="-122"/>
-                <a:cs typeface="Arial" pitchFamily="34" charset="-120"/>
-              </a:rPr>
-              <a:t>FastAPI + React</a:t>
-            </a:r>
-            <a:endParaRPr lang="en-US" sz="1050" dirty="0"/>
-          </a:p>
-        </p:txBody>
-      </p:sp>
-      <p:sp>
-        <p:nvSpPr>
-          <p:cNvPr id="12" name="Shape 10"/>
-          <p:cNvSpPr/>
-          <p:nvPr/>
-        </p:nvSpPr>
-        <p:spPr>
-          <a:xfrm>
-            <a:off x="6766560" y="4160520"/>
-            <a:ext cx="1737360" cy="402336"/>
-          </a:xfrm>
-          <a:prstGeom prst="roundRect">
-            <a:avLst>
-              <a:gd name="adj" fmla="val 11364"/>
-            </a:avLst>
-          </a:prstGeom>
-          <a:solidFill>
-            <a:srgbClr val="EAF4EF"/>
-          </a:solidFill>
-          <a:ln w="12700">
-            <a:solidFill>
-              <a:srgbClr val="C8D8D1"/>
-            </a:solidFill>
-            <a:prstDash val="solid"/>
-          </a:ln>
-        </p:spPr>
-      </p:sp>
-      <p:sp>
-        <p:nvSpPr>
-          <p:cNvPr id="13" name="Text 11"/>
-          <p:cNvSpPr/>
-          <p:nvPr/>
-        </p:nvSpPr>
-        <p:spPr>
-          <a:xfrm>
-            <a:off x="6876288" y="4261104"/>
-            <a:ext cx="1517904" cy="164592"/>
-          </a:xfrm>
-          <a:prstGeom prst="rect">
-            <a:avLst/>
-          </a:prstGeom>
-          <a:noFill/>
-          <a:ln/>
-        </p:spPr>
-        <p:txBody>
-          <a:bodyPr wrap="square" lIns="0" tIns="0" rIns="0" bIns="0" rtlCol="0" anchor="ctr">
-            <a:normAutofit/>
-          </a:bodyPr>
-          <a:lstStyle/>
-          <a:p>
-            <a:pPr indent="0" marL="0">
-              <a:buNone/>
-            </a:pPr>
-            <a:r>
-              <a:rPr lang="en-US" sz="1050" b="1" dirty="0">
-                <a:solidFill>
-                  <a:srgbClr val="0F5132"/>
-                </a:solidFill>
-                <a:latin typeface="Arial" pitchFamily="34" charset="0"/>
-                <a:ea typeface="Arial" pitchFamily="34" charset="-122"/>
-                <a:cs typeface="Arial" pitchFamily="34" charset="-120"/>
-              </a:rPr>
-              <a:t>Qdrant + Redis</a:t>
-            </a:r>
-            <a:endParaRPr lang="en-US" sz="1050" dirty="0"/>
-          </a:p>
-        </p:txBody>
-      </p:sp>
-      <p:sp>
-        <p:nvSpPr>
-          <p:cNvPr id="14" name="Text 12"/>
+            <a:off x="685800" y="5724144"/>
+            <a:ext cx="10789920" cy="201168"/>
+          </a:xfrm>
+          <a:prstGeom prst="rect">
+            <a:avLst/>
+          </a:prstGeom>
+          <a:noFill/>
+          <a:ln/>
+        </p:spPr>
+        <p:txBody>
+          <a:bodyPr wrap="square" lIns="0" tIns="0" rIns="0" bIns="0" rtlCol="0" anchor="ctr"/>
+          <a:lstStyle/>
+          <a:p>
+            <a:pPr algn="ctr" indent="0" marL="0">
+              <a:buNone/>
+            </a:pPr>
+            <a:r>
+              <a:rPr lang="en-US" sz="1200" dirty="0">
+                <a:solidFill>
+                  <a:srgbClr val="555F5B"/>
+                </a:solidFill>
+                <a:latin typeface="Arial" pitchFamily="34" charset="0"/>
+                <a:ea typeface="Arial" pitchFamily="34" charset="-122"/>
+                <a:cs typeface="Arial" pitchFamily="34" charset="-120"/>
+              </a:rPr>
+              <a:t>Москва, 2026</a:t>
+            </a:r>
+            <a:endParaRPr lang="en-US" sz="1200" dirty="0"/>
+          </a:p>
+        </p:txBody>
+      </p:sp>
+      <p:sp>
+        <p:nvSpPr>
+          <p:cNvPr id="10" name="Text 8"/>
           <p:cNvSpPr/>
           <p:nvPr/>
         </p:nvSpPr>
@@ -2317,13 +2219,13 @@
             <a:r>
               <a:rPr lang="en-US" sz="850" dirty="0">
                 <a:solidFill>
-                  <a:srgbClr val="60706A"/>
-                </a:solidFill>
-                <a:latin typeface="Arial" pitchFamily="34" charset="0"/>
-                <a:ea typeface="Arial" pitchFamily="34" charset="-122"/>
-                <a:cs typeface="Arial" pitchFamily="34" charset="-120"/>
-              </a:rPr>
-              <a:t>news-analysis · 1/12</a:t>
+                  <a:srgbClr val="555F5B"/>
+                </a:solidFill>
+                <a:latin typeface="Arial" pitchFamily="34" charset="0"/>
+                <a:ea typeface="Arial" pitchFamily="34" charset="-122"/>
+                <a:cs typeface="Arial" pitchFamily="34" charset="-120"/>
+              </a:rPr>
+              <a:t>Прудиев Алексей Сергеевич · ПМ23-4 · 1/12</a:t>
             </a:r>
             <a:endParaRPr lang="en-US" sz="850" dirty="0"/>
           </a:p>
@@ -2343,7 +2245,7 @@
     <p:bg>
       <p:bgPr>
         <a:solidFill>
-          <a:srgbClr val="F7FAF8"/>
+          <a:srgbClr val="F8F9F8"/>
         </a:solidFill>
       </p:bgPr>
     </p:bg>
@@ -2376,11 +2278,11 @@
             <a:avLst/>
           </a:prstGeom>
           <a:solidFill>
-            <a:srgbClr val="F7FAF8"/>
+            <a:srgbClr val="F8F9F8"/>
           </a:solidFill>
           <a:ln w="12700">
             <a:solidFill>
-              <a:srgbClr val="F7FAF8"/>
+              <a:srgbClr val="F8F9F8"/>
             </a:solidFill>
             <a:prstDash val="solid"/>
           </a:ln>
@@ -2420,7 +2322,7 @@
         <p:spPr>
           <a:xfrm>
             <a:off x="594360" y="411480"/>
-            <a:ext cx="9875520" cy="777240"/>
+            <a:ext cx="10424160" cy="658368"/>
           </a:xfrm>
           <a:prstGeom prst="rect">
             <a:avLst/>
@@ -2438,9 +2340,9 @@
               <a:buNone/>
             </a:pPr>
             <a:r>
-              <a:rPr lang="en-US" sz="2700" b="1" dirty="0">
-                <a:solidFill>
-                  <a:srgbClr val="17211D"/>
+              <a:rPr lang="en-US" sz="2500" b="1" dirty="0">
+                <a:solidFill>
+                  <a:srgbClr val="111111"/>
                 </a:solidFill>
                 <a:latin typeface="Arial" pitchFamily="34" charset="0"/>
                 <a:ea typeface="Arial" pitchFamily="34" charset="-122"/>
@@ -2448,7 +2350,7 @@
               </a:rPr>
               <a:t>Соответствие теме</a:t>
             </a:r>
-            <a:endParaRPr lang="en-US" sz="2700" dirty="0"/>
+            <a:endParaRPr lang="en-US" sz="2500" dirty="0"/>
           </a:p>
         </p:txBody>
       </p:sp>
@@ -2460,7 +2362,7 @@
         </p:nvSpPr>
         <p:spPr>
           <a:xfrm>
-            <a:off x="612648" y="1133856"/>
+            <a:off x="612648" y="1060704"/>
             <a:ext cx="9875520" cy="320040"/>
           </a:xfrm>
           <a:prstGeom prst="rect">
@@ -2479,7 +2381,7 @@
             <a:r>
               <a:rPr lang="en-US" sz="1250" dirty="0">
                 <a:solidFill>
-                  <a:srgbClr val="60706A"/>
+                  <a:srgbClr val="555F5B"/>
                 </a:solidFill>
                 <a:latin typeface="Arial" pitchFamily="34" charset="0"/>
                 <a:ea typeface="Arial" pitchFamily="34" charset="-122"/>
@@ -2518,13 +2420,13 @@
             <a:r>
               <a:rPr lang="en-US" sz="850" dirty="0">
                 <a:solidFill>
-                  <a:srgbClr val="60706A"/>
-                </a:solidFill>
-                <a:latin typeface="Arial" pitchFamily="34" charset="0"/>
-                <a:ea typeface="Arial" pitchFamily="34" charset="-122"/>
-                <a:cs typeface="Arial" pitchFamily="34" charset="-120"/>
-              </a:rPr>
-              <a:t>news-analysis · 10/12</a:t>
+                  <a:srgbClr val="555F5B"/>
+                </a:solidFill>
+                <a:latin typeface="Arial" pitchFamily="34" charset="0"/>
+                <a:ea typeface="Arial" pitchFamily="34" charset="-122"/>
+                <a:cs typeface="Arial" pitchFamily="34" charset="-120"/>
+              </a:rPr>
+              <a:t>Прудиев Алексей Сергеевич · ПМ23-4 · 10/12</a:t>
             </a:r>
             <a:endParaRPr lang="en-US" sz="850" dirty="0"/>
           </a:p>
@@ -2538,18 +2440,18 @@
         </p:nvSpPr>
         <p:spPr>
           <a:xfrm>
-            <a:off x="731520" y="1508760"/>
-            <a:ext cx="4297680" cy="621792"/>
-          </a:xfrm>
-          <a:prstGeom prst="rect">
-            <a:avLst/>
-          </a:prstGeom>
-          <a:solidFill>
-            <a:srgbClr val="EAF4EF"/>
-          </a:solidFill>
-          <a:ln w="10160">
+            <a:off x="731520" y="1207008"/>
+            <a:ext cx="2377440" cy="310896"/>
+          </a:xfrm>
+          <a:prstGeom prst="rect">
+            <a:avLst/>
+          </a:prstGeom>
+          <a:solidFill>
+            <a:srgbClr val="0F5132"/>
+          </a:solidFill>
+          <a:ln w="12700">
             <a:solidFill>
-              <a:srgbClr val="C8D8D1"/>
+              <a:srgbClr val="0F5132"/>
             </a:solidFill>
             <a:prstDash val="solid"/>
           </a:ln>
@@ -2563,8 +2465,8 @@
         </p:nvSpPr>
         <p:spPr>
           <a:xfrm>
-            <a:off x="804672" y="1600200"/>
-            <a:ext cx="4151376" cy="493776"/>
+            <a:off x="804672" y="1280160"/>
+            <a:ext cx="2231136" cy="109728"/>
           </a:xfrm>
           <a:prstGeom prst="rect">
             <a:avLst/>
@@ -2582,17 +2484,17 @@
               <a:buNone/>
             </a:pPr>
             <a:r>
-              <a:rPr lang="en-US" sz="1050" b="1" dirty="0">
-                <a:solidFill>
-                  <a:srgbClr val="0F5132"/>
-                </a:solidFill>
-                <a:latin typeface="Arial" pitchFamily="34" charset="0"/>
-                <a:ea typeface="Arial" pitchFamily="34" charset="-122"/>
-                <a:cs typeface="Arial" pitchFamily="34" charset="-120"/>
-              </a:rPr>
-              <a:t>Требование темы</a:t>
-            </a:r>
-            <a:endParaRPr lang="en-US" sz="1050" dirty="0"/>
+              <a:rPr lang="en-US" sz="850" b="1" dirty="0">
+                <a:solidFill>
+                  <a:srgbClr val="FFFFFF"/>
+                </a:solidFill>
+                <a:latin typeface="Arial" pitchFamily="34" charset="0"/>
+                <a:ea typeface="Arial" pitchFamily="34" charset="-122"/>
+                <a:cs typeface="Arial" pitchFamily="34" charset="-120"/>
+              </a:rPr>
+              <a:t>Критерий: методы и результаты</a:t>
+            </a:r>
+            <a:endParaRPr lang="en-US" sz="850" dirty="0"/>
           </a:p>
         </p:txBody>
       </p:sp>
@@ -2604,18 +2506,18 @@
         </p:nvSpPr>
         <p:spPr>
           <a:xfrm>
-            <a:off x="5029200" y="1508760"/>
-            <a:ext cx="5943600" cy="621792"/>
-          </a:xfrm>
-          <a:prstGeom prst="rect">
-            <a:avLst/>
-          </a:prstGeom>
-          <a:solidFill>
-            <a:srgbClr val="EAF4EF"/>
+            <a:off x="731520" y="1508760"/>
+            <a:ext cx="4297680" cy="548640"/>
+          </a:xfrm>
+          <a:prstGeom prst="rect">
+            <a:avLst/>
+          </a:prstGeom>
+          <a:solidFill>
+            <a:srgbClr val="EDF3F0"/>
           </a:solidFill>
           <a:ln w="10160">
             <a:solidFill>
-              <a:srgbClr val="C8D8D1"/>
+              <a:srgbClr val="B7C6C0"/>
             </a:solidFill>
             <a:prstDash val="solid"/>
           </a:ln>
@@ -2629,8 +2531,8 @@
         </p:nvSpPr>
         <p:spPr>
           <a:xfrm>
-            <a:off x="5102352" y="1600200"/>
-            <a:ext cx="5797296" cy="493776"/>
+            <a:off x="804672" y="1600200"/>
+            <a:ext cx="4151376" cy="420624"/>
           </a:xfrm>
           <a:prstGeom prst="rect">
             <a:avLst/>
@@ -2656,7 +2558,7 @@
                 <a:ea typeface="Arial" pitchFamily="34" charset="-122"/>
                 <a:cs typeface="Arial" pitchFamily="34" charset="-120"/>
               </a:rPr>
-              <a:t>Что реализовано</a:t>
+              <a:t>Требование темы</a:t>
             </a:r>
             <a:endParaRPr lang="en-US" sz="1050" dirty="0"/>
           </a:p>
@@ -2670,18 +2572,18 @@
         </p:nvSpPr>
         <p:spPr>
           <a:xfrm>
-            <a:off x="731520" y="2130552"/>
-            <a:ext cx="4297680" cy="621792"/>
-          </a:xfrm>
-          <a:prstGeom prst="rect">
-            <a:avLst/>
-          </a:prstGeom>
-          <a:solidFill>
-            <a:srgbClr val="FFFFFF"/>
+            <a:off x="5029200" y="1508760"/>
+            <a:ext cx="5943600" cy="548640"/>
+          </a:xfrm>
+          <a:prstGeom prst="rect">
+            <a:avLst/>
+          </a:prstGeom>
+          <a:solidFill>
+            <a:srgbClr val="EDF3F0"/>
           </a:solidFill>
           <a:ln w="10160">
             <a:solidFill>
-              <a:srgbClr val="C8D8D1"/>
+              <a:srgbClr val="B7C6C0"/>
             </a:solidFill>
             <a:prstDash val="solid"/>
           </a:ln>
@@ -2695,8 +2597,8 @@
         </p:nvSpPr>
         <p:spPr>
           <a:xfrm>
-            <a:off x="804672" y="2221992"/>
-            <a:ext cx="4151376" cy="493776"/>
+            <a:off x="5102352" y="1600200"/>
+            <a:ext cx="5797296" cy="420624"/>
           </a:xfrm>
           <a:prstGeom prst="rect">
             <a:avLst/>
@@ -2714,17 +2616,17 @@
               <a:buNone/>
             </a:pPr>
             <a:r>
-              <a:rPr lang="en-US" sz="1000" dirty="0">
-                <a:solidFill>
-                  <a:srgbClr val="17211D"/>
-                </a:solidFill>
-                <a:latin typeface="Arial" pitchFamily="34" charset="0"/>
-                <a:ea typeface="Arial" pitchFamily="34" charset="-122"/>
-                <a:cs typeface="Arial" pitchFamily="34" charset="-120"/>
-              </a:rPr>
-              <a:t>Автоматическая диалоговая система</a:t>
-            </a:r>
-            <a:endParaRPr lang="en-US" sz="1000" dirty="0"/>
+              <a:rPr lang="en-US" sz="1050" b="1" dirty="0">
+                <a:solidFill>
+                  <a:srgbClr val="0F5132"/>
+                </a:solidFill>
+                <a:latin typeface="Arial" pitchFamily="34" charset="0"/>
+                <a:ea typeface="Arial" pitchFamily="34" charset="-122"/>
+                <a:cs typeface="Arial" pitchFamily="34" charset="-120"/>
+              </a:rPr>
+              <a:t>Что реализовано</a:t>
+            </a:r>
+            <a:endParaRPr lang="en-US" sz="1050" dirty="0"/>
           </a:p>
         </p:txBody>
       </p:sp>
@@ -2736,8 +2638,8 @@
         </p:nvSpPr>
         <p:spPr>
           <a:xfrm>
-            <a:off x="5029200" y="2130552"/>
-            <a:ext cx="5943600" cy="621792"/>
+            <a:off x="731520" y="2057400"/>
+            <a:ext cx="4297680" cy="548640"/>
           </a:xfrm>
           <a:prstGeom prst="rect">
             <a:avLst/>
@@ -2747,7 +2649,7 @@
           </a:solidFill>
           <a:ln w="10160">
             <a:solidFill>
-              <a:srgbClr val="C8D8D1"/>
+              <a:srgbClr val="B7C6C0"/>
             </a:solidFill>
             <a:prstDash val="solid"/>
           </a:ln>
@@ -2761,8 +2663,8 @@
         </p:nvSpPr>
         <p:spPr>
           <a:xfrm>
-            <a:off x="5102352" y="2221992"/>
-            <a:ext cx="5797296" cy="493776"/>
+            <a:off x="804672" y="2148840"/>
+            <a:ext cx="4151376" cy="420624"/>
           </a:xfrm>
           <a:prstGeom prst="rect">
             <a:avLst/>
@@ -2782,13 +2684,13 @@
             <a:r>
               <a:rPr lang="en-US" sz="1000" dirty="0">
                 <a:solidFill>
-                  <a:srgbClr val="17211D"/>
-                </a:solidFill>
-                <a:latin typeface="Arial" pitchFamily="34" charset="0"/>
-                <a:ea typeface="Arial" pitchFamily="34" charset="-122"/>
-                <a:cs typeface="Arial" pitchFamily="34" charset="-120"/>
-              </a:rPr>
-              <a:t>Web UI + chat SSE endpoint</a:t>
+                  <a:srgbClr val="111111"/>
+                </a:solidFill>
+                <a:latin typeface="Arial" pitchFamily="34" charset="0"/>
+                <a:ea typeface="Arial" pitchFamily="34" charset="-122"/>
+                <a:cs typeface="Arial" pitchFamily="34" charset="-120"/>
+              </a:rPr>
+              <a:t>Автоматическая диалоговая система</a:t>
             </a:r>
             <a:endParaRPr lang="en-US" sz="1000" dirty="0"/>
           </a:p>
@@ -2802,8 +2704,8 @@
         </p:nvSpPr>
         <p:spPr>
           <a:xfrm>
-            <a:off x="731520" y="2752344"/>
-            <a:ext cx="4297680" cy="621792"/>
+            <a:off x="5029200" y="2057400"/>
+            <a:ext cx="5943600" cy="548640"/>
           </a:xfrm>
           <a:prstGeom prst="rect">
             <a:avLst/>
@@ -2813,7 +2715,7 @@
           </a:solidFill>
           <a:ln w="10160">
             <a:solidFill>
-              <a:srgbClr val="C8D8D1"/>
+              <a:srgbClr val="B7C6C0"/>
             </a:solidFill>
             <a:prstDash val="solid"/>
           </a:ln>
@@ -2827,8 +2729,8 @@
         </p:nvSpPr>
         <p:spPr>
           <a:xfrm>
-            <a:off x="804672" y="2843784"/>
-            <a:ext cx="4151376" cy="493776"/>
+            <a:off x="5102352" y="2148840"/>
+            <a:ext cx="5797296" cy="420624"/>
           </a:xfrm>
           <a:prstGeom prst="rect">
             <a:avLst/>
@@ -2848,13 +2750,13 @@
             <a:r>
               <a:rPr lang="en-US" sz="1000" dirty="0">
                 <a:solidFill>
-                  <a:srgbClr val="17211D"/>
-                </a:solidFill>
-                <a:latin typeface="Arial" pitchFamily="34" charset="0"/>
-                <a:ea typeface="Arial" pitchFamily="34" charset="-122"/>
-                <a:cs typeface="Arial" pitchFamily="34" charset="-120"/>
-              </a:rPr>
-              <a:t>Языковая модель</a:t>
+                  <a:srgbClr val="111111"/>
+                </a:solidFill>
+                <a:latin typeface="Arial" pitchFamily="34" charset="0"/>
+                <a:ea typeface="Arial" pitchFamily="34" charset="-122"/>
+                <a:cs typeface="Arial" pitchFamily="34" charset="-120"/>
+              </a:rPr>
+              <a:t>Web UI + chat SSE endpoint</a:t>
             </a:r>
             <a:endParaRPr lang="en-US" sz="1000" dirty="0"/>
           </a:p>
@@ -2868,8 +2770,8 @@
         </p:nvSpPr>
         <p:spPr>
           <a:xfrm>
-            <a:off x="5029200" y="2752344"/>
-            <a:ext cx="5943600" cy="621792"/>
+            <a:off x="731520" y="2606040"/>
+            <a:ext cx="4297680" cy="548640"/>
           </a:xfrm>
           <a:prstGeom prst="rect">
             <a:avLst/>
@@ -2879,7 +2781,7 @@
           </a:solidFill>
           <a:ln w="10160">
             <a:solidFill>
-              <a:srgbClr val="C8D8D1"/>
+              <a:srgbClr val="B7C6C0"/>
             </a:solidFill>
             <a:prstDash val="solid"/>
           </a:ln>
@@ -2893,8 +2795,8 @@
         </p:nvSpPr>
         <p:spPr>
           <a:xfrm>
-            <a:off x="5102352" y="2843784"/>
-            <a:ext cx="5797296" cy="493776"/>
+            <a:off x="804672" y="2697480"/>
+            <a:ext cx="4151376" cy="420624"/>
           </a:xfrm>
           <a:prstGeom prst="rect">
             <a:avLst/>
@@ -2914,13 +2816,13 @@
             <a:r>
               <a:rPr lang="en-US" sz="1000" dirty="0">
                 <a:solidFill>
-                  <a:srgbClr val="17211D"/>
-                </a:solidFill>
-                <a:latin typeface="Arial" pitchFamily="34" charset="0"/>
-                <a:ea typeface="Arial" pitchFamily="34" charset="-122"/>
-                <a:cs typeface="Arial" pitchFamily="34" charset="-120"/>
-              </a:rPr>
-              <a:t>LLM-адаптер в dialog-service</a:t>
+                  <a:srgbClr val="111111"/>
+                </a:solidFill>
+                <a:latin typeface="Arial" pitchFamily="34" charset="0"/>
+                <a:ea typeface="Arial" pitchFamily="34" charset="-122"/>
+                <a:cs typeface="Arial" pitchFamily="34" charset="-120"/>
+              </a:rPr>
+              <a:t>Языковая модель</a:t>
             </a:r>
             <a:endParaRPr lang="en-US" sz="1000" dirty="0"/>
           </a:p>
@@ -2934,8 +2836,8 @@
         </p:nvSpPr>
         <p:spPr>
           <a:xfrm>
-            <a:off x="731520" y="3374136"/>
-            <a:ext cx="4297680" cy="621792"/>
+            <a:off x="5029200" y="2606040"/>
+            <a:ext cx="5943600" cy="548640"/>
           </a:xfrm>
           <a:prstGeom prst="rect">
             <a:avLst/>
@@ -2945,7 +2847,7 @@
           </a:solidFill>
           <a:ln w="10160">
             <a:solidFill>
-              <a:srgbClr val="C8D8D1"/>
+              <a:srgbClr val="B7C6C0"/>
             </a:solidFill>
             <a:prstDash val="solid"/>
           </a:ln>
@@ -2959,8 +2861,8 @@
         </p:nvSpPr>
         <p:spPr>
           <a:xfrm>
-            <a:off x="804672" y="3465576"/>
-            <a:ext cx="4151376" cy="493776"/>
+            <a:off x="5102352" y="2697480"/>
+            <a:ext cx="5797296" cy="420624"/>
           </a:xfrm>
           <a:prstGeom prst="rect">
             <a:avLst/>
@@ -2980,13 +2882,13 @@
             <a:r>
               <a:rPr lang="en-US" sz="1000" dirty="0">
                 <a:solidFill>
-                  <a:srgbClr val="17211D"/>
-                </a:solidFill>
-                <a:latin typeface="Arial" pitchFamily="34" charset="0"/>
-                <a:ea typeface="Arial" pitchFamily="34" charset="-122"/>
-                <a:cs typeface="Arial" pitchFamily="34" charset="-120"/>
-              </a:rPr>
-              <a:t>Анализ экономических новостей</a:t>
+                  <a:srgbClr val="111111"/>
+                </a:solidFill>
+                <a:latin typeface="Arial" pitchFamily="34" charset="0"/>
+                <a:ea typeface="Arial" pitchFamily="34" charset="-122"/>
+                <a:cs typeface="Arial" pitchFamily="34" charset="-120"/>
+              </a:rPr>
+              <a:t>LLM-адаптер в dialog-service</a:t>
             </a:r>
             <a:endParaRPr lang="en-US" sz="1000" dirty="0"/>
           </a:p>
@@ -3000,8 +2902,8 @@
         </p:nvSpPr>
         <p:spPr>
           <a:xfrm>
-            <a:off x="5029200" y="3374136"/>
-            <a:ext cx="5943600" cy="621792"/>
+            <a:off x="731520" y="3154680"/>
+            <a:ext cx="4297680" cy="548640"/>
           </a:xfrm>
           <a:prstGeom prst="rect">
             <a:avLst/>
@@ -3011,7 +2913,7 @@
           </a:solidFill>
           <a:ln w="10160">
             <a:solidFill>
-              <a:srgbClr val="C8D8D1"/>
+              <a:srgbClr val="B7C6C0"/>
             </a:solidFill>
             <a:prstDash val="solid"/>
           </a:ln>
@@ -3025,8 +2927,8 @@
         </p:nvSpPr>
         <p:spPr>
           <a:xfrm>
-            <a:off x="5102352" y="3465576"/>
-            <a:ext cx="5797296" cy="493776"/>
+            <a:off x="804672" y="3246120"/>
+            <a:ext cx="4151376" cy="420624"/>
           </a:xfrm>
           <a:prstGeom prst="rect">
             <a:avLst/>
@@ -3046,13 +2948,13 @@
             <a:r>
               <a:rPr lang="en-US" sz="1000" dirty="0">
                 <a:solidFill>
-                  <a:srgbClr val="17211D"/>
-                </a:solidFill>
-                <a:latin typeface="Arial" pitchFamily="34" charset="0"/>
-                <a:ea typeface="Arial" pitchFamily="34" charset="-122"/>
-                <a:cs typeface="Arial" pitchFamily="34" charset="-120"/>
-              </a:rPr>
-              <a:t>analysis-service + demo dataset</a:t>
+                  <a:srgbClr val="111111"/>
+                </a:solidFill>
+                <a:latin typeface="Arial" pitchFamily="34" charset="0"/>
+                <a:ea typeface="Arial" pitchFamily="34" charset="-122"/>
+                <a:cs typeface="Arial" pitchFamily="34" charset="-120"/>
+              </a:rPr>
+              <a:t>ML-анализ новостей</a:t>
             </a:r>
             <a:endParaRPr lang="en-US" sz="1000" dirty="0"/>
           </a:p>
@@ -3066,8 +2968,8 @@
         </p:nvSpPr>
         <p:spPr>
           <a:xfrm>
-            <a:off x="731520" y="3995928"/>
-            <a:ext cx="4297680" cy="621792"/>
+            <a:off x="5029200" y="3154680"/>
+            <a:ext cx="5943600" cy="548640"/>
           </a:xfrm>
           <a:prstGeom prst="rect">
             <a:avLst/>
@@ -3077,7 +2979,7 @@
           </a:solidFill>
           <a:ln w="10160">
             <a:solidFill>
-              <a:srgbClr val="C8D8D1"/>
+              <a:srgbClr val="B7C6C0"/>
             </a:solidFill>
             <a:prstDash val="solid"/>
           </a:ln>
@@ -3091,8 +2993,8 @@
         </p:nvSpPr>
         <p:spPr>
           <a:xfrm>
-            <a:off x="804672" y="4087368"/>
-            <a:ext cx="4151376" cy="493776"/>
+            <a:off x="5102352" y="3246120"/>
+            <a:ext cx="5797296" cy="420624"/>
           </a:xfrm>
           <a:prstGeom prst="rect">
             <a:avLst/>
@@ -3112,13 +3014,13 @@
             <a:r>
               <a:rPr lang="en-US" sz="1000" dirty="0">
                 <a:solidFill>
-                  <a:srgbClr val="17211D"/>
-                </a:solidFill>
-                <a:latin typeface="Arial" pitchFamily="34" charset="0"/>
-                <a:ea typeface="Arial" pitchFamily="34" charset="-122"/>
-                <a:cs typeface="Arial" pitchFamily="34" charset="-120"/>
-              </a:rPr>
-              <a:t>Работа с источниками</a:t>
+                  <a:srgbClr val="111111"/>
+                </a:solidFill>
+                <a:latin typeface="Arial" pitchFamily="34" charset="0"/>
+                <a:ea typeface="Arial" pitchFamily="34" charset="-122"/>
+                <a:cs typeface="Arial" pitchFamily="34" charset="-120"/>
+              </a:rPr>
+              <a:t>tfidf-logreg, impact, confidence, explanation</a:t>
             </a:r>
             <a:endParaRPr lang="en-US" sz="1000" dirty="0"/>
           </a:p>
@@ -3132,8 +3034,8 @@
         </p:nvSpPr>
         <p:spPr>
           <a:xfrm>
-            <a:off x="5029200" y="3995928"/>
-            <a:ext cx="5943600" cy="621792"/>
+            <a:off x="731520" y="3703320"/>
+            <a:ext cx="4297680" cy="548640"/>
           </a:xfrm>
           <a:prstGeom prst="rect">
             <a:avLst/>
@@ -3143,7 +3045,7 @@
           </a:solidFill>
           <a:ln w="10160">
             <a:solidFill>
-              <a:srgbClr val="C8D8D1"/>
+              <a:srgbClr val="B7C6C0"/>
             </a:solidFill>
             <a:prstDash val="solid"/>
           </a:ln>
@@ -3157,8 +3059,8 @@
         </p:nvSpPr>
         <p:spPr>
           <a:xfrm>
-            <a:off x="5102352" y="4087368"/>
-            <a:ext cx="5797296" cy="493776"/>
+            <a:off x="804672" y="3794760"/>
+            <a:ext cx="4151376" cy="420624"/>
           </a:xfrm>
           <a:prstGeom prst="rect">
             <a:avLst/>
@@ -3178,13 +3080,13 @@
             <a:r>
               <a:rPr lang="en-US" sz="1000" dirty="0">
                 <a:solidFill>
-                  <a:srgbClr val="17211D"/>
-                </a:solidFill>
-                <a:latin typeface="Arial" pitchFamily="34" charset="0"/>
-                <a:ea typeface="Arial" pitchFamily="34" charset="-122"/>
-                <a:cs typeface="Arial" pitchFamily="34" charset="-120"/>
-              </a:rPr>
-              <a:t>retrieval pipeline + Qdrant</a:t>
+                  <a:srgbClr val="111111"/>
+                </a:solidFill>
+                <a:latin typeface="Arial" pitchFamily="34" charset="0"/>
+                <a:ea typeface="Arial" pitchFamily="34" charset="-122"/>
+                <a:cs typeface="Arial" pitchFamily="34" charset="-120"/>
+              </a:rPr>
+              <a:t>Retrieval/RAG</a:t>
             </a:r>
             <a:endParaRPr lang="en-US" sz="1000" dirty="0"/>
           </a:p>
@@ -3198,8 +3100,8 @@
         </p:nvSpPr>
         <p:spPr>
           <a:xfrm>
-            <a:off x="731520" y="4617720"/>
-            <a:ext cx="4297680" cy="621792"/>
+            <a:off x="5029200" y="3703320"/>
+            <a:ext cx="5943600" cy="548640"/>
           </a:xfrm>
           <a:prstGeom prst="rect">
             <a:avLst/>
@@ -3209,7 +3111,7 @@
           </a:solidFill>
           <a:ln w="10160">
             <a:solidFill>
-              <a:srgbClr val="C8D8D1"/>
+              <a:srgbClr val="B7C6C0"/>
             </a:solidFill>
             <a:prstDash val="solid"/>
           </a:ln>
@@ -3223,8 +3125,8 @@
         </p:nvSpPr>
         <p:spPr>
           <a:xfrm>
-            <a:off x="804672" y="4709160"/>
-            <a:ext cx="4151376" cy="493776"/>
+            <a:off x="5102352" y="3794760"/>
+            <a:ext cx="5797296" cy="420624"/>
           </a:xfrm>
           <a:prstGeom prst="rect">
             <a:avLst/>
@@ -3244,13 +3146,13 @@
             <a:r>
               <a:rPr lang="en-US" sz="1000" dirty="0">
                 <a:solidFill>
-                  <a:srgbClr val="17211D"/>
-                </a:solidFill>
-                <a:latin typeface="Arial" pitchFamily="34" charset="0"/>
-                <a:ea typeface="Arial" pitchFamily="34" charset="-122"/>
-                <a:cs typeface="Arial" pitchFamily="34" charset="-120"/>
-              </a:rPr>
-              <a:t>Воспроизводимый результат</a:t>
+                  <a:srgbClr val="111111"/>
+                </a:solidFill>
+                <a:latin typeface="Arial" pitchFamily="34" charset="0"/>
+                <a:ea typeface="Arial" pitchFamily="34" charset="-122"/>
+                <a:cs typeface="Arial" pitchFamily="34" charset="-120"/>
+              </a:rPr>
+              <a:t>top-k источники, score, Qdrant</a:t>
             </a:r>
             <a:endParaRPr lang="en-US" sz="1000" dirty="0"/>
           </a:p>
@@ -3264,8 +3166,8 @@
         </p:nvSpPr>
         <p:spPr>
           <a:xfrm>
-            <a:off x="5029200" y="4617720"/>
-            <a:ext cx="5943600" cy="621792"/>
+            <a:off x="731520" y="4251960"/>
+            <a:ext cx="4297680" cy="548640"/>
           </a:xfrm>
           <a:prstGeom prst="rect">
             <a:avLst/>
@@ -3275,7 +3177,7 @@
           </a:solidFill>
           <a:ln w="10160">
             <a:solidFill>
-              <a:srgbClr val="C8D8D1"/>
+              <a:srgbClr val="B7C6C0"/>
             </a:solidFill>
             <a:prstDash val="solid"/>
           </a:ln>
@@ -3289,8 +3191,8 @@
         </p:nvSpPr>
         <p:spPr>
           <a:xfrm>
-            <a:off x="5102352" y="4709160"/>
-            <a:ext cx="5797296" cy="493776"/>
+            <a:off x="804672" y="4343400"/>
+            <a:ext cx="4151376" cy="420624"/>
           </a:xfrm>
           <a:prstGeom prst="rect">
             <a:avLst/>
@@ -3310,7 +3212,205 @@
             <a:r>
               <a:rPr lang="en-US" sz="1000" dirty="0">
                 <a:solidFill>
-                  <a:srgbClr val="17211D"/>
+                  <a:srgbClr val="111111"/>
+                </a:solidFill>
+                <a:latin typeface="Arial" pitchFamily="34" charset="0"/>
+                <a:ea typeface="Arial" pitchFamily="34" charset="-122"/>
+                <a:cs typeface="Arial" pitchFamily="34" charset="-120"/>
+              </a:rPr>
+              <a:t>Production backend</a:t>
+            </a:r>
+            <a:endParaRPr lang="en-US" sz="1000" dirty="0"/>
+          </a:p>
+        </p:txBody>
+      </p:sp>
+      <p:sp>
+        <p:nvSpPr>
+          <p:cNvPr id="31" name="Shape 29"/>
+          <p:cNvSpPr/>
+          <p:nvPr/>
+        </p:nvSpPr>
+        <p:spPr>
+          <a:xfrm>
+            <a:off x="5029200" y="4251960"/>
+            <a:ext cx="5943600" cy="548640"/>
+          </a:xfrm>
+          <a:prstGeom prst="rect">
+            <a:avLst/>
+          </a:prstGeom>
+          <a:solidFill>
+            <a:srgbClr val="FFFFFF"/>
+          </a:solidFill>
+          <a:ln w="10160">
+            <a:solidFill>
+              <a:srgbClr val="B7C6C0"/>
+            </a:solidFill>
+            <a:prstDash val="solid"/>
+          </a:ln>
+        </p:spPr>
+      </p:sp>
+      <p:sp>
+        <p:nvSpPr>
+          <p:cNvPr id="32" name="Text 30"/>
+          <p:cNvSpPr/>
+          <p:nvPr/>
+        </p:nvSpPr>
+        <p:spPr>
+          <a:xfrm>
+            <a:off x="5102352" y="4343400"/>
+            <a:ext cx="5797296" cy="420624"/>
+          </a:xfrm>
+          <a:prstGeom prst="rect">
+            <a:avLst/>
+          </a:prstGeom>
+          <a:noFill/>
+          <a:ln/>
+        </p:spPr>
+        <p:txBody>
+          <a:bodyPr wrap="square" lIns="0" tIns="0" rIns="0" bIns="0" rtlCol="0" anchor="ctr">
+            <a:normAutofit/>
+          </a:bodyPr>
+          <a:lstStyle/>
+          <a:p>
+            <a:pPr indent="0" marL="0">
+              <a:buNone/>
+            </a:pPr>
+            <a:r>
+              <a:rPr lang="en-US" sz="1000" dirty="0">
+                <a:solidFill>
+                  <a:srgbClr val="111111"/>
+                </a:solidFill>
+                <a:latin typeface="Arial" pitchFamily="34" charset="0"/>
+                <a:ea typeface="Arial" pitchFamily="34" charset="-122"/>
+                <a:cs typeface="Arial" pitchFamily="34" charset="-120"/>
+              </a:rPr>
+              <a:t>FastAPI, DDD, Dishka, Taskiq, Redis</a:t>
+            </a:r>
+            <a:endParaRPr lang="en-US" sz="1000" dirty="0"/>
+          </a:p>
+        </p:txBody>
+      </p:sp>
+      <p:sp>
+        <p:nvSpPr>
+          <p:cNvPr id="33" name="Shape 31"/>
+          <p:cNvSpPr/>
+          <p:nvPr/>
+        </p:nvSpPr>
+        <p:spPr>
+          <a:xfrm>
+            <a:off x="731520" y="4800600"/>
+            <a:ext cx="4297680" cy="548640"/>
+          </a:xfrm>
+          <a:prstGeom prst="rect">
+            <a:avLst/>
+          </a:prstGeom>
+          <a:solidFill>
+            <a:srgbClr val="FFFFFF"/>
+          </a:solidFill>
+          <a:ln w="10160">
+            <a:solidFill>
+              <a:srgbClr val="B7C6C0"/>
+            </a:solidFill>
+            <a:prstDash val="solid"/>
+          </a:ln>
+        </p:spPr>
+      </p:sp>
+      <p:sp>
+        <p:nvSpPr>
+          <p:cNvPr id="34" name="Text 32"/>
+          <p:cNvSpPr/>
+          <p:nvPr/>
+        </p:nvSpPr>
+        <p:spPr>
+          <a:xfrm>
+            <a:off x="804672" y="4892040"/>
+            <a:ext cx="4151376" cy="420624"/>
+          </a:xfrm>
+          <a:prstGeom prst="rect">
+            <a:avLst/>
+          </a:prstGeom>
+          <a:noFill/>
+          <a:ln/>
+        </p:spPr>
+        <p:txBody>
+          <a:bodyPr wrap="square" lIns="0" tIns="0" rIns="0" bIns="0" rtlCol="0" anchor="ctr">
+            <a:normAutofit/>
+          </a:bodyPr>
+          <a:lstStyle/>
+          <a:p>
+            <a:pPr indent="0" marL="0">
+              <a:buNone/>
+            </a:pPr>
+            <a:r>
+              <a:rPr lang="en-US" sz="1000" dirty="0">
+                <a:solidFill>
+                  <a:srgbClr val="111111"/>
+                </a:solidFill>
+                <a:latin typeface="Arial" pitchFamily="34" charset="0"/>
+                <a:ea typeface="Arial" pitchFamily="34" charset="-122"/>
+                <a:cs typeface="Arial" pitchFamily="34" charset="-120"/>
+              </a:rPr>
+              <a:t>Воспроизводимый результат</a:t>
+            </a:r>
+            <a:endParaRPr lang="en-US" sz="1000" dirty="0"/>
+          </a:p>
+        </p:txBody>
+      </p:sp>
+      <p:sp>
+        <p:nvSpPr>
+          <p:cNvPr id="35" name="Shape 33"/>
+          <p:cNvSpPr/>
+          <p:nvPr/>
+        </p:nvSpPr>
+        <p:spPr>
+          <a:xfrm>
+            <a:off x="5029200" y="4800600"/>
+            <a:ext cx="5943600" cy="548640"/>
+          </a:xfrm>
+          <a:prstGeom prst="rect">
+            <a:avLst/>
+          </a:prstGeom>
+          <a:solidFill>
+            <a:srgbClr val="FFFFFF"/>
+          </a:solidFill>
+          <a:ln w="10160">
+            <a:solidFill>
+              <a:srgbClr val="B7C6C0"/>
+            </a:solidFill>
+            <a:prstDash val="solid"/>
+          </a:ln>
+        </p:spPr>
+      </p:sp>
+      <p:sp>
+        <p:nvSpPr>
+          <p:cNvPr id="36" name="Text 34"/>
+          <p:cNvSpPr/>
+          <p:nvPr/>
+        </p:nvSpPr>
+        <p:spPr>
+          <a:xfrm>
+            <a:off x="5102352" y="4892040"/>
+            <a:ext cx="5797296" cy="420624"/>
+          </a:xfrm>
+          <a:prstGeom prst="rect">
+            <a:avLst/>
+          </a:prstGeom>
+          <a:noFill/>
+          <a:ln/>
+        </p:spPr>
+        <p:txBody>
+          <a:bodyPr wrap="square" lIns="0" tIns="0" rIns="0" bIns="0" rtlCol="0" anchor="ctr">
+            <a:normAutofit/>
+          </a:bodyPr>
+          <a:lstStyle/>
+          <a:p>
+            <a:pPr indent="0" marL="0">
+              <a:buNone/>
+            </a:pPr>
+            <a:r>
+              <a:rPr lang="en-US" sz="1000" dirty="0">
+                <a:solidFill>
+                  <a:srgbClr val="111111"/>
                 </a:solidFill>
                 <a:latin typeface="Arial" pitchFamily="34" charset="0"/>
                 <a:ea typeface="Arial" pitchFamily="34" charset="-122"/>
@@ -3336,7 +3436,7 @@
     <p:bg>
       <p:bgPr>
         <a:solidFill>
-          <a:srgbClr val="F7FAF8"/>
+          <a:srgbClr val="F8F9F8"/>
         </a:solidFill>
       </p:bgPr>
     </p:bg>
@@ -3369,11 +3469,11 @@
             <a:avLst/>
           </a:prstGeom>
           <a:solidFill>
-            <a:srgbClr val="F7FAF8"/>
+            <a:srgbClr val="F8F9F8"/>
           </a:solidFill>
           <a:ln w="12700">
             <a:solidFill>
-              <a:srgbClr val="F7FAF8"/>
+              <a:srgbClr val="F8F9F8"/>
             </a:solidFill>
             <a:prstDash val="solid"/>
           </a:ln>
@@ -3413,7 +3513,7 @@
         <p:spPr>
           <a:xfrm>
             <a:off x="594360" y="411480"/>
-            <a:ext cx="9875520" cy="777240"/>
+            <a:ext cx="10424160" cy="658368"/>
           </a:xfrm>
           <a:prstGeom prst="rect">
             <a:avLst/>
@@ -3431,9 +3531,9 @@
               <a:buNone/>
             </a:pPr>
             <a:r>
-              <a:rPr lang="en-US" sz="2700" b="1" dirty="0">
-                <a:solidFill>
-                  <a:srgbClr val="17211D"/>
+              <a:rPr lang="en-US" sz="2500" b="1" dirty="0">
+                <a:solidFill>
+                  <a:srgbClr val="111111"/>
                 </a:solidFill>
                 <a:latin typeface="Arial" pitchFamily="34" charset="0"/>
                 <a:ea typeface="Arial" pitchFamily="34" charset="-122"/>
@@ -3441,7 +3541,7 @@
               </a:rPr>
               <a:t>Заключение</a:t>
             </a:r>
-            <a:endParaRPr lang="en-US" sz="2700" dirty="0"/>
+            <a:endParaRPr lang="en-US" sz="2500" dirty="0"/>
           </a:p>
         </p:txBody>
       </p:sp>
@@ -3453,7 +3553,7 @@
         </p:nvSpPr>
         <p:spPr>
           <a:xfrm>
-            <a:off x="612648" y="1133856"/>
+            <a:off x="612648" y="1060704"/>
             <a:ext cx="9875520" cy="320040"/>
           </a:xfrm>
           <a:prstGeom prst="rect">
@@ -3472,13 +3572,13 @@
             <a:r>
               <a:rPr lang="en-US" sz="1250" dirty="0">
                 <a:solidFill>
-                  <a:srgbClr val="60706A"/>
-                </a:solidFill>
-                <a:latin typeface="Arial" pitchFamily="34" charset="0"/>
-                <a:ea typeface="Arial" pitchFamily="34" charset="-122"/>
-                <a:cs typeface="Arial" pitchFamily="34" charset="-120"/>
-              </a:rPr>
-              <a:t>Получился локальный end-to-end стенд для защиты</a:t>
+                  <a:srgbClr val="555F5B"/>
+                </a:solidFill>
+                <a:latin typeface="Arial" pitchFamily="34" charset="0"/>
+                <a:ea typeface="Arial" pitchFamily="34" charset="-122"/>
+                <a:cs typeface="Arial" pitchFamily="34" charset="-120"/>
+              </a:rPr>
+              <a:t>Результат объединяет ML/NLP pipeline и production backend</a:t>
             </a:r>
             <a:endParaRPr lang="en-US" sz="1250" dirty="0"/>
           </a:p>
@@ -3511,13 +3611,13 @@
             <a:r>
               <a:rPr lang="en-US" sz="850" dirty="0">
                 <a:solidFill>
-                  <a:srgbClr val="60706A"/>
-                </a:solidFill>
-                <a:latin typeface="Arial" pitchFamily="34" charset="0"/>
-                <a:ea typeface="Arial" pitchFamily="34" charset="-122"/>
-                <a:cs typeface="Arial" pitchFamily="34" charset="-120"/>
-              </a:rPr>
-              <a:t>news-analysis · 11/12</a:t>
+                  <a:srgbClr val="555F5B"/>
+                </a:solidFill>
+                <a:latin typeface="Arial" pitchFamily="34" charset="0"/>
+                <a:ea typeface="Arial" pitchFamily="34" charset="-122"/>
+                <a:cs typeface="Arial" pitchFamily="34" charset="-120"/>
+              </a:rPr>
+              <a:t>Прудиев Алексей Сергеевич · ПМ23-4 · 11/12</a:t>
             </a:r>
             <a:endParaRPr lang="en-US" sz="850" dirty="0"/>
           </a:p>
@@ -3525,14 +3625,119 @@
       </p:sp>
       <p:sp>
         <p:nvSpPr>
-          <p:cNvPr id="7" name="Text 5"/>
-          <p:cNvSpPr/>
-          <p:nvPr/>
-        </p:nvSpPr>
-        <p:spPr>
-          <a:xfrm>
-            <a:off x="731520" y="1645920"/>
-            <a:ext cx="5760720" cy="2926080"/>
+          <p:cNvPr id="7" name="Shape 5"/>
+          <p:cNvSpPr/>
+          <p:nvPr/>
+        </p:nvSpPr>
+        <p:spPr>
+          <a:xfrm>
+            <a:off x="731520" y="1353312"/>
+            <a:ext cx="1645920" cy="310896"/>
+          </a:xfrm>
+          <a:prstGeom prst="rect">
+            <a:avLst/>
+          </a:prstGeom>
+          <a:solidFill>
+            <a:srgbClr val="0F5132"/>
+          </a:solidFill>
+          <a:ln w="12700">
+            <a:solidFill>
+              <a:srgbClr val="0F5132"/>
+            </a:solidFill>
+            <a:prstDash val="solid"/>
+          </a:ln>
+        </p:spPr>
+      </p:sp>
+      <p:sp>
+        <p:nvSpPr>
+          <p:cNvPr id="8" name="Text 6"/>
+          <p:cNvSpPr/>
+          <p:nvPr/>
+        </p:nvSpPr>
+        <p:spPr>
+          <a:xfrm>
+            <a:off x="804672" y="1426464"/>
+            <a:ext cx="1499616" cy="109728"/>
+          </a:xfrm>
+          <a:prstGeom prst="rect">
+            <a:avLst/>
+          </a:prstGeom>
+          <a:noFill/>
+          <a:ln/>
+        </p:spPr>
+        <p:txBody>
+          <a:bodyPr wrap="square" lIns="0" tIns="0" rIns="0" bIns="0" rtlCol="0" anchor="ctr">
+            <a:normAutofit/>
+          </a:bodyPr>
+          <a:lstStyle/>
+          <a:p>
+            <a:pPr indent="0" marL="0">
+              <a:buNone/>
+            </a:pPr>
+            <a:r>
+              <a:rPr lang="en-US" sz="850" b="1" dirty="0">
+                <a:solidFill>
+                  <a:srgbClr val="FFFFFF"/>
+                </a:solidFill>
+                <a:latin typeface="Arial" pitchFamily="34" charset="0"/>
+                <a:ea typeface="Arial" pitchFamily="34" charset="-122"/>
+                <a:cs typeface="Arial" pitchFamily="34" charset="-120"/>
+              </a:rPr>
+              <a:t>Критерий: заключение</a:t>
+            </a:r>
+            <a:endParaRPr lang="en-US" sz="850" dirty="0"/>
+          </a:p>
+        </p:txBody>
+      </p:sp>
+      <p:sp>
+        <p:nvSpPr>
+          <p:cNvPr id="9" name="Text 7"/>
+          <p:cNvSpPr/>
+          <p:nvPr/>
+        </p:nvSpPr>
+        <p:spPr>
+          <a:xfrm>
+            <a:off x="822960" y="1664208"/>
+            <a:ext cx="4206240" cy="274320"/>
+          </a:xfrm>
+          <a:prstGeom prst="rect">
+            <a:avLst/>
+          </a:prstGeom>
+          <a:noFill/>
+          <a:ln/>
+        </p:spPr>
+        <p:txBody>
+          <a:bodyPr wrap="square" lIns="0" tIns="0" rIns="0" bIns="0" rtlCol="0" anchor="ctr"/>
+          <a:lstStyle/>
+          <a:p>
+            <a:pPr indent="0" marL="0">
+              <a:buNone/>
+            </a:pPr>
+            <a:r>
+              <a:rPr lang="en-US" sz="1500" b="1" dirty="0">
+                <a:solidFill>
+                  <a:srgbClr val="0F5132"/>
+                </a:solidFill>
+                <a:latin typeface="Arial" pitchFamily="34" charset="0"/>
+                <a:ea typeface="Arial" pitchFamily="34" charset="-122"/>
+                <a:cs typeface="Arial" pitchFamily="34" charset="-120"/>
+              </a:rPr>
+              <a:t>ML/NLP-результат</a:t>
+            </a:r>
+            <a:endParaRPr lang="en-US" sz="1500" dirty="0"/>
+          </a:p>
+        </p:txBody>
+      </p:sp>
+      <p:sp>
+        <p:nvSpPr>
+          <p:cNvPr id="10" name="Text 8"/>
+          <p:cNvSpPr/>
+          <p:nvPr/>
+        </p:nvSpPr>
+        <p:spPr>
+          <a:xfrm>
+            <a:off x="822960" y="2011680"/>
+            <a:ext cx="4572000" cy="2240280"/>
           </a:xfrm>
           <a:prstGeom prst="rect">
             <a:avLst/>
@@ -3551,17 +3756,17 @@
               <a:buChar char="•"/>
             </a:pPr>
             <a:r>
-              <a:rPr lang="en-US" sz="1800" dirty="0">
-                <a:solidFill>
-                  <a:srgbClr val="17211D"/>
-                </a:solidFill>
-                <a:latin typeface="Arial" pitchFamily="34" charset="0"/>
-                <a:ea typeface="Arial" pitchFamily="34" charset="-122"/>
-                <a:cs typeface="Arial" pitchFamily="34" charset="-120"/>
-              </a:rPr>
-              <a:t>Разработана микросервисная диалоговая система.</a:t>
-            </a:r>
-            <a:endParaRPr lang="en-US" sz="1800" dirty="0"/>
+              <a:rPr lang="en-US" sz="1550" dirty="0">
+                <a:solidFill>
+                  <a:srgbClr val="111111"/>
+                </a:solidFill>
+                <a:latin typeface="Arial" pitchFamily="34" charset="0"/>
+                <a:ea typeface="Arial" pitchFamily="34" charset="-122"/>
+                <a:cs typeface="Arial" pitchFamily="34" charset="-120"/>
+              </a:rPr>
+              <a:t>Поиск релевантного контекста.</a:t>
+            </a:r>
+            <a:endParaRPr lang="en-US" sz="1550" dirty="0"/>
           </a:p>
           <a:p>
             <a:pPr marL="177800" indent="-177800">
@@ -3569,17 +3774,17 @@
               <a:buChar char="•"/>
             </a:pPr>
             <a:r>
-              <a:rPr lang="en-US" sz="1800" dirty="0">
-                <a:solidFill>
-                  <a:srgbClr val="17211D"/>
-                </a:solidFill>
-                <a:latin typeface="Arial" pitchFamily="34" charset="0"/>
-                <a:ea typeface="Arial" pitchFamily="34" charset="-122"/>
-                <a:cs typeface="Arial" pitchFamily="34" charset="-120"/>
-              </a:rPr>
-              <a:t>Реализованы загрузка, поиск, анализ и генерация ответа.</a:t>
-            </a:r>
-            <a:endParaRPr lang="en-US" sz="1800" dirty="0"/>
+              <a:rPr lang="en-US" sz="1550" dirty="0">
+                <a:solidFill>
+                  <a:srgbClr val="111111"/>
+                </a:solidFill>
+                <a:latin typeface="Arial" pitchFamily="34" charset="0"/>
+                <a:ea typeface="Arial" pitchFamily="34" charset="-122"/>
+                <a:cs typeface="Arial" pitchFamily="34" charset="-120"/>
+              </a:rPr>
+              <a:t>Классификация влияния новостей.</a:t>
+            </a:r>
+            <a:endParaRPr lang="en-US" sz="1550" dirty="0"/>
           </a:p>
           <a:p>
             <a:pPr marL="177800" indent="-177800">
@@ -3587,17 +3792,17 @@
               <a:buChar char="•"/>
             </a:pPr>
             <a:r>
-              <a:rPr lang="en-US" sz="1800" dirty="0">
-                <a:solidFill>
-                  <a:srgbClr val="17211D"/>
-                </a:solidFill>
-                <a:latin typeface="Arial" pitchFamily="34" charset="0"/>
-                <a:ea typeface="Arial" pitchFamily="34" charset="-122"/>
-                <a:cs typeface="Arial" pitchFamily="34" charset="-120"/>
-              </a:rPr>
-              <a:t>Подготовлен React UI.</a:t>
-            </a:r>
-            <a:endParaRPr lang="en-US" sz="1800" dirty="0"/>
+              <a:rPr lang="en-US" sz="1550" dirty="0">
+                <a:solidFill>
+                  <a:srgbClr val="111111"/>
+                </a:solidFill>
+                <a:latin typeface="Arial" pitchFamily="34" charset="0"/>
+                <a:ea typeface="Arial" pitchFamily="34" charset="-122"/>
+                <a:cs typeface="Arial" pitchFamily="34" charset="-120"/>
+              </a:rPr>
+              <a:t>Ответ по источникам с LLM-адаптером.</a:t>
+            </a:r>
+            <a:endParaRPr lang="en-US" sz="1550" dirty="0"/>
           </a:p>
           <a:p>
             <a:pPr marL="177800" indent="-177800">
@@ -3605,77 +3810,116 @@
               <a:buChar char="•"/>
             </a:pPr>
             <a:r>
-              <a:rPr lang="en-US" sz="1800" dirty="0">
-                <a:solidFill>
-                  <a:srgbClr val="17211D"/>
-                </a:solidFill>
-                <a:latin typeface="Arial" pitchFamily="34" charset="0"/>
-                <a:ea typeface="Arial" pitchFamily="34" charset="-122"/>
-                <a:cs typeface="Arial" pitchFamily="34" charset="-120"/>
-              </a:rPr>
-              <a:t>Система запускается локально через Docker Compose.</a:t>
-            </a:r>
-            <a:endParaRPr lang="en-US" sz="1800" dirty="0"/>
-          </a:p>
+              <a:rPr lang="en-US" sz="1550" dirty="0">
+                <a:solidFill>
+                  <a:srgbClr val="111111"/>
+                </a:solidFill>
+                <a:latin typeface="Arial" pitchFamily="34" charset="0"/>
+                <a:ea typeface="Arial" pitchFamily="34" charset="-122"/>
+                <a:cs typeface="Arial" pitchFamily="34" charset="-120"/>
+              </a:rPr>
+              <a:t>MLflow для дальнейших экспериментов.</a:t>
+            </a:r>
+            <a:endParaRPr lang="en-US" sz="1550" dirty="0"/>
+          </a:p>
+        </p:txBody>
+      </p:sp>
+      <p:sp>
+        <p:nvSpPr>
+          <p:cNvPr id="11" name="Text 9"/>
+          <p:cNvSpPr/>
+          <p:nvPr/>
+        </p:nvSpPr>
+        <p:spPr>
+          <a:xfrm>
+            <a:off x="5989320" y="1664208"/>
+            <a:ext cx="4206240" cy="274320"/>
+          </a:xfrm>
+          <a:prstGeom prst="rect">
+            <a:avLst/>
+          </a:prstGeom>
+          <a:noFill/>
+          <a:ln/>
+        </p:spPr>
+        <p:txBody>
+          <a:bodyPr wrap="square" lIns="0" tIns="0" rIns="0" bIns="0" rtlCol="0" anchor="ctr"/>
+          <a:lstStyle/>
+          <a:p>
+            <a:pPr indent="0" marL="0">
+              <a:buNone/>
+            </a:pPr>
+            <a:r>
+              <a:rPr lang="en-US" sz="1500" b="1" dirty="0">
+                <a:solidFill>
+                  <a:srgbClr val="0F5132"/>
+                </a:solidFill>
+                <a:latin typeface="Arial" pitchFamily="34" charset="0"/>
+                <a:ea typeface="Arial" pitchFamily="34" charset="-122"/>
+                <a:cs typeface="Arial" pitchFamily="34" charset="-120"/>
+              </a:rPr>
+              <a:t>Backend-результат</a:t>
+            </a:r>
+            <a:endParaRPr lang="en-US" sz="1500" dirty="0"/>
+          </a:p>
+        </p:txBody>
+      </p:sp>
+      <p:sp>
+        <p:nvSpPr>
+          <p:cNvPr id="12" name="Text 10"/>
+          <p:cNvSpPr/>
+          <p:nvPr/>
+        </p:nvSpPr>
+        <p:spPr>
+          <a:xfrm>
+            <a:off x="5989320" y="2011680"/>
+            <a:ext cx="4663440" cy="2240280"/>
+          </a:xfrm>
+          <a:prstGeom prst="rect">
+            <a:avLst/>
+          </a:prstGeom>
+          <a:noFill/>
+          <a:ln/>
+        </p:spPr>
+        <p:txBody>
+          <a:bodyPr wrap="square" lIns="254" tIns="254" rIns="254" bIns="254" rtlCol="0" anchor="t">
+            <a:normAutofit/>
+          </a:bodyPr>
+          <a:lstStyle/>
           <a:p>
             <a:pPr marL="177800" indent="-177800">
               <a:buSzPct val="100000"/>
               <a:buChar char="•"/>
             </a:pPr>
             <a:r>
-              <a:rPr lang="en-US" sz="1800" dirty="0">
-                <a:solidFill>
-                  <a:srgbClr val="17211D"/>
-                </a:solidFill>
-                <a:latin typeface="Arial" pitchFamily="34" charset="0"/>
-                <a:ea typeface="Arial" pitchFamily="34" charset="-122"/>
-                <a:cs typeface="Arial" pitchFamily="34" charset="-120"/>
-              </a:rPr>
-              <a:t>Подготовлен воспроизводимый demo-сценарий.</a:t>
-            </a:r>
-            <a:endParaRPr lang="en-US" sz="1800" dirty="0"/>
-          </a:p>
-        </p:txBody>
-      </p:sp>
-      <p:sp>
-        <p:nvSpPr>
-          <p:cNvPr id="8" name="Text 6"/>
-          <p:cNvSpPr/>
-          <p:nvPr/>
-        </p:nvSpPr>
-        <p:spPr>
-          <a:xfrm>
-            <a:off x="6583680" y="1645920"/>
-            <a:ext cx="4663440" cy="2926080"/>
-          </a:xfrm>
-          <a:prstGeom prst="rect">
-            <a:avLst/>
-          </a:prstGeom>
-          <a:noFill/>
-          <a:ln/>
-        </p:spPr>
-        <p:txBody>
-          <a:bodyPr wrap="square" lIns="254" tIns="254" rIns="254" bIns="254" rtlCol="0" anchor="t">
-            <a:normAutofit/>
-          </a:bodyPr>
-          <a:lstStyle/>
+              <a:rPr lang="en-US" sz="1550" dirty="0">
+                <a:solidFill>
+                  <a:srgbClr val="111111"/>
+                </a:solidFill>
+                <a:latin typeface="Arial" pitchFamily="34" charset="0"/>
+                <a:ea typeface="Arial" pitchFamily="34" charset="-122"/>
+                <a:cs typeface="Arial" pitchFamily="34" charset="-120"/>
+              </a:rPr>
+              <a:t>Микросервисы со слоистой DDD-структурой.</a:t>
+            </a:r>
+            <a:endParaRPr lang="en-US" sz="1550" dirty="0"/>
+          </a:p>
           <a:p>
             <a:pPr marL="177800" indent="-177800">
               <a:buSzPct val="100000"/>
               <a:buChar char="•"/>
             </a:pPr>
             <a:r>
-              <a:rPr lang="en-US" sz="1600" dirty="0">
-                <a:solidFill>
-                  <a:srgbClr val="17211D"/>
-                </a:solidFill>
-                <a:latin typeface="Arial" pitchFamily="34" charset="0"/>
-                <a:ea typeface="Arial" pitchFamily="34" charset="-122"/>
-                <a:cs typeface="Arial" pitchFamily="34" charset="-120"/>
-              </a:rPr>
-              <a:t>Развитие: реальные новостные API.</a:t>
-            </a:r>
-            <a:endParaRPr lang="en-US" sz="1600" dirty="0"/>
+              <a:rPr lang="en-US" sz="1550" dirty="0">
+                <a:solidFill>
+                  <a:srgbClr val="111111"/>
+                </a:solidFill>
+                <a:latin typeface="Arial" pitchFamily="34" charset="0"/>
+                <a:ea typeface="Arial" pitchFamily="34" charset="-122"/>
+                <a:cs typeface="Arial" pitchFamily="34" charset="-120"/>
+              </a:rPr>
+              <a:t>Асинхронные API, фоновые задачи и SSE.</a:t>
+            </a:r>
+            <a:endParaRPr lang="en-US" sz="1550" dirty="0"/>
           </a:p>
           <a:p>
             <a:pPr marL="177800" indent="-177800">
@@ -3683,17 +3927,17 @@
               <a:buChar char="•"/>
             </a:pPr>
             <a:r>
-              <a:rPr lang="en-US" sz="1600" dirty="0">
-                <a:solidFill>
-                  <a:srgbClr val="17211D"/>
-                </a:solidFill>
-                <a:latin typeface="Arial" pitchFamily="34" charset="0"/>
-                <a:ea typeface="Arial" pitchFamily="34" charset="-122"/>
-                <a:cs typeface="Arial" pitchFamily="34" charset="-120"/>
-              </a:rPr>
-              <a:t>История диалогов в PostgreSQL.</a:t>
-            </a:r>
-            <a:endParaRPr lang="en-US" sz="1600" dirty="0"/>
+              <a:rPr lang="en-US" sz="1550" dirty="0">
+                <a:solidFill>
+                  <a:srgbClr val="111111"/>
+                </a:solidFill>
+                <a:latin typeface="Arial" pitchFamily="34" charset="0"/>
+                <a:ea typeface="Arial" pitchFamily="34" charset="-122"/>
+                <a:cs typeface="Arial" pitchFamily="34" charset="-120"/>
+              </a:rPr>
+              <a:t>React UI и Docker Compose запуск.</a:t>
+            </a:r>
+            <a:endParaRPr lang="en-US" sz="1550" dirty="0"/>
           </a:p>
           <a:p>
             <a:pPr marL="177800" indent="-177800">
@@ -3701,35 +3945,56 @@
               <a:buChar char="•"/>
             </a:pPr>
             <a:r>
-              <a:rPr lang="en-US" sz="1600" dirty="0">
-                <a:solidFill>
-                  <a:srgbClr val="17211D"/>
-                </a:solidFill>
-                <a:latin typeface="Arial" pitchFamily="34" charset="0"/>
-                <a:ea typeface="Arial" pitchFamily="34" charset="-122"/>
-                <a:cs typeface="Arial" pitchFamily="34" charset="-120"/>
-              </a:rPr>
-              <a:t>Обученные артефакты дополнительных моделей.</a:t>
-            </a:r>
-            <a:endParaRPr lang="en-US" sz="1600" dirty="0"/>
-          </a:p>
-          <a:p>
-            <a:pPr marL="177800" indent="-177800">
-              <a:buSzPct val="100000"/>
-              <a:buChar char="•"/>
-            </a:pPr>
-            <a:r>
-              <a:rPr lang="en-US" sz="1600" dirty="0">
-                <a:solidFill>
-                  <a:srgbClr val="17211D"/>
-                </a:solidFill>
-                <a:latin typeface="Arial" pitchFamily="34" charset="0"/>
-                <a:ea typeface="Arial" pitchFamily="34" charset="-122"/>
-                <a:cs typeface="Arial" pitchFamily="34" charset="-120"/>
-              </a:rPr>
-              <a:t>Сравнение качества template и LLM-режимов.</a:t>
-            </a:r>
-            <a:endParaRPr lang="en-US" sz="1600" dirty="0"/>
+              <a:rPr lang="en-US" sz="1550" dirty="0">
+                <a:solidFill>
+                  <a:srgbClr val="111111"/>
+                </a:solidFill>
+                <a:latin typeface="Arial" pitchFamily="34" charset="0"/>
+                <a:ea typeface="Arial" pitchFamily="34" charset="-122"/>
+                <a:cs typeface="Arial" pitchFamily="34" charset="-120"/>
+              </a:rPr>
+              <a:t>Smoke-сценарий для проверки стенда.</a:t>
+            </a:r>
+            <a:endParaRPr lang="en-US" sz="1550" dirty="0"/>
+          </a:p>
+        </p:txBody>
+      </p:sp>
+      <p:sp>
+        <p:nvSpPr>
+          <p:cNvPr id="13" name="Text 11"/>
+          <p:cNvSpPr/>
+          <p:nvPr/>
+        </p:nvSpPr>
+        <p:spPr>
+          <a:xfrm>
+            <a:off x="822960" y="4983480"/>
+            <a:ext cx="9875520" cy="384048"/>
+          </a:xfrm>
+          <a:prstGeom prst="rect">
+            <a:avLst/>
+          </a:prstGeom>
+          <a:noFill/>
+          <a:ln/>
+        </p:spPr>
+        <p:txBody>
+          <a:bodyPr wrap="square" lIns="0" tIns="0" rIns="0" bIns="0" rtlCol="0" anchor="ctr"/>
+          <a:lstStyle/>
+          <a:p>
+            <a:pPr indent="0" marL="0">
+              <a:buNone/>
+            </a:pPr>
+            <a:r>
+              <a:rPr lang="en-US" sz="1420" b="1" dirty="0">
+                <a:solidFill>
+                  <a:srgbClr val="1F3A5F"/>
+                </a:solidFill>
+                <a:latin typeface="Arial" pitchFamily="34" charset="0"/>
+                <a:ea typeface="Arial" pitchFamily="34" charset="-122"/>
+                <a:cs typeface="Arial" pitchFamily="34" charset="-120"/>
+              </a:rPr>
+              <a:t>Дальнейшее развитие: реальные news API, расширение датасета, сравнение моделей и сохранение истории диалогов.</a:t>
+            </a:r>
+            <a:endParaRPr lang="en-US" sz="1420" dirty="0"/>
           </a:p>
         </p:txBody>
       </p:sp>
@@ -3747,7 +4012,7 @@
     <p:bg>
       <p:bgPr>
         <a:solidFill>
-          <a:srgbClr val="F7FAF8"/>
+          <a:srgbClr val="F8F9F8"/>
         </a:solidFill>
       </p:bgPr>
     </p:bg>
@@ -3780,11 +4045,11 @@
             <a:avLst/>
           </a:prstGeom>
           <a:solidFill>
-            <a:srgbClr val="F7FAF8"/>
+            <a:srgbClr val="F8F9F8"/>
           </a:solidFill>
           <a:ln w="12700">
             <a:solidFill>
-              <a:srgbClr val="F7FAF8"/>
+              <a:srgbClr val="F8F9F8"/>
             </a:solidFill>
             <a:prstDash val="solid"/>
           </a:ln>
@@ -3824,7 +4089,7 @@
         <p:spPr>
           <a:xfrm>
             <a:off x="594360" y="411480"/>
-            <a:ext cx="9875520" cy="777240"/>
+            <a:ext cx="10424160" cy="658368"/>
           </a:xfrm>
           <a:prstGeom prst="rect">
             <a:avLst/>
@@ -3842,9 +4107,9 @@
               <a:buNone/>
             </a:pPr>
             <a:r>
-              <a:rPr lang="en-US" sz="2700" b="1" dirty="0">
-                <a:solidFill>
-                  <a:srgbClr val="17211D"/>
+              <a:rPr lang="en-US" sz="2500" b="1" dirty="0">
+                <a:solidFill>
+                  <a:srgbClr val="111111"/>
                 </a:solidFill>
                 <a:latin typeface="Arial" pitchFamily="34" charset="0"/>
                 <a:ea typeface="Arial" pitchFamily="34" charset="-122"/>
@@ -3852,7 +4117,7 @@
               </a:rPr>
               <a:t>Источники</a:t>
             </a:r>
-            <a:endParaRPr lang="en-US" sz="2700" dirty="0"/>
+            <a:endParaRPr lang="en-US" sz="2500" dirty="0"/>
           </a:p>
         </p:txBody>
       </p:sp>
@@ -3864,7 +4129,7 @@
         </p:nvSpPr>
         <p:spPr>
           <a:xfrm>
-            <a:off x="612648" y="1133856"/>
+            <a:off x="612648" y="1060704"/>
             <a:ext cx="9875520" cy="320040"/>
           </a:xfrm>
           <a:prstGeom prst="rect">
@@ -3883,7 +4148,7 @@
             <a:r>
               <a:rPr lang="en-US" sz="1250" dirty="0">
                 <a:solidFill>
-                  <a:srgbClr val="60706A"/>
+                  <a:srgbClr val="555F5B"/>
                 </a:solidFill>
                 <a:latin typeface="Arial" pitchFamily="34" charset="0"/>
                 <a:ea typeface="Arial" pitchFamily="34" charset="-122"/>
@@ -3922,13 +4187,13 @@
             <a:r>
               <a:rPr lang="en-US" sz="850" dirty="0">
                 <a:solidFill>
-                  <a:srgbClr val="60706A"/>
-                </a:solidFill>
-                <a:latin typeface="Arial" pitchFamily="34" charset="0"/>
-                <a:ea typeface="Arial" pitchFamily="34" charset="-122"/>
-                <a:cs typeface="Arial" pitchFamily="34" charset="-120"/>
-              </a:rPr>
-              <a:t>news-analysis · 12/12</a:t>
+                  <a:srgbClr val="555F5B"/>
+                </a:solidFill>
+                <a:latin typeface="Arial" pitchFamily="34" charset="0"/>
+                <a:ea typeface="Arial" pitchFamily="34" charset="-122"/>
+                <a:cs typeface="Arial" pitchFamily="34" charset="-120"/>
+              </a:rPr>
+              <a:t>Прудиев Алексей Сергеевич · ПМ23-4 · 12/12</a:t>
             </a:r>
             <a:endParaRPr lang="en-US" sz="850" dirty="0"/>
           </a:p>
@@ -3936,7 +4201,73 @@
       </p:sp>
       <p:sp>
         <p:nvSpPr>
-          <p:cNvPr id="7" name="Text 5"/>
+          <p:cNvPr id="7" name="Shape 5"/>
+          <p:cNvSpPr/>
+          <p:nvPr/>
+        </p:nvSpPr>
+        <p:spPr>
+          <a:xfrm>
+            <a:off x="731520" y="1353312"/>
+            <a:ext cx="1920240" cy="310896"/>
+          </a:xfrm>
+          <a:prstGeom prst="rect">
+            <a:avLst/>
+          </a:prstGeom>
+          <a:solidFill>
+            <a:srgbClr val="0F5132"/>
+          </a:solidFill>
+          <a:ln w="12700">
+            <a:solidFill>
+              <a:srgbClr val="0F5132"/>
+            </a:solidFill>
+            <a:prstDash val="solid"/>
+          </a:ln>
+        </p:spPr>
+      </p:sp>
+      <p:sp>
+        <p:nvSpPr>
+          <p:cNvPr id="8" name="Text 6"/>
+          <p:cNvSpPr/>
+          <p:nvPr/>
+        </p:nvSpPr>
+        <p:spPr>
+          <a:xfrm>
+            <a:off x="804672" y="1426464"/>
+            <a:ext cx="1773936" cy="109728"/>
+          </a:xfrm>
+          <a:prstGeom prst="rect">
+            <a:avLst/>
+          </a:prstGeom>
+          <a:noFill/>
+          <a:ln/>
+        </p:spPr>
+        <p:txBody>
+          <a:bodyPr wrap="square" lIns="0" tIns="0" rIns="0" bIns="0" rtlCol="0" anchor="ctr">
+            <a:normAutofit/>
+          </a:bodyPr>
+          <a:lstStyle/>
+          <a:p>
+            <a:pPr indent="0" marL="0">
+              <a:buNone/>
+            </a:pPr>
+            <a:r>
+              <a:rPr lang="en-US" sz="850" b="1" dirty="0">
+                <a:solidFill>
+                  <a:srgbClr val="FFFFFF"/>
+                </a:solidFill>
+                <a:latin typeface="Arial" pitchFamily="34" charset="0"/>
+                <a:ea typeface="Arial" pitchFamily="34" charset="-122"/>
+                <a:cs typeface="Arial" pitchFamily="34" charset="-120"/>
+              </a:rPr>
+              <a:t>Критерий: список источников</a:t>
+            </a:r>
+            <a:endParaRPr lang="en-US" sz="850" dirty="0"/>
+          </a:p>
+        </p:txBody>
+      </p:sp>
+      <p:sp>
+        <p:nvSpPr>
+          <p:cNvPr id="9" name="Text 7"/>
           <p:cNvSpPr/>
           <p:nvPr/>
         </p:nvSpPr>
@@ -3964,7 +4295,7 @@
             <a:r>
               <a:rPr lang="en-US" sz="1700" dirty="0">
                 <a:solidFill>
-                  <a:srgbClr val="17211D"/>
+                  <a:srgbClr val="111111"/>
                 </a:solidFill>
                 <a:latin typeface="Arial" pitchFamily="34" charset="0"/>
                 <a:ea typeface="Arial" pitchFamily="34" charset="-122"/>
@@ -3982,7 +4313,7 @@
             <a:r>
               <a:rPr lang="en-US" sz="1700" dirty="0">
                 <a:solidFill>
-                  <a:srgbClr val="17211D"/>
+                  <a:srgbClr val="111111"/>
                 </a:solidFill>
                 <a:latin typeface="Arial" pitchFamily="34" charset="0"/>
                 <a:ea typeface="Arial" pitchFamily="34" charset="-122"/>
@@ -4000,7 +4331,7 @@
             <a:r>
               <a:rPr lang="en-US" sz="1700" dirty="0">
                 <a:solidFill>
-                  <a:srgbClr val="17211D"/>
+                  <a:srgbClr val="111111"/>
                 </a:solidFill>
                 <a:latin typeface="Arial" pitchFamily="34" charset="0"/>
                 <a:ea typeface="Arial" pitchFamily="34" charset="-122"/>
@@ -4018,7 +4349,7 @@
             <a:r>
               <a:rPr lang="en-US" sz="1700" dirty="0">
                 <a:solidFill>
-                  <a:srgbClr val="17211D"/>
+                  <a:srgbClr val="111111"/>
                 </a:solidFill>
                 <a:latin typeface="Arial" pitchFamily="34" charset="0"/>
                 <a:ea typeface="Arial" pitchFamily="34" charset="-122"/>
@@ -4036,7 +4367,7 @@
             <a:r>
               <a:rPr lang="en-US" sz="1700" dirty="0">
                 <a:solidFill>
-                  <a:srgbClr val="17211D"/>
+                  <a:srgbClr val="111111"/>
                 </a:solidFill>
                 <a:latin typeface="Arial" pitchFamily="34" charset="0"/>
                 <a:ea typeface="Arial" pitchFamily="34" charset="-122"/>
@@ -4054,7 +4385,7 @@
             <a:r>
               <a:rPr lang="en-US" sz="1700" dirty="0">
                 <a:solidFill>
-                  <a:srgbClr val="17211D"/>
+                  <a:srgbClr val="111111"/>
                 </a:solidFill>
                 <a:latin typeface="Arial" pitchFamily="34" charset="0"/>
                 <a:ea typeface="Arial" pitchFamily="34" charset="-122"/>
@@ -4072,7 +4403,7 @@
             <a:r>
               <a:rPr lang="en-US" sz="1700" dirty="0">
                 <a:solidFill>
-                  <a:srgbClr val="17211D"/>
+                  <a:srgbClr val="111111"/>
                 </a:solidFill>
                 <a:latin typeface="Arial" pitchFamily="34" charset="0"/>
                 <a:ea typeface="Arial" pitchFamily="34" charset="-122"/>
@@ -4098,7 +4429,7 @@
     <p:bg>
       <p:bgPr>
         <a:solidFill>
-          <a:srgbClr val="F7FAF8"/>
+          <a:srgbClr val="F8F9F8"/>
         </a:solidFill>
       </p:bgPr>
     </p:bg>
@@ -4131,11 +4462,11 @@
             <a:avLst/>
           </a:prstGeom>
           <a:solidFill>
-            <a:srgbClr val="F7FAF8"/>
+            <a:srgbClr val="F8F9F8"/>
           </a:solidFill>
           <a:ln w="12700">
             <a:solidFill>
-              <a:srgbClr val="F7FAF8"/>
+              <a:srgbClr val="F8F9F8"/>
             </a:solidFill>
             <a:prstDash val="solid"/>
           </a:ln>
@@ -4175,7 +4506,7 @@
         <p:spPr>
           <a:xfrm>
             <a:off x="594360" y="411480"/>
-            <a:ext cx="9875520" cy="777240"/>
+            <a:ext cx="10424160" cy="658368"/>
           </a:xfrm>
           <a:prstGeom prst="rect">
             <a:avLst/>
@@ -4193,9 +4524,9 @@
               <a:buNone/>
             </a:pPr>
             <a:r>
-              <a:rPr lang="en-US" sz="2700" b="1" dirty="0">
-                <a:solidFill>
-                  <a:srgbClr val="17211D"/>
+              <a:rPr lang="en-US" sz="2500" b="1" dirty="0">
+                <a:solidFill>
+                  <a:srgbClr val="111111"/>
                 </a:solidFill>
                 <a:latin typeface="Arial" pitchFamily="34" charset="0"/>
                 <a:ea typeface="Arial" pitchFamily="34" charset="-122"/>
@@ -4203,7 +4534,7 @@
               </a:rPr>
               <a:t>Актуальность</a:t>
             </a:r>
-            <a:endParaRPr lang="en-US" sz="2700" dirty="0"/>
+            <a:endParaRPr lang="en-US" sz="2500" dirty="0"/>
           </a:p>
         </p:txBody>
       </p:sp>
@@ -4215,7 +4546,7 @@
         </p:nvSpPr>
         <p:spPr>
           <a:xfrm>
-            <a:off x="612648" y="1133856"/>
+            <a:off x="612648" y="1060704"/>
             <a:ext cx="9875520" cy="320040"/>
           </a:xfrm>
           <a:prstGeom prst="rect">
@@ -4234,7 +4565,7 @@
             <a:r>
               <a:rPr lang="en-US" sz="1250" dirty="0">
                 <a:solidFill>
-                  <a:srgbClr val="60706A"/>
+                  <a:srgbClr val="555F5B"/>
                 </a:solidFill>
                 <a:latin typeface="Arial" pitchFamily="34" charset="0"/>
                 <a:ea typeface="Arial" pitchFamily="34" charset="-122"/>
@@ -4273,13 +4604,13 @@
             <a:r>
               <a:rPr lang="en-US" sz="850" dirty="0">
                 <a:solidFill>
-                  <a:srgbClr val="60706A"/>
-                </a:solidFill>
-                <a:latin typeface="Arial" pitchFamily="34" charset="0"/>
-                <a:ea typeface="Arial" pitchFamily="34" charset="-122"/>
-                <a:cs typeface="Arial" pitchFamily="34" charset="-120"/>
-              </a:rPr>
-              <a:t>news-analysis · 2/12</a:t>
+                  <a:srgbClr val="555F5B"/>
+                </a:solidFill>
+                <a:latin typeface="Arial" pitchFamily="34" charset="0"/>
+                <a:ea typeface="Arial" pitchFamily="34" charset="-122"/>
+                <a:cs typeface="Arial" pitchFamily="34" charset="-120"/>
+              </a:rPr>
+              <a:t>Прудиев Алексей Сергеевич · ПМ23-4 · 2/12</a:t>
             </a:r>
             <a:endParaRPr lang="en-US" sz="850" dirty="0"/>
           </a:p>
@@ -4287,7 +4618,73 @@
       </p:sp>
       <p:sp>
         <p:nvSpPr>
-          <p:cNvPr id="7" name="Text 5"/>
+          <p:cNvPr id="7" name="Shape 5"/>
+          <p:cNvSpPr/>
+          <p:nvPr/>
+        </p:nvSpPr>
+        <p:spPr>
+          <a:xfrm>
+            <a:off x="731520" y="1417320"/>
+            <a:ext cx="2560320" cy="310896"/>
+          </a:xfrm>
+          <a:prstGeom prst="rect">
+            <a:avLst/>
+          </a:prstGeom>
+          <a:solidFill>
+            <a:srgbClr val="0F5132"/>
+          </a:solidFill>
+          <a:ln w="12700">
+            <a:solidFill>
+              <a:srgbClr val="0F5132"/>
+            </a:solidFill>
+            <a:prstDash val="solid"/>
+          </a:ln>
+        </p:spPr>
+      </p:sp>
+      <p:sp>
+        <p:nvSpPr>
+          <p:cNvPr id="8" name="Text 6"/>
+          <p:cNvSpPr/>
+          <p:nvPr/>
+        </p:nvSpPr>
+        <p:spPr>
+          <a:xfrm>
+            <a:off x="804672" y="1490472"/>
+            <a:ext cx="2414016" cy="109728"/>
+          </a:xfrm>
+          <a:prstGeom prst="rect">
+            <a:avLst/>
+          </a:prstGeom>
+          <a:noFill/>
+          <a:ln/>
+        </p:spPr>
+        <p:txBody>
+          <a:bodyPr wrap="square" lIns="0" tIns="0" rIns="0" bIns="0" rtlCol="0" anchor="ctr">
+            <a:normAutofit/>
+          </a:bodyPr>
+          <a:lstStyle/>
+          <a:p>
+            <a:pPr indent="0" marL="0">
+              <a:buNone/>
+            </a:pPr>
+            <a:r>
+              <a:rPr lang="en-US" sz="850" b="1" dirty="0">
+                <a:solidFill>
+                  <a:srgbClr val="FFFFFF"/>
+                </a:solidFill>
+                <a:latin typeface="Arial" pitchFamily="34" charset="0"/>
+                <a:ea typeface="Arial" pitchFamily="34" charset="-122"/>
+                <a:cs typeface="Arial" pitchFamily="34" charset="-120"/>
+              </a:rPr>
+              <a:t>Критерий: введение / актуальность</a:t>
+            </a:r>
+            <a:endParaRPr lang="en-US" sz="850" dirty="0"/>
+          </a:p>
+        </p:txBody>
+      </p:sp>
+      <p:sp>
+        <p:nvSpPr>
+          <p:cNvPr id="9" name="Text 7"/>
           <p:cNvSpPr/>
           <p:nvPr/>
         </p:nvSpPr>
@@ -4315,7 +4712,7 @@
             <a:r>
               <a:rPr lang="en-US" sz="1800" dirty="0">
                 <a:solidFill>
-                  <a:srgbClr val="17211D"/>
+                  <a:srgbClr val="111111"/>
                 </a:solidFill>
                 <a:latin typeface="Arial" pitchFamily="34" charset="0"/>
                 <a:ea typeface="Arial" pitchFamily="34" charset="-122"/>
@@ -4333,7 +4730,7 @@
             <a:r>
               <a:rPr lang="en-US" sz="1800" dirty="0">
                 <a:solidFill>
-                  <a:srgbClr val="17211D"/>
+                  <a:srgbClr val="111111"/>
                 </a:solidFill>
                 <a:latin typeface="Arial" pitchFamily="34" charset="0"/>
                 <a:ea typeface="Arial" pitchFamily="34" charset="-122"/>
@@ -4351,7 +4748,7 @@
             <a:r>
               <a:rPr lang="en-US" sz="1800" dirty="0">
                 <a:solidFill>
-                  <a:srgbClr val="17211D"/>
+                  <a:srgbClr val="111111"/>
                 </a:solidFill>
                 <a:latin typeface="Arial" pitchFamily="34" charset="0"/>
                 <a:ea typeface="Arial" pitchFamily="34" charset="-122"/>
@@ -4369,7 +4766,7 @@
             <a:r>
               <a:rPr lang="en-US" sz="1800" dirty="0">
                 <a:solidFill>
-                  <a:srgbClr val="17211D"/>
+                  <a:srgbClr val="111111"/>
                 </a:solidFill>
                 <a:latin typeface="Arial" pitchFamily="34" charset="0"/>
                 <a:ea typeface="Arial" pitchFamily="34" charset="-122"/>
@@ -4383,7 +4780,7 @@
       </p:sp>
       <p:sp>
         <p:nvSpPr>
-          <p:cNvPr id="8" name="Shape 6"/>
+          <p:cNvPr id="10" name="Shape 8"/>
           <p:cNvSpPr/>
           <p:nvPr/>
         </p:nvSpPr>
@@ -4410,7 +4807,7 @@
       </p:sp>
       <p:sp>
         <p:nvSpPr>
-          <p:cNvPr id="9" name="Text 7"/>
+          <p:cNvPr id="11" name="Text 9"/>
           <p:cNvSpPr/>
           <p:nvPr/>
         </p:nvSpPr>
@@ -4451,7 +4848,7 @@
       </p:sp>
       <p:sp>
         <p:nvSpPr>
-          <p:cNvPr id="10" name="Shape 8"/>
+          <p:cNvPr id="12" name="Shape 10"/>
           <p:cNvSpPr/>
           <p:nvPr/>
         </p:nvSpPr>
@@ -4476,7 +4873,7 @@
       </p:sp>
       <p:sp>
         <p:nvSpPr>
-          <p:cNvPr id="11" name="Shape 9"/>
+          <p:cNvPr id="13" name="Shape 11"/>
           <p:cNvSpPr/>
           <p:nvPr/>
         </p:nvSpPr>
@@ -4495,7 +4892,7 @@
           </a:solidFill>
           <a:ln w="13970">
             <a:solidFill>
-              <a:srgbClr val="C8D8D1"/>
+              <a:srgbClr val="B7C6C0"/>
             </a:solidFill>
             <a:prstDash val="solid"/>
           </a:ln>
@@ -4503,7 +4900,7 @@
       </p:sp>
       <p:sp>
         <p:nvSpPr>
-          <p:cNvPr id="12" name="Text 10"/>
+          <p:cNvPr id="14" name="Text 12"/>
           <p:cNvSpPr/>
           <p:nvPr/>
         </p:nvSpPr>
@@ -4530,7 +4927,7 @@
             <a:r>
               <a:rPr lang="en-US" sz="1150" b="1" dirty="0">
                 <a:solidFill>
-                  <a:srgbClr val="17211D"/>
+                  <a:srgbClr val="111111"/>
                 </a:solidFill>
                 <a:latin typeface="Arial" pitchFamily="34" charset="0"/>
                 <a:ea typeface="Arial" pitchFamily="34" charset="-122"/>
@@ -4544,7 +4941,7 @@
       </p:sp>
       <p:sp>
         <p:nvSpPr>
-          <p:cNvPr id="13" name="Shape 11"/>
+          <p:cNvPr id="15" name="Shape 13"/>
           <p:cNvSpPr/>
           <p:nvPr/>
         </p:nvSpPr>
@@ -4569,7 +4966,7 @@
       </p:sp>
       <p:sp>
         <p:nvSpPr>
-          <p:cNvPr id="14" name="Shape 12"/>
+          <p:cNvPr id="16" name="Shape 14"/>
           <p:cNvSpPr/>
           <p:nvPr/>
         </p:nvSpPr>
@@ -4588,7 +4985,7 @@
           </a:solidFill>
           <a:ln w="13970">
             <a:solidFill>
-              <a:srgbClr val="C8D8D1"/>
+              <a:srgbClr val="B7C6C0"/>
             </a:solidFill>
             <a:prstDash val="solid"/>
           </a:ln>
@@ -4596,7 +4993,7 @@
       </p:sp>
       <p:sp>
         <p:nvSpPr>
-          <p:cNvPr id="15" name="Text 13"/>
+          <p:cNvPr id="17" name="Text 15"/>
           <p:cNvSpPr/>
           <p:nvPr/>
         </p:nvSpPr>
@@ -4623,7 +5020,7 @@
             <a:r>
               <a:rPr lang="en-US" sz="1150" b="1" dirty="0">
                 <a:solidFill>
-                  <a:srgbClr val="17211D"/>
+                  <a:srgbClr val="111111"/>
                 </a:solidFill>
                 <a:latin typeface="Arial" pitchFamily="34" charset="0"/>
                 <a:ea typeface="Arial" pitchFamily="34" charset="-122"/>
@@ -4637,7 +5034,7 @@
       </p:sp>
       <p:sp>
         <p:nvSpPr>
-          <p:cNvPr id="16" name="Shape 14"/>
+          <p:cNvPr id="18" name="Shape 16"/>
           <p:cNvSpPr/>
           <p:nvPr/>
         </p:nvSpPr>
@@ -4662,7 +5059,7 @@
       </p:sp>
       <p:sp>
         <p:nvSpPr>
-          <p:cNvPr id="17" name="Shape 15"/>
+          <p:cNvPr id="19" name="Shape 17"/>
           <p:cNvSpPr/>
           <p:nvPr/>
         </p:nvSpPr>
@@ -4681,7 +5078,7 @@
           </a:solidFill>
           <a:ln w="13970">
             <a:solidFill>
-              <a:srgbClr val="C8D8D1"/>
+              <a:srgbClr val="B7C6C0"/>
             </a:solidFill>
             <a:prstDash val="solid"/>
           </a:ln>
@@ -4689,7 +5086,7 @@
       </p:sp>
       <p:sp>
         <p:nvSpPr>
-          <p:cNvPr id="18" name="Text 16"/>
+          <p:cNvPr id="20" name="Text 18"/>
           <p:cNvSpPr/>
           <p:nvPr/>
         </p:nvSpPr>
@@ -4716,7 +5113,7 @@
             <a:r>
               <a:rPr lang="en-US" sz="1150" b="1" dirty="0">
                 <a:solidFill>
-                  <a:srgbClr val="17211D"/>
+                  <a:srgbClr val="111111"/>
                 </a:solidFill>
                 <a:latin typeface="Arial" pitchFamily="34" charset="0"/>
                 <a:ea typeface="Arial" pitchFamily="34" charset="-122"/>
@@ -4730,7 +5127,7 @@
       </p:sp>
       <p:sp>
         <p:nvSpPr>
-          <p:cNvPr id="19" name="Shape 17"/>
+          <p:cNvPr id="21" name="Shape 19"/>
           <p:cNvSpPr/>
           <p:nvPr/>
         </p:nvSpPr>
@@ -4755,7 +5152,7 @@
       </p:sp>
       <p:sp>
         <p:nvSpPr>
-          <p:cNvPr id="20" name="Shape 18"/>
+          <p:cNvPr id="22" name="Shape 20"/>
           <p:cNvSpPr/>
           <p:nvPr/>
         </p:nvSpPr>
@@ -4774,7 +5171,7 @@
           </a:solidFill>
           <a:ln w="13970">
             <a:solidFill>
-              <a:srgbClr val="C8D8D1"/>
+              <a:srgbClr val="B7C6C0"/>
             </a:solidFill>
             <a:prstDash val="solid"/>
           </a:ln>
@@ -4782,7 +5179,7 @@
       </p:sp>
       <p:sp>
         <p:nvSpPr>
-          <p:cNvPr id="21" name="Text 19"/>
+          <p:cNvPr id="23" name="Text 21"/>
           <p:cNvSpPr/>
           <p:nvPr/>
         </p:nvSpPr>
@@ -4809,7 +5206,7 @@
             <a:r>
               <a:rPr lang="en-US" sz="1150" b="1" dirty="0">
                 <a:solidFill>
-                  <a:srgbClr val="17211D"/>
+                  <a:srgbClr val="111111"/>
                 </a:solidFill>
                 <a:latin typeface="Arial" pitchFamily="34" charset="0"/>
                 <a:ea typeface="Arial" pitchFamily="34" charset="-122"/>
@@ -4835,7 +5232,7 @@
     <p:bg>
       <p:bgPr>
         <a:solidFill>
-          <a:srgbClr val="F7FAF8"/>
+          <a:srgbClr val="F8F9F8"/>
         </a:solidFill>
       </p:bgPr>
     </p:bg>
@@ -4868,11 +5265,11 @@
             <a:avLst/>
           </a:prstGeom>
           <a:solidFill>
-            <a:srgbClr val="F7FAF8"/>
+            <a:srgbClr val="F8F9F8"/>
           </a:solidFill>
           <a:ln w="12700">
             <a:solidFill>
-              <a:srgbClr val="F7FAF8"/>
+              <a:srgbClr val="F8F9F8"/>
             </a:solidFill>
             <a:prstDash val="solid"/>
           </a:ln>
@@ -4912,7 +5309,7 @@
         <p:spPr>
           <a:xfrm>
             <a:off x="594360" y="411480"/>
-            <a:ext cx="9875520" cy="777240"/>
+            <a:ext cx="10424160" cy="658368"/>
           </a:xfrm>
           <a:prstGeom prst="rect">
             <a:avLst/>
@@ -4930,9 +5327,9 @@
               <a:buNone/>
             </a:pPr>
             <a:r>
-              <a:rPr lang="en-US" sz="2700" b="1" dirty="0">
-                <a:solidFill>
-                  <a:srgbClr val="17211D"/>
+              <a:rPr lang="en-US" sz="2500" b="1" dirty="0">
+                <a:solidFill>
+                  <a:srgbClr val="111111"/>
                 </a:solidFill>
                 <a:latin typeface="Arial" pitchFamily="34" charset="0"/>
                 <a:ea typeface="Arial" pitchFamily="34" charset="-122"/>
@@ -4940,7 +5337,7 @@
               </a:rPr>
               <a:t>Цель и задачи</a:t>
             </a:r>
-            <a:endParaRPr lang="en-US" sz="2700" dirty="0"/>
+            <a:endParaRPr lang="en-US" sz="2500" dirty="0"/>
           </a:p>
         </p:txBody>
       </p:sp>
@@ -4952,7 +5349,7 @@
         </p:nvSpPr>
         <p:spPr>
           <a:xfrm>
-            <a:off x="612648" y="1133856"/>
+            <a:off x="612648" y="1060704"/>
             <a:ext cx="9875520" cy="320040"/>
           </a:xfrm>
           <a:prstGeom prst="rect">
@@ -4971,7 +5368,7 @@
             <a:r>
               <a:rPr lang="en-US" sz="1250" dirty="0">
                 <a:solidFill>
-                  <a:srgbClr val="60706A"/>
+                  <a:srgbClr val="555F5B"/>
                 </a:solidFill>
                 <a:latin typeface="Arial" pitchFamily="34" charset="0"/>
                 <a:ea typeface="Arial" pitchFamily="34" charset="-122"/>
@@ -5010,13 +5407,13 @@
             <a:r>
               <a:rPr lang="en-US" sz="850" dirty="0">
                 <a:solidFill>
-                  <a:srgbClr val="60706A"/>
-                </a:solidFill>
-                <a:latin typeface="Arial" pitchFamily="34" charset="0"/>
-                <a:ea typeface="Arial" pitchFamily="34" charset="-122"/>
-                <a:cs typeface="Arial" pitchFamily="34" charset="-120"/>
-              </a:rPr>
-              <a:t>news-analysis · 3/12</a:t>
+                  <a:srgbClr val="555F5B"/>
+                </a:solidFill>
+                <a:latin typeface="Arial" pitchFamily="34" charset="0"/>
+                <a:ea typeface="Arial" pitchFamily="34" charset="-122"/>
+                <a:cs typeface="Arial" pitchFamily="34" charset="-120"/>
+              </a:rPr>
+              <a:t>Прудиев Алексей Сергеевич · ПМ23-4 · 3/12</a:t>
             </a:r>
             <a:endParaRPr lang="en-US" sz="850" dirty="0"/>
           </a:p>
@@ -5024,14 +5421,119 @@
       </p:sp>
       <p:sp>
         <p:nvSpPr>
-          <p:cNvPr id="7" name="Text 5"/>
-          <p:cNvSpPr/>
-          <p:nvPr/>
-        </p:nvSpPr>
-        <p:spPr>
-          <a:xfrm>
-            <a:off x="731520" y="1737360"/>
-            <a:ext cx="9875520" cy="3749040"/>
+          <p:cNvPr id="7" name="Shape 5"/>
+          <p:cNvSpPr/>
+          <p:nvPr/>
+        </p:nvSpPr>
+        <p:spPr>
+          <a:xfrm>
+            <a:off x="731520" y="1389888"/>
+            <a:ext cx="2743200" cy="310896"/>
+          </a:xfrm>
+          <a:prstGeom prst="rect">
+            <a:avLst/>
+          </a:prstGeom>
+          <a:solidFill>
+            <a:srgbClr val="0F5132"/>
+          </a:solidFill>
+          <a:ln w="12700">
+            <a:solidFill>
+              <a:srgbClr val="0F5132"/>
+            </a:solidFill>
+            <a:prstDash val="solid"/>
+          </a:ln>
+        </p:spPr>
+      </p:sp>
+      <p:sp>
+        <p:nvSpPr>
+          <p:cNvPr id="8" name="Text 6"/>
+          <p:cNvSpPr/>
+          <p:nvPr/>
+        </p:nvSpPr>
+        <p:spPr>
+          <a:xfrm>
+            <a:off x="804672" y="1463040"/>
+            <a:ext cx="2596896" cy="109728"/>
+          </a:xfrm>
+          <a:prstGeom prst="rect">
+            <a:avLst/>
+          </a:prstGeom>
+          <a:noFill/>
+          <a:ln/>
+        </p:spPr>
+        <p:txBody>
+          <a:bodyPr wrap="square" lIns="0" tIns="0" rIns="0" bIns="0" rtlCol="0" anchor="ctr">
+            <a:normAutofit/>
+          </a:bodyPr>
+          <a:lstStyle/>
+          <a:p>
+            <a:pPr indent="0" marL="0">
+              <a:buNone/>
+            </a:pPr>
+            <a:r>
+              <a:rPr lang="en-US" sz="850" b="1" dirty="0">
+                <a:solidFill>
+                  <a:srgbClr val="FFFFFF"/>
+                </a:solidFill>
+                <a:latin typeface="Arial" pitchFamily="34" charset="0"/>
+                <a:ea typeface="Arial" pitchFamily="34" charset="-122"/>
+                <a:cs typeface="Arial" pitchFamily="34" charset="-120"/>
+              </a:rPr>
+              <a:t>Критерий: введение / цель и задачи</a:t>
+            </a:r>
+            <a:endParaRPr lang="en-US" sz="850" dirty="0"/>
+          </a:p>
+        </p:txBody>
+      </p:sp>
+      <p:sp>
+        <p:nvSpPr>
+          <p:cNvPr id="9" name="Text 7"/>
+          <p:cNvSpPr/>
+          <p:nvPr/>
+        </p:nvSpPr>
+        <p:spPr>
+          <a:xfrm>
+            <a:off x="822960" y="1783080"/>
+            <a:ext cx="4297680" cy="274320"/>
+          </a:xfrm>
+          <a:prstGeom prst="rect">
+            <a:avLst/>
+          </a:prstGeom>
+          <a:noFill/>
+          <a:ln/>
+        </p:spPr>
+        <p:txBody>
+          <a:bodyPr wrap="square" lIns="0" tIns="0" rIns="0" bIns="0" rtlCol="0" anchor="ctr"/>
+          <a:lstStyle/>
+          <a:p>
+            <a:pPr indent="0" marL="0">
+              <a:buNone/>
+            </a:pPr>
+            <a:r>
+              <a:rPr lang="en-US" sz="1500" b="1" dirty="0">
+                <a:solidFill>
+                  <a:srgbClr val="0F5132"/>
+                </a:solidFill>
+                <a:latin typeface="Arial" pitchFamily="34" charset="0"/>
+                <a:ea typeface="Arial" pitchFamily="34" charset="-122"/>
+                <a:cs typeface="Arial" pitchFamily="34" charset="-120"/>
+              </a:rPr>
+              <a:t>ML/NLP-часть</a:t>
+            </a:r>
+            <a:endParaRPr lang="en-US" sz="1500" dirty="0"/>
+          </a:p>
+        </p:txBody>
+      </p:sp>
+      <p:sp>
+        <p:nvSpPr>
+          <p:cNvPr id="10" name="Text 8"/>
+          <p:cNvSpPr/>
+          <p:nvPr/>
+        </p:nvSpPr>
+        <p:spPr>
+          <a:xfrm>
+            <a:off x="822960" y="2176272"/>
+            <a:ext cx="4572000" cy="2194560"/>
           </a:xfrm>
           <a:prstGeom prst="rect">
             <a:avLst/>
@@ -5050,17 +5552,17 @@
               <a:buChar char="•"/>
             </a:pPr>
             <a:r>
-              <a:rPr lang="en-US" sz="1700" dirty="0">
-                <a:solidFill>
-                  <a:srgbClr val="17211D"/>
-                </a:solidFill>
-                <a:latin typeface="Arial" pitchFamily="34" charset="0"/>
-                <a:ea typeface="Arial" pitchFamily="34" charset="-122"/>
-                <a:cs typeface="Arial" pitchFamily="34" charset="-120"/>
-              </a:rPr>
-              <a:t>Спроектировать микросервисную архитектуру.</a:t>
-            </a:r>
-            <a:endParaRPr lang="en-US" sz="1700" dirty="0"/>
+              <a:rPr lang="en-US" sz="1550" dirty="0">
+                <a:solidFill>
+                  <a:srgbClr val="111111"/>
+                </a:solidFill>
+                <a:latin typeface="Arial" pitchFamily="34" charset="0"/>
+                <a:ea typeface="Arial" pitchFamily="34" charset="-122"/>
+                <a:cs typeface="Arial" pitchFamily="34" charset="-120"/>
+              </a:rPr>
+              <a:t>Определить текстовое представление новостей.</a:t>
+            </a:r>
+            <a:endParaRPr lang="en-US" sz="1550" dirty="0"/>
           </a:p>
           <a:p>
             <a:pPr marL="177800" indent="-177800">
@@ -5068,17 +5570,17 @@
               <a:buChar char="•"/>
             </a:pPr>
             <a:r>
-              <a:rPr lang="en-US" sz="1700" dirty="0">
-                <a:solidFill>
-                  <a:srgbClr val="17211D"/>
-                </a:solidFill>
-                <a:latin typeface="Arial" pitchFamily="34" charset="0"/>
-                <a:ea typeface="Arial" pitchFamily="34" charset="-122"/>
-                <a:cs typeface="Arial" pitchFamily="34" charset="-120"/>
-              </a:rPr>
-              <a:t>Реализовать загрузку и индексацию новостей.</a:t>
-            </a:r>
-            <a:endParaRPr lang="en-US" sz="1700" dirty="0"/>
+              <a:rPr lang="en-US" sz="1550" dirty="0">
+                <a:solidFill>
+                  <a:srgbClr val="111111"/>
+                </a:solidFill>
+                <a:latin typeface="Arial" pitchFamily="34" charset="0"/>
+                <a:ea typeface="Arial" pitchFamily="34" charset="-122"/>
+                <a:cs typeface="Arial" pitchFamily="34" charset="-120"/>
+              </a:rPr>
+              <a:t>Реализовать retrieval/RAG по источникам.</a:t>
+            </a:r>
+            <a:endParaRPr lang="en-US" sz="1550" dirty="0"/>
           </a:p>
           <a:p>
             <a:pPr marL="177800" indent="-177800">
@@ -5086,17 +5588,17 @@
               <a:buChar char="•"/>
             </a:pPr>
             <a:r>
-              <a:rPr lang="en-US" sz="1700" dirty="0">
-                <a:solidFill>
-                  <a:srgbClr val="17211D"/>
-                </a:solidFill>
-                <a:latin typeface="Arial" pitchFamily="34" charset="0"/>
-                <a:ea typeface="Arial" pitchFamily="34" charset="-122"/>
-                <a:cs typeface="Arial" pitchFamily="34" charset="-120"/>
-              </a:rPr>
-              <a:t>Реализовать векторный поиск релевантных источников.</a:t>
-            </a:r>
-            <a:endParaRPr lang="en-US" sz="1700" dirty="0"/>
+              <a:rPr lang="en-US" sz="1550" dirty="0">
+                <a:solidFill>
+                  <a:srgbClr val="111111"/>
+                </a:solidFill>
+                <a:latin typeface="Arial" pitchFamily="34" charset="0"/>
+                <a:ea typeface="Arial" pitchFamily="34" charset="-122"/>
+                <a:cs typeface="Arial" pitchFamily="34" charset="-120"/>
+              </a:rPr>
+              <a:t>Реализовать классификацию влияния новости.</a:t>
+            </a:r>
+            <a:endParaRPr lang="en-US" sz="1550" dirty="0"/>
           </a:p>
           <a:p>
             <a:pPr marL="177800" indent="-177800">
@@ -5104,35 +5606,98 @@
               <a:buChar char="•"/>
             </a:pPr>
             <a:r>
-              <a:rPr lang="en-US" sz="1700" dirty="0">
-                <a:solidFill>
-                  <a:srgbClr val="17211D"/>
-                </a:solidFill>
-                <a:latin typeface="Arial" pitchFamily="34" charset="0"/>
-                <a:ea typeface="Arial" pitchFamily="34" charset="-122"/>
-                <a:cs typeface="Arial" pitchFamily="34" charset="-120"/>
-              </a:rPr>
-              <a:t>Реализовать анализ влияния новости.</a:t>
-            </a:r>
-            <a:endParaRPr lang="en-US" sz="1700" dirty="0"/>
-          </a:p>
+              <a:rPr lang="en-US" sz="1550" dirty="0">
+                <a:solidFill>
+                  <a:srgbClr val="111111"/>
+                </a:solidFill>
+                <a:latin typeface="Arial" pitchFamily="34" charset="0"/>
+                <a:ea typeface="Arial" pitchFamily="34" charset="-122"/>
+                <a:cs typeface="Arial" pitchFamily="34" charset="-120"/>
+              </a:rPr>
+              <a:t>Поддержать template и LLM-режим ответа.</a:t>
+            </a:r>
+            <a:endParaRPr lang="en-US" sz="1550" dirty="0"/>
+          </a:p>
+        </p:txBody>
+      </p:sp>
+      <p:sp>
+        <p:nvSpPr>
+          <p:cNvPr id="11" name="Text 9"/>
+          <p:cNvSpPr/>
+          <p:nvPr/>
+        </p:nvSpPr>
+        <p:spPr>
+          <a:xfrm>
+            <a:off x="5989320" y="1783080"/>
+            <a:ext cx="4297680" cy="274320"/>
+          </a:xfrm>
+          <a:prstGeom prst="rect">
+            <a:avLst/>
+          </a:prstGeom>
+          <a:noFill/>
+          <a:ln/>
+        </p:spPr>
+        <p:txBody>
+          <a:bodyPr wrap="square" lIns="0" tIns="0" rIns="0" bIns="0" rtlCol="0" anchor="ctr"/>
+          <a:lstStyle/>
+          <a:p>
+            <a:pPr indent="0" marL="0">
+              <a:buNone/>
+            </a:pPr>
+            <a:r>
+              <a:rPr lang="en-US" sz="1500" b="1" dirty="0">
+                <a:solidFill>
+                  <a:srgbClr val="0F5132"/>
+                </a:solidFill>
+                <a:latin typeface="Arial" pitchFamily="34" charset="0"/>
+                <a:ea typeface="Arial" pitchFamily="34" charset="-122"/>
+                <a:cs typeface="Arial" pitchFamily="34" charset="-120"/>
+              </a:rPr>
+              <a:t>Backend-часть</a:t>
+            </a:r>
+            <a:endParaRPr lang="en-US" sz="1500" dirty="0"/>
+          </a:p>
+        </p:txBody>
+      </p:sp>
+      <p:sp>
+        <p:nvSpPr>
+          <p:cNvPr id="12" name="Text 10"/>
+          <p:cNvSpPr/>
+          <p:nvPr/>
+        </p:nvSpPr>
+        <p:spPr>
+          <a:xfrm>
+            <a:off x="5989320" y="2176272"/>
+            <a:ext cx="4754880" cy="2194560"/>
+          </a:xfrm>
+          <a:prstGeom prst="rect">
+            <a:avLst/>
+          </a:prstGeom>
+          <a:noFill/>
+          <a:ln/>
+        </p:spPr>
+        <p:txBody>
+          <a:bodyPr wrap="square" lIns="254" tIns="254" rIns="254" bIns="254" rtlCol="0" anchor="t">
+            <a:normAutofit/>
+          </a:bodyPr>
+          <a:lstStyle/>
           <a:p>
             <a:pPr marL="177800" indent="-177800">
               <a:buSzPct val="100000"/>
               <a:buChar char="•"/>
             </a:pPr>
             <a:r>
-              <a:rPr lang="en-US" sz="1700" dirty="0">
-                <a:solidFill>
-                  <a:srgbClr val="17211D"/>
-                </a:solidFill>
-                <a:latin typeface="Arial" pitchFamily="34" charset="0"/>
-                <a:ea typeface="Arial" pitchFamily="34" charset="-122"/>
-                <a:cs typeface="Arial" pitchFamily="34" charset="-120"/>
-              </a:rPr>
-              <a:t>Реализовать генерацию ответа с поддержкой языковой модели.</a:t>
-            </a:r>
-            <a:endParaRPr lang="en-US" sz="1700" dirty="0"/>
+              <a:rPr lang="en-US" sz="1550" dirty="0">
+                <a:solidFill>
+                  <a:srgbClr val="111111"/>
+                </a:solidFill>
+                <a:latin typeface="Arial" pitchFamily="34" charset="0"/>
+                <a:ea typeface="Arial" pitchFamily="34" charset="-122"/>
+                <a:cs typeface="Arial" pitchFamily="34" charset="-120"/>
+              </a:rPr>
+              <a:t>Спроектировать микросервисную DDD-архитектуру.</a:t>
+            </a:r>
+            <a:endParaRPr lang="en-US" sz="1550" dirty="0"/>
           </a:p>
           <a:p>
             <a:pPr marL="177800" indent="-177800">
@@ -5140,17 +5705,92 @@
               <a:buChar char="•"/>
             </a:pPr>
             <a:r>
-              <a:rPr lang="en-US" sz="1700" dirty="0">
-                <a:solidFill>
-                  <a:srgbClr val="17211D"/>
-                </a:solidFill>
-                <a:latin typeface="Arial" pitchFamily="34" charset="0"/>
-                <a:ea typeface="Arial" pitchFamily="34" charset="-122"/>
-                <a:cs typeface="Arial" pitchFamily="34" charset="-120"/>
-              </a:rPr>
-              <a:t>Подготовить web UI и demo-сценарий.</a:t>
-            </a:r>
-            <a:endParaRPr lang="en-US" sz="1700" dirty="0"/>
+              <a:rPr lang="en-US" sz="1550" dirty="0">
+                <a:solidFill>
+                  <a:srgbClr val="111111"/>
+                </a:solidFill>
+                <a:latin typeface="Arial" pitchFamily="34" charset="0"/>
+                <a:ea typeface="Arial" pitchFamily="34" charset="-122"/>
+                <a:cs typeface="Arial" pitchFamily="34" charset="-120"/>
+              </a:rPr>
+              <a:t>Реализовать асинхронные сервисы и фоновые задачи.</a:t>
+            </a:r>
+            <a:endParaRPr lang="en-US" sz="1550" dirty="0"/>
+          </a:p>
+          <a:p>
+            <a:pPr marL="177800" indent="-177800">
+              <a:buSzPct val="100000"/>
+              <a:buChar char="•"/>
+            </a:pPr>
+            <a:r>
+              <a:rPr lang="en-US" sz="1550" dirty="0">
+                <a:solidFill>
+                  <a:srgbClr val="111111"/>
+                </a:solidFill>
+                <a:latin typeface="Arial" pitchFamily="34" charset="0"/>
+                <a:ea typeface="Arial" pitchFamily="34" charset="-122"/>
+                <a:cs typeface="Arial" pitchFamily="34" charset="-120"/>
+              </a:rPr>
+              <a:t>Сделать React UI с SSE timeline.</a:t>
+            </a:r>
+            <a:endParaRPr lang="en-US" sz="1550" dirty="0"/>
+          </a:p>
+          <a:p>
+            <a:pPr marL="177800" indent="-177800">
+              <a:buSzPct val="100000"/>
+              <a:buChar char="•"/>
+            </a:pPr>
+            <a:r>
+              <a:rPr lang="en-US" sz="1550" dirty="0">
+                <a:solidFill>
+                  <a:srgbClr val="111111"/>
+                </a:solidFill>
+                <a:latin typeface="Arial" pitchFamily="34" charset="0"/>
+                <a:ea typeface="Arial" pitchFamily="34" charset="-122"/>
+                <a:cs typeface="Arial" pitchFamily="34" charset="-120"/>
+              </a:rPr>
+              <a:t>Подготовить Docker Compose demo-сценарий.</a:t>
+            </a:r>
+            <a:endParaRPr lang="en-US" sz="1550" dirty="0"/>
+          </a:p>
+        </p:txBody>
+      </p:sp>
+      <p:sp>
+        <p:nvSpPr>
+          <p:cNvPr id="13" name="Text 11"/>
+          <p:cNvSpPr/>
+          <p:nvPr/>
+        </p:nvSpPr>
+        <p:spPr>
+          <a:xfrm>
+            <a:off x="822960" y="5074920"/>
+            <a:ext cx="9875520" cy="320040"/>
+          </a:xfrm>
+          <a:prstGeom prst="rect">
+            <a:avLst/>
+          </a:prstGeom>
+          <a:noFill/>
+          <a:ln/>
+        </p:spPr>
+        <p:txBody>
+          <a:bodyPr wrap="square" lIns="0" tIns="0" rIns="0" bIns="0" rtlCol="0" anchor="ctr"/>
+          <a:lstStyle/>
+          <a:p>
+            <a:pPr indent="0" marL="0">
+              <a:buNone/>
+            </a:pPr>
+            <a:r>
+              <a:rPr lang="en-US" sz="1500" b="1" dirty="0">
+                <a:solidFill>
+                  <a:srgbClr val="1F3A5F"/>
+                </a:solidFill>
+                <a:latin typeface="Arial" pitchFamily="34" charset="0"/>
+                <a:ea typeface="Arial" pitchFamily="34" charset="-122"/>
+                <a:cs typeface="Arial" pitchFamily="34" charset="-120"/>
+              </a:rPr>
+              <a:t>Баланс защиты: примерно 50% ML/NLP и 50% production backend</a:t>
+            </a:r>
+            <a:endParaRPr lang="en-US" sz="1500" dirty="0"/>
           </a:p>
         </p:txBody>
       </p:sp>
@@ -5168,7 +5808,7 @@
     <p:bg>
       <p:bgPr>
         <a:solidFill>
-          <a:srgbClr val="F7FAF8"/>
+          <a:srgbClr val="F8F9F8"/>
         </a:solidFill>
       </p:bgPr>
     </p:bg>
@@ -5201,11 +5841,11 @@
             <a:avLst/>
           </a:prstGeom>
           <a:solidFill>
-            <a:srgbClr val="F7FAF8"/>
+            <a:srgbClr val="F8F9F8"/>
           </a:solidFill>
           <a:ln w="12700">
             <a:solidFill>
-              <a:srgbClr val="F7FAF8"/>
+              <a:srgbClr val="F8F9F8"/>
             </a:solidFill>
             <a:prstDash val="solid"/>
           </a:ln>
@@ -5245,7 +5885,7 @@
         <p:spPr>
           <a:xfrm>
             <a:off x="594360" y="411480"/>
-            <a:ext cx="9875520" cy="777240"/>
+            <a:ext cx="10424160" cy="658368"/>
           </a:xfrm>
           <a:prstGeom prst="rect">
             <a:avLst/>
@@ -5263,9 +5903,9 @@
               <a:buNone/>
             </a:pPr>
             <a:r>
-              <a:rPr lang="en-US" sz="2700" b="1" dirty="0">
-                <a:solidFill>
-                  <a:srgbClr val="17211D"/>
+              <a:rPr lang="en-US" sz="2500" b="1" dirty="0">
+                <a:solidFill>
+                  <a:srgbClr val="111111"/>
                 </a:solidFill>
                 <a:latin typeface="Arial" pitchFamily="34" charset="0"/>
                 <a:ea typeface="Arial" pitchFamily="34" charset="-122"/>
@@ -5273,7 +5913,7 @@
               </a:rPr>
               <a:t>Общая архитектура</a:t>
             </a:r>
-            <a:endParaRPr lang="en-US" sz="2700" dirty="0"/>
+            <a:endParaRPr lang="en-US" sz="2500" dirty="0"/>
           </a:p>
         </p:txBody>
       </p:sp>
@@ -5285,7 +5925,7 @@
         </p:nvSpPr>
         <p:spPr>
           <a:xfrm>
-            <a:off x="612648" y="1133856"/>
+            <a:off x="612648" y="1060704"/>
             <a:ext cx="9875520" cy="320040"/>
           </a:xfrm>
           <a:prstGeom prst="rect">
@@ -5304,7 +5944,7 @@
             <a:r>
               <a:rPr lang="en-US" sz="1250" dirty="0">
                 <a:solidFill>
-                  <a:srgbClr val="60706A"/>
+                  <a:srgbClr val="555F5B"/>
                 </a:solidFill>
                 <a:latin typeface="Arial" pitchFamily="34" charset="0"/>
                 <a:ea typeface="Arial" pitchFamily="34" charset="-122"/>
@@ -5343,13 +5983,79 @@
             <a:r>
               <a:rPr lang="en-US" sz="850" dirty="0">
                 <a:solidFill>
-                  <a:srgbClr val="60706A"/>
-                </a:solidFill>
-                <a:latin typeface="Arial" pitchFamily="34" charset="0"/>
-                <a:ea typeface="Arial" pitchFamily="34" charset="-122"/>
-                <a:cs typeface="Arial" pitchFamily="34" charset="-120"/>
-              </a:rPr>
-              <a:t>news-analysis · 4/12</a:t>
+                  <a:srgbClr val="555F5B"/>
+                </a:solidFill>
+                <a:latin typeface="Arial" pitchFamily="34" charset="0"/>
+                <a:ea typeface="Arial" pitchFamily="34" charset="-122"/>
+                <a:cs typeface="Arial" pitchFamily="34" charset="-120"/>
+              </a:rPr>
+              <a:t>Прудиев Алексей Сергеевич · ПМ23-4 · 4/12</a:t>
+            </a:r>
+            <a:endParaRPr lang="en-US" sz="850" dirty="0"/>
+          </a:p>
+        </p:txBody>
+      </p:sp>
+      <p:sp>
+        <p:nvSpPr>
+          <p:cNvPr id="7" name="Shape 5"/>
+          <p:cNvSpPr/>
+          <p:nvPr/>
+        </p:nvSpPr>
+        <p:spPr>
+          <a:xfrm>
+            <a:off x="502920" y="1115568"/>
+            <a:ext cx="2377440" cy="310896"/>
+          </a:xfrm>
+          <a:prstGeom prst="rect">
+            <a:avLst/>
+          </a:prstGeom>
+          <a:solidFill>
+            <a:srgbClr val="0F5132"/>
+          </a:solidFill>
+          <a:ln w="12700">
+            <a:solidFill>
+              <a:srgbClr val="0F5132"/>
+            </a:solidFill>
+            <a:prstDash val="solid"/>
+          </a:ln>
+        </p:spPr>
+      </p:sp>
+      <p:sp>
+        <p:nvSpPr>
+          <p:cNvPr id="8" name="Text 6"/>
+          <p:cNvSpPr/>
+          <p:nvPr/>
+        </p:nvSpPr>
+        <p:spPr>
+          <a:xfrm>
+            <a:off x="576072" y="1188720"/>
+            <a:ext cx="2231136" cy="109728"/>
+          </a:xfrm>
+          <a:prstGeom prst="rect">
+            <a:avLst/>
+          </a:prstGeom>
+          <a:noFill/>
+          <a:ln/>
+        </p:spPr>
+        <p:txBody>
+          <a:bodyPr wrap="square" lIns="0" tIns="0" rIns="0" bIns="0" rtlCol="0" anchor="ctr">
+            <a:normAutofit/>
+          </a:bodyPr>
+          <a:lstStyle/>
+          <a:p>
+            <a:pPr indent="0" marL="0">
+              <a:buNone/>
+            </a:pPr>
+            <a:r>
+              <a:rPr lang="en-US" sz="850" b="1" dirty="0">
+                <a:solidFill>
+                  <a:srgbClr val="FFFFFF"/>
+                </a:solidFill>
+                <a:latin typeface="Arial" pitchFamily="34" charset="0"/>
+                <a:ea typeface="Arial" pitchFamily="34" charset="-122"/>
+                <a:cs typeface="Arial" pitchFamily="34" charset="-120"/>
+              </a:rPr>
+              <a:t>Критерий: методы и результаты</a:t>
             </a:r>
             <a:endParaRPr lang="en-US" sz="850" dirty="0"/>
           </a:p>
@@ -5357,7 +6063,7 @@
       </p:sp>
       <p:pic>
         <p:nvPicPr>
-          <p:cNvPr id="7" name="Image 0" descr="/Users/a.prudiev/PyCharmMiscProject/curswork/docs/final/assets/architecture-diagram.png">    </p:cNvPr>
+          <p:cNvPr id="9" name="Image 0" descr="/Users/a.prudiev/PyCharmMiscProject/curswork/docs/final/assets/architecture-diagram.png">    </p:cNvPr>
           <p:cNvPicPr>
             <a:picLocks noChangeAspect="1"/>
           </p:cNvPicPr>
@@ -5393,7 +6099,7 @@
     <p:bg>
       <p:bgPr>
         <a:solidFill>
-          <a:srgbClr val="F7FAF8"/>
+          <a:srgbClr val="F8F9F8"/>
         </a:solidFill>
       </p:bgPr>
     </p:bg>
@@ -5426,11 +6132,11 @@
             <a:avLst/>
           </a:prstGeom>
           <a:solidFill>
-            <a:srgbClr val="F7FAF8"/>
+            <a:srgbClr val="F8F9F8"/>
           </a:solidFill>
           <a:ln w="12700">
             <a:solidFill>
-              <a:srgbClr val="F7FAF8"/>
+              <a:srgbClr val="F8F9F8"/>
             </a:solidFill>
             <a:prstDash val="solid"/>
           </a:ln>
@@ -5470,7 +6176,7 @@
         <p:spPr>
           <a:xfrm>
             <a:off x="594360" y="411480"/>
-            <a:ext cx="9875520" cy="777240"/>
+            <a:ext cx="10424160" cy="658368"/>
           </a:xfrm>
           <a:prstGeom prst="rect">
             <a:avLst/>
@@ -5488,9 +6194,9 @@
               <a:buNone/>
             </a:pPr>
             <a:r>
-              <a:rPr lang="en-US" sz="2700" b="1" dirty="0">
-                <a:solidFill>
-                  <a:srgbClr val="17211D"/>
+              <a:rPr lang="en-US" sz="2500" b="1" dirty="0">
+                <a:solidFill>
+                  <a:srgbClr val="111111"/>
                 </a:solidFill>
                 <a:latin typeface="Arial" pitchFamily="34" charset="0"/>
                 <a:ea typeface="Arial" pitchFamily="34" charset="-122"/>
@@ -5498,7 +6204,7 @@
               </a:rPr>
               <a:t>Pipeline обработки вопроса</a:t>
             </a:r>
-            <a:endParaRPr lang="en-US" sz="2700" dirty="0"/>
+            <a:endParaRPr lang="en-US" sz="2500" dirty="0"/>
           </a:p>
         </p:txBody>
       </p:sp>
@@ -5510,7 +6216,7 @@
         </p:nvSpPr>
         <p:spPr>
           <a:xfrm>
-            <a:off x="612648" y="1133856"/>
+            <a:off x="612648" y="1060704"/>
             <a:ext cx="9875520" cy="320040"/>
           </a:xfrm>
           <a:prstGeom prst="rect">
@@ -5529,13 +6235,13 @@
             <a:r>
               <a:rPr lang="en-US" sz="1250" dirty="0">
                 <a:solidFill>
-                  <a:srgbClr val="60706A"/>
-                </a:solidFill>
-                <a:latin typeface="Arial" pitchFamily="34" charset="0"/>
-                <a:ea typeface="Arial" pitchFamily="34" charset="-122"/>
-                <a:cs typeface="Arial" pitchFamily="34" charset="-120"/>
-              </a:rPr>
-              <a:t>SSE показывает пользователю ход выполнения</a:t>
+                  <a:srgbClr val="555F5B"/>
+                </a:solidFill>
+                <a:latin typeface="Arial" pitchFamily="34" charset="0"/>
+                <a:ea typeface="Arial" pitchFamily="34" charset="-122"/>
+                <a:cs typeface="Arial" pitchFamily="34" charset="-120"/>
+              </a:rPr>
+              <a:t>ML/NLP pipeline выполняется внутри асинхронного backend-сценария</a:t>
             </a:r>
             <a:endParaRPr lang="en-US" sz="1250" dirty="0"/>
           </a:p>
@@ -5568,13 +6274,13 @@
             <a:r>
               <a:rPr lang="en-US" sz="850" dirty="0">
                 <a:solidFill>
-                  <a:srgbClr val="60706A"/>
-                </a:solidFill>
-                <a:latin typeface="Arial" pitchFamily="34" charset="0"/>
-                <a:ea typeface="Arial" pitchFamily="34" charset="-122"/>
-                <a:cs typeface="Arial" pitchFamily="34" charset="-120"/>
-              </a:rPr>
-              <a:t>news-analysis · 5/12</a:t>
+                  <a:srgbClr val="555F5B"/>
+                </a:solidFill>
+                <a:latin typeface="Arial" pitchFamily="34" charset="0"/>
+                <a:ea typeface="Arial" pitchFamily="34" charset="-122"/>
+                <a:cs typeface="Arial" pitchFamily="34" charset="-120"/>
+              </a:rPr>
+              <a:t>Прудиев Алексей Сергеевич · ПМ23-4 · 5/12</a:t>
             </a:r>
             <a:endParaRPr lang="en-US" sz="850" dirty="0"/>
           </a:p>
@@ -5588,7 +6294,73 @@
         </p:nvSpPr>
         <p:spPr>
           <a:xfrm>
-            <a:off x="685800" y="1965960"/>
+            <a:off x="731520" y="1417320"/>
+            <a:ext cx="2377440" cy="310896"/>
+          </a:xfrm>
+          <a:prstGeom prst="rect">
+            <a:avLst/>
+          </a:prstGeom>
+          <a:solidFill>
+            <a:srgbClr val="0F5132"/>
+          </a:solidFill>
+          <a:ln w="12700">
+            <a:solidFill>
+              <a:srgbClr val="0F5132"/>
+            </a:solidFill>
+            <a:prstDash val="solid"/>
+          </a:ln>
+        </p:spPr>
+      </p:sp>
+      <p:sp>
+        <p:nvSpPr>
+          <p:cNvPr id="8" name="Text 6"/>
+          <p:cNvSpPr/>
+          <p:nvPr/>
+        </p:nvSpPr>
+        <p:spPr>
+          <a:xfrm>
+            <a:off x="804672" y="1490472"/>
+            <a:ext cx="2231136" cy="109728"/>
+          </a:xfrm>
+          <a:prstGeom prst="rect">
+            <a:avLst/>
+          </a:prstGeom>
+          <a:noFill/>
+          <a:ln/>
+        </p:spPr>
+        <p:txBody>
+          <a:bodyPr wrap="square" lIns="0" tIns="0" rIns="0" bIns="0" rtlCol="0" anchor="ctr">
+            <a:normAutofit/>
+          </a:bodyPr>
+          <a:lstStyle/>
+          <a:p>
+            <a:pPr indent="0" marL="0">
+              <a:buNone/>
+            </a:pPr>
+            <a:r>
+              <a:rPr lang="en-US" sz="850" b="1" dirty="0">
+                <a:solidFill>
+                  <a:srgbClr val="FFFFFF"/>
+                </a:solidFill>
+                <a:latin typeface="Arial" pitchFamily="34" charset="0"/>
+                <a:ea typeface="Arial" pitchFamily="34" charset="-122"/>
+                <a:cs typeface="Arial" pitchFamily="34" charset="-120"/>
+              </a:rPr>
+              <a:t>Критерий: методы и результаты</a:t>
+            </a:r>
+            <a:endParaRPr lang="en-US" sz="850" dirty="0"/>
+          </a:p>
+        </p:txBody>
+      </p:sp>
+      <p:sp>
+        <p:nvSpPr>
+          <p:cNvPr id="9" name="Shape 7"/>
+          <p:cNvSpPr/>
+          <p:nvPr/>
+        </p:nvSpPr>
+        <p:spPr>
+          <a:xfrm>
+            <a:off x="685800" y="1874520"/>
             <a:ext cx="1600200" cy="713232"/>
           </a:xfrm>
           <a:prstGeom prst="roundRect">
@@ -5609,13 +6381,13 @@
       </p:sp>
       <p:sp>
         <p:nvSpPr>
-          <p:cNvPr id="8" name="Text 6"/>
-          <p:cNvSpPr/>
-          <p:nvPr/>
-        </p:nvSpPr>
-        <p:spPr>
-          <a:xfrm>
-            <a:off x="758952" y="2148840"/>
+          <p:cNvPr id="10" name="Text 8"/>
+          <p:cNvSpPr/>
+          <p:nvPr/>
+        </p:nvSpPr>
+        <p:spPr>
+          <a:xfrm>
+            <a:off x="758952" y="2057400"/>
             <a:ext cx="1453896" cy="274320"/>
           </a:xfrm>
           <a:prstGeom prst="rect">
@@ -5650,13 +6422,13 @@
       </p:sp>
       <p:sp>
         <p:nvSpPr>
-          <p:cNvPr id="9" name="Shape 7"/>
-          <p:cNvSpPr/>
-          <p:nvPr/>
-        </p:nvSpPr>
-        <p:spPr>
-          <a:xfrm>
-            <a:off x="2395728" y="2185416"/>
+          <p:cNvPr id="11" name="Shape 9"/>
+          <p:cNvSpPr/>
+          <p:nvPr/>
+        </p:nvSpPr>
+        <p:spPr>
+          <a:xfrm>
+            <a:off x="2395728" y="2093976"/>
             <a:ext cx="292608" cy="256032"/>
           </a:xfrm>
           <a:prstGeom prst="rightArrow">
@@ -5675,13 +6447,13 @@
       </p:sp>
       <p:sp>
         <p:nvSpPr>
-          <p:cNvPr id="10" name="Shape 8"/>
-          <p:cNvSpPr/>
-          <p:nvPr/>
-        </p:nvSpPr>
-        <p:spPr>
-          <a:xfrm>
-            <a:off x="2560320" y="1965960"/>
+          <p:cNvPr id="12" name="Shape 10"/>
+          <p:cNvSpPr/>
+          <p:nvPr/>
+        </p:nvSpPr>
+        <p:spPr>
+          <a:xfrm>
+            <a:off x="2560320" y="1874520"/>
             <a:ext cx="1600200" cy="713232"/>
           </a:xfrm>
           <a:prstGeom prst="roundRect">
@@ -5694,7 +6466,7 @@
           </a:solidFill>
           <a:ln w="13970">
             <a:solidFill>
-              <a:srgbClr val="C8D8D1"/>
+              <a:srgbClr val="B7C6C0"/>
             </a:solidFill>
             <a:prstDash val="solid"/>
           </a:ln>
@@ -5702,13 +6474,13 @@
       </p:sp>
       <p:sp>
         <p:nvSpPr>
-          <p:cNvPr id="11" name="Text 9"/>
-          <p:cNvSpPr/>
-          <p:nvPr/>
-        </p:nvSpPr>
-        <p:spPr>
-          <a:xfrm>
-            <a:off x="2633472" y="2148840"/>
+          <p:cNvPr id="13" name="Text 11"/>
+          <p:cNvSpPr/>
+          <p:nvPr/>
+        </p:nvSpPr>
+        <p:spPr>
+          <a:xfrm>
+            <a:off x="2633472" y="2057400"/>
             <a:ext cx="1453896" cy="274320"/>
           </a:xfrm>
           <a:prstGeom prst="rect">
@@ -5729,7 +6501,7 @@
             <a:r>
               <a:rPr lang="en-US" sz="1150" b="1" dirty="0">
                 <a:solidFill>
-                  <a:srgbClr val="17211D"/>
+                  <a:srgbClr val="111111"/>
                 </a:solidFill>
                 <a:latin typeface="Arial" pitchFamily="34" charset="0"/>
                 <a:ea typeface="Arial" pitchFamily="34" charset="-122"/>
@@ -5743,13 +6515,13 @@
       </p:sp>
       <p:sp>
         <p:nvSpPr>
-          <p:cNvPr id="12" name="Shape 10"/>
-          <p:cNvSpPr/>
-          <p:nvPr/>
-        </p:nvSpPr>
-        <p:spPr>
-          <a:xfrm>
-            <a:off x="4270248" y="2185416"/>
+          <p:cNvPr id="14" name="Shape 12"/>
+          <p:cNvSpPr/>
+          <p:nvPr/>
+        </p:nvSpPr>
+        <p:spPr>
+          <a:xfrm>
+            <a:off x="4270248" y="2093976"/>
             <a:ext cx="292608" cy="256032"/>
           </a:xfrm>
           <a:prstGeom prst="rightArrow">
@@ -5768,13 +6540,13 @@
       </p:sp>
       <p:sp>
         <p:nvSpPr>
-          <p:cNvPr id="13" name="Shape 11"/>
-          <p:cNvSpPr/>
-          <p:nvPr/>
-        </p:nvSpPr>
-        <p:spPr>
-          <a:xfrm>
-            <a:off x="4434840" y="1965960"/>
+          <p:cNvPr id="15" name="Shape 13"/>
+          <p:cNvSpPr/>
+          <p:nvPr/>
+        </p:nvSpPr>
+        <p:spPr>
+          <a:xfrm>
+            <a:off x="4434840" y="1874520"/>
             <a:ext cx="1600200" cy="713232"/>
           </a:xfrm>
           <a:prstGeom prst="roundRect">
@@ -5787,7 +6559,7 @@
           </a:solidFill>
           <a:ln w="13970">
             <a:solidFill>
-              <a:srgbClr val="C8D8D1"/>
+              <a:srgbClr val="B7C6C0"/>
             </a:solidFill>
             <a:prstDash val="solid"/>
           </a:ln>
@@ -5795,13 +6567,13 @@
       </p:sp>
       <p:sp>
         <p:nvSpPr>
-          <p:cNvPr id="14" name="Text 12"/>
-          <p:cNvSpPr/>
-          <p:nvPr/>
-        </p:nvSpPr>
-        <p:spPr>
-          <a:xfrm>
-            <a:off x="4507992" y="2148840"/>
+          <p:cNvPr id="16" name="Text 14"/>
+          <p:cNvSpPr/>
+          <p:nvPr/>
+        </p:nvSpPr>
+        <p:spPr>
+          <a:xfrm>
+            <a:off x="4507992" y="2057400"/>
             <a:ext cx="1453896" cy="274320"/>
           </a:xfrm>
           <a:prstGeom prst="rect">
@@ -5822,7 +6594,7 @@
             <a:r>
               <a:rPr lang="en-US" sz="1150" b="1" dirty="0">
                 <a:solidFill>
-                  <a:srgbClr val="17211D"/>
+                  <a:srgbClr val="111111"/>
                 </a:solidFill>
                 <a:latin typeface="Arial" pitchFamily="34" charset="0"/>
                 <a:ea typeface="Arial" pitchFamily="34" charset="-122"/>
@@ -5836,13 +6608,13 @@
       </p:sp>
       <p:sp>
         <p:nvSpPr>
-          <p:cNvPr id="15" name="Shape 13"/>
-          <p:cNvSpPr/>
-          <p:nvPr/>
-        </p:nvSpPr>
-        <p:spPr>
-          <a:xfrm>
-            <a:off x="6144768" y="2185416"/>
+          <p:cNvPr id="17" name="Shape 15"/>
+          <p:cNvSpPr/>
+          <p:nvPr/>
+        </p:nvSpPr>
+        <p:spPr>
+          <a:xfrm>
+            <a:off x="6144768" y="2093976"/>
             <a:ext cx="292608" cy="256032"/>
           </a:xfrm>
           <a:prstGeom prst="rightArrow">
@@ -5861,13 +6633,13 @@
       </p:sp>
       <p:sp>
         <p:nvSpPr>
-          <p:cNvPr id="16" name="Shape 14"/>
-          <p:cNvSpPr/>
-          <p:nvPr/>
-        </p:nvSpPr>
-        <p:spPr>
-          <a:xfrm>
-            <a:off x="6309360" y="1965960"/>
+          <p:cNvPr id="18" name="Shape 16"/>
+          <p:cNvSpPr/>
+          <p:nvPr/>
+        </p:nvSpPr>
+        <p:spPr>
+          <a:xfrm>
+            <a:off x="6309360" y="1874520"/>
             <a:ext cx="1600200" cy="713232"/>
           </a:xfrm>
           <a:prstGeom prst="roundRect">
@@ -5880,7 +6652,7 @@
           </a:solidFill>
           <a:ln w="13970">
             <a:solidFill>
-              <a:srgbClr val="C8D8D1"/>
+              <a:srgbClr val="B7C6C0"/>
             </a:solidFill>
             <a:prstDash val="solid"/>
           </a:ln>
@@ -5888,13 +6660,13 @@
       </p:sp>
       <p:sp>
         <p:nvSpPr>
-          <p:cNvPr id="17" name="Text 15"/>
-          <p:cNvSpPr/>
-          <p:nvPr/>
-        </p:nvSpPr>
-        <p:spPr>
-          <a:xfrm>
-            <a:off x="6382512" y="2148840"/>
+          <p:cNvPr id="19" name="Text 17"/>
+          <p:cNvSpPr/>
+          <p:nvPr/>
+        </p:nvSpPr>
+        <p:spPr>
+          <a:xfrm>
+            <a:off x="6382512" y="2057400"/>
             <a:ext cx="1453896" cy="274320"/>
           </a:xfrm>
           <a:prstGeom prst="rect">
@@ -5915,7 +6687,7 @@
             <a:r>
               <a:rPr lang="en-US" sz="1150" b="1" dirty="0">
                 <a:solidFill>
-                  <a:srgbClr val="17211D"/>
+                  <a:srgbClr val="111111"/>
                 </a:solidFill>
                 <a:latin typeface="Arial" pitchFamily="34" charset="0"/>
                 <a:ea typeface="Arial" pitchFamily="34" charset="-122"/>
@@ -5929,13 +6701,13 @@
       </p:sp>
       <p:sp>
         <p:nvSpPr>
-          <p:cNvPr id="18" name="Shape 16"/>
-          <p:cNvSpPr/>
-          <p:nvPr/>
-        </p:nvSpPr>
-        <p:spPr>
-          <a:xfrm>
-            <a:off x="8019288" y="2185416"/>
+          <p:cNvPr id="20" name="Shape 18"/>
+          <p:cNvSpPr/>
+          <p:nvPr/>
+        </p:nvSpPr>
+        <p:spPr>
+          <a:xfrm>
+            <a:off x="8019288" y="2093976"/>
             <a:ext cx="292608" cy="256032"/>
           </a:xfrm>
           <a:prstGeom prst="rightArrow">
@@ -5954,13 +6726,13 @@
       </p:sp>
       <p:sp>
         <p:nvSpPr>
-          <p:cNvPr id="19" name="Shape 17"/>
-          <p:cNvSpPr/>
-          <p:nvPr/>
-        </p:nvSpPr>
-        <p:spPr>
-          <a:xfrm>
-            <a:off x="8183880" y="1965960"/>
+          <p:cNvPr id="21" name="Shape 19"/>
+          <p:cNvSpPr/>
+          <p:nvPr/>
+        </p:nvSpPr>
+        <p:spPr>
+          <a:xfrm>
+            <a:off x="8183880" y="1874520"/>
             <a:ext cx="1600200" cy="713232"/>
           </a:xfrm>
           <a:prstGeom prst="roundRect">
@@ -5973,7 +6745,7 @@
           </a:solidFill>
           <a:ln w="13970">
             <a:solidFill>
-              <a:srgbClr val="C8D8D1"/>
+              <a:srgbClr val="B7C6C0"/>
             </a:solidFill>
             <a:prstDash val="solid"/>
           </a:ln>
@@ -5981,13 +6753,13 @@
       </p:sp>
       <p:sp>
         <p:nvSpPr>
-          <p:cNvPr id="20" name="Text 18"/>
-          <p:cNvSpPr/>
-          <p:nvPr/>
-        </p:nvSpPr>
-        <p:spPr>
-          <a:xfrm>
-            <a:off x="8257032" y="2148840"/>
+          <p:cNvPr id="22" name="Text 20"/>
+          <p:cNvSpPr/>
+          <p:nvPr/>
+        </p:nvSpPr>
+        <p:spPr>
+          <a:xfrm>
+            <a:off x="8257032" y="2057400"/>
             <a:ext cx="1453896" cy="274320"/>
           </a:xfrm>
           <a:prstGeom prst="rect">
@@ -6008,7 +6780,7 @@
             <a:r>
               <a:rPr lang="en-US" sz="1150" b="1" dirty="0">
                 <a:solidFill>
-                  <a:srgbClr val="17211D"/>
+                  <a:srgbClr val="111111"/>
                 </a:solidFill>
                 <a:latin typeface="Arial" pitchFamily="34" charset="0"/>
                 <a:ea typeface="Arial" pitchFamily="34" charset="-122"/>
@@ -6022,13 +6794,13 @@
       </p:sp>
       <p:sp>
         <p:nvSpPr>
-          <p:cNvPr id="21" name="Shape 19"/>
-          <p:cNvSpPr/>
-          <p:nvPr/>
-        </p:nvSpPr>
-        <p:spPr>
-          <a:xfrm>
-            <a:off x="9893808" y="2185416"/>
+          <p:cNvPr id="23" name="Shape 21"/>
+          <p:cNvSpPr/>
+          <p:nvPr/>
+        </p:nvSpPr>
+        <p:spPr>
+          <a:xfrm>
+            <a:off x="9893808" y="2093976"/>
             <a:ext cx="292608" cy="256032"/>
           </a:xfrm>
           <a:prstGeom prst="rightArrow">
@@ -6047,13 +6819,13 @@
       </p:sp>
       <p:sp>
         <p:nvSpPr>
-          <p:cNvPr id="22" name="Shape 20"/>
-          <p:cNvSpPr/>
-          <p:nvPr/>
-        </p:nvSpPr>
-        <p:spPr>
-          <a:xfrm>
-            <a:off x="10058400" y="1965960"/>
+          <p:cNvPr id="24" name="Shape 22"/>
+          <p:cNvSpPr/>
+          <p:nvPr/>
+        </p:nvSpPr>
+        <p:spPr>
+          <a:xfrm>
+            <a:off x="10058400" y="1874520"/>
             <a:ext cx="1600200" cy="713232"/>
           </a:xfrm>
           <a:prstGeom prst="roundRect">
@@ -6066,7 +6838,7 @@
           </a:solidFill>
           <a:ln w="13970">
             <a:solidFill>
-              <a:srgbClr val="C8D8D1"/>
+              <a:srgbClr val="B7C6C0"/>
             </a:solidFill>
             <a:prstDash val="solid"/>
           </a:ln>
@@ -6074,13 +6846,13 @@
       </p:sp>
       <p:sp>
         <p:nvSpPr>
-          <p:cNvPr id="23" name="Text 21"/>
-          <p:cNvSpPr/>
-          <p:nvPr/>
-        </p:nvSpPr>
-        <p:spPr>
-          <a:xfrm>
-            <a:off x="10131552" y="2148840"/>
+          <p:cNvPr id="25" name="Text 23"/>
+          <p:cNvSpPr/>
+          <p:nvPr/>
+        </p:nvSpPr>
+        <p:spPr>
+          <a:xfrm>
+            <a:off x="10131552" y="2057400"/>
             <a:ext cx="1453896" cy="274320"/>
           </a:xfrm>
           <a:prstGeom prst="rect">
@@ -6101,7 +6873,7 @@
             <a:r>
               <a:rPr lang="en-US" sz="1150" b="1" dirty="0">
                 <a:solidFill>
-                  <a:srgbClr val="17211D"/>
+                  <a:srgbClr val="111111"/>
                 </a:solidFill>
                 <a:latin typeface="Arial" pitchFamily="34" charset="0"/>
                 <a:ea typeface="Arial" pitchFamily="34" charset="-122"/>
@@ -6115,14 +6887,14 @@
       </p:sp>
       <p:sp>
         <p:nvSpPr>
-          <p:cNvPr id="24" name="Text 22"/>
-          <p:cNvSpPr/>
-          <p:nvPr/>
-        </p:nvSpPr>
-        <p:spPr>
-          <a:xfrm>
-            <a:off x="914400" y="3657600"/>
-            <a:ext cx="9326880" cy="1645920"/>
+          <p:cNvPr id="26" name="Text 24"/>
+          <p:cNvSpPr/>
+          <p:nvPr/>
+        </p:nvSpPr>
+        <p:spPr>
+          <a:xfrm>
+            <a:off x="822960" y="3246120"/>
+            <a:ext cx="5120640" cy="1828800"/>
           </a:xfrm>
           <a:prstGeom prst="rect">
             <a:avLst/>
@@ -6141,17 +6913,17 @@
               <a:buChar char="•"/>
             </a:pPr>
             <a:r>
-              <a:rPr lang="en-US" sz="1700" dirty="0">
-                <a:solidFill>
-                  <a:srgbClr val="17211D"/>
-                </a:solidFill>
-                <a:latin typeface="Arial" pitchFamily="34" charset="0"/>
-                <a:ea typeface="Arial" pitchFamily="34" charset="-122"/>
-                <a:cs typeface="Arial" pitchFamily="34" charset="-120"/>
-              </a:rPr>
-              <a:t>Gateway получает вопрос и запускает поток событий.</a:t>
-            </a:r>
-            <a:endParaRPr lang="en-US" sz="1700" dirty="0"/>
+              <a:rPr lang="en-US" sz="1550" dirty="0">
+                <a:solidFill>
+                  <a:srgbClr val="111111"/>
+                </a:solidFill>
+                <a:latin typeface="Arial" pitchFamily="34" charset="0"/>
+                <a:ea typeface="Arial" pitchFamily="34" charset="-122"/>
+                <a:cs typeface="Arial" pitchFamily="34" charset="-120"/>
+              </a:rPr>
+              <a:t>ML/NLP: поиск контекста, score источников, классификация влияния.</a:t>
+            </a:r>
+            <a:endParaRPr lang="en-US" sz="1550" dirty="0"/>
           </a:p>
           <a:p>
             <a:pPr marL="177800" indent="-177800">
@@ -6159,17 +6931,17 @@
               <a:buChar char="•"/>
             </a:pPr>
             <a:r>
-              <a:rPr lang="en-US" sz="1700" dirty="0">
-                <a:solidFill>
-                  <a:srgbClr val="17211D"/>
-                </a:solidFill>
-                <a:latin typeface="Arial" pitchFamily="34" charset="0"/>
-                <a:ea typeface="Arial" pitchFamily="34" charset="-122"/>
-                <a:cs typeface="Arial" pitchFamily="34" charset="-120"/>
-              </a:rPr>
-              <a:t>Retrieval-service ищет релевантные новости в Qdrant.</a:t>
-            </a:r>
-            <a:endParaRPr lang="en-US" sz="1700" dirty="0"/>
+              <a:rPr lang="en-US" sz="1550" dirty="0">
+                <a:solidFill>
+                  <a:srgbClr val="111111"/>
+                </a:solidFill>
+                <a:latin typeface="Arial" pitchFamily="34" charset="0"/>
+                <a:ea typeface="Arial" pitchFamily="34" charset="-122"/>
+                <a:cs typeface="Arial" pitchFamily="34" charset="-120"/>
+              </a:rPr>
+              <a:t>Backend: gateway, сервисные контракты, SSE-события и orchestration.</a:t>
+            </a:r>
+            <a:endParaRPr lang="en-US" sz="1550" dirty="0"/>
           </a:p>
           <a:p>
             <a:pPr marL="177800" indent="-177800">
@@ -6177,35 +6949,113 @@
               <a:buChar char="•"/>
             </a:pPr>
             <a:r>
-              <a:rPr lang="en-US" sz="1700" dirty="0">
-                <a:solidFill>
-                  <a:srgbClr val="17211D"/>
-                </a:solidFill>
-                <a:latin typeface="Arial" pitchFamily="34" charset="0"/>
-                <a:ea typeface="Arial" pitchFamily="34" charset="-122"/>
-                <a:cs typeface="Arial" pitchFamily="34" charset="-120"/>
-              </a:rPr>
-              <a:t>Analysis-service оценивает влияние каждой новости.</a:t>
-            </a:r>
-            <a:endParaRPr lang="en-US" sz="1700" dirty="0"/>
-          </a:p>
+              <a:rPr lang="en-US" sz="1550" dirty="0">
+                <a:solidFill>
+                  <a:srgbClr val="111111"/>
+                </a:solidFill>
+                <a:latin typeface="Arial" pitchFamily="34" charset="0"/>
+                <a:ea typeface="Arial" pitchFamily="34" charset="-122"/>
+                <a:cs typeface="Arial" pitchFamily="34" charset="-120"/>
+              </a:rPr>
+              <a:t>Ответ строится только по найденным новостям и явно показывает источники.</a:t>
+            </a:r>
+            <a:endParaRPr lang="en-US" sz="1550" dirty="0"/>
+          </a:p>
+        </p:txBody>
+      </p:sp>
+      <p:sp>
+        <p:nvSpPr>
+          <p:cNvPr id="27" name="Text 25"/>
+          <p:cNvSpPr/>
+          <p:nvPr/>
+        </p:nvSpPr>
+        <p:spPr>
+          <a:xfrm>
+            <a:off x="6492240" y="3246120"/>
+            <a:ext cx="4297680" cy="1828800"/>
+          </a:xfrm>
+          <a:prstGeom prst="rect">
+            <a:avLst/>
+          </a:prstGeom>
+          <a:noFill/>
+          <a:ln/>
+        </p:spPr>
+        <p:txBody>
+          <a:bodyPr wrap="square" lIns="254" tIns="254" rIns="254" bIns="254" rtlCol="0" anchor="t">
+            <a:normAutofit/>
+          </a:bodyPr>
+          <a:lstStyle/>
           <a:p>
             <a:pPr marL="177800" indent="-177800">
               <a:buSzPct val="100000"/>
               <a:buChar char="•"/>
             </a:pPr>
             <a:r>
-              <a:rPr lang="en-US" sz="1700" dirty="0">
-                <a:solidFill>
-                  <a:srgbClr val="17211D"/>
-                </a:solidFill>
-                <a:latin typeface="Arial" pitchFamily="34" charset="0"/>
-                <a:ea typeface="Arial" pitchFamily="34" charset="-122"/>
-                <a:cs typeface="Arial" pitchFamily="34" charset="-120"/>
-              </a:rPr>
-              <a:t>Dialog-service собирает итоговый ответ.</a:t>
-            </a:r>
-            <a:endParaRPr lang="en-US" sz="1700" dirty="0"/>
+              <a:rPr lang="en-US" sz="1550" dirty="0">
+                <a:solidFill>
+                  <a:srgbClr val="111111"/>
+                </a:solidFill>
+                <a:latin typeface="Arial" pitchFamily="34" charset="0"/>
+                <a:ea typeface="Arial" pitchFamily="34" charset="-122"/>
+                <a:cs typeface="Arial" pitchFamily="34" charset="-120"/>
+              </a:rPr>
+              <a:t>chat_started</a:t>
+            </a:r>
+            <a:endParaRPr lang="en-US" sz="1550" dirty="0"/>
+          </a:p>
+          <a:p>
+            <a:pPr marL="177800" indent="-177800">
+              <a:buSzPct val="100000"/>
+              <a:buChar char="•"/>
+            </a:pPr>
+            <a:r>
+              <a:rPr lang="en-US" sz="1550" dirty="0">
+                <a:solidFill>
+                  <a:srgbClr val="111111"/>
+                </a:solidFill>
+                <a:latin typeface="Arial" pitchFamily="34" charset="0"/>
+                <a:ea typeface="Arial" pitchFamily="34" charset="-122"/>
+                <a:cs typeface="Arial" pitchFamily="34" charset="-120"/>
+              </a:rPr>
+              <a:t>search_started / sources_found</a:t>
+            </a:r>
+            <a:endParaRPr lang="en-US" sz="1550" dirty="0"/>
+          </a:p>
+          <a:p>
+            <a:pPr marL="177800" indent="-177800">
+              <a:buSzPct val="100000"/>
+              <a:buChar char="•"/>
+            </a:pPr>
+            <a:r>
+              <a:rPr lang="en-US" sz="1550" dirty="0">
+                <a:solidFill>
+                  <a:srgbClr val="111111"/>
+                </a:solidFill>
+                <a:latin typeface="Arial" pitchFamily="34" charset="0"/>
+                <a:ea typeface="Arial" pitchFamily="34" charset="-122"/>
+                <a:cs typeface="Arial" pitchFamily="34" charset="-120"/>
+              </a:rPr>
+              <a:t>analysis_started / analysis_completed</a:t>
+            </a:r>
+            <a:endParaRPr lang="en-US" sz="1550" dirty="0"/>
+          </a:p>
+          <a:p>
+            <a:pPr marL="177800" indent="-177800">
+              <a:buSzPct val="100000"/>
+              <a:buChar char="•"/>
+            </a:pPr>
+            <a:r>
+              <a:rPr lang="en-US" sz="1550" dirty="0">
+                <a:solidFill>
+                  <a:srgbClr val="111111"/>
+                </a:solidFill>
+                <a:latin typeface="Arial" pitchFamily="34" charset="0"/>
+                <a:ea typeface="Arial" pitchFamily="34" charset="-122"/>
+                <a:cs typeface="Arial" pitchFamily="34" charset="-120"/>
+              </a:rPr>
+              <a:t>answer_started / answer_completed / done</a:t>
+            </a:r>
+            <a:endParaRPr lang="en-US" sz="1550" dirty="0"/>
           </a:p>
         </p:txBody>
       </p:sp>
@@ -6223,7 +7073,7 @@
     <p:bg>
       <p:bgPr>
         <a:solidFill>
-          <a:srgbClr val="F7FAF8"/>
+          <a:srgbClr val="F8F9F8"/>
         </a:solidFill>
       </p:bgPr>
     </p:bg>
@@ -6256,11 +7106,11 @@
             <a:avLst/>
           </a:prstGeom>
           <a:solidFill>
-            <a:srgbClr val="F7FAF8"/>
+            <a:srgbClr val="F8F9F8"/>
           </a:solidFill>
           <a:ln w="12700">
             <a:solidFill>
-              <a:srgbClr val="F7FAF8"/>
+              <a:srgbClr val="F8F9F8"/>
             </a:solidFill>
             <a:prstDash val="solid"/>
           </a:ln>
@@ -6300,7 +7150,7 @@
         <p:spPr>
           <a:xfrm>
             <a:off x="594360" y="411480"/>
-            <a:ext cx="9875520" cy="777240"/>
+            <a:ext cx="10424160" cy="658368"/>
           </a:xfrm>
           <a:prstGeom prst="rect">
             <a:avLst/>
@@ -6318,9 +7168,9 @@
               <a:buNone/>
             </a:pPr>
             <a:r>
-              <a:rPr lang="en-US" sz="2700" b="1" dirty="0">
-                <a:solidFill>
-                  <a:srgbClr val="17211D"/>
+              <a:rPr lang="en-US" sz="2500" b="1" dirty="0">
+                <a:solidFill>
+                  <a:srgbClr val="111111"/>
                 </a:solidFill>
                 <a:latin typeface="Arial" pitchFamily="34" charset="0"/>
                 <a:ea typeface="Arial" pitchFamily="34" charset="-122"/>
@@ -6328,7 +7178,7 @@
               </a:rPr>
               <a:t>Методы и технологии</a:t>
             </a:r>
-            <a:endParaRPr lang="en-US" sz="2700" dirty="0"/>
+            <a:endParaRPr lang="en-US" sz="2500" dirty="0"/>
           </a:p>
         </p:txBody>
       </p:sp>
@@ -6340,7 +7190,7 @@
         </p:nvSpPr>
         <p:spPr>
           <a:xfrm>
-            <a:off x="612648" y="1133856"/>
+            <a:off x="612648" y="1060704"/>
             <a:ext cx="9875520" cy="320040"/>
           </a:xfrm>
           <a:prstGeom prst="rect">
@@ -6359,13 +7209,13 @@
             <a:r>
               <a:rPr lang="en-US" sz="1250" dirty="0">
                 <a:solidFill>
-                  <a:srgbClr val="60706A"/>
-                </a:solidFill>
-                <a:latin typeface="Arial" pitchFamily="34" charset="0"/>
-                <a:ea typeface="Arial" pitchFamily="34" charset="-122"/>
-                <a:cs typeface="Arial" pitchFamily="34" charset="-120"/>
-              </a:rPr>
-              <a:t>Стек современный, но локальный и без лишней инфраструктуры</a:t>
+                  <a:srgbClr val="555F5B"/>
+                </a:solidFill>
+                <a:latin typeface="Arial" pitchFamily="34" charset="0"/>
+                <a:ea typeface="Arial" pitchFamily="34" charset="-122"/>
+                <a:cs typeface="Arial" pitchFamily="34" charset="-120"/>
+              </a:rPr>
+              <a:t>Стек разделен на ML/NLP-методы и backend-инфраструктуру</a:t>
             </a:r>
             <a:endParaRPr lang="en-US" sz="1250" dirty="0"/>
           </a:p>
@@ -6398,13 +7248,13 @@
             <a:r>
               <a:rPr lang="en-US" sz="850" dirty="0">
                 <a:solidFill>
-                  <a:srgbClr val="60706A"/>
-                </a:solidFill>
-                <a:latin typeface="Arial" pitchFamily="34" charset="0"/>
-                <a:ea typeface="Arial" pitchFamily="34" charset="-122"/>
-                <a:cs typeface="Arial" pitchFamily="34" charset="-120"/>
-              </a:rPr>
-              <a:t>news-analysis · 6/12</a:t>
+                  <a:srgbClr val="555F5B"/>
+                </a:solidFill>
+                <a:latin typeface="Arial" pitchFamily="34" charset="0"/>
+                <a:ea typeface="Arial" pitchFamily="34" charset="-122"/>
+                <a:cs typeface="Arial" pitchFamily="34" charset="-120"/>
+              </a:rPr>
+              <a:t>Прудиев Алексей Сергеевич · ПМ23-4 · 6/12</a:t>
             </a:r>
             <a:endParaRPr lang="en-US" sz="850" dirty="0"/>
           </a:p>
@@ -6418,18 +7268,18 @@
         </p:nvSpPr>
         <p:spPr>
           <a:xfrm>
-            <a:off x="822960" y="1417320"/>
-            <a:ext cx="2834640" cy="502920"/>
-          </a:xfrm>
-          <a:prstGeom prst="rect">
-            <a:avLst/>
-          </a:prstGeom>
-          <a:solidFill>
-            <a:srgbClr val="EAF4EF"/>
-          </a:solidFill>
-          <a:ln w="10160">
+            <a:off x="822960" y="1115568"/>
+            <a:ext cx="2377440" cy="310896"/>
+          </a:xfrm>
+          <a:prstGeom prst="rect">
+            <a:avLst/>
+          </a:prstGeom>
+          <a:solidFill>
+            <a:srgbClr val="0F5132"/>
+          </a:solidFill>
+          <a:ln w="12700">
             <a:solidFill>
-              <a:srgbClr val="C8D8D1"/>
+              <a:srgbClr val="0F5132"/>
             </a:solidFill>
             <a:prstDash val="solid"/>
           </a:ln>
@@ -6443,8 +7293,8 @@
         </p:nvSpPr>
         <p:spPr>
           <a:xfrm>
-            <a:off x="896112" y="1508760"/>
-            <a:ext cx="2688336" cy="374904"/>
+            <a:off x="896112" y="1188720"/>
+            <a:ext cx="2231136" cy="109728"/>
           </a:xfrm>
           <a:prstGeom prst="rect">
             <a:avLst/>
@@ -6462,17 +7312,17 @@
               <a:buNone/>
             </a:pPr>
             <a:r>
-              <a:rPr lang="en-US" sz="1050" b="1" dirty="0">
-                <a:solidFill>
-                  <a:srgbClr val="0F5132"/>
-                </a:solidFill>
-                <a:latin typeface="Arial" pitchFamily="34" charset="0"/>
-                <a:ea typeface="Arial" pitchFamily="34" charset="-122"/>
-                <a:cs typeface="Arial" pitchFamily="34" charset="-120"/>
-              </a:rPr>
-              <a:t>Часть</a:t>
-            </a:r>
-            <a:endParaRPr lang="en-US" sz="1050" dirty="0"/>
+              <a:rPr lang="en-US" sz="850" b="1" dirty="0">
+                <a:solidFill>
+                  <a:srgbClr val="FFFFFF"/>
+                </a:solidFill>
+                <a:latin typeface="Arial" pitchFamily="34" charset="0"/>
+                <a:ea typeface="Arial" pitchFamily="34" charset="-122"/>
+                <a:cs typeface="Arial" pitchFamily="34" charset="-120"/>
+              </a:rPr>
+              <a:t>Критерий: методы и результаты</a:t>
+            </a:r>
+            <a:endParaRPr lang="en-US" sz="850" dirty="0"/>
           </a:p>
         </p:txBody>
       </p:sp>
@@ -6484,18 +7334,18 @@
         </p:nvSpPr>
         <p:spPr>
           <a:xfrm>
-            <a:off x="3657600" y="1417320"/>
-            <a:ext cx="7040880" cy="502920"/>
-          </a:xfrm>
-          <a:prstGeom prst="rect">
-            <a:avLst/>
-          </a:prstGeom>
-          <a:solidFill>
-            <a:srgbClr val="EAF4EF"/>
+            <a:off x="822960" y="1371600"/>
+            <a:ext cx="3063240" cy="457200"/>
+          </a:xfrm>
+          <a:prstGeom prst="rect">
+            <a:avLst/>
+          </a:prstGeom>
+          <a:solidFill>
+            <a:srgbClr val="EDF3F0"/>
           </a:solidFill>
           <a:ln w="10160">
             <a:solidFill>
-              <a:srgbClr val="C8D8D1"/>
+              <a:srgbClr val="B7C6C0"/>
             </a:solidFill>
             <a:prstDash val="solid"/>
           </a:ln>
@@ -6509,8 +7359,8 @@
         </p:nvSpPr>
         <p:spPr>
           <a:xfrm>
-            <a:off x="3730752" y="1508760"/>
-            <a:ext cx="6894576" cy="374904"/>
+            <a:off x="896112" y="1463040"/>
+            <a:ext cx="2916936" cy="329184"/>
           </a:xfrm>
           <a:prstGeom prst="rect">
             <a:avLst/>
@@ -6536,7 +7386,7 @@
                 <a:ea typeface="Arial" pitchFamily="34" charset="-122"/>
                 <a:cs typeface="Arial" pitchFamily="34" charset="-120"/>
               </a:rPr>
-              <a:t>Выбор</a:t>
+              <a:t>Часть</a:t>
             </a:r>
             <a:endParaRPr lang="en-US" sz="1050" dirty="0"/>
           </a:p>
@@ -6550,18 +7400,18 @@
         </p:nvSpPr>
         <p:spPr>
           <a:xfrm>
-            <a:off x="822960" y="1920240"/>
-            <a:ext cx="2834640" cy="502920"/>
-          </a:xfrm>
-          <a:prstGeom prst="rect">
-            <a:avLst/>
-          </a:prstGeom>
-          <a:solidFill>
-            <a:srgbClr val="FFFFFF"/>
+            <a:off x="3886200" y="1371600"/>
+            <a:ext cx="6812280" cy="457200"/>
+          </a:xfrm>
+          <a:prstGeom prst="rect">
+            <a:avLst/>
+          </a:prstGeom>
+          <a:solidFill>
+            <a:srgbClr val="EDF3F0"/>
           </a:solidFill>
           <a:ln w="10160">
             <a:solidFill>
-              <a:srgbClr val="C8D8D1"/>
+              <a:srgbClr val="B7C6C0"/>
             </a:solidFill>
             <a:prstDash val="solid"/>
           </a:ln>
@@ -6575,8 +7425,8 @@
         </p:nvSpPr>
         <p:spPr>
           <a:xfrm>
-            <a:off x="896112" y="2011680"/>
-            <a:ext cx="2688336" cy="374904"/>
+            <a:off x="3959352" y="1463040"/>
+            <a:ext cx="6665976" cy="329184"/>
           </a:xfrm>
           <a:prstGeom prst="rect">
             <a:avLst/>
@@ -6594,17 +7444,17 @@
               <a:buNone/>
             </a:pPr>
             <a:r>
-              <a:rPr lang="en-US" sz="1000" dirty="0">
-                <a:solidFill>
-                  <a:srgbClr val="17211D"/>
-                </a:solidFill>
-                <a:latin typeface="Arial" pitchFamily="34" charset="0"/>
-                <a:ea typeface="Arial" pitchFamily="34" charset="-122"/>
-                <a:cs typeface="Arial" pitchFamily="34" charset="-120"/>
-              </a:rPr>
-              <a:t>Backend</a:t>
-            </a:r>
-            <a:endParaRPr lang="en-US" sz="1000" dirty="0"/>
+              <a:rPr lang="en-US" sz="1050" b="1" dirty="0">
+                <a:solidFill>
+                  <a:srgbClr val="0F5132"/>
+                </a:solidFill>
+                <a:latin typeface="Arial" pitchFamily="34" charset="0"/>
+                <a:ea typeface="Arial" pitchFamily="34" charset="-122"/>
+                <a:cs typeface="Arial" pitchFamily="34" charset="-120"/>
+              </a:rPr>
+              <a:t>Выбор</a:t>
+            </a:r>
+            <a:endParaRPr lang="en-US" sz="1050" dirty="0"/>
           </a:p>
         </p:txBody>
       </p:sp>
@@ -6616,8 +7466,8 @@
         </p:nvSpPr>
         <p:spPr>
           <a:xfrm>
-            <a:off x="3657600" y="1920240"/>
-            <a:ext cx="7040880" cy="502920"/>
+            <a:off x="822960" y="1828800"/>
+            <a:ext cx="3063240" cy="457200"/>
           </a:xfrm>
           <a:prstGeom prst="rect">
             <a:avLst/>
@@ -6627,7 +7477,7 @@
           </a:solidFill>
           <a:ln w="10160">
             <a:solidFill>
-              <a:srgbClr val="C8D8D1"/>
+              <a:srgbClr val="B7C6C0"/>
             </a:solidFill>
             <a:prstDash val="solid"/>
           </a:ln>
@@ -6641,8 +7491,8 @@
         </p:nvSpPr>
         <p:spPr>
           <a:xfrm>
-            <a:off x="3730752" y="2011680"/>
-            <a:ext cx="6894576" cy="374904"/>
+            <a:off x="896112" y="1920240"/>
+            <a:ext cx="2916936" cy="329184"/>
           </a:xfrm>
           <a:prstGeom prst="rect">
             <a:avLst/>
@@ -6662,13 +7512,13 @@
             <a:r>
               <a:rPr lang="en-US" sz="1000" dirty="0">
                 <a:solidFill>
-                  <a:srgbClr val="17211D"/>
-                </a:solidFill>
-                <a:latin typeface="Arial" pitchFamily="34" charset="0"/>
-                <a:ea typeface="Arial" pitchFamily="34" charset="-122"/>
-                <a:cs typeface="Arial" pitchFamily="34" charset="-120"/>
-              </a:rPr>
-              <a:t>FastAPI, asyncio, Granian</a:t>
+                  <a:srgbClr val="111111"/>
+                </a:solidFill>
+                <a:latin typeface="Arial" pitchFamily="34" charset="0"/>
+                <a:ea typeface="Arial" pitchFamily="34" charset="-122"/>
+                <a:cs typeface="Arial" pitchFamily="34" charset="-120"/>
+              </a:rPr>
+              <a:t>ML: текстовые признаки</a:t>
             </a:r>
             <a:endParaRPr lang="en-US" sz="1000" dirty="0"/>
           </a:p>
@@ -6682,8 +7532,8 @@
         </p:nvSpPr>
         <p:spPr>
           <a:xfrm>
-            <a:off x="822960" y="2423160"/>
-            <a:ext cx="2834640" cy="502920"/>
+            <a:off x="3886200" y="1828800"/>
+            <a:ext cx="6812280" cy="457200"/>
           </a:xfrm>
           <a:prstGeom prst="rect">
             <a:avLst/>
@@ -6693,7 +7543,7 @@
           </a:solidFill>
           <a:ln w="10160">
             <a:solidFill>
-              <a:srgbClr val="C8D8D1"/>
+              <a:srgbClr val="B7C6C0"/>
             </a:solidFill>
             <a:prstDash val="solid"/>
           </a:ln>
@@ -6707,8 +7557,8 @@
         </p:nvSpPr>
         <p:spPr>
           <a:xfrm>
-            <a:off x="896112" y="2514600"/>
-            <a:ext cx="2688336" cy="374904"/>
+            <a:off x="3959352" y="1920240"/>
+            <a:ext cx="6665976" cy="329184"/>
           </a:xfrm>
           <a:prstGeom prst="rect">
             <a:avLst/>
@@ -6728,13 +7578,13 @@
             <a:r>
               <a:rPr lang="en-US" sz="1000" dirty="0">
                 <a:solidFill>
-                  <a:srgbClr val="17211D"/>
-                </a:solidFill>
-                <a:latin typeface="Arial" pitchFamily="34" charset="0"/>
-                <a:ea typeface="Arial" pitchFamily="34" charset="-122"/>
-                <a:cs typeface="Arial" pitchFamily="34" charset="-120"/>
-              </a:rPr>
-              <a:t>Архитектура</a:t>
+                  <a:srgbClr val="111111"/>
+                </a:solidFill>
+                <a:latin typeface="Arial" pitchFamily="34" charset="0"/>
+                <a:ea typeface="Arial" pitchFamily="34" charset="-122"/>
+                <a:cs typeface="Arial" pitchFamily="34" charset="-120"/>
+              </a:rPr>
+              <a:t>TF-IDF, embeddings</a:t>
             </a:r>
             <a:endParaRPr lang="en-US" sz="1000" dirty="0"/>
           </a:p>
@@ -6748,8 +7598,8 @@
         </p:nvSpPr>
         <p:spPr>
           <a:xfrm>
-            <a:off x="3657600" y="2423160"/>
-            <a:ext cx="7040880" cy="502920"/>
+            <a:off x="822960" y="2286000"/>
+            <a:ext cx="3063240" cy="457200"/>
           </a:xfrm>
           <a:prstGeom prst="rect">
             <a:avLst/>
@@ -6759,7 +7609,7 @@
           </a:solidFill>
           <a:ln w="10160">
             <a:solidFill>
-              <a:srgbClr val="C8D8D1"/>
+              <a:srgbClr val="B7C6C0"/>
             </a:solidFill>
             <a:prstDash val="solid"/>
           </a:ln>
@@ -6773,8 +7623,8 @@
         </p:nvSpPr>
         <p:spPr>
           <a:xfrm>
-            <a:off x="3730752" y="2514600"/>
-            <a:ext cx="6894576" cy="374904"/>
+            <a:off x="896112" y="2377440"/>
+            <a:ext cx="2916936" cy="329184"/>
           </a:xfrm>
           <a:prstGeom prst="rect">
             <a:avLst/>
@@ -6794,13 +7644,13 @@
             <a:r>
               <a:rPr lang="en-US" sz="1000" dirty="0">
                 <a:solidFill>
-                  <a:srgbClr val="17211D"/>
-                </a:solidFill>
-                <a:latin typeface="Arial" pitchFamily="34" charset="0"/>
-                <a:ea typeface="Arial" pitchFamily="34" charset="-122"/>
-                <a:cs typeface="Arial" pitchFamily="34" charset="-120"/>
-              </a:rPr>
-              <a:t>DDD, слои, Protocol, Dishka</a:t>
+                  <a:srgbClr val="111111"/>
+                </a:solidFill>
+                <a:latin typeface="Arial" pitchFamily="34" charset="0"/>
+                <a:ea typeface="Arial" pitchFamily="34" charset="-122"/>
+                <a:cs typeface="Arial" pitchFamily="34" charset="-120"/>
+              </a:rPr>
+              <a:t>ML: классификация</a:t>
             </a:r>
             <a:endParaRPr lang="en-US" sz="1000" dirty="0"/>
           </a:p>
@@ -6814,8 +7664,8 @@
         </p:nvSpPr>
         <p:spPr>
           <a:xfrm>
-            <a:off x="822960" y="2926080"/>
-            <a:ext cx="2834640" cy="502920"/>
+            <a:off x="3886200" y="2286000"/>
+            <a:ext cx="6812280" cy="457200"/>
           </a:xfrm>
           <a:prstGeom prst="rect">
             <a:avLst/>
@@ -6825,7 +7675,7 @@
           </a:solidFill>
           <a:ln w="10160">
             <a:solidFill>
-              <a:srgbClr val="C8D8D1"/>
+              <a:srgbClr val="B7C6C0"/>
             </a:solidFill>
             <a:prstDash val="solid"/>
           </a:ln>
@@ -6839,8 +7689,8 @@
         </p:nvSpPr>
         <p:spPr>
           <a:xfrm>
-            <a:off x="896112" y="3017520"/>
-            <a:ext cx="2688336" cy="374904"/>
+            <a:off x="3959352" y="2377440"/>
+            <a:ext cx="6665976" cy="329184"/>
           </a:xfrm>
           <a:prstGeom prst="rect">
             <a:avLst/>
@@ -6860,13 +7710,13 @@
             <a:r>
               <a:rPr lang="en-US" sz="1000" dirty="0">
                 <a:solidFill>
-                  <a:srgbClr val="17211D"/>
-                </a:solidFill>
-                <a:latin typeface="Arial" pitchFamily="34" charset="0"/>
-                <a:ea typeface="Arial" pitchFamily="34" charset="-122"/>
-                <a:cs typeface="Arial" pitchFamily="34" charset="-120"/>
-              </a:rPr>
-              <a:t>Фоновые задачи</a:t>
+                  <a:srgbClr val="111111"/>
+                </a:solidFill>
+                <a:latin typeface="Arial" pitchFamily="34" charset="0"/>
+                <a:ea typeface="Arial" pitchFamily="34" charset="-122"/>
+                <a:cs typeface="Arial" pitchFamily="34" charset="-120"/>
+              </a:rPr>
+              <a:t>Logistic Regression, tiny transformer mode</a:t>
             </a:r>
             <a:endParaRPr lang="en-US" sz="1000" dirty="0"/>
           </a:p>
@@ -6880,8 +7730,8 @@
         </p:nvSpPr>
         <p:spPr>
           <a:xfrm>
-            <a:off x="3657600" y="2926080"/>
-            <a:ext cx="7040880" cy="502920"/>
+            <a:off x="822960" y="2743200"/>
+            <a:ext cx="3063240" cy="457200"/>
           </a:xfrm>
           <a:prstGeom prst="rect">
             <a:avLst/>
@@ -6891,7 +7741,7 @@
           </a:solidFill>
           <a:ln w="10160">
             <a:solidFill>
-              <a:srgbClr val="C8D8D1"/>
+              <a:srgbClr val="B7C6C0"/>
             </a:solidFill>
             <a:prstDash val="solid"/>
           </a:ln>
@@ -6905,8 +7755,8 @@
         </p:nvSpPr>
         <p:spPr>
           <a:xfrm>
-            <a:off x="3730752" y="3017520"/>
-            <a:ext cx="6894576" cy="374904"/>
+            <a:off x="896112" y="2834640"/>
+            <a:ext cx="2916936" cy="329184"/>
           </a:xfrm>
           <a:prstGeom prst="rect">
             <a:avLst/>
@@ -6926,13 +7776,13 @@
             <a:r>
               <a:rPr lang="en-US" sz="1000" dirty="0">
                 <a:solidFill>
-                  <a:srgbClr val="17211D"/>
-                </a:solidFill>
-                <a:latin typeface="Arial" pitchFamily="34" charset="0"/>
-                <a:ea typeface="Arial" pitchFamily="34" charset="-122"/>
-                <a:cs typeface="Arial" pitchFamily="34" charset="-120"/>
-              </a:rPr>
-              <a:t>Taskiq + Redis</a:t>
+                  <a:srgbClr val="111111"/>
+                </a:solidFill>
+                <a:latin typeface="Arial" pitchFamily="34" charset="0"/>
+                <a:ea typeface="Arial" pitchFamily="34" charset="-122"/>
+                <a:cs typeface="Arial" pitchFamily="34" charset="-120"/>
+              </a:rPr>
+              <a:t>NLP: retrieval/RAG</a:t>
             </a:r>
             <a:endParaRPr lang="en-US" sz="1000" dirty="0"/>
           </a:p>
@@ -6946,8 +7796,8 @@
         </p:nvSpPr>
         <p:spPr>
           <a:xfrm>
-            <a:off x="822960" y="3429000"/>
-            <a:ext cx="2834640" cy="502920"/>
+            <a:off x="3886200" y="2743200"/>
+            <a:ext cx="6812280" cy="457200"/>
           </a:xfrm>
           <a:prstGeom prst="rect">
             <a:avLst/>
@@ -6957,7 +7807,7 @@
           </a:solidFill>
           <a:ln w="10160">
             <a:solidFill>
-              <a:srgbClr val="C8D8D1"/>
+              <a:srgbClr val="B7C6C0"/>
             </a:solidFill>
             <a:prstDash val="solid"/>
           </a:ln>
@@ -6971,8 +7821,8 @@
         </p:nvSpPr>
         <p:spPr>
           <a:xfrm>
-            <a:off x="896112" y="3520440"/>
-            <a:ext cx="2688336" cy="374904"/>
+            <a:off x="3959352" y="2834640"/>
+            <a:ext cx="6665976" cy="329184"/>
           </a:xfrm>
           <a:prstGeom prst="rect">
             <a:avLst/>
@@ -6992,13 +7842,13 @@
             <a:r>
               <a:rPr lang="en-US" sz="1000" dirty="0">
                 <a:solidFill>
-                  <a:srgbClr val="17211D"/>
-                </a:solidFill>
-                <a:latin typeface="Arial" pitchFamily="34" charset="0"/>
-                <a:ea typeface="Arial" pitchFamily="34" charset="-122"/>
-                <a:cs typeface="Arial" pitchFamily="34" charset="-120"/>
-              </a:rPr>
-              <a:t>События</a:t>
+                  <a:srgbClr val="111111"/>
+                </a:solidFill>
+                <a:latin typeface="Arial" pitchFamily="34" charset="0"/>
+                <a:ea typeface="Arial" pitchFamily="34" charset="-122"/>
+                <a:cs typeface="Arial" pitchFamily="34" charset="-120"/>
+              </a:rPr>
+              <a:t>Qdrant + контекст источников</a:t>
             </a:r>
             <a:endParaRPr lang="en-US" sz="1000" dirty="0"/>
           </a:p>
@@ -7012,8 +7862,8 @@
         </p:nvSpPr>
         <p:spPr>
           <a:xfrm>
-            <a:off x="3657600" y="3429000"/>
-            <a:ext cx="7040880" cy="502920"/>
+            <a:off x="822960" y="3200400"/>
+            <a:ext cx="3063240" cy="457200"/>
           </a:xfrm>
           <a:prstGeom prst="rect">
             <a:avLst/>
@@ -7023,7 +7873,7 @@
           </a:solidFill>
           <a:ln w="10160">
             <a:solidFill>
-              <a:srgbClr val="C8D8D1"/>
+              <a:srgbClr val="B7C6C0"/>
             </a:solidFill>
             <a:prstDash val="solid"/>
           </a:ln>
@@ -7037,8 +7887,8 @@
         </p:nvSpPr>
         <p:spPr>
           <a:xfrm>
-            <a:off x="3730752" y="3520440"/>
-            <a:ext cx="6894576" cy="374904"/>
+            <a:off x="896112" y="3291840"/>
+            <a:ext cx="2916936" cy="329184"/>
           </a:xfrm>
           <a:prstGeom prst="rect">
             <a:avLst/>
@@ -7058,13 +7908,13 @@
             <a:r>
               <a:rPr lang="en-US" sz="1000" dirty="0">
                 <a:solidFill>
-                  <a:srgbClr val="17211D"/>
-                </a:solidFill>
-                <a:latin typeface="Arial" pitchFamily="34" charset="0"/>
-                <a:ea typeface="Arial" pitchFamily="34" charset="-122"/>
-                <a:cs typeface="Arial" pitchFamily="34" charset="-120"/>
-              </a:rPr>
-              <a:t>FastStream + Redis</a:t>
+                  <a:srgbClr val="111111"/>
+                </a:solidFill>
+                <a:latin typeface="Arial" pitchFamily="34" charset="0"/>
+                <a:ea typeface="Arial" pitchFamily="34" charset="-122"/>
+                <a:cs typeface="Arial" pitchFamily="34" charset="-120"/>
+              </a:rPr>
+              <a:t>NLP: генерация</a:t>
             </a:r>
             <a:endParaRPr lang="en-US" sz="1000" dirty="0"/>
           </a:p>
@@ -7078,8 +7928,8 @@
         </p:nvSpPr>
         <p:spPr>
           <a:xfrm>
-            <a:off x="822960" y="3931920"/>
-            <a:ext cx="2834640" cy="502920"/>
+            <a:off x="3886200" y="3200400"/>
+            <a:ext cx="6812280" cy="457200"/>
           </a:xfrm>
           <a:prstGeom prst="rect">
             <a:avLst/>
@@ -7089,7 +7939,7 @@
           </a:solidFill>
           <a:ln w="10160">
             <a:solidFill>
-              <a:srgbClr val="C8D8D1"/>
+              <a:srgbClr val="B7C6C0"/>
             </a:solidFill>
             <a:prstDash val="solid"/>
           </a:ln>
@@ -7103,8 +7953,8 @@
         </p:nvSpPr>
         <p:spPr>
           <a:xfrm>
-            <a:off x="896112" y="4023360"/>
-            <a:ext cx="2688336" cy="374904"/>
+            <a:off x="3959352" y="3291840"/>
+            <a:ext cx="6665976" cy="329184"/>
           </a:xfrm>
           <a:prstGeom prst="rect">
             <a:avLst/>
@@ -7124,13 +7974,13 @@
             <a:r>
               <a:rPr lang="en-US" sz="1000" dirty="0">
                 <a:solidFill>
-                  <a:srgbClr val="17211D"/>
-                </a:solidFill>
-                <a:latin typeface="Arial" pitchFamily="34" charset="0"/>
-                <a:ea typeface="Arial" pitchFamily="34" charset="-122"/>
-                <a:cs typeface="Arial" pitchFamily="34" charset="-120"/>
-              </a:rPr>
-              <a:t>Векторный поиск</a:t>
+                  <a:srgbClr val="111111"/>
+                </a:solidFill>
+                <a:latin typeface="Arial" pitchFamily="34" charset="0"/>
+                <a:ea typeface="Arial" pitchFamily="34" charset="-122"/>
+                <a:cs typeface="Arial" pitchFamily="34" charset="-120"/>
+              </a:rPr>
+              <a:t>Template fallback + LLM adapter</a:t>
             </a:r>
             <a:endParaRPr lang="en-US" sz="1000" dirty="0"/>
           </a:p>
@@ -7144,8 +7994,8 @@
         </p:nvSpPr>
         <p:spPr>
           <a:xfrm>
-            <a:off x="3657600" y="3931920"/>
-            <a:ext cx="7040880" cy="502920"/>
+            <a:off x="822960" y="3657600"/>
+            <a:ext cx="3063240" cy="457200"/>
           </a:xfrm>
           <a:prstGeom prst="rect">
             <a:avLst/>
@@ -7155,7 +8005,7 @@
           </a:solidFill>
           <a:ln w="10160">
             <a:solidFill>
-              <a:srgbClr val="C8D8D1"/>
+              <a:srgbClr val="B7C6C0"/>
             </a:solidFill>
             <a:prstDash val="solid"/>
           </a:ln>
@@ -7169,8 +8019,8 @@
         </p:nvSpPr>
         <p:spPr>
           <a:xfrm>
-            <a:off x="3730752" y="4023360"/>
-            <a:ext cx="6894576" cy="374904"/>
+            <a:off x="896112" y="3749040"/>
+            <a:ext cx="2916936" cy="329184"/>
           </a:xfrm>
           <a:prstGeom prst="rect">
             <a:avLst/>
@@ -7190,13 +8040,13 @@
             <a:r>
               <a:rPr lang="en-US" sz="1000" dirty="0">
                 <a:solidFill>
-                  <a:srgbClr val="17211D"/>
-                </a:solidFill>
-                <a:latin typeface="Arial" pitchFamily="34" charset="0"/>
-                <a:ea typeface="Arial" pitchFamily="34" charset="-122"/>
-                <a:cs typeface="Arial" pitchFamily="34" charset="-120"/>
-              </a:rPr>
-              <a:t>Qdrant</a:t>
+                  <a:srgbClr val="111111"/>
+                </a:solidFill>
+                <a:latin typeface="Arial" pitchFamily="34" charset="0"/>
+                <a:ea typeface="Arial" pitchFamily="34" charset="-122"/>
+                <a:cs typeface="Arial" pitchFamily="34" charset="-120"/>
+              </a:rPr>
+              <a:t>Backend</a:t>
             </a:r>
             <a:endParaRPr lang="en-US" sz="1000" dirty="0"/>
           </a:p>
@@ -7210,8 +8060,8 @@
         </p:nvSpPr>
         <p:spPr>
           <a:xfrm>
-            <a:off x="822960" y="4434840"/>
-            <a:ext cx="2834640" cy="502920"/>
+            <a:off x="3886200" y="3657600"/>
+            <a:ext cx="6812280" cy="457200"/>
           </a:xfrm>
           <a:prstGeom prst="rect">
             <a:avLst/>
@@ -7221,7 +8071,7 @@
           </a:solidFill>
           <a:ln w="10160">
             <a:solidFill>
-              <a:srgbClr val="C8D8D1"/>
+              <a:srgbClr val="B7C6C0"/>
             </a:solidFill>
             <a:prstDash val="solid"/>
           </a:ln>
@@ -7235,8 +8085,8 @@
         </p:nvSpPr>
         <p:spPr>
           <a:xfrm>
-            <a:off x="896112" y="4526280"/>
-            <a:ext cx="2688336" cy="374904"/>
+            <a:off x="3959352" y="3749040"/>
+            <a:ext cx="6665976" cy="329184"/>
           </a:xfrm>
           <a:prstGeom prst="rect">
             <a:avLst/>
@@ -7256,13 +8106,13 @@
             <a:r>
               <a:rPr lang="en-US" sz="1000" dirty="0">
                 <a:solidFill>
-                  <a:srgbClr val="17211D"/>
-                </a:solidFill>
-                <a:latin typeface="Arial" pitchFamily="34" charset="0"/>
-                <a:ea typeface="Arial" pitchFamily="34" charset="-122"/>
-                <a:cs typeface="Arial" pitchFamily="34" charset="-120"/>
-              </a:rPr>
-              <a:t>ML tracking</a:t>
+                  <a:srgbClr val="111111"/>
+                </a:solidFill>
+                <a:latin typeface="Arial" pitchFamily="34" charset="0"/>
+                <a:ea typeface="Arial" pitchFamily="34" charset="-122"/>
+                <a:cs typeface="Arial" pitchFamily="34" charset="-120"/>
+              </a:rPr>
+              <a:t>FastAPI, asyncio, Granian, Zapros</a:t>
             </a:r>
             <a:endParaRPr lang="en-US" sz="1000" dirty="0"/>
           </a:p>
@@ -7276,8 +8126,8 @@
         </p:nvSpPr>
         <p:spPr>
           <a:xfrm>
-            <a:off x="3657600" y="4434840"/>
-            <a:ext cx="7040880" cy="502920"/>
+            <a:off x="822960" y="4114800"/>
+            <a:ext cx="3063240" cy="457200"/>
           </a:xfrm>
           <a:prstGeom prst="rect">
             <a:avLst/>
@@ -7287,7 +8137,7 @@
           </a:solidFill>
           <a:ln w="10160">
             <a:solidFill>
-              <a:srgbClr val="C8D8D1"/>
+              <a:srgbClr val="B7C6C0"/>
             </a:solidFill>
             <a:prstDash val="solid"/>
           </a:ln>
@@ -7301,8 +8151,8 @@
         </p:nvSpPr>
         <p:spPr>
           <a:xfrm>
-            <a:off x="3730752" y="4526280"/>
-            <a:ext cx="6894576" cy="374904"/>
+            <a:off x="896112" y="4206240"/>
+            <a:ext cx="2916936" cy="329184"/>
           </a:xfrm>
           <a:prstGeom prst="rect">
             <a:avLst/>
@@ -7322,13 +8172,13 @@
             <a:r>
               <a:rPr lang="en-US" sz="1000" dirty="0">
                 <a:solidFill>
-                  <a:srgbClr val="17211D"/>
-                </a:solidFill>
-                <a:latin typeface="Arial" pitchFamily="34" charset="0"/>
-                <a:ea typeface="Arial" pitchFamily="34" charset="-122"/>
-                <a:cs typeface="Arial" pitchFamily="34" charset="-120"/>
-              </a:rPr>
-              <a:t>MLflow</a:t>
+                  <a:srgbClr val="111111"/>
+                </a:solidFill>
+                <a:latin typeface="Arial" pitchFamily="34" charset="0"/>
+                <a:ea typeface="Arial" pitchFamily="34" charset="-122"/>
+                <a:cs typeface="Arial" pitchFamily="34" charset="-120"/>
+              </a:rPr>
+              <a:t>Архитектура</a:t>
             </a:r>
             <a:endParaRPr lang="en-US" sz="1000" dirty="0"/>
           </a:p>
@@ -7342,8 +8192,8 @@
         </p:nvSpPr>
         <p:spPr>
           <a:xfrm>
-            <a:off x="822960" y="4937760"/>
-            <a:ext cx="2834640" cy="502920"/>
+            <a:off x="3886200" y="4114800"/>
+            <a:ext cx="6812280" cy="457200"/>
           </a:xfrm>
           <a:prstGeom prst="rect">
             <a:avLst/>
@@ -7353,7 +8203,7 @@
           </a:solidFill>
           <a:ln w="10160">
             <a:solidFill>
-              <a:srgbClr val="C8D8D1"/>
+              <a:srgbClr val="B7C6C0"/>
             </a:solidFill>
             <a:prstDash val="solid"/>
           </a:ln>
@@ -7367,8 +8217,8 @@
         </p:nvSpPr>
         <p:spPr>
           <a:xfrm>
-            <a:off x="896112" y="5029200"/>
-            <a:ext cx="2688336" cy="374904"/>
+            <a:off x="3959352" y="4206240"/>
+            <a:ext cx="6665976" cy="329184"/>
           </a:xfrm>
           <a:prstGeom prst="rect">
             <a:avLst/>
@@ -7388,13 +8238,13 @@
             <a:r>
               <a:rPr lang="en-US" sz="1000" dirty="0">
                 <a:solidFill>
-                  <a:srgbClr val="17211D"/>
-                </a:solidFill>
-                <a:latin typeface="Arial" pitchFamily="34" charset="0"/>
-                <a:ea typeface="Arial" pitchFamily="34" charset="-122"/>
-                <a:cs typeface="Arial" pitchFamily="34" charset="-120"/>
-              </a:rPr>
-              <a:t>Frontend</a:t>
+                  <a:srgbClr val="111111"/>
+                </a:solidFill>
+                <a:latin typeface="Arial" pitchFamily="34" charset="0"/>
+                <a:ea typeface="Arial" pitchFamily="34" charset="-122"/>
+                <a:cs typeface="Arial" pitchFamily="34" charset="-120"/>
+              </a:rPr>
+              <a:t>DDD, слои, Protocol, Dishka</a:t>
             </a:r>
             <a:endParaRPr lang="en-US" sz="1000" dirty="0"/>
           </a:p>
@@ -7408,8 +8258,8 @@
         </p:nvSpPr>
         <p:spPr>
           <a:xfrm>
-            <a:off x="3657600" y="4937760"/>
-            <a:ext cx="7040880" cy="502920"/>
+            <a:off x="822960" y="4572000"/>
+            <a:ext cx="3063240" cy="457200"/>
           </a:xfrm>
           <a:prstGeom prst="rect">
             <a:avLst/>
@@ -7419,7 +8269,7 @@
           </a:solidFill>
           <a:ln w="10160">
             <a:solidFill>
-              <a:srgbClr val="C8D8D1"/>
+              <a:srgbClr val="B7C6C0"/>
             </a:solidFill>
             <a:prstDash val="solid"/>
           </a:ln>
@@ -7433,8 +8283,8 @@
         </p:nvSpPr>
         <p:spPr>
           <a:xfrm>
-            <a:off x="3730752" y="5029200"/>
-            <a:ext cx="6894576" cy="374904"/>
+            <a:off x="896112" y="4663440"/>
+            <a:ext cx="2916936" cy="329184"/>
           </a:xfrm>
           <a:prstGeom prst="rect">
             <a:avLst/>
@@ -7454,13 +8304,211 @@
             <a:r>
               <a:rPr lang="en-US" sz="1000" dirty="0">
                 <a:solidFill>
-                  <a:srgbClr val="17211D"/>
-                </a:solidFill>
-                <a:latin typeface="Arial" pitchFamily="34" charset="0"/>
-                <a:ea typeface="Arial" pitchFamily="34" charset="-122"/>
-                <a:cs typeface="Arial" pitchFamily="34" charset="-120"/>
-              </a:rPr>
-              <a:t>React</a:t>
+                  <a:srgbClr val="111111"/>
+                </a:solidFill>
+                <a:latin typeface="Arial" pitchFamily="34" charset="0"/>
+                <a:ea typeface="Arial" pitchFamily="34" charset="-122"/>
+                <a:cs typeface="Arial" pitchFamily="34" charset="-120"/>
+              </a:rPr>
+              <a:t>Очереди и события</a:t>
+            </a:r>
+            <a:endParaRPr lang="en-US" sz="1000" dirty="0"/>
+          </a:p>
+        </p:txBody>
+      </p:sp>
+      <p:sp>
+        <p:nvSpPr>
+          <p:cNvPr id="39" name="Shape 37"/>
+          <p:cNvSpPr/>
+          <p:nvPr/>
+        </p:nvSpPr>
+        <p:spPr>
+          <a:xfrm>
+            <a:off x="3886200" y="4572000"/>
+            <a:ext cx="6812280" cy="457200"/>
+          </a:xfrm>
+          <a:prstGeom prst="rect">
+            <a:avLst/>
+          </a:prstGeom>
+          <a:solidFill>
+            <a:srgbClr val="FFFFFF"/>
+          </a:solidFill>
+          <a:ln w="10160">
+            <a:solidFill>
+              <a:srgbClr val="B7C6C0"/>
+            </a:solidFill>
+            <a:prstDash val="solid"/>
+          </a:ln>
+        </p:spPr>
+      </p:sp>
+      <p:sp>
+        <p:nvSpPr>
+          <p:cNvPr id="40" name="Text 38"/>
+          <p:cNvSpPr/>
+          <p:nvPr/>
+        </p:nvSpPr>
+        <p:spPr>
+          <a:xfrm>
+            <a:off x="3959352" y="4663440"/>
+            <a:ext cx="6665976" cy="329184"/>
+          </a:xfrm>
+          <a:prstGeom prst="rect">
+            <a:avLst/>
+          </a:prstGeom>
+          <a:noFill/>
+          <a:ln/>
+        </p:spPr>
+        <p:txBody>
+          <a:bodyPr wrap="square" lIns="0" tIns="0" rIns="0" bIns="0" rtlCol="0" anchor="ctr">
+            <a:normAutofit/>
+          </a:bodyPr>
+          <a:lstStyle/>
+          <a:p>
+            <a:pPr indent="0" marL="0">
+              <a:buNone/>
+            </a:pPr>
+            <a:r>
+              <a:rPr lang="en-US" sz="1000" dirty="0">
+                <a:solidFill>
+                  <a:srgbClr val="111111"/>
+                </a:solidFill>
+                <a:latin typeface="Arial" pitchFamily="34" charset="0"/>
+                <a:ea typeface="Arial" pitchFamily="34" charset="-122"/>
+                <a:cs typeface="Arial" pitchFamily="34" charset="-120"/>
+              </a:rPr>
+              <a:t>Taskiq, Redis, FastStream, SSE</a:t>
+            </a:r>
+            <a:endParaRPr lang="en-US" sz="1000" dirty="0"/>
+          </a:p>
+        </p:txBody>
+      </p:sp>
+      <p:sp>
+        <p:nvSpPr>
+          <p:cNvPr id="41" name="Shape 39"/>
+          <p:cNvSpPr/>
+          <p:nvPr/>
+        </p:nvSpPr>
+        <p:spPr>
+          <a:xfrm>
+            <a:off x="822960" y="5029200"/>
+            <a:ext cx="3063240" cy="457200"/>
+          </a:xfrm>
+          <a:prstGeom prst="rect">
+            <a:avLst/>
+          </a:prstGeom>
+          <a:solidFill>
+            <a:srgbClr val="FFFFFF"/>
+          </a:solidFill>
+          <a:ln w="10160">
+            <a:solidFill>
+              <a:srgbClr val="B7C6C0"/>
+            </a:solidFill>
+            <a:prstDash val="solid"/>
+          </a:ln>
+        </p:spPr>
+      </p:sp>
+      <p:sp>
+        <p:nvSpPr>
+          <p:cNvPr id="42" name="Text 40"/>
+          <p:cNvSpPr/>
+          <p:nvPr/>
+        </p:nvSpPr>
+        <p:spPr>
+          <a:xfrm>
+            <a:off x="896112" y="5120640"/>
+            <a:ext cx="2916936" cy="329184"/>
+          </a:xfrm>
+          <a:prstGeom prst="rect">
+            <a:avLst/>
+          </a:prstGeom>
+          <a:noFill/>
+          <a:ln/>
+        </p:spPr>
+        <p:txBody>
+          <a:bodyPr wrap="square" lIns="0" tIns="0" rIns="0" bIns="0" rtlCol="0" anchor="ctr">
+            <a:normAutofit/>
+          </a:bodyPr>
+          <a:lstStyle/>
+          <a:p>
+            <a:pPr indent="0" marL="0">
+              <a:buNone/>
+            </a:pPr>
+            <a:r>
+              <a:rPr lang="en-US" sz="1000" dirty="0">
+                <a:solidFill>
+                  <a:srgbClr val="111111"/>
+                </a:solidFill>
+                <a:latin typeface="Arial" pitchFamily="34" charset="0"/>
+                <a:ea typeface="Arial" pitchFamily="34" charset="-122"/>
+                <a:cs typeface="Arial" pitchFamily="34" charset="-120"/>
+              </a:rPr>
+              <a:t>UI и запуск</a:t>
+            </a:r>
+            <a:endParaRPr lang="en-US" sz="1000" dirty="0"/>
+          </a:p>
+        </p:txBody>
+      </p:sp>
+      <p:sp>
+        <p:nvSpPr>
+          <p:cNvPr id="43" name="Shape 41"/>
+          <p:cNvSpPr/>
+          <p:nvPr/>
+        </p:nvSpPr>
+        <p:spPr>
+          <a:xfrm>
+            <a:off x="3886200" y="5029200"/>
+            <a:ext cx="6812280" cy="457200"/>
+          </a:xfrm>
+          <a:prstGeom prst="rect">
+            <a:avLst/>
+          </a:prstGeom>
+          <a:solidFill>
+            <a:srgbClr val="FFFFFF"/>
+          </a:solidFill>
+          <a:ln w="10160">
+            <a:solidFill>
+              <a:srgbClr val="B7C6C0"/>
+            </a:solidFill>
+            <a:prstDash val="solid"/>
+          </a:ln>
+        </p:spPr>
+      </p:sp>
+      <p:sp>
+        <p:nvSpPr>
+          <p:cNvPr id="44" name="Text 42"/>
+          <p:cNvSpPr/>
+          <p:nvPr/>
+        </p:nvSpPr>
+        <p:spPr>
+          <a:xfrm>
+            <a:off x="3959352" y="5120640"/>
+            <a:ext cx="6665976" cy="329184"/>
+          </a:xfrm>
+          <a:prstGeom prst="rect">
+            <a:avLst/>
+          </a:prstGeom>
+          <a:noFill/>
+          <a:ln/>
+        </p:spPr>
+        <p:txBody>
+          <a:bodyPr wrap="square" lIns="0" tIns="0" rIns="0" bIns="0" rtlCol="0" anchor="ctr">
+            <a:normAutofit/>
+          </a:bodyPr>
+          <a:lstStyle/>
+          <a:p>
+            <a:pPr indent="0" marL="0">
+              <a:buNone/>
+            </a:pPr>
+            <a:r>
+              <a:rPr lang="en-US" sz="1000" dirty="0">
+                <a:solidFill>
+                  <a:srgbClr val="111111"/>
+                </a:solidFill>
+                <a:latin typeface="Arial" pitchFamily="34" charset="0"/>
+                <a:ea typeface="Arial" pitchFamily="34" charset="-122"/>
+                <a:cs typeface="Arial" pitchFamily="34" charset="-120"/>
+              </a:rPr>
+              <a:t>React, Docker Compose, Justfile</a:t>
             </a:r>
             <a:endParaRPr lang="en-US" sz="1000" dirty="0"/>
           </a:p>
@@ -7480,7 +8528,7 @@
     <p:bg>
       <p:bgPr>
         <a:solidFill>
-          <a:srgbClr val="F7FAF8"/>
+          <a:srgbClr val="F8F9F8"/>
         </a:solidFill>
       </p:bgPr>
     </p:bg>
@@ -7513,11 +8561,11 @@
             <a:avLst/>
           </a:prstGeom>
           <a:solidFill>
-            <a:srgbClr val="F7FAF8"/>
+            <a:srgbClr val="F8F9F8"/>
           </a:solidFill>
           <a:ln w="12700">
             <a:solidFill>
-              <a:srgbClr val="F7FAF8"/>
+              <a:srgbClr val="F8F9F8"/>
             </a:solidFill>
             <a:prstDash val="solid"/>
           </a:ln>
@@ -7557,7 +8605,7 @@
         <p:spPr>
           <a:xfrm>
             <a:off x="594360" y="411480"/>
-            <a:ext cx="9875520" cy="777240"/>
+            <a:ext cx="10424160" cy="658368"/>
           </a:xfrm>
           <a:prstGeom prst="rect">
             <a:avLst/>
@@ -7575,17 +8623,17 @@
               <a:buNone/>
             </a:pPr>
             <a:r>
-              <a:rPr lang="en-US" sz="2700" b="1" dirty="0">
-                <a:solidFill>
-                  <a:srgbClr val="17211D"/>
-                </a:solidFill>
-                <a:latin typeface="Arial" pitchFamily="34" charset="0"/>
-                <a:ea typeface="Arial" pitchFamily="34" charset="-122"/>
-                <a:cs typeface="Arial" pitchFamily="34" charset="-120"/>
-              </a:rPr>
-              <a:t>Анализ и генерация</a:t>
-            </a:r>
-            <a:endParaRPr lang="en-US" sz="2700" dirty="0"/>
+              <a:rPr lang="en-US" sz="2500" b="1" dirty="0">
+                <a:solidFill>
+                  <a:srgbClr val="111111"/>
+                </a:solidFill>
+                <a:latin typeface="Arial" pitchFamily="34" charset="0"/>
+                <a:ea typeface="Arial" pitchFamily="34" charset="-122"/>
+                <a:cs typeface="Arial" pitchFamily="34" charset="-120"/>
+              </a:rPr>
+              <a:t>ML/NLP-компоненты</a:t>
+            </a:r>
+            <a:endParaRPr lang="en-US" sz="2500" dirty="0"/>
           </a:p>
         </p:txBody>
       </p:sp>
@@ -7597,7 +8645,7 @@
         </p:nvSpPr>
         <p:spPr>
           <a:xfrm>
-            <a:off x="612648" y="1133856"/>
+            <a:off x="612648" y="1060704"/>
             <a:ext cx="9875520" cy="320040"/>
           </a:xfrm>
           <a:prstGeom prst="rect">
@@ -7616,13 +8664,13 @@
             <a:r>
               <a:rPr lang="en-US" sz="1250" dirty="0">
                 <a:solidFill>
-                  <a:srgbClr val="60706A"/>
-                </a:solidFill>
-                <a:latin typeface="Arial" pitchFamily="34" charset="0"/>
-                <a:ea typeface="Arial" pitchFamily="34" charset="-122"/>
-                <a:cs typeface="Arial" pitchFamily="34" charset="-120"/>
-              </a:rPr>
-              <a:t>Воспроизводимый demo-режим плюс возможность подключения LLM</a:t>
+                  <a:srgbClr val="555F5B"/>
+                </a:solidFill>
+                <a:latin typeface="Arial" pitchFamily="34" charset="0"/>
+                <a:ea typeface="Arial" pitchFamily="34" charset="-122"/>
+                <a:cs typeface="Arial" pitchFamily="34" charset="-120"/>
+              </a:rPr>
+              <a:t>Анализ новости сделан как объяснимый baseline с расширяемыми режимами</a:t>
             </a:r>
             <a:endParaRPr lang="en-US" sz="1250" dirty="0"/>
           </a:p>
@@ -7655,13 +8703,13 @@
             <a:r>
               <a:rPr lang="en-US" sz="850" dirty="0">
                 <a:solidFill>
-                  <a:srgbClr val="60706A"/>
-                </a:solidFill>
-                <a:latin typeface="Arial" pitchFamily="34" charset="0"/>
-                <a:ea typeface="Arial" pitchFamily="34" charset="-122"/>
-                <a:cs typeface="Arial" pitchFamily="34" charset="-120"/>
-              </a:rPr>
-              <a:t>news-analysis · 7/12</a:t>
+                  <a:srgbClr val="555F5B"/>
+                </a:solidFill>
+                <a:latin typeface="Arial" pitchFamily="34" charset="0"/>
+                <a:ea typeface="Arial" pitchFamily="34" charset="-122"/>
+                <a:cs typeface="Arial" pitchFamily="34" charset="-120"/>
+              </a:rPr>
+              <a:t>Прудиев Алексей Сергеевич · ПМ23-4 · 7/12</a:t>
             </a:r>
             <a:endParaRPr lang="en-US" sz="850" dirty="0"/>
           </a:p>
@@ -7669,14 +8717,119 @@
       </p:sp>
       <p:sp>
         <p:nvSpPr>
-          <p:cNvPr id="7" name="Text 5"/>
-          <p:cNvSpPr/>
-          <p:nvPr/>
-        </p:nvSpPr>
-        <p:spPr>
-          <a:xfrm>
-            <a:off x="731520" y="1645920"/>
-            <a:ext cx="9692640" cy="3291840"/>
+          <p:cNvPr id="7" name="Shape 5"/>
+          <p:cNvSpPr/>
+          <p:nvPr/>
+        </p:nvSpPr>
+        <p:spPr>
+          <a:xfrm>
+            <a:off x="731520" y="1353312"/>
+            <a:ext cx="2377440" cy="310896"/>
+          </a:xfrm>
+          <a:prstGeom prst="rect">
+            <a:avLst/>
+          </a:prstGeom>
+          <a:solidFill>
+            <a:srgbClr val="0F5132"/>
+          </a:solidFill>
+          <a:ln w="12700">
+            <a:solidFill>
+              <a:srgbClr val="0F5132"/>
+            </a:solidFill>
+            <a:prstDash val="solid"/>
+          </a:ln>
+        </p:spPr>
+      </p:sp>
+      <p:sp>
+        <p:nvSpPr>
+          <p:cNvPr id="8" name="Text 6"/>
+          <p:cNvSpPr/>
+          <p:nvPr/>
+        </p:nvSpPr>
+        <p:spPr>
+          <a:xfrm>
+            <a:off x="804672" y="1426464"/>
+            <a:ext cx="2231136" cy="109728"/>
+          </a:xfrm>
+          <a:prstGeom prst="rect">
+            <a:avLst/>
+          </a:prstGeom>
+          <a:noFill/>
+          <a:ln/>
+        </p:spPr>
+        <p:txBody>
+          <a:bodyPr wrap="square" lIns="0" tIns="0" rIns="0" bIns="0" rtlCol="0" anchor="ctr">
+            <a:normAutofit/>
+          </a:bodyPr>
+          <a:lstStyle/>
+          <a:p>
+            <a:pPr indent="0" marL="0">
+              <a:buNone/>
+            </a:pPr>
+            <a:r>
+              <a:rPr lang="en-US" sz="850" b="1" dirty="0">
+                <a:solidFill>
+                  <a:srgbClr val="FFFFFF"/>
+                </a:solidFill>
+                <a:latin typeface="Arial" pitchFamily="34" charset="0"/>
+                <a:ea typeface="Arial" pitchFamily="34" charset="-122"/>
+                <a:cs typeface="Arial" pitchFamily="34" charset="-120"/>
+              </a:rPr>
+              <a:t>Критерий: методы и результаты</a:t>
+            </a:r>
+            <a:endParaRPr lang="en-US" sz="850" dirty="0"/>
+          </a:p>
+        </p:txBody>
+      </p:sp>
+      <p:sp>
+        <p:nvSpPr>
+          <p:cNvPr id="9" name="Text 7"/>
+          <p:cNvSpPr/>
+          <p:nvPr/>
+        </p:nvSpPr>
+        <p:spPr>
+          <a:xfrm>
+            <a:off x="822960" y="1737360"/>
+            <a:ext cx="4389120" cy="256032"/>
+          </a:xfrm>
+          <a:prstGeom prst="rect">
+            <a:avLst/>
+          </a:prstGeom>
+          <a:noFill/>
+          <a:ln/>
+        </p:spPr>
+        <p:txBody>
+          <a:bodyPr wrap="square" lIns="0" tIns="0" rIns="0" bIns="0" rtlCol="0" anchor="ctr"/>
+          <a:lstStyle/>
+          <a:p>
+            <a:pPr indent="0" marL="0">
+              <a:buNone/>
+            </a:pPr>
+            <a:r>
+              <a:rPr lang="en-US" sz="1500" b="1" dirty="0">
+                <a:solidFill>
+                  <a:srgbClr val="0F5132"/>
+                </a:solidFill>
+                <a:latin typeface="Arial" pitchFamily="34" charset="0"/>
+                <a:ea typeface="Arial" pitchFamily="34" charset="-122"/>
+                <a:cs typeface="Arial" pitchFamily="34" charset="-120"/>
+              </a:rPr>
+              <a:t>Классификация влияния</a:t>
+            </a:r>
+            <a:endParaRPr lang="en-US" sz="1500" dirty="0"/>
+          </a:p>
+        </p:txBody>
+      </p:sp>
+      <p:sp>
+        <p:nvSpPr>
+          <p:cNvPr id="10" name="Text 8"/>
+          <p:cNvSpPr/>
+          <p:nvPr/>
+        </p:nvSpPr>
+        <p:spPr>
+          <a:xfrm>
+            <a:off x="822960" y="2075688"/>
+            <a:ext cx="4754880" cy="2148840"/>
           </a:xfrm>
           <a:prstGeom prst="rect">
             <a:avLst/>
@@ -7695,17 +8848,17 @@
               <a:buChar char="•"/>
             </a:pPr>
             <a:r>
-              <a:rPr lang="en-US" sz="1700" dirty="0">
-                <a:solidFill>
-                  <a:srgbClr val="17211D"/>
-                </a:solidFill>
-                <a:latin typeface="Arial" pitchFamily="34" charset="0"/>
-                <a:ea typeface="Arial" pitchFamily="34" charset="-122"/>
-                <a:cs typeface="Arial" pitchFamily="34" charset="-120"/>
-              </a:rPr>
-              <a:t>tfidf-logreg: стабильный режим анализа влияния для защиты.</a:t>
-            </a:r>
-            <a:endParaRPr lang="en-US" sz="1700" dirty="0"/>
+              <a:rPr lang="en-US" sz="1520" dirty="0">
+                <a:solidFill>
+                  <a:srgbClr val="111111"/>
+                </a:solidFill>
+                <a:latin typeface="Arial" pitchFamily="34" charset="0"/>
+                <a:ea typeface="Arial" pitchFamily="34" charset="-122"/>
+                <a:cs typeface="Arial" pitchFamily="34" charset="-120"/>
+              </a:rPr>
+              <a:t>Классы: positive, negative, neutral.</a:t>
+            </a:r>
+            <a:endParaRPr lang="en-US" sz="1520" dirty="0"/>
           </a:p>
           <a:p>
             <a:pPr marL="177800" indent="-177800">
@@ -7713,17 +8866,17 @@
               <a:buChar char="•"/>
             </a:pPr>
             <a:r>
-              <a:rPr lang="en-US" sz="1700" dirty="0">
-                <a:solidFill>
-                  <a:srgbClr val="17211D"/>
-                </a:solidFill>
-                <a:latin typeface="Arial" pitchFamily="34" charset="0"/>
-                <a:ea typeface="Arial" pitchFamily="34" charset="-122"/>
-                <a:cs typeface="Arial" pitchFamily="34" charset="-120"/>
-              </a:rPr>
-              <a:t>embedding-logreg и tiny-transformer-classifier: предусмотрены контрактами.</a:t>
-            </a:r>
-            <a:endParaRPr lang="en-US" sz="1700" dirty="0"/>
+              <a:rPr lang="en-US" sz="1520" dirty="0">
+                <a:solidFill>
+                  <a:srgbClr val="111111"/>
+                </a:solidFill>
+                <a:latin typeface="Arial" pitchFamily="34" charset="0"/>
+                <a:ea typeface="Arial" pitchFamily="34" charset="-122"/>
+                <a:cs typeface="Arial" pitchFamily="34" charset="-120"/>
+              </a:rPr>
+              <a:t>Baseline: TF-IDF + Logistic Regression.</a:t>
+            </a:r>
+            <a:endParaRPr lang="en-US" sz="1520" dirty="0"/>
           </a:p>
           <a:p>
             <a:pPr marL="177800" indent="-177800">
@@ -7731,17 +8884,17 @@
               <a:buChar char="•"/>
             </a:pPr>
             <a:r>
-              <a:rPr lang="en-US" sz="1700" dirty="0">
-                <a:solidFill>
-                  <a:srgbClr val="17211D"/>
-                </a:solidFill>
-                <a:latin typeface="Arial" pitchFamily="34" charset="0"/>
-                <a:ea typeface="Arial" pitchFamily="34" charset="-122"/>
-                <a:cs typeface="Arial" pitchFamily="34" charset="-120"/>
-              </a:rPr>
-              <a:t>template generator: локальный fallback без зависимости от модели.</a:t>
-            </a:r>
-            <a:endParaRPr lang="en-US" sz="1700" dirty="0"/>
+              <a:rPr lang="en-US" sz="1520" dirty="0">
+                <a:solidFill>
+                  <a:srgbClr val="111111"/>
+                </a:solidFill>
+                <a:latin typeface="Arial" pitchFamily="34" charset="0"/>
+                <a:ea typeface="Arial" pitchFamily="34" charset="-122"/>
+                <a:cs typeface="Arial" pitchFamily="34" charset="-120"/>
+              </a:rPr>
+              <a:t>Выход: impact, confidence, explanation.</a:t>
+            </a:r>
+            <a:endParaRPr lang="en-US" sz="1520" dirty="0"/>
           </a:p>
           <a:p>
             <a:pPr marL="177800" indent="-177800">
@@ -7749,35 +8902,191 @@
               <a:buChar char="•"/>
             </a:pPr>
             <a:r>
-              <a:rPr lang="en-US" sz="1700" dirty="0">
-                <a:solidFill>
-                  <a:srgbClr val="17211D"/>
-                </a:solidFill>
-                <a:latin typeface="Arial" pitchFamily="34" charset="0"/>
-                <a:ea typeface="Arial" pitchFamily="34" charset="-122"/>
-                <a:cs typeface="Arial" pitchFamily="34" charset="-120"/>
-              </a:rPr>
-              <a:t>LLM-режим: OpenAI-compatible сервер, например llama.cpp.</a:t>
-            </a:r>
-            <a:endParaRPr lang="en-US" sz="1700" dirty="0"/>
-          </a:p>
+              <a:rPr lang="en-US" sz="1520" dirty="0">
+                <a:solidFill>
+                  <a:srgbClr val="111111"/>
+                </a:solidFill>
+                <a:latin typeface="Arial" pitchFamily="34" charset="0"/>
+                <a:ea typeface="Arial" pitchFamily="34" charset="-122"/>
+                <a:cs typeface="Arial" pitchFamily="34" charset="-120"/>
+              </a:rPr>
+              <a:t>Расширение: embedding-logreg и tiny-transformer-classifier.</a:t>
+            </a:r>
+            <a:endParaRPr lang="en-US" sz="1520" dirty="0"/>
+          </a:p>
+        </p:txBody>
+      </p:sp>
+      <p:sp>
+        <p:nvSpPr>
+          <p:cNvPr id="11" name="Text 9"/>
+          <p:cNvSpPr/>
+          <p:nvPr/>
+        </p:nvSpPr>
+        <p:spPr>
+          <a:xfrm>
+            <a:off x="5989320" y="1737360"/>
+            <a:ext cx="4389120" cy="256032"/>
+          </a:xfrm>
+          <a:prstGeom prst="rect">
+            <a:avLst/>
+          </a:prstGeom>
+          <a:noFill/>
+          <a:ln/>
+        </p:spPr>
+        <p:txBody>
+          <a:bodyPr wrap="square" lIns="0" tIns="0" rIns="0" bIns="0" rtlCol="0" anchor="ctr"/>
+          <a:lstStyle/>
+          <a:p>
+            <a:pPr indent="0" marL="0">
+              <a:buNone/>
+            </a:pPr>
+            <a:r>
+              <a:rPr lang="en-US" sz="1500" b="1" dirty="0">
+                <a:solidFill>
+                  <a:srgbClr val="0F5132"/>
+                </a:solidFill>
+                <a:latin typeface="Arial" pitchFamily="34" charset="0"/>
+                <a:ea typeface="Arial" pitchFamily="34" charset="-122"/>
+                <a:cs typeface="Arial" pitchFamily="34" charset="-120"/>
+              </a:rPr>
+              <a:t>Retrieval и генерация</a:t>
+            </a:r>
+            <a:endParaRPr lang="en-US" sz="1500" dirty="0"/>
+          </a:p>
+        </p:txBody>
+      </p:sp>
+      <p:sp>
+        <p:nvSpPr>
+          <p:cNvPr id="12" name="Text 10"/>
+          <p:cNvSpPr/>
+          <p:nvPr/>
+        </p:nvSpPr>
+        <p:spPr>
+          <a:xfrm>
+            <a:off x="5989320" y="2075688"/>
+            <a:ext cx="4937760" cy="2148840"/>
+          </a:xfrm>
+          <a:prstGeom prst="rect">
+            <a:avLst/>
+          </a:prstGeom>
+          <a:noFill/>
+          <a:ln/>
+        </p:spPr>
+        <p:txBody>
+          <a:bodyPr wrap="square" lIns="254" tIns="254" rIns="254" bIns="254" rtlCol="0" anchor="t">
+            <a:normAutofit/>
+          </a:bodyPr>
+          <a:lstStyle/>
           <a:p>
             <a:pPr marL="177800" indent="-177800">
               <a:buSzPct val="100000"/>
               <a:buChar char="•"/>
             </a:pPr>
             <a:r>
-              <a:rPr lang="en-US" sz="1700" dirty="0">
-                <a:solidFill>
-                  <a:srgbClr val="17211D"/>
-                </a:solidFill>
-                <a:latin typeface="Arial" pitchFamily="34" charset="0"/>
-                <a:ea typeface="Arial" pitchFamily="34" charset="-122"/>
-                <a:cs typeface="Arial" pitchFamily="34" charset="-120"/>
-              </a:rPr>
-              <a:t>Легкая модель: Qwen3-0.6B-Instruct-GGUF.</a:t>
-            </a:r>
-            <a:endParaRPr lang="en-US" sz="1700" dirty="0"/>
+              <a:rPr lang="en-US" sz="1520" dirty="0">
+                <a:solidFill>
+                  <a:srgbClr val="111111"/>
+                </a:solidFill>
+                <a:latin typeface="Arial" pitchFamily="34" charset="0"/>
+                <a:ea typeface="Arial" pitchFamily="34" charset="-122"/>
+                <a:cs typeface="Arial" pitchFamily="34" charset="-120"/>
+              </a:rPr>
+              <a:t>Qdrant хранит документы и векторные представления.</a:t>
+            </a:r>
+            <a:endParaRPr lang="en-US" sz="1520" dirty="0"/>
+          </a:p>
+          <a:p>
+            <a:pPr marL="177800" indent="-177800">
+              <a:buSzPct val="100000"/>
+              <a:buChar char="•"/>
+            </a:pPr>
+            <a:r>
+              <a:rPr lang="en-US" sz="1520" dirty="0">
+                <a:solidFill>
+                  <a:srgbClr val="111111"/>
+                </a:solidFill>
+                <a:latin typeface="Arial" pitchFamily="34" charset="0"/>
+                <a:ea typeface="Arial" pitchFamily="34" charset="-122"/>
+                <a:cs typeface="Arial" pitchFamily="34" charset="-120"/>
+              </a:rPr>
+              <a:t>Ответ строится по top-k источникам.</a:t>
+            </a:r>
+            <a:endParaRPr lang="en-US" sz="1520" dirty="0"/>
+          </a:p>
+          <a:p>
+            <a:pPr marL="177800" indent="-177800">
+              <a:buSzPct val="100000"/>
+              <a:buChar char="•"/>
+            </a:pPr>
+            <a:r>
+              <a:rPr lang="en-US" sz="1520" dirty="0">
+                <a:solidFill>
+                  <a:srgbClr val="111111"/>
+                </a:solidFill>
+                <a:latin typeface="Arial" pitchFamily="34" charset="0"/>
+                <a:ea typeface="Arial" pitchFamily="34" charset="-122"/>
+                <a:cs typeface="Arial" pitchFamily="34" charset="-120"/>
+              </a:rPr>
+              <a:t>Template generator дает стабильный demo.</a:t>
+            </a:r>
+            <a:endParaRPr lang="en-US" sz="1520" dirty="0"/>
+          </a:p>
+          <a:p>
+            <a:pPr marL="177800" indent="-177800">
+              <a:buSzPct val="100000"/>
+              <a:buChar char="•"/>
+            </a:pPr>
+            <a:r>
+              <a:rPr lang="en-US" sz="1520" dirty="0">
+                <a:solidFill>
+                  <a:srgbClr val="111111"/>
+                </a:solidFill>
+                <a:latin typeface="Arial" pitchFamily="34" charset="0"/>
+                <a:ea typeface="Arial" pitchFamily="34" charset="-122"/>
+                <a:cs typeface="Arial" pitchFamily="34" charset="-120"/>
+              </a:rPr>
+              <a:t>LLM-режим подключает Qwen3-0.6B-Instruct-GGUF через llama.cpp.</a:t>
+            </a:r>
+            <a:endParaRPr lang="en-US" sz="1520" dirty="0"/>
+          </a:p>
+        </p:txBody>
+      </p:sp>
+      <p:sp>
+        <p:nvSpPr>
+          <p:cNvPr id="13" name="Text 11"/>
+          <p:cNvSpPr/>
+          <p:nvPr/>
+        </p:nvSpPr>
+        <p:spPr>
+          <a:xfrm>
+            <a:off x="822960" y="5029200"/>
+            <a:ext cx="9875520" cy="320040"/>
+          </a:xfrm>
+          <a:prstGeom prst="rect">
+            <a:avLst/>
+          </a:prstGeom>
+          <a:noFill/>
+          <a:ln/>
+        </p:spPr>
+        <p:txBody>
+          <a:bodyPr wrap="square" lIns="0" tIns="0" rIns="0" bIns="0" rtlCol="0" anchor="ctr"/>
+          <a:lstStyle/>
+          <a:p>
+            <a:pPr indent="0" marL="0">
+              <a:buNone/>
+            </a:pPr>
+            <a:r>
+              <a:rPr lang="en-US" sz="1450" b="1" dirty="0">
+                <a:solidFill>
+                  <a:srgbClr val="1F3A5F"/>
+                </a:solidFill>
+                <a:latin typeface="Arial" pitchFamily="34" charset="0"/>
+                <a:ea typeface="Arial" pitchFamily="34" charset="-122"/>
+                <a:cs typeface="Arial" pitchFamily="34" charset="-120"/>
+              </a:rPr>
+              <a:t>MLflow используется как точка учета экспериментов, метрик и артефактов моделей.</a:t>
+            </a:r>
+            <a:endParaRPr lang="en-US" sz="1450" dirty="0"/>
           </a:p>
         </p:txBody>
       </p:sp>
@@ -7795,7 +9104,7 @@
     <p:bg>
       <p:bgPr>
         <a:solidFill>
-          <a:srgbClr val="F7FAF8"/>
+          <a:srgbClr val="F8F9F8"/>
         </a:solidFill>
       </p:bgPr>
     </p:bg>
@@ -7828,11 +9137,11 @@
             <a:avLst/>
           </a:prstGeom>
           <a:solidFill>
-            <a:srgbClr val="F7FAF8"/>
+            <a:srgbClr val="F8F9F8"/>
           </a:solidFill>
           <a:ln w="12700">
             <a:solidFill>
-              <a:srgbClr val="F7FAF8"/>
+              <a:srgbClr val="F8F9F8"/>
             </a:solidFill>
             <a:prstDash val="solid"/>
           </a:ln>
@@ -7872,7 +9181,7 @@
         <p:spPr>
           <a:xfrm>
             <a:off x="594360" y="411480"/>
-            <a:ext cx="9875520" cy="777240"/>
+            <a:ext cx="10424160" cy="658368"/>
           </a:xfrm>
           <a:prstGeom prst="rect">
             <a:avLst/>
@@ -7890,9 +9199,9 @@
               <a:buNone/>
             </a:pPr>
             <a:r>
-              <a:rPr lang="en-US" sz="2700" b="1" dirty="0">
-                <a:solidFill>
-                  <a:srgbClr val="17211D"/>
+              <a:rPr lang="en-US" sz="2500" b="1" dirty="0">
+                <a:solidFill>
+                  <a:srgbClr val="111111"/>
                 </a:solidFill>
                 <a:latin typeface="Arial" pitchFamily="34" charset="0"/>
                 <a:ea typeface="Arial" pitchFamily="34" charset="-122"/>
@@ -7900,7 +9209,7 @@
               </a:rPr>
               <a:t>Интерфейс приложения</a:t>
             </a:r>
-            <a:endParaRPr lang="en-US" sz="2700" dirty="0"/>
+            <a:endParaRPr lang="en-US" sz="2500" dirty="0"/>
           </a:p>
         </p:txBody>
       </p:sp>
@@ -7912,7 +9221,7 @@
         </p:nvSpPr>
         <p:spPr>
           <a:xfrm>
-            <a:off x="612648" y="1133856"/>
+            <a:off x="612648" y="1060704"/>
             <a:ext cx="9875520" cy="320040"/>
           </a:xfrm>
           <a:prstGeom prst="rect">
@@ -7931,7 +9240,7 @@
             <a:r>
               <a:rPr lang="en-US" sz="1250" dirty="0">
                 <a:solidFill>
-                  <a:srgbClr val="60706A"/>
+                  <a:srgbClr val="555F5B"/>
                 </a:solidFill>
                 <a:latin typeface="Arial" pitchFamily="34" charset="0"/>
                 <a:ea typeface="Arial" pitchFamily="34" charset="-122"/>
@@ -7970,13 +9279,79 @@
             <a:r>
               <a:rPr lang="en-US" sz="850" dirty="0">
                 <a:solidFill>
-                  <a:srgbClr val="60706A"/>
-                </a:solidFill>
-                <a:latin typeface="Arial" pitchFamily="34" charset="0"/>
-                <a:ea typeface="Arial" pitchFamily="34" charset="-122"/>
-                <a:cs typeface="Arial" pitchFamily="34" charset="-120"/>
-              </a:rPr>
-              <a:t>news-analysis · 8/12</a:t>
+                  <a:srgbClr val="555F5B"/>
+                </a:solidFill>
+                <a:latin typeface="Arial" pitchFamily="34" charset="0"/>
+                <a:ea typeface="Arial" pitchFamily="34" charset="-122"/>
+                <a:cs typeface="Arial" pitchFamily="34" charset="-120"/>
+              </a:rPr>
+              <a:t>Прудиев Алексей Сергеевич · ПМ23-4 · 8/12</a:t>
+            </a:r>
+            <a:endParaRPr lang="en-US" sz="850" dirty="0"/>
+          </a:p>
+        </p:txBody>
+      </p:sp>
+      <p:sp>
+        <p:nvSpPr>
+          <p:cNvPr id="7" name="Shape 5"/>
+          <p:cNvSpPr/>
+          <p:nvPr/>
+        </p:nvSpPr>
+        <p:spPr>
+          <a:xfrm>
+            <a:off x="502920" y="1078992"/>
+            <a:ext cx="2377440" cy="310896"/>
+          </a:xfrm>
+          <a:prstGeom prst="rect">
+            <a:avLst/>
+          </a:prstGeom>
+          <a:solidFill>
+            <a:srgbClr val="0F5132"/>
+          </a:solidFill>
+          <a:ln w="12700">
+            <a:solidFill>
+              <a:srgbClr val="0F5132"/>
+            </a:solidFill>
+            <a:prstDash val="solid"/>
+          </a:ln>
+        </p:spPr>
+      </p:sp>
+      <p:sp>
+        <p:nvSpPr>
+          <p:cNvPr id="8" name="Text 6"/>
+          <p:cNvSpPr/>
+          <p:nvPr/>
+        </p:nvSpPr>
+        <p:spPr>
+          <a:xfrm>
+            <a:off x="576072" y="1152144"/>
+            <a:ext cx="2231136" cy="109728"/>
+          </a:xfrm>
+          <a:prstGeom prst="rect">
+            <a:avLst/>
+          </a:prstGeom>
+          <a:noFill/>
+          <a:ln/>
+        </p:spPr>
+        <p:txBody>
+          <a:bodyPr wrap="square" lIns="0" tIns="0" rIns="0" bIns="0" rtlCol="0" anchor="ctr">
+            <a:normAutofit/>
+          </a:bodyPr>
+          <a:lstStyle/>
+          <a:p>
+            <a:pPr indent="0" marL="0">
+              <a:buNone/>
+            </a:pPr>
+            <a:r>
+              <a:rPr lang="en-US" sz="850" b="1" dirty="0">
+                <a:solidFill>
+                  <a:srgbClr val="FFFFFF"/>
+                </a:solidFill>
+                <a:latin typeface="Arial" pitchFamily="34" charset="0"/>
+                <a:ea typeface="Arial" pitchFamily="34" charset="-122"/>
+                <a:cs typeface="Arial" pitchFamily="34" charset="-120"/>
+              </a:rPr>
+              <a:t>Критерий: методы и результаты</a:t>
             </a:r>
             <a:endParaRPr lang="en-US" sz="850" dirty="0"/>
           </a:p>
@@ -7984,7 +9359,7 @@
       </p:sp>
       <p:pic>
         <p:nvPicPr>
-          <p:cNvPr id="7" name="Image 0" descr="/Users/a.prudiev/PyCharmMiscProject/curswork/docs/final/assets/ui-demo-screenshot.png">    </p:cNvPr>
+          <p:cNvPr id="9" name="Image 0" descr="/Users/a.prudiev/PyCharmMiscProject/curswork/docs/final/assets/ui-demo-screenshot.png">    </p:cNvPr>
           <p:cNvPicPr>
             <a:picLocks noChangeAspect="1"/>
           </p:cNvPicPr>
@@ -8020,7 +9395,7 @@
     <p:bg>
       <p:bgPr>
         <a:solidFill>
-          <a:srgbClr val="F7FAF8"/>
+          <a:srgbClr val="F8F9F8"/>
         </a:solidFill>
       </p:bgPr>
     </p:bg>
@@ -8053,11 +9428,11 @@
             <a:avLst/>
           </a:prstGeom>
           <a:solidFill>
-            <a:srgbClr val="F7FAF8"/>
+            <a:srgbClr val="F8F9F8"/>
           </a:solidFill>
           <a:ln w="12700">
             <a:solidFill>
-              <a:srgbClr val="F7FAF8"/>
+              <a:srgbClr val="F8F9F8"/>
             </a:solidFill>
             <a:prstDash val="solid"/>
           </a:ln>
@@ -8097,7 +9472,7 @@
         <p:spPr>
           <a:xfrm>
             <a:off x="594360" y="411480"/>
-            <a:ext cx="9875520" cy="777240"/>
+            <a:ext cx="10424160" cy="658368"/>
           </a:xfrm>
           <a:prstGeom prst="rect">
             <a:avLst/>
@@ -8115,9 +9490,9 @@
               <a:buNone/>
             </a:pPr>
             <a:r>
-              <a:rPr lang="en-US" sz="2700" b="1" dirty="0">
-                <a:solidFill>
-                  <a:srgbClr val="17211D"/>
+              <a:rPr lang="en-US" sz="2500" b="1" dirty="0">
+                <a:solidFill>
+                  <a:srgbClr val="111111"/>
                 </a:solidFill>
                 <a:latin typeface="Arial" pitchFamily="34" charset="0"/>
                 <a:ea typeface="Arial" pitchFamily="34" charset="-122"/>
@@ -8125,7 +9500,7 @@
               </a:rPr>
               <a:t>Результаты проверки</a:t>
             </a:r>
-            <a:endParaRPr lang="en-US" sz="2700" dirty="0"/>
+            <a:endParaRPr lang="en-US" sz="2500" dirty="0"/>
           </a:p>
         </p:txBody>
       </p:sp>
@@ -8137,7 +9512,7 @@
         </p:nvSpPr>
         <p:spPr>
           <a:xfrm>
-            <a:off x="612648" y="1133856"/>
+            <a:off x="612648" y="1060704"/>
             <a:ext cx="9875520" cy="320040"/>
           </a:xfrm>
           <a:prstGeom prst="rect">
@@ -8156,7 +9531,7 @@
             <a:r>
               <a:rPr lang="en-US" sz="1250" dirty="0">
                 <a:solidFill>
-                  <a:srgbClr val="60706A"/>
+                  <a:srgbClr val="555F5B"/>
                 </a:solidFill>
                 <a:latin typeface="Arial" pitchFamily="34" charset="0"/>
                 <a:ea typeface="Arial" pitchFamily="34" charset="-122"/>
@@ -8195,13 +9570,13 @@
             <a:r>
               <a:rPr lang="en-US" sz="850" dirty="0">
                 <a:solidFill>
-                  <a:srgbClr val="60706A"/>
-                </a:solidFill>
-                <a:latin typeface="Arial" pitchFamily="34" charset="0"/>
-                <a:ea typeface="Arial" pitchFamily="34" charset="-122"/>
-                <a:cs typeface="Arial" pitchFamily="34" charset="-120"/>
-              </a:rPr>
-              <a:t>news-analysis · 9/12</a:t>
+                  <a:srgbClr val="555F5B"/>
+                </a:solidFill>
+                <a:latin typeface="Arial" pitchFamily="34" charset="0"/>
+                <a:ea typeface="Arial" pitchFamily="34" charset="-122"/>
+                <a:cs typeface="Arial" pitchFamily="34" charset="-120"/>
+              </a:rPr>
+              <a:t>Прудиев Алексей Сергеевич · ПМ23-4 · 9/12</a:t>
             </a:r>
             <a:endParaRPr lang="en-US" sz="850" dirty="0"/>
           </a:p>
@@ -8215,18 +9590,18 @@
         </p:nvSpPr>
         <p:spPr>
           <a:xfrm>
-            <a:off x="822960" y="1371600"/>
-            <a:ext cx="3657600" cy="502920"/>
-          </a:xfrm>
-          <a:prstGeom prst="rect">
-            <a:avLst/>
-          </a:prstGeom>
-          <a:solidFill>
-            <a:srgbClr val="EAF4EF"/>
-          </a:solidFill>
-          <a:ln w="10160">
+            <a:off x="822960" y="1078992"/>
+            <a:ext cx="2377440" cy="310896"/>
+          </a:xfrm>
+          <a:prstGeom prst="rect">
+            <a:avLst/>
+          </a:prstGeom>
+          <a:solidFill>
+            <a:srgbClr val="0F5132"/>
+          </a:solidFill>
+          <a:ln w="12700">
             <a:solidFill>
-              <a:srgbClr val="C8D8D1"/>
+              <a:srgbClr val="0F5132"/>
             </a:solidFill>
             <a:prstDash val="solid"/>
           </a:ln>
@@ -8240,8 +9615,8 @@
         </p:nvSpPr>
         <p:spPr>
           <a:xfrm>
-            <a:off x="896112" y="1463040"/>
-            <a:ext cx="3511296" cy="374904"/>
+            <a:off x="896112" y="1152144"/>
+            <a:ext cx="2231136" cy="109728"/>
           </a:xfrm>
           <a:prstGeom prst="rect">
             <a:avLst/>
@@ -8259,17 +9634,17 @@
               <a:buNone/>
             </a:pPr>
             <a:r>
-              <a:rPr lang="en-US" sz="1050" b="1" dirty="0">
-                <a:solidFill>
-                  <a:srgbClr val="0F5132"/>
-                </a:solidFill>
-                <a:latin typeface="Arial" pitchFamily="34" charset="0"/>
-                <a:ea typeface="Arial" pitchFamily="34" charset="-122"/>
-                <a:cs typeface="Arial" pitchFamily="34" charset="-120"/>
-              </a:rPr>
-              <a:t>Проверка</a:t>
-            </a:r>
-            <a:endParaRPr lang="en-US" sz="1050" dirty="0"/>
+              <a:rPr lang="en-US" sz="850" b="1" dirty="0">
+                <a:solidFill>
+                  <a:srgbClr val="FFFFFF"/>
+                </a:solidFill>
+                <a:latin typeface="Arial" pitchFamily="34" charset="0"/>
+                <a:ea typeface="Arial" pitchFamily="34" charset="-122"/>
+                <a:cs typeface="Arial" pitchFamily="34" charset="-120"/>
+              </a:rPr>
+              <a:t>Критерий: методы и результаты</a:t>
+            </a:r>
+            <a:endParaRPr lang="en-US" sz="850" dirty="0"/>
           </a:p>
         </p:txBody>
       </p:sp>
@@ -8281,18 +9656,18 @@
         </p:nvSpPr>
         <p:spPr>
           <a:xfrm>
-            <a:off x="4480560" y="1371600"/>
-            <a:ext cx="5029200" cy="502920"/>
-          </a:xfrm>
-          <a:prstGeom prst="rect">
-            <a:avLst/>
-          </a:prstGeom>
-          <a:solidFill>
-            <a:srgbClr val="EAF4EF"/>
+            <a:off x="822960" y="1371600"/>
+            <a:ext cx="3657600" cy="457200"/>
+          </a:xfrm>
+          <a:prstGeom prst="rect">
+            <a:avLst/>
+          </a:prstGeom>
+          <a:solidFill>
+            <a:srgbClr val="EDF3F0"/>
           </a:solidFill>
           <a:ln w="10160">
             <a:solidFill>
-              <a:srgbClr val="C8D8D1"/>
+              <a:srgbClr val="B7C6C0"/>
             </a:solidFill>
             <a:prstDash val="solid"/>
           </a:ln>
@@ -8306,8 +9681,8 @@
         </p:nvSpPr>
         <p:spPr>
           <a:xfrm>
-            <a:off x="4553712" y="1463040"/>
-            <a:ext cx="4882896" cy="374904"/>
+            <a:off x="896112" y="1463040"/>
+            <a:ext cx="3511296" cy="329184"/>
           </a:xfrm>
           <a:prstGeom prst="rect">
             <a:avLst/>
@@ -8333,7 +9708,7 @@
                 <a:ea typeface="Arial" pitchFamily="34" charset="-122"/>
                 <a:cs typeface="Arial" pitchFamily="34" charset="-120"/>
               </a:rPr>
-              <a:t>Результат</a:t>
+              <a:t>Проверка</a:t>
             </a:r>
             <a:endParaRPr lang="en-US" sz="1050" dirty="0"/>
           </a:p>
@@ -8347,18 +9722,18 @@
         </p:nvSpPr>
         <p:spPr>
           <a:xfrm>
-            <a:off x="822960" y="1874520"/>
-            <a:ext cx="3657600" cy="502920"/>
-          </a:xfrm>
-          <a:prstGeom prst="rect">
-            <a:avLst/>
-          </a:prstGeom>
-          <a:solidFill>
-            <a:srgbClr val="FFFFFF"/>
+            <a:off x="4480560" y="1371600"/>
+            <a:ext cx="5029200" cy="457200"/>
+          </a:xfrm>
+          <a:prstGeom prst="rect">
+            <a:avLst/>
+          </a:prstGeom>
+          <a:solidFill>
+            <a:srgbClr val="EDF3F0"/>
           </a:solidFill>
           <a:ln w="10160">
             <a:solidFill>
-              <a:srgbClr val="C8D8D1"/>
+              <a:srgbClr val="B7C6C0"/>
             </a:solidFill>
             <a:prstDash val="solid"/>
           </a:ln>
@@ -8372,8 +9747,8 @@
         </p:nvSpPr>
         <p:spPr>
           <a:xfrm>
-            <a:off x="896112" y="1965960"/>
-            <a:ext cx="3511296" cy="374904"/>
+            <a:off x="4553712" y="1463040"/>
+            <a:ext cx="4882896" cy="329184"/>
           </a:xfrm>
           <a:prstGeom prst="rect">
             <a:avLst/>
@@ -8391,17 +9766,17 @@
               <a:buNone/>
             </a:pPr>
             <a:r>
-              <a:rPr lang="en-US" sz="1000" dirty="0">
-                <a:solidFill>
-                  <a:srgbClr val="17211D"/>
-                </a:solidFill>
-                <a:latin typeface="Arial" pitchFamily="34" charset="0"/>
-                <a:ea typeface="Arial" pitchFamily="34" charset="-122"/>
-                <a:cs typeface="Arial" pitchFamily="34" charset="-120"/>
-              </a:rPr>
-              <a:t>api-gateway health</a:t>
-            </a:r>
-            <a:endParaRPr lang="en-US" sz="1000" dirty="0"/>
+              <a:rPr lang="en-US" sz="1050" b="1" dirty="0">
+                <a:solidFill>
+                  <a:srgbClr val="0F5132"/>
+                </a:solidFill>
+                <a:latin typeface="Arial" pitchFamily="34" charset="0"/>
+                <a:ea typeface="Arial" pitchFamily="34" charset="-122"/>
+                <a:cs typeface="Arial" pitchFamily="34" charset="-120"/>
+              </a:rPr>
+              <a:t>Результат</a:t>
+            </a:r>
+            <a:endParaRPr lang="en-US" sz="1050" dirty="0"/>
           </a:p>
         </p:txBody>
       </p:sp>
@@ -8413,8 +9788,8 @@
         </p:nvSpPr>
         <p:spPr>
           <a:xfrm>
-            <a:off x="4480560" y="1874520"/>
-            <a:ext cx="5029200" cy="502920"/>
+            <a:off x="822960" y="1828800"/>
+            <a:ext cx="3657600" cy="457200"/>
           </a:xfrm>
           <a:prstGeom prst="rect">
             <a:avLst/>
@@ -8424,7 +9799,7 @@
           </a:solidFill>
           <a:ln w="10160">
             <a:solidFill>
-              <a:srgbClr val="C8D8D1"/>
+              <a:srgbClr val="B7C6C0"/>
             </a:solidFill>
             <a:prstDash val="solid"/>
           </a:ln>
@@ -8438,8 +9813,8 @@
         </p:nvSpPr>
         <p:spPr>
           <a:xfrm>
-            <a:off x="4553712" y="1965960"/>
-            <a:ext cx="4882896" cy="374904"/>
+            <a:off x="896112" y="1920240"/>
+            <a:ext cx="3511296" cy="329184"/>
           </a:xfrm>
           <a:prstGeom prst="rect">
             <a:avLst/>
@@ -8459,13 +9834,13 @@
             <a:r>
               <a:rPr lang="en-US" sz="1000" dirty="0">
                 <a:solidFill>
-                  <a:srgbClr val="17211D"/>
-                </a:solidFill>
-                <a:latin typeface="Arial" pitchFamily="34" charset="0"/>
-                <a:ea typeface="Arial" pitchFamily="34" charset="-122"/>
-                <a:cs typeface="Arial" pitchFamily="34" charset="-120"/>
-              </a:rPr>
-              <a:t>ok</a:t>
+                  <a:srgbClr val="111111"/>
+                </a:solidFill>
+                <a:latin typeface="Arial" pitchFamily="34" charset="0"/>
+                <a:ea typeface="Arial" pitchFamily="34" charset="-122"/>
+                <a:cs typeface="Arial" pitchFamily="34" charset="-120"/>
+              </a:rPr>
+              <a:t>api-gateway health</a:t>
             </a:r>
             <a:endParaRPr lang="en-US" sz="1000" dirty="0"/>
           </a:p>
@@ -8479,8 +9854,8 @@
         </p:nvSpPr>
         <p:spPr>
           <a:xfrm>
-            <a:off x="822960" y="2377440"/>
-            <a:ext cx="3657600" cy="502920"/>
+            <a:off x="4480560" y="1828800"/>
+            <a:ext cx="5029200" cy="457200"/>
           </a:xfrm>
           <a:prstGeom prst="rect">
             <a:avLst/>
@@ -8490,7 +9865,7 @@
           </a:solidFill>
           <a:ln w="10160">
             <a:solidFill>
-              <a:srgbClr val="C8D8D1"/>
+              <a:srgbClr val="B7C6C0"/>
             </a:solidFill>
             <a:prstDash val="solid"/>
           </a:ln>
@@ -8504,8 +9879,8 @@
         </p:nvSpPr>
         <p:spPr>
           <a:xfrm>
-            <a:off x="896112" y="2468880"/>
-            <a:ext cx="3511296" cy="374904"/>
+            <a:off x="4553712" y="1920240"/>
+            <a:ext cx="4882896" cy="329184"/>
           </a:xfrm>
           <a:prstGeom prst="rect">
             <a:avLst/>
@@ -8525,13 +9900,13 @@
             <a:r>
               <a:rPr lang="en-US" sz="1000" dirty="0">
                 <a:solidFill>
-                  <a:srgbClr val="17211D"/>
-                </a:solidFill>
-                <a:latin typeface="Arial" pitchFamily="34" charset="0"/>
-                <a:ea typeface="Arial" pitchFamily="34" charset="-122"/>
-                <a:cs typeface="Arial" pitchFamily="34" charset="-120"/>
-              </a:rPr>
-              <a:t>news-service health</a:t>
+                  <a:srgbClr val="111111"/>
+                </a:solidFill>
+                <a:latin typeface="Arial" pitchFamily="34" charset="0"/>
+                <a:ea typeface="Arial" pitchFamily="34" charset="-122"/>
+                <a:cs typeface="Arial" pitchFamily="34" charset="-120"/>
+              </a:rPr>
+              <a:t>ok</a:t>
             </a:r>
             <a:endParaRPr lang="en-US" sz="1000" dirty="0"/>
           </a:p>
@@ -8545,8 +9920,8 @@
         </p:nvSpPr>
         <p:spPr>
           <a:xfrm>
-            <a:off x="4480560" y="2377440"/>
-            <a:ext cx="5029200" cy="502920"/>
+            <a:off x="822960" y="2286000"/>
+            <a:ext cx="3657600" cy="457200"/>
           </a:xfrm>
           <a:prstGeom prst="rect">
             <a:avLst/>
@@ -8556,7 +9931,7 @@
           </a:solidFill>
           <a:ln w="10160">
             <a:solidFill>
-              <a:srgbClr val="C8D8D1"/>
+              <a:srgbClr val="B7C6C0"/>
             </a:solidFill>
             <a:prstDash val="solid"/>
           </a:ln>
@@ -8570,8 +9945,8 @@
         </p:nvSpPr>
         <p:spPr>
           <a:xfrm>
-            <a:off x="4553712" y="2468880"/>
-            <a:ext cx="4882896" cy="374904"/>
+            <a:off x="896112" y="2377440"/>
+            <a:ext cx="3511296" cy="329184"/>
           </a:xfrm>
           <a:prstGeom prst="rect">
             <a:avLst/>
@@ -8591,13 +9966,13 @@
             <a:r>
               <a:rPr lang="en-US" sz="1000" dirty="0">
                 <a:solidFill>
-                  <a:srgbClr val="17211D"/>
-                </a:solidFill>
-                <a:latin typeface="Arial" pitchFamily="34" charset="0"/>
-                <a:ea typeface="Arial" pitchFamily="34" charset="-122"/>
-                <a:cs typeface="Arial" pitchFamily="34" charset="-120"/>
-              </a:rPr>
-              <a:t>ok</a:t>
+                  <a:srgbClr val="111111"/>
+                </a:solidFill>
+                <a:latin typeface="Arial" pitchFamily="34" charset="0"/>
+                <a:ea typeface="Arial" pitchFamily="34" charset="-122"/>
+                <a:cs typeface="Arial" pitchFamily="34" charset="-120"/>
+              </a:rPr>
+              <a:t>news-service health</a:t>
             </a:r>
             <a:endParaRPr lang="en-US" sz="1000" dirty="0"/>
           </a:p>
@@ -8611,8 +9986,8 @@
         </p:nvSpPr>
         <p:spPr>
           <a:xfrm>
-            <a:off x="822960" y="2880360"/>
-            <a:ext cx="3657600" cy="502920"/>
+            <a:off x="4480560" y="2286000"/>
+            <a:ext cx="5029200" cy="457200"/>
           </a:xfrm>
           <a:prstGeom prst="rect">
             <a:avLst/>
@@ -8622,7 +9997,7 @@
           </a:solidFill>
           <a:ln w="10160">
             <a:solidFill>
-              <a:srgbClr val="C8D8D1"/>
+              <a:srgbClr val="B7C6C0"/>
             </a:solidFill>
             <a:prstDash val="solid"/>
           </a:ln>
@@ -8636,8 +10011,8 @@
         </p:nvSpPr>
         <p:spPr>
           <a:xfrm>
-            <a:off x="896112" y="2971800"/>
-            <a:ext cx="3511296" cy="374904"/>
+            <a:off x="4553712" y="2377440"/>
+            <a:ext cx="4882896" cy="329184"/>
           </a:xfrm>
           <a:prstGeom prst="rect">
             <a:avLst/>
@@ -8657,13 +10032,13 @@
             <a:r>
               <a:rPr lang="en-US" sz="1000" dirty="0">
                 <a:solidFill>
-                  <a:srgbClr val="17211D"/>
-                </a:solidFill>
-                <a:latin typeface="Arial" pitchFamily="34" charset="0"/>
-                <a:ea typeface="Arial" pitchFamily="34" charset="-122"/>
-                <a:cs typeface="Arial" pitchFamily="34" charset="-120"/>
-              </a:rPr>
-              <a:t>CSV preview</a:t>
+                  <a:srgbClr val="111111"/>
+                </a:solidFill>
+                <a:latin typeface="Arial" pitchFamily="34" charset="0"/>
+                <a:ea typeface="Arial" pitchFamily="34" charset="-122"/>
+                <a:cs typeface="Arial" pitchFamily="34" charset="-120"/>
+              </a:rPr>
+              <a:t>ok</a:t>
             </a:r>
             <a:endParaRPr lang="en-US" sz="1000" dirty="0"/>
           </a:p>
@@ -8677,8 +10052,8 @@
         </p:nvSpPr>
         <p:spPr>
           <a:xfrm>
-            <a:off x="4480560" y="2880360"/>
-            <a:ext cx="5029200" cy="502920"/>
+            <a:off x="822960" y="2743200"/>
+            <a:ext cx="3657600" cy="457200"/>
           </a:xfrm>
           <a:prstGeom prst="rect">
             <a:avLst/>
@@ -8688,7 +10063,7 @@
           </a:solidFill>
           <a:ln w="10160">
             <a:solidFill>
-              <a:srgbClr val="C8D8D1"/>
+              <a:srgbClr val="B7C6C0"/>
             </a:solidFill>
             <a:prstDash val="solid"/>
           </a:ln>
@@ -8702,8 +10077,8 @@
         </p:nvSpPr>
         <p:spPr>
           <a:xfrm>
-            <a:off x="4553712" y="2971800"/>
-            <a:ext cx="4882896" cy="374904"/>
+            <a:off x="896112" y="2834640"/>
+            <a:ext cx="3511296" cy="329184"/>
           </a:xfrm>
           <a:prstGeom prst="rect">
             <a:avLst/>
@@ -8723,13 +10098,13 @@
             <a:r>
               <a:rPr lang="en-US" sz="1000" dirty="0">
                 <a:solidFill>
-                  <a:srgbClr val="17211D"/>
-                </a:solidFill>
-                <a:latin typeface="Arial" pitchFamily="34" charset="0"/>
-                <a:ea typeface="Arial" pitchFamily="34" charset="-122"/>
-                <a:cs typeface="Arial" pitchFamily="34" charset="-120"/>
-              </a:rPr>
-              <a:t>5 документов</a:t>
+                  <a:srgbClr val="111111"/>
+                </a:solidFill>
+                <a:latin typeface="Arial" pitchFamily="34" charset="0"/>
+                <a:ea typeface="Arial" pitchFamily="34" charset="-122"/>
+                <a:cs typeface="Arial" pitchFamily="34" charset="-120"/>
+              </a:rPr>
+              <a:t>CSV preview</a:t>
             </a:r>
             <a:endParaRPr lang="en-US" sz="1000" dirty="0"/>
           </a:p>
@@ -8743,8 +10118,8 @@
         </p:nvSpPr>
         <p:spPr>
           <a:xfrm>
-            <a:off x="822960" y="3383280"/>
-            <a:ext cx="3657600" cy="502920"/>
+            <a:off x="4480560" y="2743200"/>
+            <a:ext cx="5029200" cy="457200"/>
           </a:xfrm>
           <a:prstGeom prst="rect">
             <a:avLst/>
@@ -8754,7 +10129,7 @@
           </a:solidFill>
           <a:ln w="10160">
             <a:solidFill>
-              <a:srgbClr val="C8D8D1"/>
+              <a:srgbClr val="B7C6C0"/>
             </a:solidFill>
             <a:prstDash val="solid"/>
           </a:ln>
@@ -8768,8 +10143,8 @@
         </p:nvSpPr>
         <p:spPr>
           <a:xfrm>
-            <a:off x="896112" y="3474720"/>
-            <a:ext cx="3511296" cy="374904"/>
+            <a:off x="4553712" y="2834640"/>
+            <a:ext cx="4882896" cy="329184"/>
           </a:xfrm>
           <a:prstGeom prst="rect">
             <a:avLst/>
@@ -8789,13 +10164,13 @@
             <a:r>
               <a:rPr lang="en-US" sz="1000" dirty="0">
                 <a:solidFill>
-                  <a:srgbClr val="17211D"/>
-                </a:solidFill>
-                <a:latin typeface="Arial" pitchFamily="34" charset="0"/>
-                <a:ea typeface="Arial" pitchFamily="34" charset="-122"/>
-                <a:cs typeface="Arial" pitchFamily="34" charset="-120"/>
-              </a:rPr>
-              <a:t>index CSV</a:t>
+                  <a:srgbClr val="111111"/>
+                </a:solidFill>
+                <a:latin typeface="Arial" pitchFamily="34" charset="0"/>
+                <a:ea typeface="Arial" pitchFamily="34" charset="-122"/>
+                <a:cs typeface="Arial" pitchFamily="34" charset="-120"/>
+              </a:rPr>
+              <a:t>5 документов</a:t>
             </a:r>
             <a:endParaRPr lang="en-US" sz="1000" dirty="0"/>
           </a:p>
@@ -8809,8 +10184,8 @@
         </p:nvSpPr>
         <p:spPr>
           <a:xfrm>
-            <a:off x="4480560" y="3383280"/>
-            <a:ext cx="5029200" cy="502920"/>
+            <a:off x="822960" y="3200400"/>
+            <a:ext cx="3657600" cy="457200"/>
           </a:xfrm>
           <a:prstGeom prst="rect">
             <a:avLst/>
@@ -8820,7 +10195,7 @@
           </a:solidFill>
           <a:ln w="10160">
             <a:solidFill>
-              <a:srgbClr val="C8D8D1"/>
+              <a:srgbClr val="B7C6C0"/>
             </a:solidFill>
             <a:prstDash val="solid"/>
           </a:ln>
@@ -8834,8 +10209,8 @@
         </p:nvSpPr>
         <p:spPr>
           <a:xfrm>
-            <a:off x="4553712" y="3474720"/>
-            <a:ext cx="4882896" cy="374904"/>
+            <a:off x="896112" y="3291840"/>
+            <a:ext cx="3511296" cy="329184"/>
           </a:xfrm>
           <a:prstGeom prst="rect">
             <a:avLst/>
@@ -8855,13 +10230,13 @@
             <a:r>
               <a:rPr lang="en-US" sz="1000" dirty="0">
                 <a:solidFill>
-                  <a:srgbClr val="17211D"/>
-                </a:solidFill>
-                <a:latin typeface="Arial" pitchFamily="34" charset="0"/>
-                <a:ea typeface="Arial" pitchFamily="34" charset="-122"/>
-                <a:cs typeface="Arial" pitchFamily="34" charset="-120"/>
-              </a:rPr>
-              <a:t>5 документов</a:t>
+                  <a:srgbClr val="111111"/>
+                </a:solidFill>
+                <a:latin typeface="Arial" pitchFamily="34" charset="0"/>
+                <a:ea typeface="Arial" pitchFamily="34" charset="-122"/>
+                <a:cs typeface="Arial" pitchFamily="34" charset="-120"/>
+              </a:rPr>
+              <a:t>index CSV</a:t>
             </a:r>
             <a:endParaRPr lang="en-US" sz="1000" dirty="0"/>
           </a:p>
@@ -8875,8 +10250,8 @@
         </p:nvSpPr>
         <p:spPr>
           <a:xfrm>
-            <a:off x="822960" y="3886200"/>
-            <a:ext cx="3657600" cy="502920"/>
+            <a:off x="4480560" y="3200400"/>
+            <a:ext cx="5029200" cy="457200"/>
           </a:xfrm>
           <a:prstGeom prst="rect">
             <a:avLst/>
@@ -8886,7 +10261,7 @@
           </a:solidFill>
           <a:ln w="10160">
             <a:solidFill>
-              <a:srgbClr val="C8D8D1"/>
+              <a:srgbClr val="B7C6C0"/>
             </a:solidFill>
             <a:prstDash val="solid"/>
           </a:ln>
@@ -8900,8 +10275,8 @@
         </p:nvSpPr>
         <p:spPr>
           <a:xfrm>
-            <a:off x="896112" y="3977640"/>
-            <a:ext cx="3511296" cy="374904"/>
+            <a:off x="4553712" y="3291840"/>
+            <a:ext cx="4882896" cy="329184"/>
           </a:xfrm>
           <a:prstGeom prst="rect">
             <a:avLst/>
@@ -8921,13 +10296,13 @@
             <a:r>
               <a:rPr lang="en-US" sz="1000" dirty="0">
                 <a:solidFill>
-                  <a:srgbClr val="17211D"/>
-                </a:solidFill>
-                <a:latin typeface="Arial" pitchFamily="34" charset="0"/>
-                <a:ea typeface="Arial" pitchFamily="34" charset="-122"/>
-                <a:cs typeface="Arial" pitchFamily="34" charset="-120"/>
-              </a:rPr>
-              <a:t>Taskiq job</a:t>
+                  <a:srgbClr val="111111"/>
+                </a:solidFill>
+                <a:latin typeface="Arial" pitchFamily="34" charset="0"/>
+                <a:ea typeface="Arial" pitchFamily="34" charset="-122"/>
+                <a:cs typeface="Arial" pitchFamily="34" charset="-120"/>
+              </a:rPr>
+              <a:t>5 документов</a:t>
             </a:r>
             <a:endParaRPr lang="en-US" sz="1000" dirty="0"/>
           </a:p>
@@ -8941,8 +10316,8 @@
         </p:nvSpPr>
         <p:spPr>
           <a:xfrm>
-            <a:off x="4480560" y="3886200"/>
-            <a:ext cx="5029200" cy="502920"/>
+            <a:off x="822960" y="3657600"/>
+            <a:ext cx="3657600" cy="457200"/>
           </a:xfrm>
           <a:prstGeom prst="rect">
             <a:avLst/>
@@ -8952,7 +10327,7 @@
           </a:solidFill>
           <a:ln w="10160">
             <a:solidFill>
-              <a:srgbClr val="C8D8D1"/>
+              <a:srgbClr val="B7C6C0"/>
             </a:solidFill>
             <a:prstDash val="solid"/>
           </a:ln>
@@ -8966,8 +10341,8 @@
         </p:nvSpPr>
         <p:spPr>
           <a:xfrm>
-            <a:off x="4553712" y="3977640"/>
-            <a:ext cx="4882896" cy="374904"/>
+            <a:off x="896112" y="3749040"/>
+            <a:ext cx="3511296" cy="329184"/>
           </a:xfrm>
           <a:prstGeom prst="rect">
             <a:avLst/>
@@ -8987,13 +10362,13 @@
             <a:r>
               <a:rPr lang="en-US" sz="1000" dirty="0">
                 <a:solidFill>
-                  <a:srgbClr val="17211D"/>
-                </a:solidFill>
-                <a:latin typeface="Arial" pitchFamily="34" charset="0"/>
-                <a:ea typeface="Arial" pitchFamily="34" charset="-122"/>
-                <a:cs typeface="Arial" pitchFamily="34" charset="-120"/>
-              </a:rPr>
-              <a:t>queued</a:t>
+                  <a:srgbClr val="111111"/>
+                </a:solidFill>
+                <a:latin typeface="Arial" pitchFamily="34" charset="0"/>
+                <a:ea typeface="Arial" pitchFamily="34" charset="-122"/>
+                <a:cs typeface="Arial" pitchFamily="34" charset="-120"/>
+              </a:rPr>
+              <a:t>Taskiq job</a:t>
             </a:r>
             <a:endParaRPr lang="en-US" sz="1000" dirty="0"/>
           </a:p>
@@ -9007,8 +10382,8 @@
         </p:nvSpPr>
         <p:spPr>
           <a:xfrm>
-            <a:off x="822960" y="4389120"/>
-            <a:ext cx="3657600" cy="502920"/>
+            <a:off x="4480560" y="3657600"/>
+            <a:ext cx="5029200" cy="457200"/>
           </a:xfrm>
           <a:prstGeom prst="rect">
             <a:avLst/>
@@ -9018,7 +10393,7 @@
           </a:solidFill>
           <a:ln w="10160">
             <a:solidFill>
-              <a:srgbClr val="C8D8D1"/>
+              <a:srgbClr val="B7C6C0"/>
             </a:solidFill>
             <a:prstDash val="solid"/>
           </a:ln>
@@ -9032,8 +10407,8 @@
         </p:nvSpPr>
         <p:spPr>
           <a:xfrm>
-            <a:off x="896112" y="4480560"/>
-            <a:ext cx="3511296" cy="374904"/>
+            <a:off x="4553712" y="3749040"/>
+            <a:ext cx="4882896" cy="329184"/>
           </a:xfrm>
           <a:prstGeom prst="rect">
             <a:avLst/>
@@ -9053,13 +10428,13 @@
             <a:r>
               <a:rPr lang="en-US" sz="1000" dirty="0">
                 <a:solidFill>
-                  <a:srgbClr val="17211D"/>
-                </a:solidFill>
-                <a:latin typeface="Arial" pitchFamily="34" charset="0"/>
-                <a:ea typeface="Arial" pitchFamily="34" charset="-122"/>
-                <a:cs typeface="Arial" pitchFamily="34" charset="-120"/>
-              </a:rPr>
-              <a:t>chat SSE</a:t>
+                  <a:srgbClr val="111111"/>
+                </a:solidFill>
+                <a:latin typeface="Arial" pitchFamily="34" charset="0"/>
+                <a:ea typeface="Arial" pitchFamily="34" charset="-122"/>
+                <a:cs typeface="Arial" pitchFamily="34" charset="-120"/>
+              </a:rPr>
+              <a:t>queued</a:t>
             </a:r>
             <a:endParaRPr lang="en-US" sz="1000" dirty="0"/>
           </a:p>
@@ -9073,8 +10448,8 @@
         </p:nvSpPr>
         <p:spPr>
           <a:xfrm>
-            <a:off x="4480560" y="4389120"/>
-            <a:ext cx="5029200" cy="502920"/>
+            <a:off x="822960" y="4114800"/>
+            <a:ext cx="3657600" cy="457200"/>
           </a:xfrm>
           <a:prstGeom prst="rect">
             <a:avLst/>
@@ -9084,7 +10459,7 @@
           </a:solidFill>
           <a:ln w="10160">
             <a:solidFill>
-              <a:srgbClr val="C8D8D1"/>
+              <a:srgbClr val="B7C6C0"/>
             </a:solidFill>
             <a:prstDash val="solid"/>
           </a:ln>
@@ -9098,8 +10473,8 @@
         </p:nvSpPr>
         <p:spPr>
           <a:xfrm>
-            <a:off x="4553712" y="4480560"/>
-            <a:ext cx="4882896" cy="374904"/>
+            <a:off x="896112" y="4206240"/>
+            <a:ext cx="3511296" cy="329184"/>
           </a:xfrm>
           <a:prstGeom prst="rect">
             <a:avLst/>
@@ -9119,13 +10494,13 @@
             <a:r>
               <a:rPr lang="en-US" sz="1000" dirty="0">
                 <a:solidFill>
-                  <a:srgbClr val="17211D"/>
-                </a:solidFill>
-                <a:latin typeface="Arial" pitchFamily="34" charset="0"/>
-                <a:ea typeface="Arial" pitchFamily="34" charset="-122"/>
-                <a:cs typeface="Arial" pitchFamily="34" charset="-120"/>
-              </a:rPr>
-              <a:t>8 событий</a:t>
+                  <a:srgbClr val="111111"/>
+                </a:solidFill>
+                <a:latin typeface="Arial" pitchFamily="34" charset="0"/>
+                <a:ea typeface="Arial" pitchFamily="34" charset="-122"/>
+                <a:cs typeface="Arial" pitchFamily="34" charset="-120"/>
+              </a:rPr>
+              <a:t>retrieval + analysis</a:t>
             </a:r>
             <a:endParaRPr lang="en-US" sz="1000" dirty="0"/>
           </a:p>
@@ -9139,8 +10514,8 @@
         </p:nvSpPr>
         <p:spPr>
           <a:xfrm>
-            <a:off x="822960" y="4892040"/>
-            <a:ext cx="3657600" cy="502920"/>
+            <a:off x="4480560" y="4114800"/>
+            <a:ext cx="5029200" cy="457200"/>
           </a:xfrm>
           <a:prstGeom prst="rect">
             <a:avLst/>
@@ -9150,7 +10525,7 @@
           </a:solidFill>
           <a:ln w="10160">
             <a:solidFill>
-              <a:srgbClr val="C8D8D1"/>
+              <a:srgbClr val="B7C6C0"/>
             </a:solidFill>
             <a:prstDash val="solid"/>
           </a:ln>
@@ -9164,8 +10539,8 @@
         </p:nvSpPr>
         <p:spPr>
           <a:xfrm>
-            <a:off x="896112" y="4983480"/>
-            <a:ext cx="3511296" cy="374904"/>
+            <a:off x="4553712" y="4206240"/>
+            <a:ext cx="4882896" cy="329184"/>
           </a:xfrm>
           <a:prstGeom prst="rect">
             <a:avLst/>
@@ -9185,13 +10560,13 @@
             <a:r>
               <a:rPr lang="en-US" sz="1000" dirty="0">
                 <a:solidFill>
-                  <a:srgbClr val="17211D"/>
-                </a:solidFill>
-                <a:latin typeface="Arial" pitchFamily="34" charset="0"/>
-                <a:ea typeface="Arial" pitchFamily="34" charset="-122"/>
-                <a:cs typeface="Arial" pitchFamily="34" charset="-120"/>
-              </a:rPr>
-              <a:t>frontend HTML</a:t>
+                  <a:srgbClr val="111111"/>
+                </a:solidFill>
+                <a:latin typeface="Arial" pitchFamily="34" charset="0"/>
+                <a:ea typeface="Arial" pitchFamily="34" charset="-122"/>
+                <a:cs typeface="Arial" pitchFamily="34" charset="-120"/>
+              </a:rPr>
+              <a:t>источники + impact</a:t>
             </a:r>
             <a:endParaRPr lang="en-US" sz="1000" dirty="0"/>
           </a:p>
@@ -9205,8 +10580,8 @@
         </p:nvSpPr>
         <p:spPr>
           <a:xfrm>
-            <a:off x="4480560" y="4892040"/>
-            <a:ext cx="5029200" cy="502920"/>
+            <a:off x="822960" y="4572000"/>
+            <a:ext cx="3657600" cy="457200"/>
           </a:xfrm>
           <a:prstGeom prst="rect">
             <a:avLst/>
@@ -9216,7 +10591,7 @@
           </a:solidFill>
           <a:ln w="10160">
             <a:solidFill>
-              <a:srgbClr val="C8D8D1"/>
+              <a:srgbClr val="B7C6C0"/>
             </a:solidFill>
             <a:prstDash val="solid"/>
           </a:ln>
@@ -9230,8 +10605,8 @@
         </p:nvSpPr>
         <p:spPr>
           <a:xfrm>
-            <a:off x="4553712" y="4983480"/>
-            <a:ext cx="4882896" cy="374904"/>
+            <a:off x="896112" y="4663440"/>
+            <a:ext cx="3511296" cy="329184"/>
           </a:xfrm>
           <a:prstGeom prst="rect">
             <a:avLst/>
@@ -9251,7 +10626,205 @@
             <a:r>
               <a:rPr lang="en-US" sz="1000" dirty="0">
                 <a:solidFill>
-                  <a:srgbClr val="17211D"/>
+                  <a:srgbClr val="111111"/>
+                </a:solidFill>
+                <a:latin typeface="Arial" pitchFamily="34" charset="0"/>
+                <a:ea typeface="Arial" pitchFamily="34" charset="-122"/>
+                <a:cs typeface="Arial" pitchFamily="34" charset="-120"/>
+              </a:rPr>
+              <a:t>chat SSE</a:t>
+            </a:r>
+            <a:endParaRPr lang="en-US" sz="1000" dirty="0"/>
+          </a:p>
+        </p:txBody>
+      </p:sp>
+      <p:sp>
+        <p:nvSpPr>
+          <p:cNvPr id="39" name="Shape 37"/>
+          <p:cNvSpPr/>
+          <p:nvPr/>
+        </p:nvSpPr>
+        <p:spPr>
+          <a:xfrm>
+            <a:off x="4480560" y="4572000"/>
+            <a:ext cx="5029200" cy="457200"/>
+          </a:xfrm>
+          <a:prstGeom prst="rect">
+            <a:avLst/>
+          </a:prstGeom>
+          <a:solidFill>
+            <a:srgbClr val="FFFFFF"/>
+          </a:solidFill>
+          <a:ln w="10160">
+            <a:solidFill>
+              <a:srgbClr val="B7C6C0"/>
+            </a:solidFill>
+            <a:prstDash val="solid"/>
+          </a:ln>
+        </p:spPr>
+      </p:sp>
+      <p:sp>
+        <p:nvSpPr>
+          <p:cNvPr id="40" name="Text 38"/>
+          <p:cNvSpPr/>
+          <p:nvPr/>
+        </p:nvSpPr>
+        <p:spPr>
+          <a:xfrm>
+            <a:off x="4553712" y="4663440"/>
+            <a:ext cx="4882896" cy="329184"/>
+          </a:xfrm>
+          <a:prstGeom prst="rect">
+            <a:avLst/>
+          </a:prstGeom>
+          <a:noFill/>
+          <a:ln/>
+        </p:spPr>
+        <p:txBody>
+          <a:bodyPr wrap="square" lIns="0" tIns="0" rIns="0" bIns="0" rtlCol="0" anchor="ctr">
+            <a:normAutofit/>
+          </a:bodyPr>
+          <a:lstStyle/>
+          <a:p>
+            <a:pPr indent="0" marL="0">
+              <a:buNone/>
+            </a:pPr>
+            <a:r>
+              <a:rPr lang="en-US" sz="1000" dirty="0">
+                <a:solidFill>
+                  <a:srgbClr val="111111"/>
+                </a:solidFill>
+                <a:latin typeface="Arial" pitchFamily="34" charset="0"/>
+                <a:ea typeface="Arial" pitchFamily="34" charset="-122"/>
+                <a:cs typeface="Arial" pitchFamily="34" charset="-120"/>
+              </a:rPr>
+              <a:t>8 событий</a:t>
+            </a:r>
+            <a:endParaRPr lang="en-US" sz="1000" dirty="0"/>
+          </a:p>
+        </p:txBody>
+      </p:sp>
+      <p:sp>
+        <p:nvSpPr>
+          <p:cNvPr id="41" name="Shape 39"/>
+          <p:cNvSpPr/>
+          <p:nvPr/>
+        </p:nvSpPr>
+        <p:spPr>
+          <a:xfrm>
+            <a:off x="822960" y="5029200"/>
+            <a:ext cx="3657600" cy="457200"/>
+          </a:xfrm>
+          <a:prstGeom prst="rect">
+            <a:avLst/>
+          </a:prstGeom>
+          <a:solidFill>
+            <a:srgbClr val="FFFFFF"/>
+          </a:solidFill>
+          <a:ln w="10160">
+            <a:solidFill>
+              <a:srgbClr val="B7C6C0"/>
+            </a:solidFill>
+            <a:prstDash val="solid"/>
+          </a:ln>
+        </p:spPr>
+      </p:sp>
+      <p:sp>
+        <p:nvSpPr>
+          <p:cNvPr id="42" name="Text 40"/>
+          <p:cNvSpPr/>
+          <p:nvPr/>
+        </p:nvSpPr>
+        <p:spPr>
+          <a:xfrm>
+            <a:off x="896112" y="5120640"/>
+            <a:ext cx="3511296" cy="329184"/>
+          </a:xfrm>
+          <a:prstGeom prst="rect">
+            <a:avLst/>
+          </a:prstGeom>
+          <a:noFill/>
+          <a:ln/>
+        </p:spPr>
+        <p:txBody>
+          <a:bodyPr wrap="square" lIns="0" tIns="0" rIns="0" bIns="0" rtlCol="0" anchor="ctr">
+            <a:normAutofit/>
+          </a:bodyPr>
+          <a:lstStyle/>
+          <a:p>
+            <a:pPr indent="0" marL="0">
+              <a:buNone/>
+            </a:pPr>
+            <a:r>
+              <a:rPr lang="en-US" sz="1000" dirty="0">
+                <a:solidFill>
+                  <a:srgbClr val="111111"/>
+                </a:solidFill>
+                <a:latin typeface="Arial" pitchFamily="34" charset="0"/>
+                <a:ea typeface="Arial" pitchFamily="34" charset="-122"/>
+                <a:cs typeface="Arial" pitchFamily="34" charset="-120"/>
+              </a:rPr>
+              <a:t>frontend HTML</a:t>
+            </a:r>
+            <a:endParaRPr lang="en-US" sz="1000" dirty="0"/>
+          </a:p>
+        </p:txBody>
+      </p:sp>
+      <p:sp>
+        <p:nvSpPr>
+          <p:cNvPr id="43" name="Shape 41"/>
+          <p:cNvSpPr/>
+          <p:nvPr/>
+        </p:nvSpPr>
+        <p:spPr>
+          <a:xfrm>
+            <a:off x="4480560" y="5029200"/>
+            <a:ext cx="5029200" cy="457200"/>
+          </a:xfrm>
+          <a:prstGeom prst="rect">
+            <a:avLst/>
+          </a:prstGeom>
+          <a:solidFill>
+            <a:srgbClr val="FFFFFF"/>
+          </a:solidFill>
+          <a:ln w="10160">
+            <a:solidFill>
+              <a:srgbClr val="B7C6C0"/>
+            </a:solidFill>
+            <a:prstDash val="solid"/>
+          </a:ln>
+        </p:spPr>
+      </p:sp>
+      <p:sp>
+        <p:nvSpPr>
+          <p:cNvPr id="44" name="Text 42"/>
+          <p:cNvSpPr/>
+          <p:nvPr/>
+        </p:nvSpPr>
+        <p:spPr>
+          <a:xfrm>
+            <a:off x="4553712" y="5120640"/>
+            <a:ext cx="4882896" cy="329184"/>
+          </a:xfrm>
+          <a:prstGeom prst="rect">
+            <a:avLst/>
+          </a:prstGeom>
+          <a:noFill/>
+          <a:ln/>
+        </p:spPr>
+        <p:txBody>
+          <a:bodyPr wrap="square" lIns="0" tIns="0" rIns="0" bIns="0" rtlCol="0" anchor="ctr">
+            <a:normAutofit/>
+          </a:bodyPr>
+          <a:lstStyle/>
+          <a:p>
+            <a:pPr indent="0" marL="0">
+              <a:buNone/>
+            </a:pPr>
+            <a:r>
+              <a:rPr lang="en-US" sz="1000" dirty="0">
+                <a:solidFill>
+                  <a:srgbClr val="111111"/>
                 </a:solidFill>
                 <a:latin typeface="Arial" pitchFamily="34" charset="0"/>
                 <a:ea typeface="Arial" pitchFamily="34" charset="-122"/>
@@ -9265,7 +10838,7 @@
       </p:sp>
       <p:sp>
         <p:nvSpPr>
-          <p:cNvPr id="39" name="Text 37"/>
+          <p:cNvPr id="45" name="Text 43"/>
           <p:cNvSpPr/>
           <p:nvPr/>
         </p:nvSpPr>

--- a/docs/final/coursework-defense-presentation.pptx
+++ b/docs/final/coursework-defense-presentation.pptx
@@ -5788,7 +5788,7 @@
                 <a:ea typeface="Arial" pitchFamily="34" charset="-122"/>
                 <a:cs typeface="Arial" pitchFamily="34" charset="-120"/>
               </a:rPr>
-              <a:t>Баланс защиты: примерно 50% ML/NLP и 50% production backend</a:t>
+              <a:t>Задачи сгруппированы по исследовательской и инженерной частям проекта</a:t>
             </a:r>
             <a:endParaRPr lang="en-US" sz="1500" dirty="0"/>
           </a:p>

--- a/docs/final/coursework-defense-presentation.pptx
+++ b/docs/final/coursework-defense-presentation.pptx
@@ -3020,7 +3020,7 @@
                 <a:ea typeface="Arial" pitchFamily="34" charset="-122"/>
                 <a:cs typeface="Arial" pitchFamily="34" charset="-120"/>
               </a:rPr>
-              <a:t>tfidf-logreg, impact, confidence, explanation</a:t>
+              <a:t>prepare_dataset, train-*, impact, confidence</a:t>
             </a:r>
             <a:endParaRPr lang="en-US" sz="1000" dirty="0"/>
           </a:p>
@@ -3284,7 +3284,7 @@
                 <a:ea typeface="Arial" pitchFamily="34" charset="-122"/>
                 <a:cs typeface="Arial" pitchFamily="34" charset="-120"/>
               </a:rPr>
-              <a:t>FastAPI, DDD, Dishka, Taskiq, Redis</a:t>
+              <a:t>FastAPI, CSV upload, DDD, Taskiq, Redis</a:t>
             </a:r>
             <a:endParaRPr lang="en-US" sz="1000" dirty="0"/>
           </a:p>
@@ -3756,7 +3756,7 @@
               <a:buChar char="•"/>
             </a:pPr>
             <a:r>
-              <a:rPr lang="en-US" sz="1550" dirty="0">
+              <a:rPr lang="en-US" sz="1440" dirty="0">
                 <a:solidFill>
                   <a:srgbClr val="111111"/>
                 </a:solidFill>
@@ -3766,7 +3766,7 @@
               </a:rPr>
               <a:t>Поиск релевантного контекста.</a:t>
             </a:r>
-            <a:endParaRPr lang="en-US" sz="1550" dirty="0"/>
+            <a:endParaRPr lang="en-US" sz="1440" dirty="0"/>
           </a:p>
           <a:p>
             <a:pPr marL="177800" indent="-177800">
@@ -3774,17 +3774,17 @@
               <a:buChar char="•"/>
             </a:pPr>
             <a:r>
-              <a:rPr lang="en-US" sz="1550" dirty="0">
-                <a:solidFill>
-                  <a:srgbClr val="111111"/>
-                </a:solidFill>
-                <a:latin typeface="Arial" pitchFamily="34" charset="0"/>
-                <a:ea typeface="Arial" pitchFamily="34" charset="-122"/>
-                <a:cs typeface="Arial" pitchFamily="34" charset="-120"/>
-              </a:rPr>
-              <a:t>Классификация влияния новостей.</a:t>
-            </a:r>
-            <a:endParaRPr lang="en-US" sz="1550" dirty="0"/>
+              <a:rPr lang="en-US" sz="1440" dirty="0">
+                <a:solidFill>
+                  <a:srgbClr val="111111"/>
+                </a:solidFill>
+                <a:latin typeface="Arial" pitchFamily="34" charset="0"/>
+                <a:ea typeface="Arial" pitchFamily="34" charset="-122"/>
+                <a:cs typeface="Arial" pitchFamily="34" charset="-120"/>
+              </a:rPr>
+              <a:t>Подготовка датасета и обучение моделей.</a:t>
+            </a:r>
+            <a:endParaRPr lang="en-US" sz="1440" dirty="0"/>
           </a:p>
           <a:p>
             <a:pPr marL="177800" indent="-177800">
@@ -3792,17 +3792,17 @@
               <a:buChar char="•"/>
             </a:pPr>
             <a:r>
-              <a:rPr lang="en-US" sz="1550" dirty="0">
-                <a:solidFill>
-                  <a:srgbClr val="111111"/>
-                </a:solidFill>
-                <a:latin typeface="Arial" pitchFamily="34" charset="0"/>
-                <a:ea typeface="Arial" pitchFamily="34" charset="-122"/>
-                <a:cs typeface="Arial" pitchFamily="34" charset="-120"/>
-              </a:rPr>
-              <a:t>Ответ по источникам с LLM-адаптером.</a:t>
-            </a:r>
-            <a:endParaRPr lang="en-US" sz="1550" dirty="0"/>
+              <a:rPr lang="en-US" sz="1440" dirty="0">
+                <a:solidFill>
+                  <a:srgbClr val="111111"/>
+                </a:solidFill>
+                <a:latin typeface="Arial" pitchFamily="34" charset="0"/>
+                <a:ea typeface="Arial" pitchFamily="34" charset="-122"/>
+                <a:cs typeface="Arial" pitchFamily="34" charset="-120"/>
+              </a:rPr>
+              <a:t>Классификация влияния новостей.</a:t>
+            </a:r>
+            <a:endParaRPr lang="en-US" sz="1440" dirty="0"/>
           </a:p>
           <a:p>
             <a:pPr marL="177800" indent="-177800">
@@ -3810,7 +3810,25 @@
               <a:buChar char="•"/>
             </a:pPr>
             <a:r>
-              <a:rPr lang="en-US" sz="1550" dirty="0">
+              <a:rPr lang="en-US" sz="1440" dirty="0">
+                <a:solidFill>
+                  <a:srgbClr val="111111"/>
+                </a:solidFill>
+                <a:latin typeface="Arial" pitchFamily="34" charset="0"/>
+                <a:ea typeface="Arial" pitchFamily="34" charset="-122"/>
+                <a:cs typeface="Arial" pitchFamily="34" charset="-120"/>
+              </a:rPr>
+              <a:t>Ответ по источникам с LLM-адаптером.</a:t>
+            </a:r>
+            <a:endParaRPr lang="en-US" sz="1440" dirty="0"/>
+          </a:p>
+          <a:p>
+            <a:pPr marL="177800" indent="-177800">
+              <a:buSzPct val="100000"/>
+              <a:buChar char="•"/>
+            </a:pPr>
+            <a:r>
+              <a:rPr lang="en-US" sz="1440" dirty="0">
                 <a:solidFill>
                   <a:srgbClr val="111111"/>
                 </a:solidFill>
@@ -3820,7 +3838,7 @@
               </a:rPr>
               <a:t>MLflow для дальнейших экспериментов.</a:t>
             </a:r>
-            <a:endParaRPr lang="en-US" sz="1550" dirty="0"/>
+            <a:endParaRPr lang="en-US" sz="1440" dirty="0"/>
           </a:p>
         </p:txBody>
       </p:sp>
@@ -3891,7 +3909,7 @@
               <a:buChar char="•"/>
             </a:pPr>
             <a:r>
-              <a:rPr lang="en-US" sz="1550" dirty="0">
+              <a:rPr lang="en-US" sz="1440" dirty="0">
                 <a:solidFill>
                   <a:srgbClr val="111111"/>
                 </a:solidFill>
@@ -3901,7 +3919,7 @@
               </a:rPr>
               <a:t>Микросервисы со слоистой DDD-структурой.</a:t>
             </a:r>
-            <a:endParaRPr lang="en-US" sz="1550" dirty="0"/>
+            <a:endParaRPr lang="en-US" sz="1440" dirty="0"/>
           </a:p>
           <a:p>
             <a:pPr marL="177800" indent="-177800">
@@ -3909,17 +3927,17 @@
               <a:buChar char="•"/>
             </a:pPr>
             <a:r>
-              <a:rPr lang="en-US" sz="1550" dirty="0">
-                <a:solidFill>
-                  <a:srgbClr val="111111"/>
-                </a:solidFill>
-                <a:latin typeface="Arial" pitchFamily="34" charset="0"/>
-                <a:ea typeface="Arial" pitchFamily="34" charset="-122"/>
-                <a:cs typeface="Arial" pitchFamily="34" charset="-120"/>
-              </a:rPr>
-              <a:t>Асинхронные API, фоновые задачи и SSE.</a:t>
-            </a:r>
-            <a:endParaRPr lang="en-US" sz="1550" dirty="0"/>
+              <a:rPr lang="en-US" sz="1440" dirty="0">
+                <a:solidFill>
+                  <a:srgbClr val="111111"/>
+                </a:solidFill>
+                <a:latin typeface="Arial" pitchFamily="34" charset="0"/>
+                <a:ea typeface="Arial" pitchFamily="34" charset="-122"/>
+                <a:cs typeface="Arial" pitchFamily="34" charset="-120"/>
+              </a:rPr>
+              <a:t>Загрузка CSV и выбор активного датасета.</a:t>
+            </a:r>
+            <a:endParaRPr lang="en-US" sz="1440" dirty="0"/>
           </a:p>
           <a:p>
             <a:pPr marL="177800" indent="-177800">
@@ -3927,17 +3945,17 @@
               <a:buChar char="•"/>
             </a:pPr>
             <a:r>
-              <a:rPr lang="en-US" sz="1550" dirty="0">
-                <a:solidFill>
-                  <a:srgbClr val="111111"/>
-                </a:solidFill>
-                <a:latin typeface="Arial" pitchFamily="34" charset="0"/>
-                <a:ea typeface="Arial" pitchFamily="34" charset="-122"/>
-                <a:cs typeface="Arial" pitchFamily="34" charset="-120"/>
-              </a:rPr>
-              <a:t>React UI и Docker Compose запуск.</a:t>
-            </a:r>
-            <a:endParaRPr lang="en-US" sz="1550" dirty="0"/>
+              <a:rPr lang="en-US" sz="1440" dirty="0">
+                <a:solidFill>
+                  <a:srgbClr val="111111"/>
+                </a:solidFill>
+                <a:latin typeface="Arial" pitchFamily="34" charset="0"/>
+                <a:ea typeface="Arial" pitchFamily="34" charset="-122"/>
+                <a:cs typeface="Arial" pitchFamily="34" charset="-120"/>
+              </a:rPr>
+              <a:t>Асинхронные API, фоновые задачи и SSE.</a:t>
+            </a:r>
+            <a:endParaRPr lang="en-US" sz="1440" dirty="0"/>
           </a:p>
           <a:p>
             <a:pPr marL="177800" indent="-177800">
@@ -3945,7 +3963,25 @@
               <a:buChar char="•"/>
             </a:pPr>
             <a:r>
-              <a:rPr lang="en-US" sz="1550" dirty="0">
+              <a:rPr lang="en-US" sz="1440" dirty="0">
+                <a:solidFill>
+                  <a:srgbClr val="111111"/>
+                </a:solidFill>
+                <a:latin typeface="Arial" pitchFamily="34" charset="0"/>
+                <a:ea typeface="Arial" pitchFamily="34" charset="-122"/>
+                <a:cs typeface="Arial" pitchFamily="34" charset="-120"/>
+              </a:rPr>
+              <a:t>React UI и Docker Compose запуск.</a:t>
+            </a:r>
+            <a:endParaRPr lang="en-US" sz="1440" dirty="0"/>
+          </a:p>
+          <a:p>
+            <a:pPr marL="177800" indent="-177800">
+              <a:buSzPct val="100000"/>
+              <a:buChar char="•"/>
+            </a:pPr>
+            <a:r>
+              <a:rPr lang="en-US" sz="1440" dirty="0">
                 <a:solidFill>
                   <a:srgbClr val="111111"/>
                 </a:solidFill>
@@ -3955,7 +3991,7 @@
               </a:rPr>
               <a:t>Smoke-сценарий для проверки стенда.</a:t>
             </a:r>
-            <a:endParaRPr lang="en-US" sz="1550" dirty="0"/>
+            <a:endParaRPr lang="en-US" sz="1440" dirty="0"/>
           </a:p>
         </p:txBody>
       </p:sp>
@@ -5552,7 +5588,7 @@
               <a:buChar char="•"/>
             </a:pPr>
             <a:r>
-              <a:rPr lang="en-US" sz="1550" dirty="0">
+              <a:rPr lang="en-US" sz="1440" dirty="0">
                 <a:solidFill>
                   <a:srgbClr val="111111"/>
                 </a:solidFill>
@@ -5562,7 +5598,7 @@
               </a:rPr>
               <a:t>Определить текстовое представление новостей.</a:t>
             </a:r>
-            <a:endParaRPr lang="en-US" sz="1550" dirty="0"/>
+            <a:endParaRPr lang="en-US" sz="1440" dirty="0"/>
           </a:p>
           <a:p>
             <a:pPr marL="177800" indent="-177800">
@@ -5570,17 +5606,17 @@
               <a:buChar char="•"/>
             </a:pPr>
             <a:r>
-              <a:rPr lang="en-US" sz="1550" dirty="0">
-                <a:solidFill>
-                  <a:srgbClr val="111111"/>
-                </a:solidFill>
-                <a:latin typeface="Arial" pitchFamily="34" charset="0"/>
-                <a:ea typeface="Arial" pitchFamily="34" charset="-122"/>
-                <a:cs typeface="Arial" pitchFamily="34" charset="-120"/>
-              </a:rPr>
-              <a:t>Реализовать retrieval/RAG по источникам.</a:t>
-            </a:r>
-            <a:endParaRPr lang="en-US" sz="1550" dirty="0"/>
+              <a:rPr lang="en-US" sz="1440" dirty="0">
+                <a:solidFill>
+                  <a:srgbClr val="111111"/>
+                </a:solidFill>
+                <a:latin typeface="Arial" pitchFamily="34" charset="0"/>
+                <a:ea typeface="Arial" pitchFamily="34" charset="-122"/>
+                <a:cs typeface="Arial" pitchFamily="34" charset="-120"/>
+              </a:rPr>
+              <a:t>Подготовить CSV и обучить классификаторы.</a:t>
+            </a:r>
+            <a:endParaRPr lang="en-US" sz="1440" dirty="0"/>
           </a:p>
           <a:p>
             <a:pPr marL="177800" indent="-177800">
@@ -5588,17 +5624,17 @@
               <a:buChar char="•"/>
             </a:pPr>
             <a:r>
-              <a:rPr lang="en-US" sz="1550" dirty="0">
-                <a:solidFill>
-                  <a:srgbClr val="111111"/>
-                </a:solidFill>
-                <a:latin typeface="Arial" pitchFamily="34" charset="0"/>
-                <a:ea typeface="Arial" pitchFamily="34" charset="-122"/>
-                <a:cs typeface="Arial" pitchFamily="34" charset="-120"/>
-              </a:rPr>
-              <a:t>Реализовать классификацию влияния новости.</a:t>
-            </a:r>
-            <a:endParaRPr lang="en-US" sz="1550" dirty="0"/>
+              <a:rPr lang="en-US" sz="1440" dirty="0">
+                <a:solidFill>
+                  <a:srgbClr val="111111"/>
+                </a:solidFill>
+                <a:latin typeface="Arial" pitchFamily="34" charset="0"/>
+                <a:ea typeface="Arial" pitchFamily="34" charset="-122"/>
+                <a:cs typeface="Arial" pitchFamily="34" charset="-120"/>
+              </a:rPr>
+              <a:t>Реализовать retrieval/RAG по источникам.</a:t>
+            </a:r>
+            <a:endParaRPr lang="en-US" sz="1440" dirty="0"/>
           </a:p>
           <a:p>
             <a:pPr marL="177800" indent="-177800">
@@ -5606,7 +5642,25 @@
               <a:buChar char="•"/>
             </a:pPr>
             <a:r>
-              <a:rPr lang="en-US" sz="1550" dirty="0">
+              <a:rPr lang="en-US" sz="1440" dirty="0">
+                <a:solidFill>
+                  <a:srgbClr val="111111"/>
+                </a:solidFill>
+                <a:latin typeface="Arial" pitchFamily="34" charset="0"/>
+                <a:ea typeface="Arial" pitchFamily="34" charset="-122"/>
+                <a:cs typeface="Arial" pitchFamily="34" charset="-120"/>
+              </a:rPr>
+              <a:t>Реализовать классификацию влияния новости.</a:t>
+            </a:r>
+            <a:endParaRPr lang="en-US" sz="1440" dirty="0"/>
+          </a:p>
+          <a:p>
+            <a:pPr marL="177800" indent="-177800">
+              <a:buSzPct val="100000"/>
+              <a:buChar char="•"/>
+            </a:pPr>
+            <a:r>
+              <a:rPr lang="en-US" sz="1440" dirty="0">
                 <a:solidFill>
                   <a:srgbClr val="111111"/>
                 </a:solidFill>
@@ -5616,7 +5670,7 @@
               </a:rPr>
               <a:t>Поддержать template и LLM-режим ответа.</a:t>
             </a:r>
-            <a:endParaRPr lang="en-US" sz="1550" dirty="0"/>
+            <a:endParaRPr lang="en-US" sz="1440" dirty="0"/>
           </a:p>
         </p:txBody>
       </p:sp>
@@ -5687,7 +5741,7 @@
               <a:buChar char="•"/>
             </a:pPr>
             <a:r>
-              <a:rPr lang="en-US" sz="1550" dirty="0">
+              <a:rPr lang="en-US" sz="1440" dirty="0">
                 <a:solidFill>
                   <a:srgbClr val="111111"/>
                 </a:solidFill>
@@ -5697,7 +5751,7 @@
               </a:rPr>
               <a:t>Спроектировать микросервисную DDD-архитектуру.</a:t>
             </a:r>
-            <a:endParaRPr lang="en-US" sz="1550" dirty="0"/>
+            <a:endParaRPr lang="en-US" sz="1440" dirty="0"/>
           </a:p>
           <a:p>
             <a:pPr marL="177800" indent="-177800">
@@ -5705,17 +5759,17 @@
               <a:buChar char="•"/>
             </a:pPr>
             <a:r>
-              <a:rPr lang="en-US" sz="1550" dirty="0">
-                <a:solidFill>
-                  <a:srgbClr val="111111"/>
-                </a:solidFill>
-                <a:latin typeface="Arial" pitchFamily="34" charset="0"/>
-                <a:ea typeface="Arial" pitchFamily="34" charset="-122"/>
-                <a:cs typeface="Arial" pitchFamily="34" charset="-120"/>
-              </a:rPr>
-              <a:t>Реализовать асинхронные сервисы и фоновые задачи.</a:t>
-            </a:r>
-            <a:endParaRPr lang="en-US" sz="1550" dirty="0"/>
+              <a:rPr lang="en-US" sz="1440" dirty="0">
+                <a:solidFill>
+                  <a:srgbClr val="111111"/>
+                </a:solidFill>
+                <a:latin typeface="Arial" pitchFamily="34" charset="0"/>
+                <a:ea typeface="Arial" pitchFamily="34" charset="-122"/>
+                <a:cs typeface="Arial" pitchFamily="34" charset="-120"/>
+              </a:rPr>
+              <a:t>Реализовать CSV upload и активный датасет.</a:t>
+            </a:r>
+            <a:endParaRPr lang="en-US" sz="1440" dirty="0"/>
           </a:p>
           <a:p>
             <a:pPr marL="177800" indent="-177800">
@@ -5723,17 +5777,17 @@
               <a:buChar char="•"/>
             </a:pPr>
             <a:r>
-              <a:rPr lang="en-US" sz="1550" dirty="0">
-                <a:solidFill>
-                  <a:srgbClr val="111111"/>
-                </a:solidFill>
-                <a:latin typeface="Arial" pitchFamily="34" charset="0"/>
-                <a:ea typeface="Arial" pitchFamily="34" charset="-122"/>
-                <a:cs typeface="Arial" pitchFamily="34" charset="-120"/>
-              </a:rPr>
-              <a:t>Сделать React UI с SSE timeline.</a:t>
-            </a:r>
-            <a:endParaRPr lang="en-US" sz="1550" dirty="0"/>
+              <a:rPr lang="en-US" sz="1440" dirty="0">
+                <a:solidFill>
+                  <a:srgbClr val="111111"/>
+                </a:solidFill>
+                <a:latin typeface="Arial" pitchFamily="34" charset="0"/>
+                <a:ea typeface="Arial" pitchFamily="34" charset="-122"/>
+                <a:cs typeface="Arial" pitchFamily="34" charset="-120"/>
+              </a:rPr>
+              <a:t>Реализовать асинхронные сервисы и фоновые задачи.</a:t>
+            </a:r>
+            <a:endParaRPr lang="en-US" sz="1440" dirty="0"/>
           </a:p>
           <a:p>
             <a:pPr marL="177800" indent="-177800">
@@ -5741,7 +5795,25 @@
               <a:buChar char="•"/>
             </a:pPr>
             <a:r>
-              <a:rPr lang="en-US" sz="1550" dirty="0">
+              <a:rPr lang="en-US" sz="1440" dirty="0">
+                <a:solidFill>
+                  <a:srgbClr val="111111"/>
+                </a:solidFill>
+                <a:latin typeface="Arial" pitchFamily="34" charset="0"/>
+                <a:ea typeface="Arial" pitchFamily="34" charset="-122"/>
+                <a:cs typeface="Arial" pitchFamily="34" charset="-120"/>
+              </a:rPr>
+              <a:t>Сделать React UI с SSE timeline.</a:t>
+            </a:r>
+            <a:endParaRPr lang="en-US" sz="1440" dirty="0"/>
+          </a:p>
+          <a:p>
+            <a:pPr marL="177800" indent="-177800">
+              <a:buSzPct val="100000"/>
+              <a:buChar char="•"/>
+            </a:pPr>
+            <a:r>
+              <a:rPr lang="en-US" sz="1440" dirty="0">
                 <a:solidFill>
                   <a:srgbClr val="111111"/>
                 </a:solidFill>
@@ -5751,7 +5823,7 @@
               </a:rPr>
               <a:t>Подготовить Docker Compose demo-сценарий.</a:t>
             </a:r>
-            <a:endParaRPr lang="en-US" sz="1550" dirty="0"/>
+            <a:endParaRPr lang="en-US" sz="1440" dirty="0"/>
           </a:p>
         </p:txBody>
       </p:sp>
@@ -7335,7 +7407,7 @@
         <p:spPr>
           <a:xfrm>
             <a:off x="822960" y="1371600"/>
-            <a:ext cx="3063240" cy="457200"/>
+            <a:ext cx="3063240" cy="420624"/>
           </a:xfrm>
           <a:prstGeom prst="rect">
             <a:avLst/>
@@ -7360,7 +7432,7 @@
         <p:spPr>
           <a:xfrm>
             <a:off x="896112" y="1463040"/>
-            <a:ext cx="2916936" cy="329184"/>
+            <a:ext cx="2916936" cy="292608"/>
           </a:xfrm>
           <a:prstGeom prst="rect">
             <a:avLst/>
@@ -7401,7 +7473,7 @@
         <p:spPr>
           <a:xfrm>
             <a:off x="3886200" y="1371600"/>
-            <a:ext cx="6812280" cy="457200"/>
+            <a:ext cx="6812280" cy="420624"/>
           </a:xfrm>
           <a:prstGeom prst="rect">
             <a:avLst/>
@@ -7426,7 +7498,7 @@
         <p:spPr>
           <a:xfrm>
             <a:off x="3959352" y="1463040"/>
-            <a:ext cx="6665976" cy="329184"/>
+            <a:ext cx="6665976" cy="292608"/>
           </a:xfrm>
           <a:prstGeom prst="rect">
             <a:avLst/>
@@ -7466,8 +7538,8 @@
         </p:nvSpPr>
         <p:spPr>
           <a:xfrm>
-            <a:off x="822960" y="1828800"/>
-            <a:ext cx="3063240" cy="457200"/>
+            <a:off x="822960" y="1792224"/>
+            <a:ext cx="3063240" cy="420624"/>
           </a:xfrm>
           <a:prstGeom prst="rect">
             <a:avLst/>
@@ -7491,8 +7563,8 @@
         </p:nvSpPr>
         <p:spPr>
           <a:xfrm>
-            <a:off x="896112" y="1920240"/>
-            <a:ext cx="2916936" cy="329184"/>
+            <a:off x="896112" y="1883664"/>
+            <a:ext cx="2916936" cy="292608"/>
           </a:xfrm>
           <a:prstGeom prst="rect">
             <a:avLst/>
@@ -7518,7 +7590,7 @@
                 <a:ea typeface="Arial" pitchFamily="34" charset="-122"/>
                 <a:cs typeface="Arial" pitchFamily="34" charset="-120"/>
               </a:rPr>
-              <a:t>ML: текстовые признаки</a:t>
+              <a:t>ML: подготовка CSV</a:t>
             </a:r>
             <a:endParaRPr lang="en-US" sz="1000" dirty="0"/>
           </a:p>
@@ -7532,8 +7604,8 @@
         </p:nvSpPr>
         <p:spPr>
           <a:xfrm>
-            <a:off x="3886200" y="1828800"/>
-            <a:ext cx="6812280" cy="457200"/>
+            <a:off x="3886200" y="1792224"/>
+            <a:ext cx="6812280" cy="420624"/>
           </a:xfrm>
           <a:prstGeom prst="rect">
             <a:avLst/>
@@ -7557,8 +7629,8 @@
         </p:nvSpPr>
         <p:spPr>
           <a:xfrm>
-            <a:off x="3959352" y="1920240"/>
-            <a:ext cx="6665976" cy="329184"/>
+            <a:off x="3959352" y="1883664"/>
+            <a:ext cx="6665976" cy="292608"/>
           </a:xfrm>
           <a:prstGeom prst="rect">
             <a:avLst/>
@@ -7584,7 +7656,7 @@
                 <a:ea typeface="Arial" pitchFamily="34" charset="-122"/>
                 <a:cs typeface="Arial" pitchFamily="34" charset="-120"/>
               </a:rPr>
-              <a:t>TF-IDF, embeddings</a:t>
+              <a:t>prepare_dataset + label-column</a:t>
             </a:r>
             <a:endParaRPr lang="en-US" sz="1000" dirty="0"/>
           </a:p>
@@ -7598,8 +7670,8 @@
         </p:nvSpPr>
         <p:spPr>
           <a:xfrm>
-            <a:off x="822960" y="2286000"/>
-            <a:ext cx="3063240" cy="457200"/>
+            <a:off x="822960" y="2212848"/>
+            <a:ext cx="3063240" cy="420624"/>
           </a:xfrm>
           <a:prstGeom prst="rect">
             <a:avLst/>
@@ -7623,8 +7695,8 @@
         </p:nvSpPr>
         <p:spPr>
           <a:xfrm>
-            <a:off x="896112" y="2377440"/>
-            <a:ext cx="2916936" cy="329184"/>
+            <a:off x="896112" y="2304288"/>
+            <a:ext cx="2916936" cy="292608"/>
           </a:xfrm>
           <a:prstGeom prst="rect">
             <a:avLst/>
@@ -7650,7 +7722,7 @@
                 <a:ea typeface="Arial" pitchFamily="34" charset="-122"/>
                 <a:cs typeface="Arial" pitchFamily="34" charset="-120"/>
               </a:rPr>
-              <a:t>ML: классификация</a:t>
+              <a:t>ML: текстовые признаки</a:t>
             </a:r>
             <a:endParaRPr lang="en-US" sz="1000" dirty="0"/>
           </a:p>
@@ -7664,8 +7736,8 @@
         </p:nvSpPr>
         <p:spPr>
           <a:xfrm>
-            <a:off x="3886200" y="2286000"/>
-            <a:ext cx="6812280" cy="457200"/>
+            <a:off x="3886200" y="2212848"/>
+            <a:ext cx="6812280" cy="420624"/>
           </a:xfrm>
           <a:prstGeom prst="rect">
             <a:avLst/>
@@ -7689,8 +7761,8 @@
         </p:nvSpPr>
         <p:spPr>
           <a:xfrm>
-            <a:off x="3959352" y="2377440"/>
-            <a:ext cx="6665976" cy="329184"/>
+            <a:off x="3959352" y="2304288"/>
+            <a:ext cx="6665976" cy="292608"/>
           </a:xfrm>
           <a:prstGeom prst="rect">
             <a:avLst/>
@@ -7716,7 +7788,7 @@
                 <a:ea typeface="Arial" pitchFamily="34" charset="-122"/>
                 <a:cs typeface="Arial" pitchFamily="34" charset="-120"/>
               </a:rPr>
-              <a:t>Logistic Regression, tiny transformer mode</a:t>
+              <a:t>TF-IDF, embeddings</a:t>
             </a:r>
             <a:endParaRPr lang="en-US" sz="1000" dirty="0"/>
           </a:p>
@@ -7730,8 +7802,8 @@
         </p:nvSpPr>
         <p:spPr>
           <a:xfrm>
-            <a:off x="822960" y="2743200"/>
-            <a:ext cx="3063240" cy="457200"/>
+            <a:off x="822960" y="2633472"/>
+            <a:ext cx="3063240" cy="420624"/>
           </a:xfrm>
           <a:prstGeom prst="rect">
             <a:avLst/>
@@ -7755,8 +7827,8 @@
         </p:nvSpPr>
         <p:spPr>
           <a:xfrm>
-            <a:off x="896112" y="2834640"/>
-            <a:ext cx="2916936" cy="329184"/>
+            <a:off x="896112" y="2724912"/>
+            <a:ext cx="2916936" cy="292608"/>
           </a:xfrm>
           <a:prstGeom prst="rect">
             <a:avLst/>
@@ -7782,7 +7854,7 @@
                 <a:ea typeface="Arial" pitchFamily="34" charset="-122"/>
                 <a:cs typeface="Arial" pitchFamily="34" charset="-120"/>
               </a:rPr>
-              <a:t>NLP: retrieval/RAG</a:t>
+              <a:t>ML: классификация</a:t>
             </a:r>
             <a:endParaRPr lang="en-US" sz="1000" dirty="0"/>
           </a:p>
@@ -7796,8 +7868,8 @@
         </p:nvSpPr>
         <p:spPr>
           <a:xfrm>
-            <a:off x="3886200" y="2743200"/>
-            <a:ext cx="6812280" cy="457200"/>
+            <a:off x="3886200" y="2633472"/>
+            <a:ext cx="6812280" cy="420624"/>
           </a:xfrm>
           <a:prstGeom prst="rect">
             <a:avLst/>
@@ -7821,8 +7893,8 @@
         </p:nvSpPr>
         <p:spPr>
           <a:xfrm>
-            <a:off x="3959352" y="2834640"/>
-            <a:ext cx="6665976" cy="329184"/>
+            <a:off x="3959352" y="2724912"/>
+            <a:ext cx="6665976" cy="292608"/>
           </a:xfrm>
           <a:prstGeom prst="rect">
             <a:avLst/>
@@ -7848,7 +7920,7 @@
                 <a:ea typeface="Arial" pitchFamily="34" charset="-122"/>
                 <a:cs typeface="Arial" pitchFamily="34" charset="-120"/>
               </a:rPr>
-              <a:t>Qdrant + контекст источников</a:t>
+              <a:t>Logistic Regression, tiny transformer mode</a:t>
             </a:r>
             <a:endParaRPr lang="en-US" sz="1000" dirty="0"/>
           </a:p>
@@ -7862,8 +7934,8 @@
         </p:nvSpPr>
         <p:spPr>
           <a:xfrm>
-            <a:off x="822960" y="3200400"/>
-            <a:ext cx="3063240" cy="457200"/>
+            <a:off x="822960" y="3054096"/>
+            <a:ext cx="3063240" cy="420624"/>
           </a:xfrm>
           <a:prstGeom prst="rect">
             <a:avLst/>
@@ -7887,8 +7959,8 @@
         </p:nvSpPr>
         <p:spPr>
           <a:xfrm>
-            <a:off x="896112" y="3291840"/>
-            <a:ext cx="2916936" cy="329184"/>
+            <a:off x="896112" y="3145536"/>
+            <a:ext cx="2916936" cy="292608"/>
           </a:xfrm>
           <a:prstGeom prst="rect">
             <a:avLst/>
@@ -7914,7 +7986,7 @@
                 <a:ea typeface="Arial" pitchFamily="34" charset="-122"/>
                 <a:cs typeface="Arial" pitchFamily="34" charset="-120"/>
               </a:rPr>
-              <a:t>NLP: генерация</a:t>
+              <a:t>NLP: retrieval/RAG</a:t>
             </a:r>
             <a:endParaRPr lang="en-US" sz="1000" dirty="0"/>
           </a:p>
@@ -7928,8 +8000,8 @@
         </p:nvSpPr>
         <p:spPr>
           <a:xfrm>
-            <a:off x="3886200" y="3200400"/>
-            <a:ext cx="6812280" cy="457200"/>
+            <a:off x="3886200" y="3054096"/>
+            <a:ext cx="6812280" cy="420624"/>
           </a:xfrm>
           <a:prstGeom prst="rect">
             <a:avLst/>
@@ -7953,8 +8025,8 @@
         </p:nvSpPr>
         <p:spPr>
           <a:xfrm>
-            <a:off x="3959352" y="3291840"/>
-            <a:ext cx="6665976" cy="329184"/>
+            <a:off x="3959352" y="3145536"/>
+            <a:ext cx="6665976" cy="292608"/>
           </a:xfrm>
           <a:prstGeom prst="rect">
             <a:avLst/>
@@ -7980,7 +8052,7 @@
                 <a:ea typeface="Arial" pitchFamily="34" charset="-122"/>
                 <a:cs typeface="Arial" pitchFamily="34" charset="-120"/>
               </a:rPr>
-              <a:t>Template fallback + LLM adapter</a:t>
+              <a:t>Qdrant + контекст источников</a:t>
             </a:r>
             <a:endParaRPr lang="en-US" sz="1000" dirty="0"/>
           </a:p>
@@ -7994,8 +8066,8 @@
         </p:nvSpPr>
         <p:spPr>
           <a:xfrm>
-            <a:off x="822960" y="3657600"/>
-            <a:ext cx="3063240" cy="457200"/>
+            <a:off x="822960" y="3474720"/>
+            <a:ext cx="3063240" cy="420624"/>
           </a:xfrm>
           <a:prstGeom prst="rect">
             <a:avLst/>
@@ -8019,8 +8091,8 @@
         </p:nvSpPr>
         <p:spPr>
           <a:xfrm>
-            <a:off x="896112" y="3749040"/>
-            <a:ext cx="2916936" cy="329184"/>
+            <a:off x="896112" y="3566160"/>
+            <a:ext cx="2916936" cy="292608"/>
           </a:xfrm>
           <a:prstGeom prst="rect">
             <a:avLst/>
@@ -8046,7 +8118,7 @@
                 <a:ea typeface="Arial" pitchFamily="34" charset="-122"/>
                 <a:cs typeface="Arial" pitchFamily="34" charset="-120"/>
               </a:rPr>
-              <a:t>Backend</a:t>
+              <a:t>NLP: генерация</a:t>
             </a:r>
             <a:endParaRPr lang="en-US" sz="1000" dirty="0"/>
           </a:p>
@@ -8060,8 +8132,8 @@
         </p:nvSpPr>
         <p:spPr>
           <a:xfrm>
-            <a:off x="3886200" y="3657600"/>
-            <a:ext cx="6812280" cy="457200"/>
+            <a:off x="3886200" y="3474720"/>
+            <a:ext cx="6812280" cy="420624"/>
           </a:xfrm>
           <a:prstGeom prst="rect">
             <a:avLst/>
@@ -8085,8 +8157,8 @@
         </p:nvSpPr>
         <p:spPr>
           <a:xfrm>
-            <a:off x="3959352" y="3749040"/>
-            <a:ext cx="6665976" cy="329184"/>
+            <a:off x="3959352" y="3566160"/>
+            <a:ext cx="6665976" cy="292608"/>
           </a:xfrm>
           <a:prstGeom prst="rect">
             <a:avLst/>
@@ -8112,7 +8184,7 @@
                 <a:ea typeface="Arial" pitchFamily="34" charset="-122"/>
                 <a:cs typeface="Arial" pitchFamily="34" charset="-120"/>
               </a:rPr>
-              <a:t>FastAPI, asyncio, Granian, Zapros</a:t>
+              <a:t>Template fallback + LLM adapter</a:t>
             </a:r>
             <a:endParaRPr lang="en-US" sz="1000" dirty="0"/>
           </a:p>
@@ -8126,8 +8198,8 @@
         </p:nvSpPr>
         <p:spPr>
           <a:xfrm>
-            <a:off x="822960" y="4114800"/>
-            <a:ext cx="3063240" cy="457200"/>
+            <a:off x="822960" y="3895344"/>
+            <a:ext cx="3063240" cy="420624"/>
           </a:xfrm>
           <a:prstGeom prst="rect">
             <a:avLst/>
@@ -8151,8 +8223,8 @@
         </p:nvSpPr>
         <p:spPr>
           <a:xfrm>
-            <a:off x="896112" y="4206240"/>
-            <a:ext cx="2916936" cy="329184"/>
+            <a:off x="896112" y="3986784"/>
+            <a:ext cx="2916936" cy="292608"/>
           </a:xfrm>
           <a:prstGeom prst="rect">
             <a:avLst/>
@@ -8178,7 +8250,7 @@
                 <a:ea typeface="Arial" pitchFamily="34" charset="-122"/>
                 <a:cs typeface="Arial" pitchFamily="34" charset="-120"/>
               </a:rPr>
-              <a:t>Архитектура</a:t>
+              <a:t>Backend</a:t>
             </a:r>
             <a:endParaRPr lang="en-US" sz="1000" dirty="0"/>
           </a:p>
@@ -8192,8 +8264,8 @@
         </p:nvSpPr>
         <p:spPr>
           <a:xfrm>
-            <a:off x="3886200" y="4114800"/>
-            <a:ext cx="6812280" cy="457200"/>
+            <a:off x="3886200" y="3895344"/>
+            <a:ext cx="6812280" cy="420624"/>
           </a:xfrm>
           <a:prstGeom prst="rect">
             <a:avLst/>
@@ -8217,8 +8289,8 @@
         </p:nvSpPr>
         <p:spPr>
           <a:xfrm>
-            <a:off x="3959352" y="4206240"/>
-            <a:ext cx="6665976" cy="329184"/>
+            <a:off x="3959352" y="3986784"/>
+            <a:ext cx="6665976" cy="292608"/>
           </a:xfrm>
           <a:prstGeom prst="rect">
             <a:avLst/>
@@ -8244,7 +8316,7 @@
                 <a:ea typeface="Arial" pitchFamily="34" charset="-122"/>
                 <a:cs typeface="Arial" pitchFamily="34" charset="-120"/>
               </a:rPr>
-              <a:t>DDD, слои, Protocol, Dishka</a:t>
+              <a:t>FastAPI, asyncio, Granian, Zapros</a:t>
             </a:r>
             <a:endParaRPr lang="en-US" sz="1000" dirty="0"/>
           </a:p>
@@ -8258,8 +8330,8 @@
         </p:nvSpPr>
         <p:spPr>
           <a:xfrm>
-            <a:off x="822960" y="4572000"/>
-            <a:ext cx="3063240" cy="457200"/>
+            <a:off x="822960" y="4315968"/>
+            <a:ext cx="3063240" cy="420624"/>
           </a:xfrm>
           <a:prstGeom prst="rect">
             <a:avLst/>
@@ -8283,8 +8355,8 @@
         </p:nvSpPr>
         <p:spPr>
           <a:xfrm>
-            <a:off x="896112" y="4663440"/>
-            <a:ext cx="2916936" cy="329184"/>
+            <a:off x="896112" y="4407408"/>
+            <a:ext cx="2916936" cy="292608"/>
           </a:xfrm>
           <a:prstGeom prst="rect">
             <a:avLst/>
@@ -8310,7 +8382,7 @@
                 <a:ea typeface="Arial" pitchFamily="34" charset="-122"/>
                 <a:cs typeface="Arial" pitchFamily="34" charset="-120"/>
               </a:rPr>
-              <a:t>Очереди и события</a:t>
+              <a:t>Архитектура</a:t>
             </a:r>
             <a:endParaRPr lang="en-US" sz="1000" dirty="0"/>
           </a:p>
@@ -8324,8 +8396,8 @@
         </p:nvSpPr>
         <p:spPr>
           <a:xfrm>
-            <a:off x="3886200" y="4572000"/>
-            <a:ext cx="6812280" cy="457200"/>
+            <a:off x="3886200" y="4315968"/>
+            <a:ext cx="6812280" cy="420624"/>
           </a:xfrm>
           <a:prstGeom prst="rect">
             <a:avLst/>
@@ -8349,8 +8421,8 @@
         </p:nvSpPr>
         <p:spPr>
           <a:xfrm>
-            <a:off x="3959352" y="4663440"/>
-            <a:ext cx="6665976" cy="329184"/>
+            <a:off x="3959352" y="4407408"/>
+            <a:ext cx="6665976" cy="292608"/>
           </a:xfrm>
           <a:prstGeom prst="rect">
             <a:avLst/>
@@ -8376,7 +8448,7 @@
                 <a:ea typeface="Arial" pitchFamily="34" charset="-122"/>
                 <a:cs typeface="Arial" pitchFamily="34" charset="-120"/>
               </a:rPr>
-              <a:t>Taskiq, Redis, FastStream, SSE</a:t>
+              <a:t>DDD, слои, Protocol, Dishka</a:t>
             </a:r>
             <a:endParaRPr lang="en-US" sz="1000" dirty="0"/>
           </a:p>
@@ -8390,8 +8462,8 @@
         </p:nvSpPr>
         <p:spPr>
           <a:xfrm>
-            <a:off x="822960" y="5029200"/>
-            <a:ext cx="3063240" cy="457200"/>
+            <a:off x="822960" y="4736592"/>
+            <a:ext cx="3063240" cy="420624"/>
           </a:xfrm>
           <a:prstGeom prst="rect">
             <a:avLst/>
@@ -8415,8 +8487,8 @@
         </p:nvSpPr>
         <p:spPr>
           <a:xfrm>
-            <a:off x="896112" y="5120640"/>
-            <a:ext cx="2916936" cy="329184"/>
+            <a:off x="896112" y="4828032"/>
+            <a:ext cx="2916936" cy="292608"/>
           </a:xfrm>
           <a:prstGeom prst="rect">
             <a:avLst/>
@@ -8442,7 +8514,7 @@
                 <a:ea typeface="Arial" pitchFamily="34" charset="-122"/>
                 <a:cs typeface="Arial" pitchFamily="34" charset="-120"/>
               </a:rPr>
-              <a:t>UI и запуск</a:t>
+              <a:t>Очереди и события</a:t>
             </a:r>
             <a:endParaRPr lang="en-US" sz="1000" dirty="0"/>
           </a:p>
@@ -8456,8 +8528,8 @@
         </p:nvSpPr>
         <p:spPr>
           <a:xfrm>
-            <a:off x="3886200" y="5029200"/>
-            <a:ext cx="6812280" cy="457200"/>
+            <a:off x="3886200" y="4736592"/>
+            <a:ext cx="6812280" cy="420624"/>
           </a:xfrm>
           <a:prstGeom prst="rect">
             <a:avLst/>
@@ -8481,8 +8553,8 @@
         </p:nvSpPr>
         <p:spPr>
           <a:xfrm>
-            <a:off x="3959352" y="5120640"/>
-            <a:ext cx="6665976" cy="329184"/>
+            <a:off x="3959352" y="4828032"/>
+            <a:ext cx="6665976" cy="292608"/>
           </a:xfrm>
           <a:prstGeom prst="rect">
             <a:avLst/>
@@ -8508,7 +8580,139 @@
                 <a:ea typeface="Arial" pitchFamily="34" charset="-122"/>
                 <a:cs typeface="Arial" pitchFamily="34" charset="-120"/>
               </a:rPr>
-              <a:t>React, Docker Compose, Justfile</a:t>
+              <a:t>Taskiq, Redis, FastStream, SSE</a:t>
+            </a:r>
+            <a:endParaRPr lang="en-US" sz="1000" dirty="0"/>
+          </a:p>
+        </p:txBody>
+      </p:sp>
+      <p:sp>
+        <p:nvSpPr>
+          <p:cNvPr id="45" name="Shape 43"/>
+          <p:cNvSpPr/>
+          <p:nvPr/>
+        </p:nvSpPr>
+        <p:spPr>
+          <a:xfrm>
+            <a:off x="822960" y="5157216"/>
+            <a:ext cx="3063240" cy="420624"/>
+          </a:xfrm>
+          <a:prstGeom prst="rect">
+            <a:avLst/>
+          </a:prstGeom>
+          <a:solidFill>
+            <a:srgbClr val="FFFFFF"/>
+          </a:solidFill>
+          <a:ln w="10160">
+            <a:solidFill>
+              <a:srgbClr val="B7C6C0"/>
+            </a:solidFill>
+            <a:prstDash val="solid"/>
+          </a:ln>
+        </p:spPr>
+      </p:sp>
+      <p:sp>
+        <p:nvSpPr>
+          <p:cNvPr id="46" name="Text 44"/>
+          <p:cNvSpPr/>
+          <p:nvPr/>
+        </p:nvSpPr>
+        <p:spPr>
+          <a:xfrm>
+            <a:off x="896112" y="5248656"/>
+            <a:ext cx="2916936" cy="292608"/>
+          </a:xfrm>
+          <a:prstGeom prst="rect">
+            <a:avLst/>
+          </a:prstGeom>
+          <a:noFill/>
+          <a:ln/>
+        </p:spPr>
+        <p:txBody>
+          <a:bodyPr wrap="square" lIns="0" tIns="0" rIns="0" bIns="0" rtlCol="0" anchor="ctr">
+            <a:normAutofit/>
+          </a:bodyPr>
+          <a:lstStyle/>
+          <a:p>
+            <a:pPr indent="0" marL="0">
+              <a:buNone/>
+            </a:pPr>
+            <a:r>
+              <a:rPr lang="en-US" sz="1000" dirty="0">
+                <a:solidFill>
+                  <a:srgbClr val="111111"/>
+                </a:solidFill>
+                <a:latin typeface="Arial" pitchFamily="34" charset="0"/>
+                <a:ea typeface="Arial" pitchFamily="34" charset="-122"/>
+                <a:cs typeface="Arial" pitchFamily="34" charset="-120"/>
+              </a:rPr>
+              <a:t>UI и запуск</a:t>
+            </a:r>
+            <a:endParaRPr lang="en-US" sz="1000" dirty="0"/>
+          </a:p>
+        </p:txBody>
+      </p:sp>
+      <p:sp>
+        <p:nvSpPr>
+          <p:cNvPr id="47" name="Shape 45"/>
+          <p:cNvSpPr/>
+          <p:nvPr/>
+        </p:nvSpPr>
+        <p:spPr>
+          <a:xfrm>
+            <a:off x="3886200" y="5157216"/>
+            <a:ext cx="6812280" cy="420624"/>
+          </a:xfrm>
+          <a:prstGeom prst="rect">
+            <a:avLst/>
+          </a:prstGeom>
+          <a:solidFill>
+            <a:srgbClr val="FFFFFF"/>
+          </a:solidFill>
+          <a:ln w="10160">
+            <a:solidFill>
+              <a:srgbClr val="B7C6C0"/>
+            </a:solidFill>
+            <a:prstDash val="solid"/>
+          </a:ln>
+        </p:spPr>
+      </p:sp>
+      <p:sp>
+        <p:nvSpPr>
+          <p:cNvPr id="48" name="Text 46"/>
+          <p:cNvSpPr/>
+          <p:nvPr/>
+        </p:nvSpPr>
+        <p:spPr>
+          <a:xfrm>
+            <a:off x="3959352" y="5248656"/>
+            <a:ext cx="6665976" cy="292608"/>
+          </a:xfrm>
+          <a:prstGeom prst="rect">
+            <a:avLst/>
+          </a:prstGeom>
+          <a:noFill/>
+          <a:ln/>
+        </p:spPr>
+        <p:txBody>
+          <a:bodyPr wrap="square" lIns="0" tIns="0" rIns="0" bIns="0" rtlCol="0" anchor="ctr">
+            <a:normAutofit/>
+          </a:bodyPr>
+          <a:lstStyle/>
+          <a:p>
+            <a:pPr indent="0" marL="0">
+              <a:buNone/>
+            </a:pPr>
+            <a:r>
+              <a:rPr lang="en-US" sz="1000" dirty="0">
+                <a:solidFill>
+                  <a:srgbClr val="111111"/>
+                </a:solidFill>
+                <a:latin typeface="Arial" pitchFamily="34" charset="0"/>
+                <a:ea typeface="Arial" pitchFamily="34" charset="-122"/>
+                <a:cs typeface="Arial" pitchFamily="34" charset="-120"/>
+              </a:rPr>
+              <a:t>React, CSV upload, Docker Compose, Justfile</a:t>
             </a:r>
             <a:endParaRPr lang="en-US" sz="1000" dirty="0"/>
           </a:p>
@@ -8829,7 +9033,7 @@
         <p:spPr>
           <a:xfrm>
             <a:off x="822960" y="2075688"/>
-            <a:ext cx="4754880" cy="2148840"/>
+            <a:ext cx="4754880" cy="2331720"/>
           </a:xfrm>
           <a:prstGeom prst="rect">
             <a:avLst/>
@@ -8848,7 +9052,7 @@
               <a:buChar char="•"/>
             </a:pPr>
             <a:r>
-              <a:rPr lang="en-US" sz="1520" dirty="0">
+              <a:rPr lang="en-US" sz="1380" dirty="0">
                 <a:solidFill>
                   <a:srgbClr val="111111"/>
                 </a:solidFill>
@@ -8858,7 +9062,7 @@
               </a:rPr>
               <a:t>Классы: positive, negative, neutral.</a:t>
             </a:r>
-            <a:endParaRPr lang="en-US" sz="1520" dirty="0"/>
+            <a:endParaRPr lang="en-US" sz="1380" dirty="0"/>
           </a:p>
           <a:p>
             <a:pPr marL="177800" indent="-177800">
@@ -8866,7 +9070,7 @@
               <a:buChar char="•"/>
             </a:pPr>
             <a:r>
-              <a:rPr lang="en-US" sz="1520" dirty="0">
+              <a:rPr lang="en-US" sz="1380" dirty="0">
                 <a:solidFill>
                   <a:srgbClr val="111111"/>
                 </a:solidFill>
@@ -8876,7 +9080,7 @@
               </a:rPr>
               <a:t>Baseline: TF-IDF + Logistic Regression.</a:t>
             </a:r>
-            <a:endParaRPr lang="en-US" sz="1520" dirty="0"/>
+            <a:endParaRPr lang="en-US" sz="1380" dirty="0"/>
           </a:p>
           <a:p>
             <a:pPr marL="177800" indent="-177800">
@@ -8884,7 +9088,7 @@
               <a:buChar char="•"/>
             </a:pPr>
             <a:r>
-              <a:rPr lang="en-US" sz="1520" dirty="0">
+              <a:rPr lang="en-US" sz="1380" dirty="0">
                 <a:solidFill>
                   <a:srgbClr val="111111"/>
                 </a:solidFill>
@@ -8894,7 +9098,7 @@
               </a:rPr>
               <a:t>Выход: impact, confidence, explanation.</a:t>
             </a:r>
-            <a:endParaRPr lang="en-US" sz="1520" dirty="0"/>
+            <a:endParaRPr lang="en-US" sz="1380" dirty="0"/>
           </a:p>
           <a:p>
             <a:pPr marL="177800" indent="-177800">
@@ -8902,7 +9106,25 @@
               <a:buChar char="•"/>
             </a:pPr>
             <a:r>
-              <a:rPr lang="en-US" sz="1520" dirty="0">
+              <a:rPr lang="en-US" sz="1380" dirty="0">
+                <a:solidFill>
+                  <a:srgbClr val="111111"/>
+                </a:solidFill>
+                <a:latin typeface="Arial" pitchFamily="34" charset="0"/>
+                <a:ea typeface="Arial" pitchFamily="34" charset="-122"/>
+                <a:cs typeface="Arial" pitchFamily="34" charset="-120"/>
+              </a:rPr>
+              <a:t>Обучение: train-baseline / train-embedding / train-transformer.</a:t>
+            </a:r>
+            <a:endParaRPr lang="en-US" sz="1380" dirty="0"/>
+          </a:p>
+          <a:p>
+            <a:pPr marL="177800" indent="-177800">
+              <a:buSzPct val="100000"/>
+              <a:buChar char="•"/>
+            </a:pPr>
+            <a:r>
+              <a:rPr lang="en-US" sz="1380" dirty="0">
                 <a:solidFill>
                   <a:srgbClr val="111111"/>
                 </a:solidFill>
@@ -8912,7 +9134,7 @@
               </a:rPr>
               <a:t>Расширение: embedding-logreg и tiny-transformer-classifier.</a:t>
             </a:r>
-            <a:endParaRPr lang="en-US" sz="1520" dirty="0"/>
+            <a:endParaRPr lang="en-US" sz="1380" dirty="0"/>
           </a:p>
         </p:txBody>
       </p:sp>
@@ -9076,7 +9298,7 @@
               <a:buNone/>
             </a:pPr>
             <a:r>
-              <a:rPr lang="en-US" sz="1450" b="1" dirty="0">
+              <a:rPr lang="en-US" sz="1350" b="1" dirty="0">
                 <a:solidFill>
                   <a:srgbClr val="1F3A5F"/>
                 </a:solidFill>
@@ -9084,9 +9306,9 @@
                 <a:ea typeface="Arial" pitchFamily="34" charset="-122"/>
                 <a:cs typeface="Arial" pitchFamily="34" charset="-120"/>
               </a:rPr>
-              <a:t>MLflow используется как точка учета экспериментов, метрик и артефактов моделей.</a:t>
-            </a:r>
-            <a:endParaRPr lang="en-US" sz="1450" dirty="0"/>
+              <a:t>CSV готовится через prepare-dataset --label-column; MLflow используется для учета экспериментов, метрик и артефактов моделей.</a:t>
+            </a:r>
+            <a:endParaRPr lang="en-US" sz="1350" dirty="0"/>
           </a:p>
         </p:txBody>
       </p:sp>
@@ -9246,7 +9468,7 @@
                 <a:ea typeface="Arial" pitchFamily="34" charset="-122"/>
                 <a:cs typeface="Arial" pitchFamily="34" charset="-120"/>
               </a:rPr>
-              <a:t>Пользователь видит ответ, источники и timeline обработки</a:t>
+              <a:t>Пользователь загружает CSV, видит активный датасет, ответ, источники и timeline</a:t>
             </a:r>
             <a:endParaRPr lang="en-US" sz="1250" dirty="0"/>
           </a:p>
@@ -9657,7 +9879,7 @@
         <p:spPr>
           <a:xfrm>
             <a:off x="822960" y="1371600"/>
-            <a:ext cx="3657600" cy="457200"/>
+            <a:ext cx="3657600" cy="420624"/>
           </a:xfrm>
           <a:prstGeom prst="rect">
             <a:avLst/>
@@ -9682,7 +9904,7 @@
         <p:spPr>
           <a:xfrm>
             <a:off x="896112" y="1463040"/>
-            <a:ext cx="3511296" cy="329184"/>
+            <a:ext cx="3511296" cy="292608"/>
           </a:xfrm>
           <a:prstGeom prst="rect">
             <a:avLst/>
@@ -9723,7 +9945,7 @@
         <p:spPr>
           <a:xfrm>
             <a:off x="4480560" y="1371600"/>
-            <a:ext cx="5029200" cy="457200"/>
+            <a:ext cx="5029200" cy="420624"/>
           </a:xfrm>
           <a:prstGeom prst="rect">
             <a:avLst/>
@@ -9748,7 +9970,7 @@
         <p:spPr>
           <a:xfrm>
             <a:off x="4553712" y="1463040"/>
-            <a:ext cx="4882896" cy="329184"/>
+            <a:ext cx="4882896" cy="292608"/>
           </a:xfrm>
           <a:prstGeom prst="rect">
             <a:avLst/>
@@ -9788,8 +10010,8 @@
         </p:nvSpPr>
         <p:spPr>
           <a:xfrm>
-            <a:off x="822960" y="1828800"/>
-            <a:ext cx="3657600" cy="457200"/>
+            <a:off x="822960" y="1792224"/>
+            <a:ext cx="3657600" cy="420624"/>
           </a:xfrm>
           <a:prstGeom prst="rect">
             <a:avLst/>
@@ -9813,8 +10035,8 @@
         </p:nvSpPr>
         <p:spPr>
           <a:xfrm>
-            <a:off x="896112" y="1920240"/>
-            <a:ext cx="3511296" cy="329184"/>
+            <a:off x="896112" y="1883664"/>
+            <a:ext cx="3511296" cy="292608"/>
           </a:xfrm>
           <a:prstGeom prst="rect">
             <a:avLst/>
@@ -9854,8 +10076,8 @@
         </p:nvSpPr>
         <p:spPr>
           <a:xfrm>
-            <a:off x="4480560" y="1828800"/>
-            <a:ext cx="5029200" cy="457200"/>
+            <a:off x="4480560" y="1792224"/>
+            <a:ext cx="5029200" cy="420624"/>
           </a:xfrm>
           <a:prstGeom prst="rect">
             <a:avLst/>
@@ -9879,8 +10101,8 @@
         </p:nvSpPr>
         <p:spPr>
           <a:xfrm>
-            <a:off x="4553712" y="1920240"/>
-            <a:ext cx="4882896" cy="329184"/>
+            <a:off x="4553712" y="1883664"/>
+            <a:ext cx="4882896" cy="292608"/>
           </a:xfrm>
           <a:prstGeom prst="rect">
             <a:avLst/>
@@ -9920,8 +10142,8 @@
         </p:nvSpPr>
         <p:spPr>
           <a:xfrm>
-            <a:off x="822960" y="2286000"/>
-            <a:ext cx="3657600" cy="457200"/>
+            <a:off x="822960" y="2212848"/>
+            <a:ext cx="3657600" cy="420624"/>
           </a:xfrm>
           <a:prstGeom prst="rect">
             <a:avLst/>
@@ -9945,8 +10167,8 @@
         </p:nvSpPr>
         <p:spPr>
           <a:xfrm>
-            <a:off x="896112" y="2377440"/>
-            <a:ext cx="3511296" cy="329184"/>
+            <a:off x="896112" y="2304288"/>
+            <a:ext cx="3511296" cy="292608"/>
           </a:xfrm>
           <a:prstGeom prst="rect">
             <a:avLst/>
@@ -9986,8 +10208,8 @@
         </p:nvSpPr>
         <p:spPr>
           <a:xfrm>
-            <a:off x="4480560" y="2286000"/>
-            <a:ext cx="5029200" cy="457200"/>
+            <a:off x="4480560" y="2212848"/>
+            <a:ext cx="5029200" cy="420624"/>
           </a:xfrm>
           <a:prstGeom prst="rect">
             <a:avLst/>
@@ -10011,8 +10233,8 @@
         </p:nvSpPr>
         <p:spPr>
           <a:xfrm>
-            <a:off x="4553712" y="2377440"/>
-            <a:ext cx="4882896" cy="329184"/>
+            <a:off x="4553712" y="2304288"/>
+            <a:ext cx="4882896" cy="292608"/>
           </a:xfrm>
           <a:prstGeom prst="rect">
             <a:avLst/>
@@ -10052,8 +10274,8 @@
         </p:nvSpPr>
         <p:spPr>
           <a:xfrm>
-            <a:off x="822960" y="2743200"/>
-            <a:ext cx="3657600" cy="457200"/>
+            <a:off x="822960" y="2633472"/>
+            <a:ext cx="3657600" cy="420624"/>
           </a:xfrm>
           <a:prstGeom prst="rect">
             <a:avLst/>
@@ -10077,8 +10299,8 @@
         </p:nvSpPr>
         <p:spPr>
           <a:xfrm>
-            <a:off x="896112" y="2834640"/>
-            <a:ext cx="3511296" cy="329184"/>
+            <a:off x="896112" y="2724912"/>
+            <a:ext cx="3511296" cy="292608"/>
           </a:xfrm>
           <a:prstGeom prst="rect">
             <a:avLst/>
@@ -10104,7 +10326,7 @@
                 <a:ea typeface="Arial" pitchFamily="34" charset="-122"/>
                 <a:cs typeface="Arial" pitchFamily="34" charset="-120"/>
               </a:rPr>
-              <a:t>CSV preview</a:t>
+              <a:t>CSV upload / active dataset</a:t>
             </a:r>
             <a:endParaRPr lang="en-US" sz="1000" dirty="0"/>
           </a:p>
@@ -10118,8 +10340,8 @@
         </p:nvSpPr>
         <p:spPr>
           <a:xfrm>
-            <a:off x="4480560" y="2743200"/>
-            <a:ext cx="5029200" cy="457200"/>
+            <a:off x="4480560" y="2633472"/>
+            <a:ext cx="5029200" cy="420624"/>
           </a:xfrm>
           <a:prstGeom prst="rect">
             <a:avLst/>
@@ -10143,8 +10365,8 @@
         </p:nvSpPr>
         <p:spPr>
           <a:xfrm>
-            <a:off x="4553712" y="2834640"/>
-            <a:ext cx="4882896" cy="329184"/>
+            <a:off x="4553712" y="2724912"/>
+            <a:ext cx="4882896" cy="292608"/>
           </a:xfrm>
           <a:prstGeom prst="rect">
             <a:avLst/>
@@ -10170,7 +10392,7 @@
                 <a:ea typeface="Arial" pitchFamily="34" charset="-122"/>
                 <a:cs typeface="Arial" pitchFamily="34" charset="-120"/>
               </a:rPr>
-              <a:t>5 документов</a:t>
+              <a:t>ok</a:t>
             </a:r>
             <a:endParaRPr lang="en-US" sz="1000" dirty="0"/>
           </a:p>
@@ -10184,8 +10406,8 @@
         </p:nvSpPr>
         <p:spPr>
           <a:xfrm>
-            <a:off x="822960" y="3200400"/>
-            <a:ext cx="3657600" cy="457200"/>
+            <a:off x="822960" y="3054096"/>
+            <a:ext cx="3657600" cy="420624"/>
           </a:xfrm>
           <a:prstGeom prst="rect">
             <a:avLst/>
@@ -10209,8 +10431,8 @@
         </p:nvSpPr>
         <p:spPr>
           <a:xfrm>
-            <a:off x="896112" y="3291840"/>
-            <a:ext cx="3511296" cy="329184"/>
+            <a:off x="896112" y="3145536"/>
+            <a:ext cx="3511296" cy="292608"/>
           </a:xfrm>
           <a:prstGeom prst="rect">
             <a:avLst/>
@@ -10236,7 +10458,7 @@
                 <a:ea typeface="Arial" pitchFamily="34" charset="-122"/>
                 <a:cs typeface="Arial" pitchFamily="34" charset="-120"/>
               </a:rPr>
-              <a:t>index CSV</a:t>
+              <a:t>CSV preview</a:t>
             </a:r>
             <a:endParaRPr lang="en-US" sz="1000" dirty="0"/>
           </a:p>
@@ -10250,8 +10472,8 @@
         </p:nvSpPr>
         <p:spPr>
           <a:xfrm>
-            <a:off x="4480560" y="3200400"/>
-            <a:ext cx="5029200" cy="457200"/>
+            <a:off x="4480560" y="3054096"/>
+            <a:ext cx="5029200" cy="420624"/>
           </a:xfrm>
           <a:prstGeom prst="rect">
             <a:avLst/>
@@ -10275,8 +10497,8 @@
         </p:nvSpPr>
         <p:spPr>
           <a:xfrm>
-            <a:off x="4553712" y="3291840"/>
-            <a:ext cx="4882896" cy="329184"/>
+            <a:off x="4553712" y="3145536"/>
+            <a:ext cx="4882896" cy="292608"/>
           </a:xfrm>
           <a:prstGeom prst="rect">
             <a:avLst/>
@@ -10302,7 +10524,7 @@
                 <a:ea typeface="Arial" pitchFamily="34" charset="-122"/>
                 <a:cs typeface="Arial" pitchFamily="34" charset="-120"/>
               </a:rPr>
-              <a:t>5 документов</a:t>
+              <a:t>активный набор</a:t>
             </a:r>
             <a:endParaRPr lang="en-US" sz="1000" dirty="0"/>
           </a:p>
@@ -10316,8 +10538,8 @@
         </p:nvSpPr>
         <p:spPr>
           <a:xfrm>
-            <a:off x="822960" y="3657600"/>
-            <a:ext cx="3657600" cy="457200"/>
+            <a:off x="822960" y="3474720"/>
+            <a:ext cx="3657600" cy="420624"/>
           </a:xfrm>
           <a:prstGeom prst="rect">
             <a:avLst/>
@@ -10341,8 +10563,8 @@
         </p:nvSpPr>
         <p:spPr>
           <a:xfrm>
-            <a:off x="896112" y="3749040"/>
-            <a:ext cx="3511296" cy="329184"/>
+            <a:off x="896112" y="3566160"/>
+            <a:ext cx="3511296" cy="292608"/>
           </a:xfrm>
           <a:prstGeom prst="rect">
             <a:avLst/>
@@ -10368,7 +10590,7 @@
                 <a:ea typeface="Arial" pitchFamily="34" charset="-122"/>
                 <a:cs typeface="Arial" pitchFamily="34" charset="-120"/>
               </a:rPr>
-              <a:t>Taskiq job</a:t>
+              <a:t>index CSV</a:t>
             </a:r>
             <a:endParaRPr lang="en-US" sz="1000" dirty="0"/>
           </a:p>
@@ -10382,8 +10604,8 @@
         </p:nvSpPr>
         <p:spPr>
           <a:xfrm>
-            <a:off x="4480560" y="3657600"/>
-            <a:ext cx="5029200" cy="457200"/>
+            <a:off x="4480560" y="3474720"/>
+            <a:ext cx="5029200" cy="420624"/>
           </a:xfrm>
           <a:prstGeom prst="rect">
             <a:avLst/>
@@ -10407,8 +10629,8 @@
         </p:nvSpPr>
         <p:spPr>
           <a:xfrm>
-            <a:off x="4553712" y="3749040"/>
-            <a:ext cx="4882896" cy="329184"/>
+            <a:off x="4553712" y="3566160"/>
+            <a:ext cx="4882896" cy="292608"/>
           </a:xfrm>
           <a:prstGeom prst="rect">
             <a:avLst/>
@@ -10434,7 +10656,7 @@
                 <a:ea typeface="Arial" pitchFamily="34" charset="-122"/>
                 <a:cs typeface="Arial" pitchFamily="34" charset="-120"/>
               </a:rPr>
-              <a:t>queued</a:t>
+              <a:t>5 документов</a:t>
             </a:r>
             <a:endParaRPr lang="en-US" sz="1000" dirty="0"/>
           </a:p>
@@ -10448,8 +10670,8 @@
         </p:nvSpPr>
         <p:spPr>
           <a:xfrm>
-            <a:off x="822960" y="4114800"/>
-            <a:ext cx="3657600" cy="457200"/>
+            <a:off x="822960" y="3895344"/>
+            <a:ext cx="3657600" cy="420624"/>
           </a:xfrm>
           <a:prstGeom prst="rect">
             <a:avLst/>
@@ -10473,8 +10695,8 @@
         </p:nvSpPr>
         <p:spPr>
           <a:xfrm>
-            <a:off x="896112" y="4206240"/>
-            <a:ext cx="3511296" cy="329184"/>
+            <a:off x="896112" y="3986784"/>
+            <a:ext cx="3511296" cy="292608"/>
           </a:xfrm>
           <a:prstGeom prst="rect">
             <a:avLst/>
@@ -10500,7 +10722,7 @@
                 <a:ea typeface="Arial" pitchFamily="34" charset="-122"/>
                 <a:cs typeface="Arial" pitchFamily="34" charset="-120"/>
               </a:rPr>
-              <a:t>retrieval + analysis</a:t>
+              <a:t>Taskiq job</a:t>
             </a:r>
             <a:endParaRPr lang="en-US" sz="1000" dirty="0"/>
           </a:p>
@@ -10514,8 +10736,8 @@
         </p:nvSpPr>
         <p:spPr>
           <a:xfrm>
-            <a:off x="4480560" y="4114800"/>
-            <a:ext cx="5029200" cy="457200"/>
+            <a:off x="4480560" y="3895344"/>
+            <a:ext cx="5029200" cy="420624"/>
           </a:xfrm>
           <a:prstGeom prst="rect">
             <a:avLst/>
@@ -10539,8 +10761,8 @@
         </p:nvSpPr>
         <p:spPr>
           <a:xfrm>
-            <a:off x="4553712" y="4206240"/>
-            <a:ext cx="4882896" cy="329184"/>
+            <a:off x="4553712" y="3986784"/>
+            <a:ext cx="4882896" cy="292608"/>
           </a:xfrm>
           <a:prstGeom prst="rect">
             <a:avLst/>
@@ -10566,7 +10788,7 @@
                 <a:ea typeface="Arial" pitchFamily="34" charset="-122"/>
                 <a:cs typeface="Arial" pitchFamily="34" charset="-120"/>
               </a:rPr>
-              <a:t>источники + impact</a:t>
+              <a:t>queued</a:t>
             </a:r>
             <a:endParaRPr lang="en-US" sz="1000" dirty="0"/>
           </a:p>
@@ -10580,8 +10802,8 @@
         </p:nvSpPr>
         <p:spPr>
           <a:xfrm>
-            <a:off x="822960" y="4572000"/>
-            <a:ext cx="3657600" cy="457200"/>
+            <a:off x="822960" y="4315968"/>
+            <a:ext cx="3657600" cy="420624"/>
           </a:xfrm>
           <a:prstGeom prst="rect">
             <a:avLst/>
@@ -10605,8 +10827,8 @@
         </p:nvSpPr>
         <p:spPr>
           <a:xfrm>
-            <a:off x="896112" y="4663440"/>
-            <a:ext cx="3511296" cy="329184"/>
+            <a:off x="896112" y="4407408"/>
+            <a:ext cx="3511296" cy="292608"/>
           </a:xfrm>
           <a:prstGeom prst="rect">
             <a:avLst/>
@@ -10632,7 +10854,7 @@
                 <a:ea typeface="Arial" pitchFamily="34" charset="-122"/>
                 <a:cs typeface="Arial" pitchFamily="34" charset="-120"/>
               </a:rPr>
-              <a:t>chat SSE</a:t>
+              <a:t>retrieval + analysis</a:t>
             </a:r>
             <a:endParaRPr lang="en-US" sz="1000" dirty="0"/>
           </a:p>
@@ -10646,8 +10868,8 @@
         </p:nvSpPr>
         <p:spPr>
           <a:xfrm>
-            <a:off x="4480560" y="4572000"/>
-            <a:ext cx="5029200" cy="457200"/>
+            <a:off x="4480560" y="4315968"/>
+            <a:ext cx="5029200" cy="420624"/>
           </a:xfrm>
           <a:prstGeom prst="rect">
             <a:avLst/>
@@ -10671,8 +10893,8 @@
         </p:nvSpPr>
         <p:spPr>
           <a:xfrm>
-            <a:off x="4553712" y="4663440"/>
-            <a:ext cx="4882896" cy="329184"/>
+            <a:off x="4553712" y="4407408"/>
+            <a:ext cx="4882896" cy="292608"/>
           </a:xfrm>
           <a:prstGeom prst="rect">
             <a:avLst/>
@@ -10698,7 +10920,7 @@
                 <a:ea typeface="Arial" pitchFamily="34" charset="-122"/>
                 <a:cs typeface="Arial" pitchFamily="34" charset="-120"/>
               </a:rPr>
-              <a:t>8 событий</a:t>
+              <a:t>источники + impact</a:t>
             </a:r>
             <a:endParaRPr lang="en-US" sz="1000" dirty="0"/>
           </a:p>
@@ -10712,8 +10934,8 @@
         </p:nvSpPr>
         <p:spPr>
           <a:xfrm>
-            <a:off x="822960" y="5029200"/>
-            <a:ext cx="3657600" cy="457200"/>
+            <a:off x="822960" y="4736592"/>
+            <a:ext cx="3657600" cy="420624"/>
           </a:xfrm>
           <a:prstGeom prst="rect">
             <a:avLst/>
@@ -10737,8 +10959,8 @@
         </p:nvSpPr>
         <p:spPr>
           <a:xfrm>
-            <a:off x="896112" y="5120640"/>
-            <a:ext cx="3511296" cy="329184"/>
+            <a:off x="896112" y="4828032"/>
+            <a:ext cx="3511296" cy="292608"/>
           </a:xfrm>
           <a:prstGeom prst="rect">
             <a:avLst/>
@@ -10764,7 +10986,7 @@
                 <a:ea typeface="Arial" pitchFamily="34" charset="-122"/>
                 <a:cs typeface="Arial" pitchFamily="34" charset="-120"/>
               </a:rPr>
-              <a:t>frontend HTML</a:t>
+              <a:t>chat SSE</a:t>
             </a:r>
             <a:endParaRPr lang="en-US" sz="1000" dirty="0"/>
           </a:p>
@@ -10778,8 +11000,8 @@
         </p:nvSpPr>
         <p:spPr>
           <a:xfrm>
-            <a:off x="4480560" y="5029200"/>
-            <a:ext cx="5029200" cy="457200"/>
+            <a:off x="4480560" y="4736592"/>
+            <a:ext cx="5029200" cy="420624"/>
           </a:xfrm>
           <a:prstGeom prst="rect">
             <a:avLst/>
@@ -10803,8 +11025,8 @@
         </p:nvSpPr>
         <p:spPr>
           <a:xfrm>
-            <a:off x="4553712" y="5120640"/>
-            <a:ext cx="4882896" cy="329184"/>
+            <a:off x="4553712" y="4828032"/>
+            <a:ext cx="4882896" cy="292608"/>
           </a:xfrm>
           <a:prstGeom prst="rect">
             <a:avLst/>
@@ -10830,6 +11052,138 @@
                 <a:ea typeface="Arial" pitchFamily="34" charset="-122"/>
                 <a:cs typeface="Arial" pitchFamily="34" charset="-120"/>
               </a:rPr>
+              <a:t>8 событий</a:t>
+            </a:r>
+            <a:endParaRPr lang="en-US" sz="1000" dirty="0"/>
+          </a:p>
+        </p:txBody>
+      </p:sp>
+      <p:sp>
+        <p:nvSpPr>
+          <p:cNvPr id="45" name="Shape 43"/>
+          <p:cNvSpPr/>
+          <p:nvPr/>
+        </p:nvSpPr>
+        <p:spPr>
+          <a:xfrm>
+            <a:off x="822960" y="5157216"/>
+            <a:ext cx="3657600" cy="420624"/>
+          </a:xfrm>
+          <a:prstGeom prst="rect">
+            <a:avLst/>
+          </a:prstGeom>
+          <a:solidFill>
+            <a:srgbClr val="FFFFFF"/>
+          </a:solidFill>
+          <a:ln w="10160">
+            <a:solidFill>
+              <a:srgbClr val="B7C6C0"/>
+            </a:solidFill>
+            <a:prstDash val="solid"/>
+          </a:ln>
+        </p:spPr>
+      </p:sp>
+      <p:sp>
+        <p:nvSpPr>
+          <p:cNvPr id="46" name="Text 44"/>
+          <p:cNvSpPr/>
+          <p:nvPr/>
+        </p:nvSpPr>
+        <p:spPr>
+          <a:xfrm>
+            <a:off x="896112" y="5248656"/>
+            <a:ext cx="3511296" cy="292608"/>
+          </a:xfrm>
+          <a:prstGeom prst="rect">
+            <a:avLst/>
+          </a:prstGeom>
+          <a:noFill/>
+          <a:ln/>
+        </p:spPr>
+        <p:txBody>
+          <a:bodyPr wrap="square" lIns="0" tIns="0" rIns="0" bIns="0" rtlCol="0" anchor="ctr">
+            <a:normAutofit/>
+          </a:bodyPr>
+          <a:lstStyle/>
+          <a:p>
+            <a:pPr indent="0" marL="0">
+              <a:buNone/>
+            </a:pPr>
+            <a:r>
+              <a:rPr lang="en-US" sz="1000" dirty="0">
+                <a:solidFill>
+                  <a:srgbClr val="111111"/>
+                </a:solidFill>
+                <a:latin typeface="Arial" pitchFamily="34" charset="0"/>
+                <a:ea typeface="Arial" pitchFamily="34" charset="-122"/>
+                <a:cs typeface="Arial" pitchFamily="34" charset="-120"/>
+              </a:rPr>
+              <a:t>frontend HTML</a:t>
+            </a:r>
+            <a:endParaRPr lang="en-US" sz="1000" dirty="0"/>
+          </a:p>
+        </p:txBody>
+      </p:sp>
+      <p:sp>
+        <p:nvSpPr>
+          <p:cNvPr id="47" name="Shape 45"/>
+          <p:cNvSpPr/>
+          <p:nvPr/>
+        </p:nvSpPr>
+        <p:spPr>
+          <a:xfrm>
+            <a:off x="4480560" y="5157216"/>
+            <a:ext cx="5029200" cy="420624"/>
+          </a:xfrm>
+          <a:prstGeom prst="rect">
+            <a:avLst/>
+          </a:prstGeom>
+          <a:solidFill>
+            <a:srgbClr val="FFFFFF"/>
+          </a:solidFill>
+          <a:ln w="10160">
+            <a:solidFill>
+              <a:srgbClr val="B7C6C0"/>
+            </a:solidFill>
+            <a:prstDash val="solid"/>
+          </a:ln>
+        </p:spPr>
+      </p:sp>
+      <p:sp>
+        <p:nvSpPr>
+          <p:cNvPr id="48" name="Text 46"/>
+          <p:cNvSpPr/>
+          <p:nvPr/>
+        </p:nvSpPr>
+        <p:spPr>
+          <a:xfrm>
+            <a:off x="4553712" y="5248656"/>
+            <a:ext cx="4882896" cy="292608"/>
+          </a:xfrm>
+          <a:prstGeom prst="rect">
+            <a:avLst/>
+          </a:prstGeom>
+          <a:noFill/>
+          <a:ln/>
+        </p:spPr>
+        <p:txBody>
+          <a:bodyPr wrap="square" lIns="0" tIns="0" rIns="0" bIns="0" rtlCol="0" anchor="ctr">
+            <a:normAutofit/>
+          </a:bodyPr>
+          <a:lstStyle/>
+          <a:p>
+            <a:pPr indent="0" marL="0">
+              <a:buNone/>
+            </a:pPr>
+            <a:r>
+              <a:rPr lang="en-US" sz="1000" dirty="0">
+                <a:solidFill>
+                  <a:srgbClr val="111111"/>
+                </a:solidFill>
+                <a:latin typeface="Arial" pitchFamily="34" charset="0"/>
+                <a:ea typeface="Arial" pitchFamily="34" charset="-122"/>
+                <a:cs typeface="Arial" pitchFamily="34" charset="-120"/>
+              </a:rPr>
               <a:t>ok</a:t>
             </a:r>
             <a:endParaRPr lang="en-US" sz="1000" dirty="0"/>
@@ -10838,7 +11192,7 @@
       </p:sp>
       <p:sp>
         <p:nvSpPr>
-          <p:cNvPr id="45" name="Text 43"/>
+          <p:cNvPr id="49" name="Text 47"/>
           <p:cNvSpPr/>
           <p:nvPr/>
         </p:nvSpPr>
@@ -10872,6 +11226,45 @@
               <a:t>Команды: just demo-up → just demo-smoke → just demo-down</a:t>
             </a:r>
             <a:endParaRPr lang="en-US" sz="1500" dirty="0"/>
+          </a:p>
+        </p:txBody>
+      </p:sp>
+      <p:sp>
+        <p:nvSpPr>
+          <p:cNvPr id="50" name="Text 48"/>
+          <p:cNvSpPr/>
+          <p:nvPr/>
+        </p:nvSpPr>
+        <p:spPr>
+          <a:xfrm>
+            <a:off x="822960" y="6062472"/>
+            <a:ext cx="9875520" cy="256032"/>
+          </a:xfrm>
+          <a:prstGeom prst="rect">
+            <a:avLst/>
+          </a:prstGeom>
+          <a:noFill/>
+          <a:ln/>
+        </p:spPr>
+        <p:txBody>
+          <a:bodyPr wrap="square" lIns="0" tIns="0" rIns="0" bIns="0" rtlCol="0" anchor="ctr"/>
+          <a:lstStyle/>
+          <a:p>
+            <a:pPr indent="0" marL="0">
+              <a:buNone/>
+            </a:pPr>
+            <a:r>
+              <a:rPr lang="en-US" sz="1150" b="1" dirty="0">
+                <a:solidFill>
+                  <a:srgbClr val="1F3A5F"/>
+                </a:solidFill>
+                <a:latin typeface="Arial" pitchFamily="34" charset="0"/>
+                <a:ea typeface="Arial" pitchFamily="34" charset="-122"/>
+                <a:cs typeface="Arial" pitchFamily="34" charset="-120"/>
+              </a:rPr>
+              <a:t>Обученные режимы: prepare-dataset --label-column → train-* → compare-models → demo-up-trained</a:t>
+            </a:r>
+            <a:endParaRPr lang="en-US" sz="1150" dirty="0"/>
           </a:p>
         </p:txBody>
       </p:sp>

--- a/docs/final/coursework-defense-presentation.pptx
+++ b/docs/final/coursework-defense-presentation.pptx
@@ -4,6 +4,9 @@
   <p:sldMasterIdLst>
     <p:sldMasterId id="2147483648" r:id="rId1"/>
   </p:sldMasterIdLst>
+  <p:notesMasterIdLst>
+    <p:notesMasterId r:id="rId13"/>
+  </p:notesMasterIdLst>
   <p:sldIdLst>
     <p:sldId id="256" r:id="rId2"/>
     <p:sldId id="257" r:id="rId3"/>
@@ -17,11 +20,8 @@
     <p:sldId id="265" r:id="rId11"/>
     <p:sldId id="266" r:id="rId12"/>
   </p:sldIdLst>
-  <p:notesMasterIdLst>
-    <p:notesMasterId r:id="rId13"/>
-  </p:notesMasterIdLst>
-  <p:sldSz cx="12191695" cy="6858000"/>
-  <p:notesSz cx="6858000" cy="12191695"/>
+  <p:sldSz cx="12192000" cy="6858000"/>
+  <p:notesSz cx="6858000" cy="12192000"/>
   <p:defaultTextStyle>
     <a:lvl1pPr marL="0" algn="l" defTabSz="914400" rtl="0" eaLnBrk="1" latinLnBrk="0" hangingPunct="1">
       <a:defRPr sz="1800" kern="1200">
@@ -114,6 +114,11 @@
       </a:defRPr>
     </a:lvl9pPr>
   </p:defaultTextStyle>
+  <p:extLst>
+    <p:ext uri="{EFAFB233-063F-42B5-8137-9DF3F51BA10A}">
+      <p15:sldGuideLst xmlns:p15="http://schemas.microsoft.com/office/powerpoint/2012/main"/>
+    </p:ext>
+  </p:extLst>
 </p:presentation>
 </file>
 
@@ -139,234 +144,10 @@
           <a:chExt cx="0" cy="0"/>
         </a:xfrm>
       </p:grpSpPr>
-      <p:sp>
-        <p:nvSpPr>
-          <p:cNvPr id="2" name="Header Placeholder 1"/>
-          <p:cNvSpPr>
-            <a:spLocks noGrp="1"/>
-          </p:cNvSpPr>
-          <p:nvPr>
-            <p:ph type="hdr" sz="quarter"/>
-          </p:nvPr>
-        </p:nvSpPr>
-        <p:spPr>
-          <a:xfrm>
-            <a:off x="0" y="0"/>
-            <a:ext cx="2971800" cy="458788"/>
-          </a:xfrm>
-          <a:prstGeom prst="rect">
-            <a:avLst/>
-          </a:prstGeom>
-        </p:spPr>
-        <p:txBody>
-          <a:bodyPr vert="horz" lIns="91440" tIns="45720" rIns="91440" bIns="45720" rtlCol="0"/>
-          <a:lstStyle>
-            <a:lvl1pPr algn="l">
-              <a:defRPr sz="1200"/>
-            </a:lvl1pPr>
-          </a:lstStyle>
-          <a:p>
-            <a:endParaRPr lang="en-US"/>
-          </a:p>
-        </p:txBody>
-      </p:sp>
-      <p:sp>
-        <p:nvSpPr>
-          <p:cNvPr id="3" name="Date Placeholder 2"/>
-          <p:cNvSpPr>
-            <a:spLocks noGrp="1"/>
-          </p:cNvSpPr>
-          <p:nvPr>
-            <p:ph type="dt" idx="1"/>
-          </p:nvPr>
-        </p:nvSpPr>
-        <p:spPr>
-          <a:xfrm>
-            <a:off x="3884613" y="0"/>
-            <a:ext cx="2971800" cy="458788"/>
-          </a:xfrm>
-          <a:prstGeom prst="rect">
-            <a:avLst/>
-          </a:prstGeom>
-        </p:spPr>
-        <p:txBody>
-          <a:bodyPr vert="horz" lIns="91440" tIns="45720" rIns="91440" bIns="45720" rtlCol="0"/>
-          <a:lstStyle>
-            <a:lvl1pPr algn="r">
-              <a:defRPr sz="1200"/>
-            </a:lvl1pPr>
-          </a:lstStyle>
-          <a:p>
-            <a:fld id="{5282F153-3F37-0F45-9E97-73ACFA13230C}" type="datetimeFigureOut">
-              <a:rPr lang="en-US"/>
-              <a:t>7/23/19</a:t>
-            </a:fld>
-            <a:endParaRPr lang="en-US"/>
-          </a:p>
-        </p:txBody>
-      </p:sp>
-      <p:sp>
-        <p:nvSpPr>
-          <p:cNvPr id="4" name="Slide Image Placeholder 3"/>
-          <p:cNvSpPr>
-            <a:spLocks noGrp="1" noRot="1" noChangeAspect="1"/>
-          </p:cNvSpPr>
-          <p:nvPr>
-            <p:ph type="sldImg" idx="2"/>
-          </p:nvPr>
-        </p:nvSpPr>
-        <p:spPr>
-          <a:xfrm>
-            <a:off x="685800" y="1143000"/>
-            <a:ext cx="5486400" cy="3086100"/>
-          </a:xfrm>
-          <a:prstGeom prst="rect">
-            <a:avLst/>
-          </a:prstGeom>
-          <a:noFill/>
-          <a:ln w="12700">
-            <a:solidFill>
-              <a:prstClr val="black"/>
-            </a:solidFill>
-          </a:ln>
-        </p:spPr>
-        <p:txBody>
-          <a:bodyPr vert="horz" lIns="91440" tIns="45720" rIns="91440" bIns="45720" rtlCol="0" anchor="ctr"/>
-          <a:lstStyle/>
-          <a:p>
-            <a:endParaRPr lang="en-US"/>
-          </a:p>
-        </p:txBody>
-      </p:sp>
-      <p:sp>
-        <p:nvSpPr>
-          <p:cNvPr id="5" name="Notes Placeholder 4"/>
-          <p:cNvSpPr>
-            <a:spLocks noGrp="1"/>
-          </p:cNvSpPr>
-          <p:nvPr>
-            <p:ph type="body" sz="quarter" idx="3"/>
-          </p:nvPr>
-        </p:nvSpPr>
-        <p:spPr>
-          <a:xfrm>
-            <a:off x="685800" y="4400550"/>
-            <a:ext cx="5486400" cy="3600450"/>
-          </a:xfrm>
-          <a:prstGeom prst="rect">
-            <a:avLst/>
-          </a:prstGeom>
-        </p:spPr>
-        <p:txBody>
-          <a:bodyPr vert="horz" lIns="91440" tIns="45720" rIns="91440" bIns="45720" rtlCol="0"/>
-          <a:lstStyle/>
-          <a:p>
-            <a:pPr lvl="0"/>
-            <a:r>
-              <a:rPr lang="en-US"/>
-              <a:t>Click to edit Master text styles</a:t>
-            </a:r>
-          </a:p>
-          <a:p>
-            <a:pPr lvl="1"/>
-            <a:r>
-              <a:rPr lang="en-US"/>
-              <a:t>Second level</a:t>
-            </a:r>
-          </a:p>
-          <a:p>
-            <a:pPr lvl="2"/>
-            <a:r>
-              <a:rPr lang="en-US"/>
-              <a:t>Third level</a:t>
-            </a:r>
-          </a:p>
-          <a:p>
-            <a:pPr lvl="3"/>
-            <a:r>
-              <a:rPr lang="en-US"/>
-              <a:t>Fourth level</a:t>
-            </a:r>
-          </a:p>
-          <a:p>
-            <a:pPr lvl="4"/>
-            <a:r>
-              <a:rPr lang="en-US"/>
-              <a:t>Fifth level</a:t>
-            </a:r>
-          </a:p>
-        </p:txBody>
-      </p:sp>
-      <p:sp>
-        <p:nvSpPr>
-          <p:cNvPr id="6" name="Footer Placeholder 5"/>
-          <p:cNvSpPr>
-            <a:spLocks noGrp="1"/>
-          </p:cNvSpPr>
-          <p:nvPr>
-            <p:ph type="ftr" sz="quarter" idx="4"/>
-          </p:nvPr>
-        </p:nvSpPr>
-        <p:spPr>
-          <a:xfrm>
-            <a:off x="0" y="8685213"/>
-            <a:ext cx="2971800" cy="458787"/>
-          </a:xfrm>
-          <a:prstGeom prst="rect">
-            <a:avLst/>
-          </a:prstGeom>
-        </p:spPr>
-        <p:txBody>
-          <a:bodyPr vert="horz" lIns="91440" tIns="45720" rIns="91440" bIns="45720" rtlCol="0" anchor="b"/>
-          <a:lstStyle>
-            <a:lvl1pPr algn="l">
-              <a:defRPr sz="1200"/>
-            </a:lvl1pPr>
-          </a:lstStyle>
-          <a:p>
-            <a:endParaRPr lang="en-US"/>
-          </a:p>
-        </p:txBody>
-      </p:sp>
-      <p:sp>
-        <p:nvSpPr>
-          <p:cNvPr id="7" name="Slide Number Placeholder 6"/>
-          <p:cNvSpPr>
-            <a:spLocks noGrp="1"/>
-          </p:cNvSpPr>
-          <p:nvPr>
-            <p:ph type="sldNum" sz="quarter" idx="5"/>
-          </p:nvPr>
-        </p:nvSpPr>
-        <p:spPr>
-          <a:xfrm>
-            <a:off x="3884613" y="8685213"/>
-            <a:ext cx="2971800" cy="458787"/>
-          </a:xfrm>
-          <a:prstGeom prst="rect">
-            <a:avLst/>
-          </a:prstGeom>
-        </p:spPr>
-        <p:txBody>
-          <a:bodyPr vert="horz" lIns="91440" tIns="45720" rIns="91440" bIns="45720" rtlCol="0" anchor="b"/>
-          <a:lstStyle>
-            <a:lvl1pPr algn="r">
-              <a:defRPr sz="1200"/>
-            </a:lvl1pPr>
-          </a:lstStyle>
-          <a:p>
-            <a:fld id="{CE5E9CC1-C706-0F49-92D6-E571CC5EEA8F}" type="slidenum">
-              <a:rPr lang="en-US"/>
-              <a:t>‹#›</a:t>
-            </a:fld>
-            <a:endParaRPr lang="en-US"/>
-          </a:p>
-        </p:txBody>
-      </p:sp>
     </p:spTree>
     <p:extLst>
       <p:ext uri="{BB962C8B-B14F-4D97-AF65-F5344CB8AC3E}">
-        <p14:creationId xmlns:p14="http://schemas.microsoft.com/office/powerpoint/2010/main" val="1024086991"/>
+        <p14:creationId xmlns:p14="http://schemas.microsoft.com/office/powerpoint/2010/main" val="3089133788"/>
       </p:ext>
     </p:extLst>
   </p:cSld>
@@ -510,10 +291,6 @@
           <a:bodyPr/>
           <a:lstStyle/>
           <a:p>
-            <a:r>
-              <a:rPr lang="en-US" dirty="0"/>
-              <a:t/>
-            </a:r>
             <a:endParaRPr lang="en-US" dirty="0"/>
           </a:p>
         </p:txBody>
@@ -598,10 +375,6 @@
           <a:bodyPr/>
           <a:lstStyle/>
           <a:p>
-            <a:r>
-              <a:rPr lang="en-US" dirty="0"/>
-              <a:t/>
-            </a:r>
             <a:endParaRPr lang="en-US" dirty="0"/>
           </a:p>
         </p:txBody>
@@ -686,10 +459,6 @@
           <a:bodyPr/>
           <a:lstStyle/>
           <a:p>
-            <a:r>
-              <a:rPr lang="en-US" dirty="0"/>
-              <a:t/>
-            </a:r>
             <a:endParaRPr lang="en-US" dirty="0"/>
           </a:p>
         </p:txBody>
@@ -774,10 +543,6 @@
           <a:bodyPr/>
           <a:lstStyle/>
           <a:p>
-            <a:r>
-              <a:rPr lang="en-US" dirty="0"/>
-              <a:t/>
-            </a:r>
             <a:endParaRPr lang="en-US" dirty="0"/>
           </a:p>
         </p:txBody>
@@ -862,10 +627,6 @@
           <a:bodyPr/>
           <a:lstStyle/>
           <a:p>
-            <a:r>
-              <a:rPr lang="en-US" dirty="0"/>
-              <a:t/>
-            </a:r>
             <a:endParaRPr lang="en-US" dirty="0"/>
           </a:p>
         </p:txBody>
@@ -950,10 +711,6 @@
           <a:bodyPr/>
           <a:lstStyle/>
           <a:p>
-            <a:r>
-              <a:rPr lang="en-US" dirty="0"/>
-              <a:t/>
-            </a:r>
             <a:endParaRPr lang="en-US" dirty="0"/>
           </a:p>
         </p:txBody>
@@ -1038,10 +795,6 @@
           <a:bodyPr/>
           <a:lstStyle/>
           <a:p>
-            <a:r>
-              <a:rPr lang="en-US" dirty="0"/>
-              <a:t/>
-            </a:r>
             <a:endParaRPr lang="en-US" dirty="0"/>
           </a:p>
         </p:txBody>
@@ -1126,10 +879,6 @@
           <a:bodyPr/>
           <a:lstStyle/>
           <a:p>
-            <a:r>
-              <a:rPr lang="en-US" dirty="0"/>
-              <a:t/>
-            </a:r>
             <a:endParaRPr lang="en-US" dirty="0"/>
           </a:p>
         </p:txBody>
@@ -1214,10 +963,6 @@
           <a:bodyPr/>
           <a:lstStyle/>
           <a:p>
-            <a:r>
-              <a:rPr lang="en-US" dirty="0"/>
-              <a:t/>
-            </a:r>
             <a:endParaRPr lang="en-US" dirty="0"/>
           </a:p>
         </p:txBody>
@@ -1302,10 +1047,6 @@
           <a:bodyPr/>
           <a:lstStyle/>
           <a:p>
-            <a:r>
-              <a:rPr lang="en-US" dirty="0"/>
-              <a:t/>
-            </a:r>
             <a:endParaRPr lang="en-US" dirty="0"/>
           </a:p>
         </p:txBody>
@@ -1390,10 +1131,6 @@
           <a:bodyPr/>
           <a:lstStyle/>
           <a:p>
-            <a:r>
-              <a:rPr lang="en-US" dirty="0"/>
-              <a:t/>
-            </a:r>
             <a:endParaRPr lang="en-US" dirty="0"/>
           </a:p>
         </p:txBody>
@@ -1467,6 +1204,11 @@
 <file path=ppt/slideMasters/slideMaster1.xml><?xml version="1.0" encoding="utf-8"?>
 <p:sldMaster xmlns:a="http://schemas.openxmlformats.org/drawingml/2006/main" xmlns:r="http://schemas.openxmlformats.org/officeDocument/2006/relationships" xmlns:p="http://schemas.openxmlformats.org/presentationml/2006/main">
   <p:cSld>
+    <p:bg>
+      <p:bgRef idx="1001">
+        <a:schemeClr val="bg1"/>
+      </p:bgRef>
+    </p:bg>
     <p:spTree>
       <p:nvGrpSpPr>
         <p:cNvPr id="1" name=""/>
@@ -1749,6 +1491,7 @@
         <a:solidFill>
           <a:srgbClr val="F8F9F8"/>
         </a:solidFill>
+        <a:effectLst/>
       </p:bgPr>
     </p:bg>
     <p:spTree>
@@ -1838,7 +1581,7 @@
           </a:bodyPr>
           <a:lstStyle/>
           <a:p>
-            <a:pPr algn="ctr" indent="0" marL="0">
+            <a:pPr marL="0" indent="0" algn="ctr">
               <a:buNone/>
             </a:pPr>
             <a:r>
@@ -1877,7 +1620,7 @@
           <a:bodyPr wrap="square" lIns="0" tIns="0" rIns="0" bIns="0" rtlCol="0" anchor="ctr"/>
           <a:lstStyle/>
           <a:p>
-            <a:pPr algn="ctr" indent="0" marL="0">
+            <a:pPr marL="0" indent="0" algn="ctr">
               <a:buNone/>
             </a:pPr>
             <a:r>
@@ -1918,7 +1661,7 @@
           </a:bodyPr>
           <a:lstStyle/>
           <a:p>
-            <a:pPr algn="ctr" indent="0" marL="0">
+            <a:pPr marL="0" indent="0" algn="ctr">
               <a:buNone/>
             </a:pPr>
             <a:r>
@@ -1959,7 +1702,7 @@
           </a:bodyPr>
           <a:lstStyle/>
           <a:p>
-            <a:pPr indent="0" marL="0">
+            <a:pPr marL="0" indent="0">
               <a:buNone/>
             </a:pPr>
             <a:r>
@@ -1976,7 +1719,7 @@
             <a:endParaRPr lang="en-US" sz="1300" dirty="0"/>
           </a:p>
           <a:p>
-            <a:pPr indent="0" marL="0">
+            <a:pPr marL="0" indent="0">
               <a:buNone/>
             </a:pPr>
             <a:r>
@@ -1993,7 +1736,7 @@
             <a:endParaRPr lang="en-US" sz="1300" dirty="0"/>
           </a:p>
           <a:p>
-            <a:pPr indent="0" marL="0">
+            <a:pPr marL="0" indent="0">
               <a:buNone/>
             </a:pPr>
             <a:r>
@@ -2055,7 +1798,7 @@
           <a:bodyPr wrap="square" lIns="0" tIns="0" rIns="0" bIns="0" rtlCol="0" anchor="ctr"/>
           <a:lstStyle/>
           <a:p>
-            <a:pPr algn="ctr" indent="0" marL="0">
+            <a:pPr marL="0" indent="0" algn="ctr">
               <a:buNone/>
             </a:pPr>
             <a:r>
@@ -2094,7 +1837,7 @@
           <a:bodyPr wrap="square" lIns="0" tIns="0" rIns="0" bIns="0" rtlCol="0" anchor="ctr"/>
           <a:lstStyle/>
           <a:p>
-            <a:pPr algn="r" indent="0" marL="0">
+            <a:pPr marL="0" indent="0" algn="r">
               <a:buNone/>
             </a:pPr>
             <a:r>
@@ -2128,6 +1871,7 @@
         <a:solidFill>
           <a:srgbClr val="F8F9F8"/>
         </a:solidFill>
+        <a:effectLst/>
       </p:bgPr>
     </p:bg>
     <p:spTree>
@@ -2217,7 +1961,7 @@
           </a:bodyPr>
           <a:lstStyle/>
           <a:p>
-            <a:pPr indent="0" marL="0">
+            <a:pPr marL="0" indent="0">
               <a:buNone/>
             </a:pPr>
             <a:r>
@@ -2258,7 +2002,7 @@
           </a:bodyPr>
           <a:lstStyle/>
           <a:p>
-            <a:pPr indent="0" marL="0">
+            <a:pPr marL="0" indent="0">
               <a:buNone/>
             </a:pPr>
             <a:r>
@@ -2297,7 +2041,7 @@
           <a:bodyPr wrap="square" lIns="0" tIns="0" rIns="0" bIns="0" rtlCol="0" anchor="ctr"/>
           <a:lstStyle/>
           <a:p>
-            <a:pPr algn="r" indent="0" marL="0">
+            <a:pPr marL="0" indent="0" algn="r">
               <a:buNone/>
             </a:pPr>
             <a:r>
@@ -2363,7 +2107,7 @@
           </a:bodyPr>
           <a:lstStyle/>
           <a:p>
-            <a:pPr indent="0" marL="0">
+            <a:pPr marL="0" indent="0">
               <a:buNone/>
             </a:pPr>
             <a:r>
@@ -2402,7 +2146,7 @@
           <a:bodyPr wrap="square" lIns="0" tIns="0" rIns="0" bIns="0" rtlCol="0" anchor="ctr"/>
           <a:lstStyle/>
           <a:p>
-            <a:pPr indent="0" marL="0">
+            <a:pPr marL="0" indent="0">
               <a:buNone/>
             </a:pPr>
             <a:r>
@@ -2537,7 +2281,7 @@
           <a:bodyPr wrap="square" lIns="0" tIns="0" rIns="0" bIns="0" rtlCol="0" anchor="ctr"/>
           <a:lstStyle/>
           <a:p>
-            <a:pPr indent="0" marL="0">
+            <a:pPr marL="0" indent="0">
               <a:buNone/>
             </a:pPr>
             <a:r>
@@ -2648,47 +2392,6 @@
               <a:t>Оценка качества тематического прогнозирования.</a:t>
             </a:r>
             <a:endParaRPr lang="en-US" sz="1420" dirty="0"/>
-          </a:p>
-        </p:txBody>
-      </p:sp>
-      <p:sp>
-        <p:nvSpPr>
-          <p:cNvPr id="13" name="Text 11"/>
-          <p:cNvSpPr/>
-          <p:nvPr/>
-        </p:nvSpPr>
-        <p:spPr>
-          <a:xfrm>
-            <a:off x="822960" y="5074920"/>
-            <a:ext cx="9966960" cy="411480"/>
-          </a:xfrm>
-          <a:prstGeom prst="rect">
-            <a:avLst/>
-          </a:prstGeom>
-          <a:noFill/>
-          <a:ln/>
-        </p:spPr>
-        <p:txBody>
-          <a:bodyPr wrap="square" lIns="0" tIns="0" rIns="0" bIns="0" rtlCol="0" anchor="ctr">
-            <a:normAutofit/>
-          </a:bodyPr>
-          <a:lstStyle/>
-          <a:p>
-            <a:pPr indent="0" marL="0">
-              <a:buNone/>
-            </a:pPr>
-            <a:r>
-              <a:rPr lang="en-US" sz="1350" b="1" dirty="0">
-                <a:solidFill>
-                  <a:srgbClr val="1F3A5F"/>
-                </a:solidFill>
-                <a:latin typeface="Arial" pitchFamily="34" charset="0"/>
-                <a:ea typeface="Arial" pitchFamily="34" charset="-122"/>
-                <a:cs typeface="Arial" pitchFamily="34" charset="-120"/>
-              </a:rPr>
-              <a:t>Итог: проект соответствует теме, так как объединяет диалоговый интерфейс, ML-анализ экономических новостей и подключаемую языковую модель.</a:t>
-            </a:r>
-            <a:endParaRPr lang="en-US" sz="1350" dirty="0"/>
           </a:p>
         </p:txBody>
       </p:sp>
@@ -2708,6 +2411,7 @@
         <a:solidFill>
           <a:srgbClr val="F8F9F8"/>
         </a:solidFill>
+        <a:effectLst/>
       </p:bgPr>
     </p:bg>
     <p:spTree>
@@ -2797,7 +2501,7 @@
           </a:bodyPr>
           <a:lstStyle/>
           <a:p>
-            <a:pPr indent="0" marL="0">
+            <a:pPr marL="0" indent="0">
               <a:buNone/>
             </a:pPr>
             <a:r>
@@ -2838,7 +2542,7 @@
           </a:bodyPr>
           <a:lstStyle/>
           <a:p>
-            <a:pPr indent="0" marL="0">
+            <a:pPr marL="0" indent="0">
               <a:buNone/>
             </a:pPr>
             <a:r>
@@ -2877,7 +2581,7 @@
           <a:bodyPr wrap="square" lIns="0" tIns="0" rIns="0" bIns="0" rtlCol="0" anchor="ctr"/>
           <a:lstStyle/>
           <a:p>
-            <a:pPr algn="r" indent="0" marL="0">
+            <a:pPr marL="0" indent="0" algn="r">
               <a:buNone/>
             </a:pPr>
             <a:r>
@@ -2943,7 +2647,7 @@
           </a:bodyPr>
           <a:lstStyle/>
           <a:p>
-            <a:pPr indent="0" marL="0">
+            <a:pPr marL="0" indent="0">
               <a:buNone/>
             </a:pPr>
             <a:r>
@@ -2983,24 +2687,6 @@
             <a:normAutofit/>
           </a:bodyPr>
           <a:lstStyle/>
-          <a:p>
-            <a:pPr marL="177800" indent="-177800">
-              <a:buSzPct val="100000"/>
-              <a:buChar char="•"/>
-            </a:pPr>
-            <a:r>
-              <a:rPr lang="en-US" sz="1500" dirty="0">
-                <a:solidFill>
-                  <a:srgbClr val="111111"/>
-                </a:solidFill>
-                <a:latin typeface="Arial" pitchFamily="34" charset="0"/>
-                <a:ea typeface="Arial" pitchFamily="34" charset="-122"/>
-                <a:cs typeface="Arial" pitchFamily="34" charset="-120"/>
-              </a:rPr>
-              <a:t>Методические указания по выполнению курсовых работ по дисциплине «Машинное обучение в семантическом и сетевом анализе»</a:t>
-            </a:r>
-            <a:endParaRPr lang="en-US" sz="1500" dirty="0"/>
-          </a:p>
           <a:p>
             <a:pPr marL="177800" indent="-177800">
               <a:buSzPct val="100000"/>
@@ -3163,6 +2849,7 @@
         <a:solidFill>
           <a:srgbClr val="F8F9F8"/>
         </a:solidFill>
+        <a:effectLst/>
       </p:bgPr>
     </p:bg>
     <p:spTree>
@@ -3252,7 +2939,7 @@
           </a:bodyPr>
           <a:lstStyle/>
           <a:p>
-            <a:pPr indent="0" marL="0">
+            <a:pPr marL="0" indent="0">
               <a:buNone/>
             </a:pPr>
             <a:r>
@@ -3293,7 +2980,7 @@
           </a:bodyPr>
           <a:lstStyle/>
           <a:p>
-            <a:pPr indent="0" marL="0">
+            <a:pPr marL="0" indent="0">
               <a:buNone/>
             </a:pPr>
             <a:r>
@@ -3332,7 +3019,7 @@
           <a:bodyPr wrap="square" lIns="0" tIns="0" rIns="0" bIns="0" rtlCol="0" anchor="ctr"/>
           <a:lstStyle/>
           <a:p>
-            <a:pPr algn="r" indent="0" marL="0">
+            <a:pPr marL="0" indent="0" algn="r">
               <a:buNone/>
             </a:pPr>
             <a:r>
@@ -3398,7 +3085,7 @@
           </a:bodyPr>
           <a:lstStyle/>
           <a:p>
-            <a:pPr indent="0" marL="0">
+            <a:pPr marL="0" indent="0">
               <a:buNone/>
             </a:pPr>
             <a:r>
@@ -3562,7 +3249,7 @@
           </a:bodyPr>
           <a:lstStyle/>
           <a:p>
-            <a:pPr algn="ctr" indent="0" marL="0">
+            <a:pPr marL="0" indent="0" algn="ctr">
               <a:buNone/>
             </a:pPr>
             <a:r>
@@ -3603,7 +3290,7 @@
           </a:bodyPr>
           <a:lstStyle/>
           <a:p>
-            <a:pPr algn="ctr" indent="0" marL="0">
+            <a:pPr marL="0" indent="0" algn="ctr">
               <a:buNone/>
             </a:pPr>
             <a:r>
@@ -3671,7 +3358,7 @@
           </a:bodyPr>
           <a:lstStyle/>
           <a:p>
-            <a:pPr algn="ctr" indent="0" marL="0">
+            <a:pPr marL="0" indent="0" algn="ctr">
               <a:buNone/>
             </a:pPr>
             <a:r>
@@ -3712,7 +3399,7 @@
           </a:bodyPr>
           <a:lstStyle/>
           <a:p>
-            <a:pPr algn="ctr" indent="0" marL="0">
+            <a:pPr marL="0" indent="0" algn="ctr">
               <a:buNone/>
             </a:pPr>
             <a:r>
@@ -3780,7 +3467,7 @@
           </a:bodyPr>
           <a:lstStyle/>
           <a:p>
-            <a:pPr algn="ctr" indent="0" marL="0">
+            <a:pPr marL="0" indent="0" algn="ctr">
               <a:buNone/>
             </a:pPr>
             <a:r>
@@ -3821,7 +3508,7 @@
           </a:bodyPr>
           <a:lstStyle/>
           <a:p>
-            <a:pPr algn="ctr" indent="0" marL="0">
+            <a:pPr marL="0" indent="0" algn="ctr">
               <a:buNone/>
             </a:pPr>
             <a:r>
@@ -3889,7 +3576,7 @@
           </a:bodyPr>
           <a:lstStyle/>
           <a:p>
-            <a:pPr algn="ctr" indent="0" marL="0">
+            <a:pPr marL="0" indent="0" algn="ctr">
               <a:buNone/>
             </a:pPr>
             <a:r>
@@ -3982,7 +3669,7 @@
           </a:bodyPr>
           <a:lstStyle/>
           <a:p>
-            <a:pPr algn="ctr" indent="0" marL="0">
+            <a:pPr marL="0" indent="0" algn="ctr">
               <a:buNone/>
             </a:pPr>
             <a:r>
@@ -4075,7 +3762,7 @@
           </a:bodyPr>
           <a:lstStyle/>
           <a:p>
-            <a:pPr algn="ctr" indent="0" marL="0">
+            <a:pPr marL="0" indent="0" algn="ctr">
               <a:buNone/>
             </a:pPr>
             <a:r>
@@ -4168,7 +3855,7 @@
           </a:bodyPr>
           <a:lstStyle/>
           <a:p>
-            <a:pPr algn="ctr" indent="0" marL="0">
+            <a:pPr marL="0" indent="0" algn="ctr">
               <a:buNone/>
             </a:pPr>
             <a:r>
@@ -4261,7 +3948,7 @@
           </a:bodyPr>
           <a:lstStyle/>
           <a:p>
-            <a:pPr algn="ctr" indent="0" marL="0">
+            <a:pPr marL="0" indent="0" algn="ctr">
               <a:buNone/>
             </a:pPr>
             <a:r>
@@ -4354,7 +4041,7 @@
           </a:bodyPr>
           <a:lstStyle/>
           <a:p>
-            <a:pPr algn="ctr" indent="0" marL="0">
+            <a:pPr marL="0" indent="0" algn="ctr">
               <a:buNone/>
             </a:pPr>
             <a:r>
@@ -4388,6 +4075,7 @@
         <a:solidFill>
           <a:srgbClr val="F8F9F8"/>
         </a:solidFill>
+        <a:effectLst/>
       </p:bgPr>
     </p:bg>
     <p:spTree>
@@ -4477,7 +4165,7 @@
           </a:bodyPr>
           <a:lstStyle/>
           <a:p>
-            <a:pPr indent="0" marL="0">
+            <a:pPr marL="0" indent="0">
               <a:buNone/>
             </a:pPr>
             <a:r>
@@ -4518,7 +4206,7 @@
           </a:bodyPr>
           <a:lstStyle/>
           <a:p>
-            <a:pPr indent="0" marL="0">
+            <a:pPr marL="0" indent="0">
               <a:buNone/>
             </a:pPr>
             <a:r>
@@ -4557,7 +4245,7 @@
           <a:bodyPr wrap="square" lIns="0" tIns="0" rIns="0" bIns="0" rtlCol="0" anchor="ctr"/>
           <a:lstStyle/>
           <a:p>
-            <a:pPr algn="r" indent="0" marL="0">
+            <a:pPr marL="0" indent="0" algn="r">
               <a:buNone/>
             </a:pPr>
             <a:r>
@@ -4623,7 +4311,7 @@
           </a:bodyPr>
           <a:lstStyle/>
           <a:p>
-            <a:pPr indent="0" marL="0">
+            <a:pPr marL="0" indent="0">
               <a:buNone/>
             </a:pPr>
             <a:r>
@@ -4662,7 +4350,7 @@
           <a:bodyPr wrap="square" lIns="0" tIns="0" rIns="0" bIns="0" rtlCol="0" anchor="ctr"/>
           <a:lstStyle/>
           <a:p>
-            <a:pPr indent="0" marL="0">
+            <a:pPr marL="0" indent="0">
               <a:buNone/>
             </a:pPr>
             <a:r>
@@ -4703,7 +4391,7 @@
           </a:bodyPr>
           <a:lstStyle/>
           <a:p>
-            <a:pPr indent="0" marL="0">
+            <a:pPr marL="0" indent="0">
               <a:buNone/>
             </a:pPr>
             <a:r>
@@ -4742,7 +4430,7 @@
           <a:bodyPr wrap="square" lIns="0" tIns="0" rIns="0" bIns="0" rtlCol="0" anchor="ctr"/>
           <a:lstStyle/>
           <a:p>
-            <a:pPr indent="0" marL="0">
+            <a:pPr marL="0" indent="0">
               <a:buNone/>
             </a:pPr>
             <a:r>
@@ -4890,6 +4578,7 @@
         <a:solidFill>
           <a:srgbClr val="F8F9F8"/>
         </a:solidFill>
+        <a:effectLst/>
       </p:bgPr>
     </p:bg>
     <p:spTree>
@@ -4979,7 +4668,7 @@
           </a:bodyPr>
           <a:lstStyle/>
           <a:p>
-            <a:pPr indent="0" marL="0">
+            <a:pPr marL="0" indent="0">
               <a:buNone/>
             </a:pPr>
             <a:r>
@@ -5020,7 +4709,7 @@
           </a:bodyPr>
           <a:lstStyle/>
           <a:p>
-            <a:pPr indent="0" marL="0">
+            <a:pPr marL="0" indent="0">
               <a:buNone/>
             </a:pPr>
             <a:r>
@@ -5059,7 +4748,7 @@
           <a:bodyPr wrap="square" lIns="0" tIns="0" rIns="0" bIns="0" rtlCol="0" anchor="ctr"/>
           <a:lstStyle/>
           <a:p>
-            <a:pPr algn="r" indent="0" marL="0">
+            <a:pPr marL="0" indent="0" algn="r">
               <a:buNone/>
             </a:pPr>
             <a:r>
@@ -5125,7 +4814,7 @@
           </a:bodyPr>
           <a:lstStyle/>
           <a:p>
-            <a:pPr indent="0" marL="0">
+            <a:pPr marL="0" indent="0">
               <a:buNone/>
             </a:pPr>
             <a:r>
@@ -5193,7 +4882,7 @@
           </a:bodyPr>
           <a:lstStyle/>
           <a:p>
-            <a:pPr algn="ctr" indent="0" marL="0">
+            <a:pPr marL="0" indent="0" algn="ctr">
               <a:buNone/>
             </a:pPr>
             <a:r>
@@ -5234,7 +4923,7 @@
           </a:bodyPr>
           <a:lstStyle/>
           <a:p>
-            <a:pPr algn="ctr" indent="0" marL="0">
+            <a:pPr marL="0" indent="0" algn="ctr">
               <a:buNone/>
             </a:pPr>
             <a:r>
@@ -5302,7 +4991,7 @@
           </a:bodyPr>
           <a:lstStyle/>
           <a:p>
-            <a:pPr algn="ctr" indent="0" marL="0">
+            <a:pPr marL="0" indent="0" algn="ctr">
               <a:buNone/>
             </a:pPr>
             <a:r>
@@ -5343,7 +5032,7 @@
           </a:bodyPr>
           <a:lstStyle/>
           <a:p>
-            <a:pPr algn="ctr" indent="0" marL="0">
+            <a:pPr marL="0" indent="0" algn="ctr">
               <a:buNone/>
             </a:pPr>
             <a:r>
@@ -5411,7 +5100,7 @@
           </a:bodyPr>
           <a:lstStyle/>
           <a:p>
-            <a:pPr algn="ctr" indent="0" marL="0">
+            <a:pPr marL="0" indent="0" algn="ctr">
               <a:buNone/>
             </a:pPr>
             <a:r>
@@ -5452,7 +5141,7 @@
           </a:bodyPr>
           <a:lstStyle/>
           <a:p>
-            <a:pPr algn="ctr" indent="0" marL="0">
+            <a:pPr marL="0" indent="0" algn="ctr">
               <a:buNone/>
             </a:pPr>
             <a:r>
@@ -5518,7 +5207,7 @@
           </a:bodyPr>
           <a:lstStyle/>
           <a:p>
-            <a:pPr indent="0" marL="0">
+            <a:pPr marL="0" indent="0">
               <a:buNone/>
             </a:pPr>
             <a:r>
@@ -5584,7 +5273,7 @@
           </a:bodyPr>
           <a:lstStyle/>
           <a:p>
-            <a:pPr indent="0" marL="0">
+            <a:pPr marL="0" indent="0">
               <a:buNone/>
             </a:pPr>
             <a:r>
@@ -5650,7 +5339,7 @@
           </a:bodyPr>
           <a:lstStyle/>
           <a:p>
-            <a:pPr indent="0" marL="0">
+            <a:pPr marL="0" indent="0">
               <a:buNone/>
             </a:pPr>
             <a:r>
@@ -5716,7 +5405,7 @@
           </a:bodyPr>
           <a:lstStyle/>
           <a:p>
-            <a:pPr indent="0" marL="0">
+            <a:pPr marL="0" indent="0">
               <a:buNone/>
             </a:pPr>
             <a:r>
@@ -5782,7 +5471,7 @@
           </a:bodyPr>
           <a:lstStyle/>
           <a:p>
-            <a:pPr indent="0" marL="0">
+            <a:pPr marL="0" indent="0">
               <a:buNone/>
             </a:pPr>
             <a:r>
@@ -5848,7 +5537,7 @@
           </a:bodyPr>
           <a:lstStyle/>
           <a:p>
-            <a:pPr indent="0" marL="0">
+            <a:pPr marL="0" indent="0">
               <a:buNone/>
             </a:pPr>
             <a:r>
@@ -5914,7 +5603,7 @@
           </a:bodyPr>
           <a:lstStyle/>
           <a:p>
-            <a:pPr indent="0" marL="0">
+            <a:pPr marL="0" indent="0">
               <a:buNone/>
             </a:pPr>
             <a:r>
@@ -5980,7 +5669,7 @@
           </a:bodyPr>
           <a:lstStyle/>
           <a:p>
-            <a:pPr indent="0" marL="0">
+            <a:pPr marL="0" indent="0">
               <a:buNone/>
             </a:pPr>
             <a:r>
@@ -6046,7 +5735,7 @@
           </a:bodyPr>
           <a:lstStyle/>
           <a:p>
-            <a:pPr indent="0" marL="0">
+            <a:pPr marL="0" indent="0">
               <a:buNone/>
             </a:pPr>
             <a:r>
@@ -6112,7 +5801,7 @@
           </a:bodyPr>
           <a:lstStyle/>
           <a:p>
-            <a:pPr indent="0" marL="0">
+            <a:pPr marL="0" indent="0">
               <a:buNone/>
             </a:pPr>
             <a:r>
@@ -6178,7 +5867,7 @@
           </a:bodyPr>
           <a:lstStyle/>
           <a:p>
-            <a:pPr indent="0" marL="0">
+            <a:pPr marL="0" indent="0">
               <a:buNone/>
             </a:pPr>
             <a:r>
@@ -6244,7 +5933,7 @@
           </a:bodyPr>
           <a:lstStyle/>
           <a:p>
-            <a:pPr indent="0" marL="0">
+            <a:pPr marL="0" indent="0">
               <a:buNone/>
             </a:pPr>
             <a:r>
@@ -6285,7 +5974,7 @@
           </a:bodyPr>
           <a:lstStyle/>
           <a:p>
-            <a:pPr indent="0" marL="0">
+            <a:pPr marL="0" indent="0">
               <a:buNone/>
             </a:pPr>
             <a:r>
@@ -6319,6 +6008,7 @@
         <a:solidFill>
           <a:srgbClr val="F8F9F8"/>
         </a:solidFill>
+        <a:effectLst/>
       </p:bgPr>
     </p:bg>
     <p:spTree>
@@ -6408,7 +6098,7 @@
           </a:bodyPr>
           <a:lstStyle/>
           <a:p>
-            <a:pPr indent="0" marL="0">
+            <a:pPr marL="0" indent="0">
               <a:buNone/>
             </a:pPr>
             <a:r>
@@ -6449,7 +6139,7 @@
           </a:bodyPr>
           <a:lstStyle/>
           <a:p>
-            <a:pPr indent="0" marL="0">
+            <a:pPr marL="0" indent="0">
               <a:buNone/>
             </a:pPr>
             <a:r>
@@ -6488,7 +6178,7 @@
           <a:bodyPr wrap="square" lIns="0" tIns="0" rIns="0" bIns="0" rtlCol="0" anchor="ctr"/>
           <a:lstStyle/>
           <a:p>
-            <a:pPr algn="r" indent="0" marL="0">
+            <a:pPr marL="0" indent="0" algn="r">
               <a:buNone/>
             </a:pPr>
             <a:r>
@@ -6554,7 +6244,7 @@
           </a:bodyPr>
           <a:lstStyle/>
           <a:p>
-            <a:pPr indent="0" marL="0">
+            <a:pPr marL="0" indent="0">
               <a:buNone/>
             </a:pPr>
             <a:r>
@@ -6620,7 +6310,7 @@
           </a:bodyPr>
           <a:lstStyle/>
           <a:p>
-            <a:pPr indent="0" marL="0">
+            <a:pPr marL="0" indent="0">
               <a:buNone/>
             </a:pPr>
             <a:r>
@@ -6686,7 +6376,7 @@
           </a:bodyPr>
           <a:lstStyle/>
           <a:p>
-            <a:pPr indent="0" marL="0">
+            <a:pPr marL="0" indent="0">
               <a:buNone/>
             </a:pPr>
             <a:r>
@@ -6752,7 +6442,7 @@
           </a:bodyPr>
           <a:lstStyle/>
           <a:p>
-            <a:pPr indent="0" marL="0">
+            <a:pPr marL="0" indent="0">
               <a:buNone/>
             </a:pPr>
             <a:r>
@@ -6818,7 +6508,7 @@
           </a:bodyPr>
           <a:lstStyle/>
           <a:p>
-            <a:pPr indent="0" marL="0">
+            <a:pPr marL="0" indent="0">
               <a:buNone/>
             </a:pPr>
             <a:r>
@@ -6884,7 +6574,7 @@
           </a:bodyPr>
           <a:lstStyle/>
           <a:p>
-            <a:pPr indent="0" marL="0">
+            <a:pPr marL="0" indent="0">
               <a:buNone/>
             </a:pPr>
             <a:r>
@@ -6950,7 +6640,7 @@
           </a:bodyPr>
           <a:lstStyle/>
           <a:p>
-            <a:pPr indent="0" marL="0">
+            <a:pPr marL="0" indent="0">
               <a:buNone/>
             </a:pPr>
             <a:r>
@@ -7016,7 +6706,7 @@
           </a:bodyPr>
           <a:lstStyle/>
           <a:p>
-            <a:pPr indent="0" marL="0">
+            <a:pPr marL="0" indent="0">
               <a:buNone/>
             </a:pPr>
             <a:r>
@@ -7082,7 +6772,7 @@
           </a:bodyPr>
           <a:lstStyle/>
           <a:p>
-            <a:pPr indent="0" marL="0">
+            <a:pPr marL="0" indent="0">
               <a:buNone/>
             </a:pPr>
             <a:r>
@@ -7148,7 +6838,7 @@
           </a:bodyPr>
           <a:lstStyle/>
           <a:p>
-            <a:pPr indent="0" marL="0">
+            <a:pPr marL="0" indent="0">
               <a:buNone/>
             </a:pPr>
             <a:r>
@@ -7214,7 +6904,7 @@
           </a:bodyPr>
           <a:lstStyle/>
           <a:p>
-            <a:pPr indent="0" marL="0">
+            <a:pPr marL="0" indent="0">
               <a:buNone/>
             </a:pPr>
             <a:r>
@@ -7280,7 +6970,7 @@
           </a:bodyPr>
           <a:lstStyle/>
           <a:p>
-            <a:pPr indent="0" marL="0">
+            <a:pPr marL="0" indent="0">
               <a:buNone/>
             </a:pPr>
             <a:r>
@@ -7346,7 +7036,7 @@
           </a:bodyPr>
           <a:lstStyle/>
           <a:p>
-            <a:pPr indent="0" marL="0">
+            <a:pPr marL="0" indent="0">
               <a:buNone/>
             </a:pPr>
             <a:r>
@@ -7458,6 +7148,7 @@
         <a:solidFill>
           <a:srgbClr val="F8F9F8"/>
         </a:solidFill>
+        <a:effectLst/>
       </p:bgPr>
     </p:bg>
     <p:spTree>
@@ -7547,7 +7238,7 @@
           </a:bodyPr>
           <a:lstStyle/>
           <a:p>
-            <a:pPr indent="0" marL="0">
+            <a:pPr marL="0" indent="0">
               <a:buNone/>
             </a:pPr>
             <a:r>
@@ -7588,7 +7279,7 @@
           </a:bodyPr>
           <a:lstStyle/>
           <a:p>
-            <a:pPr indent="0" marL="0">
+            <a:pPr marL="0" indent="0">
               <a:buNone/>
             </a:pPr>
             <a:r>
@@ -7627,7 +7318,7 @@
           <a:bodyPr wrap="square" lIns="0" tIns="0" rIns="0" bIns="0" rtlCol="0" anchor="ctr"/>
           <a:lstStyle/>
           <a:p>
-            <a:pPr algn="r" indent="0" marL="0">
+            <a:pPr marL="0" indent="0" algn="r">
               <a:buNone/>
             </a:pPr>
             <a:r>
@@ -7693,7 +7384,7 @@
           </a:bodyPr>
           <a:lstStyle/>
           <a:p>
-            <a:pPr indent="0" marL="0">
+            <a:pPr marL="0" indent="0">
               <a:buNone/>
             </a:pPr>
             <a:r>
@@ -7761,7 +7452,7 @@
           </a:bodyPr>
           <a:lstStyle/>
           <a:p>
-            <a:pPr algn="ctr" indent="0" marL="0">
+            <a:pPr marL="0" indent="0" algn="ctr">
               <a:buNone/>
             </a:pPr>
             <a:r>
@@ -7854,7 +7545,7 @@
           </a:bodyPr>
           <a:lstStyle/>
           <a:p>
-            <a:pPr algn="ctr" indent="0" marL="0">
+            <a:pPr marL="0" indent="0" algn="ctr">
               <a:buNone/>
             </a:pPr>
             <a:r>
@@ -7947,7 +7638,7 @@
           </a:bodyPr>
           <a:lstStyle/>
           <a:p>
-            <a:pPr algn="ctr" indent="0" marL="0">
+            <a:pPr marL="0" indent="0" algn="ctr">
               <a:buNone/>
             </a:pPr>
             <a:r>
@@ -8040,7 +7731,7 @@
           </a:bodyPr>
           <a:lstStyle/>
           <a:p>
-            <a:pPr algn="ctr" indent="0" marL="0">
+            <a:pPr marL="0" indent="0" algn="ctr">
               <a:buNone/>
             </a:pPr>
             <a:r>
@@ -8133,7 +7824,7 @@
           </a:bodyPr>
           <a:lstStyle/>
           <a:p>
-            <a:pPr algn="ctr" indent="0" marL="0">
+            <a:pPr marL="0" indent="0" algn="ctr">
               <a:buNone/>
             </a:pPr>
             <a:r>
@@ -8226,7 +7917,7 @@
           </a:bodyPr>
           <a:lstStyle/>
           <a:p>
-            <a:pPr algn="ctr" indent="0" marL="0">
+            <a:pPr marL="0" indent="0" algn="ctr">
               <a:buNone/>
             </a:pPr>
             <a:r>
@@ -8292,7 +7983,7 @@
           </a:bodyPr>
           <a:lstStyle/>
           <a:p>
-            <a:pPr indent="0" marL="0">
+            <a:pPr marL="0" indent="0">
               <a:buNone/>
             </a:pPr>
             <a:r>
@@ -8358,7 +8049,7 @@
           </a:bodyPr>
           <a:lstStyle/>
           <a:p>
-            <a:pPr indent="0" marL="0">
+            <a:pPr marL="0" indent="0">
               <a:buNone/>
             </a:pPr>
             <a:r>
@@ -8424,7 +8115,7 @@
           </a:bodyPr>
           <a:lstStyle/>
           <a:p>
-            <a:pPr indent="0" marL="0">
+            <a:pPr marL="0" indent="0">
               <a:buNone/>
             </a:pPr>
             <a:r>
@@ -8490,7 +8181,7 @@
           </a:bodyPr>
           <a:lstStyle/>
           <a:p>
-            <a:pPr indent="0" marL="0">
+            <a:pPr marL="0" indent="0">
               <a:buNone/>
             </a:pPr>
             <a:r>
@@ -8556,7 +8247,7 @@
           </a:bodyPr>
           <a:lstStyle/>
           <a:p>
-            <a:pPr indent="0" marL="0">
+            <a:pPr marL="0" indent="0">
               <a:buNone/>
             </a:pPr>
             <a:r>
@@ -8622,7 +8313,7 @@
           </a:bodyPr>
           <a:lstStyle/>
           <a:p>
-            <a:pPr indent="0" marL="0">
+            <a:pPr marL="0" indent="0">
               <a:buNone/>
             </a:pPr>
             <a:r>
@@ -8688,7 +8379,7 @@
           </a:bodyPr>
           <a:lstStyle/>
           <a:p>
-            <a:pPr indent="0" marL="0">
+            <a:pPr marL="0" indent="0">
               <a:buNone/>
             </a:pPr>
             <a:r>
@@ -8754,7 +8445,7 @@
           </a:bodyPr>
           <a:lstStyle/>
           <a:p>
-            <a:pPr indent="0" marL="0">
+            <a:pPr marL="0" indent="0">
               <a:buNone/>
             </a:pPr>
             <a:r>
@@ -8820,7 +8511,7 @@
           </a:bodyPr>
           <a:lstStyle/>
           <a:p>
-            <a:pPr indent="0" marL="0">
+            <a:pPr marL="0" indent="0">
               <a:buNone/>
             </a:pPr>
             <a:r>
@@ -8886,7 +8577,7 @@
           </a:bodyPr>
           <a:lstStyle/>
           <a:p>
-            <a:pPr indent="0" marL="0">
+            <a:pPr marL="0" indent="0">
               <a:buNone/>
             </a:pPr>
             <a:r>
@@ -8920,6 +8611,7 @@
         <a:solidFill>
           <a:srgbClr val="F8F9F8"/>
         </a:solidFill>
+        <a:effectLst/>
       </p:bgPr>
     </p:bg>
     <p:spTree>
@@ -9009,7 +8701,7 @@
           </a:bodyPr>
           <a:lstStyle/>
           <a:p>
-            <a:pPr indent="0" marL="0">
+            <a:pPr marL="0" indent="0">
               <a:buNone/>
             </a:pPr>
             <a:r>
@@ -9050,7 +8742,7 @@
           </a:bodyPr>
           <a:lstStyle/>
           <a:p>
-            <a:pPr indent="0" marL="0">
+            <a:pPr marL="0" indent="0">
               <a:buNone/>
             </a:pPr>
             <a:r>
@@ -9089,7 +8781,7 @@
           <a:bodyPr wrap="square" lIns="0" tIns="0" rIns="0" bIns="0" rtlCol="0" anchor="ctr"/>
           <a:lstStyle/>
           <a:p>
-            <a:pPr algn="r" indent="0" marL="0">
+            <a:pPr marL="0" indent="0" algn="r">
               <a:buNone/>
             </a:pPr>
             <a:r>
@@ -9155,7 +8847,7 @@
           </a:bodyPr>
           <a:lstStyle/>
           <a:p>
-            <a:pPr indent="0" marL="0">
+            <a:pPr marL="0" indent="0">
               <a:buNone/>
             </a:pPr>
             <a:r>
@@ -9223,7 +8915,7 @@
           </a:bodyPr>
           <a:lstStyle/>
           <a:p>
-            <a:pPr indent="0" marL="0">
+            <a:pPr marL="0" indent="0">
               <a:buNone/>
             </a:pPr>
             <a:r>
@@ -9264,7 +8956,7 @@
           </a:bodyPr>
           <a:lstStyle/>
           <a:p>
-            <a:pPr indent="0" marL="0">
+            <a:pPr marL="0" indent="0">
               <a:buNone/>
             </a:pPr>
             <a:r>
@@ -9332,7 +9024,7 @@
           </a:bodyPr>
           <a:lstStyle/>
           <a:p>
-            <a:pPr indent="0" marL="0">
+            <a:pPr marL="0" indent="0">
               <a:buNone/>
             </a:pPr>
             <a:r>
@@ -9373,7 +9065,7 @@
           </a:bodyPr>
           <a:lstStyle/>
           <a:p>
-            <a:pPr indent="0" marL="0">
+            <a:pPr marL="0" indent="0">
               <a:buNone/>
             </a:pPr>
             <a:r>
@@ -9441,7 +9133,7 @@
           </a:bodyPr>
           <a:lstStyle/>
           <a:p>
-            <a:pPr indent="0" marL="0">
+            <a:pPr marL="0" indent="0">
               <a:buNone/>
             </a:pPr>
             <a:r>
@@ -9482,7 +9174,7 @@
           </a:bodyPr>
           <a:lstStyle/>
           <a:p>
-            <a:pPr indent="0" marL="0">
+            <a:pPr marL="0" indent="0">
               <a:buNone/>
             </a:pPr>
             <a:r>
@@ -9550,7 +9242,7 @@
           </a:bodyPr>
           <a:lstStyle/>
           <a:p>
-            <a:pPr indent="0" marL="0">
+            <a:pPr marL="0" indent="0">
               <a:buNone/>
             </a:pPr>
             <a:r>
@@ -9591,7 +9283,7 @@
           </a:bodyPr>
           <a:lstStyle/>
           <a:p>
-            <a:pPr indent="0" marL="0">
+            <a:pPr marL="0" indent="0">
               <a:buNone/>
             </a:pPr>
             <a:r>
@@ -9659,7 +9351,7 @@
           </a:bodyPr>
           <a:lstStyle/>
           <a:p>
-            <a:pPr indent="0" marL="0">
+            <a:pPr marL="0" indent="0">
               <a:buNone/>
             </a:pPr>
             <a:r>
@@ -9700,7 +9392,7 @@
           </a:bodyPr>
           <a:lstStyle/>
           <a:p>
-            <a:pPr indent="0" marL="0">
+            <a:pPr marL="0" indent="0">
               <a:buNone/>
             </a:pPr>
             <a:r>
@@ -9768,7 +9460,7 @@
           </a:bodyPr>
           <a:lstStyle/>
           <a:p>
-            <a:pPr indent="0" marL="0">
+            <a:pPr marL="0" indent="0">
               <a:buNone/>
             </a:pPr>
             <a:r>
@@ -9809,7 +9501,7 @@
           </a:bodyPr>
           <a:lstStyle/>
           <a:p>
-            <a:pPr indent="0" marL="0">
+            <a:pPr marL="0" indent="0">
               <a:buNone/>
             </a:pPr>
             <a:r>
@@ -9877,7 +9569,7 @@
           </a:bodyPr>
           <a:lstStyle/>
           <a:p>
-            <a:pPr indent="0" marL="0">
+            <a:pPr marL="0" indent="0">
               <a:buNone/>
             </a:pPr>
             <a:r>
@@ -9918,7 +9610,7 @@
           </a:bodyPr>
           <a:lstStyle/>
           <a:p>
-            <a:pPr indent="0" marL="0">
+            <a:pPr marL="0" indent="0">
               <a:buNone/>
             </a:pPr>
             <a:r>
@@ -9986,7 +9678,7 @@
           </a:bodyPr>
           <a:lstStyle/>
           <a:p>
-            <a:pPr indent="0" marL="0">
+            <a:pPr marL="0" indent="0">
               <a:buNone/>
             </a:pPr>
             <a:r>
@@ -10027,7 +9719,7 @@
           </a:bodyPr>
           <a:lstStyle/>
           <a:p>
-            <a:pPr indent="0" marL="0">
+            <a:pPr marL="0" indent="0">
               <a:buNone/>
             </a:pPr>
             <a:r>
@@ -10095,7 +9787,7 @@
           </a:bodyPr>
           <a:lstStyle/>
           <a:p>
-            <a:pPr indent="0" marL="0">
+            <a:pPr marL="0" indent="0">
               <a:buNone/>
             </a:pPr>
             <a:r>
@@ -10136,7 +9828,7 @@
           </a:bodyPr>
           <a:lstStyle/>
           <a:p>
-            <a:pPr indent="0" marL="0">
+            <a:pPr marL="0" indent="0">
               <a:buNone/>
             </a:pPr>
             <a:r>
@@ -10177,7 +9869,7 @@
           </a:bodyPr>
           <a:lstStyle/>
           <a:p>
-            <a:pPr indent="0" marL="0">
+            <a:pPr marL="0" indent="0">
               <a:buNone/>
             </a:pPr>
             <a:r>
@@ -10211,6 +9903,7 @@
         <a:solidFill>
           <a:srgbClr val="F8F9F8"/>
         </a:solidFill>
+        <a:effectLst/>
       </p:bgPr>
     </p:bg>
     <p:spTree>
@@ -10300,7 +9993,7 @@
           </a:bodyPr>
           <a:lstStyle/>
           <a:p>
-            <a:pPr indent="0" marL="0">
+            <a:pPr marL="0" indent="0">
               <a:buNone/>
             </a:pPr>
             <a:r>
@@ -10341,7 +10034,7 @@
           </a:bodyPr>
           <a:lstStyle/>
           <a:p>
-            <a:pPr indent="0" marL="0">
+            <a:pPr marL="0" indent="0">
               <a:buNone/>
             </a:pPr>
             <a:r>
@@ -10380,7 +10073,7 @@
           <a:bodyPr wrap="square" lIns="0" tIns="0" rIns="0" bIns="0" rtlCol="0" anchor="ctr"/>
           <a:lstStyle/>
           <a:p>
-            <a:pPr algn="r" indent="0" marL="0">
+            <a:pPr marL="0" indent="0" algn="r">
               <a:buNone/>
             </a:pPr>
             <a:r>
@@ -10446,7 +10139,7 @@
           </a:bodyPr>
           <a:lstStyle/>
           <a:p>
-            <a:pPr indent="0" marL="0">
+            <a:pPr marL="0" indent="0">
               <a:buNone/>
             </a:pPr>
             <a:r>
@@ -10512,7 +10205,7 @@
           </a:bodyPr>
           <a:lstStyle/>
           <a:p>
-            <a:pPr indent="0" marL="0">
+            <a:pPr marL="0" indent="0">
               <a:buNone/>
             </a:pPr>
             <a:r>
@@ -10578,7 +10271,7 @@
           </a:bodyPr>
           <a:lstStyle/>
           <a:p>
-            <a:pPr indent="0" marL="0">
+            <a:pPr marL="0" indent="0">
               <a:buNone/>
             </a:pPr>
             <a:r>
@@ -10644,7 +10337,7 @@
           </a:bodyPr>
           <a:lstStyle/>
           <a:p>
-            <a:pPr indent="0" marL="0">
+            <a:pPr marL="0" indent="0">
               <a:buNone/>
             </a:pPr>
             <a:r>
@@ -10710,7 +10403,7 @@
           </a:bodyPr>
           <a:lstStyle/>
           <a:p>
-            <a:pPr indent="0" marL="0">
+            <a:pPr marL="0" indent="0">
               <a:buNone/>
             </a:pPr>
             <a:r>
@@ -10776,7 +10469,7 @@
           </a:bodyPr>
           <a:lstStyle/>
           <a:p>
-            <a:pPr indent="0" marL="0">
+            <a:pPr marL="0" indent="0">
               <a:buNone/>
             </a:pPr>
             <a:r>
@@ -10842,7 +10535,7 @@
           </a:bodyPr>
           <a:lstStyle/>
           <a:p>
-            <a:pPr indent="0" marL="0">
+            <a:pPr marL="0" indent="0">
               <a:buNone/>
             </a:pPr>
             <a:r>
@@ -10908,7 +10601,7 @@
           </a:bodyPr>
           <a:lstStyle/>
           <a:p>
-            <a:pPr indent="0" marL="0">
+            <a:pPr marL="0" indent="0">
               <a:buNone/>
             </a:pPr>
             <a:r>
@@ -10974,7 +10667,7 @@
           </a:bodyPr>
           <a:lstStyle/>
           <a:p>
-            <a:pPr indent="0" marL="0">
+            <a:pPr marL="0" indent="0">
               <a:buNone/>
             </a:pPr>
             <a:r>
@@ -11040,7 +10733,7 @@
           </a:bodyPr>
           <a:lstStyle/>
           <a:p>
-            <a:pPr indent="0" marL="0">
+            <a:pPr marL="0" indent="0">
               <a:buNone/>
             </a:pPr>
             <a:r>
@@ -11106,7 +10799,7 @@
           </a:bodyPr>
           <a:lstStyle/>
           <a:p>
-            <a:pPr indent="0" marL="0">
+            <a:pPr marL="0" indent="0">
               <a:buNone/>
             </a:pPr>
             <a:r>
@@ -11172,7 +10865,7 @@
           </a:bodyPr>
           <a:lstStyle/>
           <a:p>
-            <a:pPr indent="0" marL="0">
+            <a:pPr marL="0" indent="0">
               <a:buNone/>
             </a:pPr>
             <a:r>
@@ -11238,7 +10931,7 @@
           </a:bodyPr>
           <a:lstStyle/>
           <a:p>
-            <a:pPr indent="0" marL="0">
+            <a:pPr marL="0" indent="0">
               <a:buNone/>
             </a:pPr>
             <a:r>
@@ -11304,7 +10997,7 @@
           </a:bodyPr>
           <a:lstStyle/>
           <a:p>
-            <a:pPr indent="0" marL="0">
+            <a:pPr marL="0" indent="0">
               <a:buNone/>
             </a:pPr>
             <a:r>
@@ -11370,7 +11063,7 @@
           </a:bodyPr>
           <a:lstStyle/>
           <a:p>
-            <a:pPr indent="0" marL="0">
+            <a:pPr marL="0" indent="0">
               <a:buNone/>
             </a:pPr>
             <a:r>
@@ -11436,7 +11129,7 @@
           </a:bodyPr>
           <a:lstStyle/>
           <a:p>
-            <a:pPr indent="0" marL="0">
+            <a:pPr marL="0" indent="0">
               <a:buNone/>
             </a:pPr>
             <a:r>
@@ -11502,7 +11195,7 @@
           </a:bodyPr>
           <a:lstStyle/>
           <a:p>
-            <a:pPr indent="0" marL="0">
+            <a:pPr marL="0" indent="0">
               <a:buNone/>
             </a:pPr>
             <a:r>
@@ -11621,7 +11314,7 @@
           </a:bodyPr>
           <a:lstStyle/>
           <a:p>
-            <a:pPr indent="0" marL="0">
+            <a:pPr marL="0" indent="0">
               <a:buNone/>
             </a:pPr>
             <a:r>
@@ -11655,6 +11348,7 @@
         <a:solidFill>
           <a:srgbClr val="F8F9F8"/>
         </a:solidFill>
+        <a:effectLst/>
       </p:bgPr>
     </p:bg>
     <p:spTree>
@@ -11744,7 +11438,7 @@
           </a:bodyPr>
           <a:lstStyle/>
           <a:p>
-            <a:pPr indent="0" marL="0">
+            <a:pPr marL="0" indent="0">
               <a:buNone/>
             </a:pPr>
             <a:r>
@@ -11785,7 +11479,7 @@
           </a:bodyPr>
           <a:lstStyle/>
           <a:p>
-            <a:pPr indent="0" marL="0">
+            <a:pPr marL="0" indent="0">
               <a:buNone/>
             </a:pPr>
             <a:r>
@@ -11824,7 +11518,7 @@
           <a:bodyPr wrap="square" lIns="0" tIns="0" rIns="0" bIns="0" rtlCol="0" anchor="ctr"/>
           <a:lstStyle/>
           <a:p>
-            <a:pPr algn="r" indent="0" marL="0">
+            <a:pPr marL="0" indent="0" algn="r">
               <a:buNone/>
             </a:pPr>
             <a:r>
@@ -11890,7 +11584,7 @@
           </a:bodyPr>
           <a:lstStyle/>
           <a:p>
-            <a:pPr indent="0" marL="0">
+            <a:pPr marL="0" indent="0">
               <a:buNone/>
             </a:pPr>
             <a:r>
@@ -11929,7 +11623,7 @@
           <a:bodyPr wrap="square" lIns="0" tIns="0" rIns="0" bIns="0" rtlCol="0" anchor="ctr"/>
           <a:lstStyle/>
           <a:p>
-            <a:pPr algn="ctr" indent="0" marL="0">
+            <a:pPr marL="0" indent="0" algn="ctr">
               <a:buNone/>
             </a:pPr>
             <a:r>
@@ -11949,14 +11643,14 @@
       </p:sp>
       <p:pic>
         <p:nvPicPr>
-          <p:cNvPr id="10" name="Image 0" descr="/Users/a.prudiev/PyCharmMiscProject/curswork/docs/final/assets/chat-page.png">    </p:cNvPr>
+          <p:cNvPr id="10" name="Image 0" descr="/Users/a.prudiev/PyCharmMiscProject/curswork/docs/final/assets/chat-page.png"/>
           <p:cNvPicPr>
             <a:picLocks noChangeAspect="1"/>
           </p:cNvPicPr>
           <p:nvPr/>
         </p:nvPicPr>
         <p:blipFill>
-          <a:blip r:embed="rId1"/>
+          <a:blip r:embed="rId3"/>
           <a:stretch>
             <a:fillRect/>
           </a:stretch>
@@ -11992,7 +11686,7 @@
           <a:bodyPr wrap="square" lIns="0" tIns="0" rIns="0" bIns="0" rtlCol="0" anchor="ctr"/>
           <a:lstStyle/>
           <a:p>
-            <a:pPr algn="ctr" indent="0" marL="0">
+            <a:pPr marL="0" indent="0" algn="ctr">
               <a:buNone/>
             </a:pPr>
             <a:r>
@@ -12012,14 +11706,14 @@
       </p:sp>
       <p:pic>
         <p:nvPicPr>
-          <p:cNvPr id="12" name="Image 1" descr="/Users/a.prudiev/PyCharmMiscProject/curswork/docs/final/assets/ml-report-page.png">    </p:cNvPr>
+          <p:cNvPr id="12" name="Image 1" descr="/Users/a.prudiev/PyCharmMiscProject/curswork/docs/final/assets/ml-report-page.png"/>
           <p:cNvPicPr>
             <a:picLocks noChangeAspect="1"/>
           </p:cNvPicPr>
           <p:nvPr/>
         </p:nvPicPr>
         <p:blipFill>
-          <a:blip r:embed="rId2"/>
+          <a:blip r:embed="rId4"/>
           <a:stretch>
             <a:fillRect/>
           </a:stretch>
@@ -12055,7 +11749,7 @@
           <a:bodyPr wrap="square" lIns="0" tIns="0" rIns="0" bIns="0" rtlCol="0" anchor="ctr"/>
           <a:lstStyle/>
           <a:p>
-            <a:pPr algn="ctr" indent="0" marL="0">
+            <a:pPr marL="0" indent="0" algn="ctr">
               <a:buNone/>
             </a:pPr>
             <a:r>
@@ -12075,14 +11769,14 @@
       </p:sp>
       <p:pic>
         <p:nvPicPr>
-          <p:cNvPr id="14" name="Image 2" descr="/Users/a.prudiev/PyCharmMiscProject/curswork/docs/final/assets/topic-forecast-page.png">    </p:cNvPr>
+          <p:cNvPr id="14" name="Image 2" descr="/Users/a.prudiev/PyCharmMiscProject/curswork/docs/final/assets/topic-forecast-page.png"/>
           <p:cNvPicPr>
             <a:picLocks noChangeAspect="1"/>
           </p:cNvPicPr>
           <p:nvPr/>
         </p:nvPicPr>
         <p:blipFill>
-          <a:blip r:embed="rId3"/>
+          <a:blip r:embed="rId5"/>
           <a:stretch>
             <a:fillRect/>
           </a:stretch>
@@ -12476,4 +12170,299 @@
     </a:ext>
   </a:extLst>
 </a:theme>
+</file>
+
+<file path=ppt/theme/theme2.xml><?xml version="1.0" encoding="utf-8"?>
+<a:theme xmlns:a="http://schemas.openxmlformats.org/drawingml/2006/main" name="Тема Office">
+  <a:themeElements>
+    <a:clrScheme name="Стандартная">
+      <a:dk1>
+        <a:sysClr val="windowText" lastClr="000000"/>
+      </a:dk1>
+      <a:lt1>
+        <a:sysClr val="window" lastClr="FFFFFF"/>
+      </a:lt1>
+      <a:dk2>
+        <a:srgbClr val="44546A"/>
+      </a:dk2>
+      <a:lt2>
+        <a:srgbClr val="E7E6E6"/>
+      </a:lt2>
+      <a:accent1>
+        <a:srgbClr val="4472C4"/>
+      </a:accent1>
+      <a:accent2>
+        <a:srgbClr val="ED7D31"/>
+      </a:accent2>
+      <a:accent3>
+        <a:srgbClr val="A5A5A5"/>
+      </a:accent3>
+      <a:accent4>
+        <a:srgbClr val="FFC000"/>
+      </a:accent4>
+      <a:accent5>
+        <a:srgbClr val="5B9BD5"/>
+      </a:accent5>
+      <a:accent6>
+        <a:srgbClr val="70AD47"/>
+      </a:accent6>
+      <a:hlink>
+        <a:srgbClr val="0563C1"/>
+      </a:hlink>
+      <a:folHlink>
+        <a:srgbClr val="954F72"/>
+      </a:folHlink>
+    </a:clrScheme>
+    <a:fontScheme name="Стандартная">
+      <a:majorFont>
+        <a:latin typeface="Calibri Light" panose="020F0302020204030204"/>
+        <a:ea typeface=""/>
+        <a:cs typeface=""/>
+        <a:font script="Jpan" typeface="游ゴシック Light"/>
+        <a:font script="Hang" typeface="맑은 고딕"/>
+        <a:font script="Hans" typeface="等线 Light"/>
+        <a:font script="Hant" typeface="新細明體"/>
+        <a:font script="Arab" typeface="Times New Roman"/>
+        <a:font script="Hebr" typeface="Times New Roman"/>
+        <a:font script="Thai" typeface="Angsana New"/>
+        <a:font script="Ethi" typeface="Nyala"/>
+        <a:font script="Beng" typeface="Vrinda"/>
+        <a:font script="Gujr" typeface="Shruti"/>
+        <a:font script="Khmr" typeface="MoolBoran"/>
+        <a:font script="Knda" typeface="Tunga"/>
+        <a:font script="Guru" typeface="Raavi"/>
+        <a:font script="Cans" typeface="Euphemia"/>
+        <a:font script="Cher" typeface="Plantagenet Cherokee"/>
+        <a:font script="Yiii" typeface="Microsoft Yi Baiti"/>
+        <a:font script="Tibt" typeface="Microsoft Himalaya"/>
+        <a:font script="Thaa" typeface="MV Boli"/>
+        <a:font script="Deva" typeface="Mangal"/>
+        <a:font script="Telu" typeface="Gautami"/>
+        <a:font script="Taml" typeface="Latha"/>
+        <a:font script="Syrc" typeface="Estrangelo Edessa"/>
+        <a:font script="Orya" typeface="Kalinga"/>
+        <a:font script="Mlym" typeface="Kartika"/>
+        <a:font script="Laoo" typeface="DokChampa"/>
+        <a:font script="Sinh" typeface="Iskoola Pota"/>
+        <a:font script="Mong" typeface="Mongolian Baiti"/>
+        <a:font script="Viet" typeface="Times New Roman"/>
+        <a:font script="Uigh" typeface="Microsoft Uighur"/>
+        <a:font script="Geor" typeface="Sylfaen"/>
+        <a:font script="Armn" typeface="Arial"/>
+        <a:font script="Bugi" typeface="Leelawadee UI"/>
+        <a:font script="Bopo" typeface="Microsoft JhengHei"/>
+        <a:font script="Java" typeface="Javanese Text"/>
+        <a:font script="Lisu" typeface="Segoe UI"/>
+        <a:font script="Mymr" typeface="Myanmar Text"/>
+        <a:font script="Nkoo" typeface="Ebrima"/>
+        <a:font script="Olck" typeface="Nirmala UI"/>
+        <a:font script="Osma" typeface="Ebrima"/>
+        <a:font script="Phag" typeface="Phagspa"/>
+        <a:font script="Syrn" typeface="Estrangelo Edessa"/>
+        <a:font script="Syrj" typeface="Estrangelo Edessa"/>
+        <a:font script="Syre" typeface="Estrangelo Edessa"/>
+        <a:font script="Sora" typeface="Nirmala UI"/>
+        <a:font script="Tale" typeface="Microsoft Tai Le"/>
+        <a:font script="Talu" typeface="Microsoft New Tai Lue"/>
+        <a:font script="Tfng" typeface="Ebrima"/>
+      </a:majorFont>
+      <a:minorFont>
+        <a:latin typeface="Calibri" panose="020F0502020204030204"/>
+        <a:ea typeface=""/>
+        <a:cs typeface=""/>
+        <a:font script="Jpan" typeface="游ゴシック"/>
+        <a:font script="Hang" typeface="맑은 고딕"/>
+        <a:font script="Hans" typeface="等线"/>
+        <a:font script="Hant" typeface="新細明體"/>
+        <a:font script="Arab" typeface="Arial"/>
+        <a:font script="Hebr" typeface="Arial"/>
+        <a:font script="Thai" typeface="Cordia New"/>
+        <a:font script="Ethi" typeface="Nyala"/>
+        <a:font script="Beng" typeface="Vrinda"/>
+        <a:font script="Gujr" typeface="Shruti"/>
+        <a:font script="Khmr" typeface="DaunPenh"/>
+        <a:font script="Knda" typeface="Tunga"/>
+        <a:font script="Guru" typeface="Raavi"/>
+        <a:font script="Cans" typeface="Euphemia"/>
+        <a:font script="Cher" typeface="Plantagenet Cherokee"/>
+        <a:font script="Yiii" typeface="Microsoft Yi Baiti"/>
+        <a:font script="Tibt" typeface="Microsoft Himalaya"/>
+        <a:font script="Thaa" typeface="MV Boli"/>
+        <a:font script="Deva" typeface="Mangal"/>
+        <a:font script="Telu" typeface="Gautami"/>
+        <a:font script="Taml" typeface="Latha"/>
+        <a:font script="Syrc" typeface="Estrangelo Edessa"/>
+        <a:font script="Orya" typeface="Kalinga"/>
+        <a:font script="Mlym" typeface="Kartika"/>
+        <a:font script="Laoo" typeface="DokChampa"/>
+        <a:font script="Sinh" typeface="Iskoola Pota"/>
+        <a:font script="Mong" typeface="Mongolian Baiti"/>
+        <a:font script="Viet" typeface="Arial"/>
+        <a:font script="Uigh" typeface="Microsoft Uighur"/>
+        <a:font script="Geor" typeface="Sylfaen"/>
+        <a:font script="Armn" typeface="Arial"/>
+        <a:font script="Bugi" typeface="Leelawadee UI"/>
+        <a:font script="Bopo" typeface="Microsoft JhengHei"/>
+        <a:font script="Java" typeface="Javanese Text"/>
+        <a:font script="Lisu" typeface="Segoe UI"/>
+        <a:font script="Mymr" typeface="Myanmar Text"/>
+        <a:font script="Nkoo" typeface="Ebrima"/>
+        <a:font script="Olck" typeface="Nirmala UI"/>
+        <a:font script="Osma" typeface="Ebrima"/>
+        <a:font script="Phag" typeface="Phagspa"/>
+        <a:font script="Syrn" typeface="Estrangelo Edessa"/>
+        <a:font script="Syrj" typeface="Estrangelo Edessa"/>
+        <a:font script="Syre" typeface="Estrangelo Edessa"/>
+        <a:font script="Sora" typeface="Nirmala UI"/>
+        <a:font script="Tale" typeface="Microsoft Tai Le"/>
+        <a:font script="Talu" typeface="Microsoft New Tai Lue"/>
+        <a:font script="Tfng" typeface="Ebrima"/>
+      </a:minorFont>
+    </a:fontScheme>
+    <a:fmtScheme name="Стандартная">
+      <a:fillStyleLst>
+        <a:solidFill>
+          <a:schemeClr val="phClr"/>
+        </a:solidFill>
+        <a:gradFill rotWithShape="1">
+          <a:gsLst>
+            <a:gs pos="0">
+              <a:schemeClr val="phClr">
+                <a:lumMod val="110000"/>
+                <a:satMod val="105000"/>
+                <a:tint val="67000"/>
+              </a:schemeClr>
+            </a:gs>
+            <a:gs pos="50000">
+              <a:schemeClr val="phClr">
+                <a:lumMod val="105000"/>
+                <a:satMod val="103000"/>
+                <a:tint val="73000"/>
+              </a:schemeClr>
+            </a:gs>
+            <a:gs pos="100000">
+              <a:schemeClr val="phClr">
+                <a:lumMod val="105000"/>
+                <a:satMod val="109000"/>
+                <a:tint val="81000"/>
+              </a:schemeClr>
+            </a:gs>
+          </a:gsLst>
+          <a:lin ang="5400000" scaled="0"/>
+        </a:gradFill>
+        <a:gradFill rotWithShape="1">
+          <a:gsLst>
+            <a:gs pos="0">
+              <a:schemeClr val="phClr">
+                <a:satMod val="103000"/>
+                <a:lumMod val="102000"/>
+                <a:tint val="94000"/>
+              </a:schemeClr>
+            </a:gs>
+            <a:gs pos="50000">
+              <a:schemeClr val="phClr">
+                <a:satMod val="110000"/>
+                <a:lumMod val="100000"/>
+                <a:shade val="100000"/>
+              </a:schemeClr>
+            </a:gs>
+            <a:gs pos="100000">
+              <a:schemeClr val="phClr">
+                <a:lumMod val="99000"/>
+                <a:satMod val="120000"/>
+                <a:shade val="78000"/>
+              </a:schemeClr>
+            </a:gs>
+          </a:gsLst>
+          <a:lin ang="5400000" scaled="0"/>
+        </a:gradFill>
+      </a:fillStyleLst>
+      <a:lnStyleLst>
+        <a:ln w="6350" cap="flat" cmpd="sng" algn="ctr">
+          <a:solidFill>
+            <a:schemeClr val="phClr"/>
+          </a:solidFill>
+          <a:prstDash val="solid"/>
+          <a:miter lim="800000"/>
+        </a:ln>
+        <a:ln w="12700" cap="flat" cmpd="sng" algn="ctr">
+          <a:solidFill>
+            <a:schemeClr val="phClr"/>
+          </a:solidFill>
+          <a:prstDash val="solid"/>
+          <a:miter lim="800000"/>
+        </a:ln>
+        <a:ln w="19050" cap="flat" cmpd="sng" algn="ctr">
+          <a:solidFill>
+            <a:schemeClr val="phClr"/>
+          </a:solidFill>
+          <a:prstDash val="solid"/>
+          <a:miter lim="800000"/>
+        </a:ln>
+      </a:lnStyleLst>
+      <a:effectStyleLst>
+        <a:effectStyle>
+          <a:effectLst/>
+        </a:effectStyle>
+        <a:effectStyle>
+          <a:effectLst/>
+        </a:effectStyle>
+        <a:effectStyle>
+          <a:effectLst>
+            <a:outerShdw blurRad="57150" dist="19050" dir="5400000" algn="ctr" rotWithShape="0">
+              <a:srgbClr val="000000">
+                <a:alpha val="63000"/>
+              </a:srgbClr>
+            </a:outerShdw>
+          </a:effectLst>
+        </a:effectStyle>
+      </a:effectStyleLst>
+      <a:bgFillStyleLst>
+        <a:solidFill>
+          <a:schemeClr val="phClr"/>
+        </a:solidFill>
+        <a:solidFill>
+          <a:schemeClr val="phClr">
+            <a:tint val="95000"/>
+            <a:satMod val="170000"/>
+          </a:schemeClr>
+        </a:solidFill>
+        <a:gradFill rotWithShape="1">
+          <a:gsLst>
+            <a:gs pos="0">
+              <a:schemeClr val="phClr">
+                <a:tint val="93000"/>
+                <a:satMod val="150000"/>
+                <a:shade val="98000"/>
+                <a:lumMod val="102000"/>
+              </a:schemeClr>
+            </a:gs>
+            <a:gs pos="50000">
+              <a:schemeClr val="phClr">
+                <a:tint val="98000"/>
+                <a:satMod val="130000"/>
+                <a:shade val="90000"/>
+                <a:lumMod val="103000"/>
+              </a:schemeClr>
+            </a:gs>
+            <a:gs pos="100000">
+              <a:schemeClr val="phClr">
+                <a:shade val="63000"/>
+                <a:satMod val="120000"/>
+              </a:schemeClr>
+            </a:gs>
+          </a:gsLst>
+          <a:lin ang="5400000" scaled="0"/>
+        </a:gradFill>
+      </a:bgFillStyleLst>
+    </a:fmtScheme>
+  </a:themeElements>
+  <a:objectDefaults/>
+  <a:extraClrSchemeLst/>
+  <a:extLst>
+    <a:ext uri="{05A4C25C-085E-4340-85A3-A5531E510DB2}">
+      <thm15:themeFamily xmlns:thm15="http://schemas.microsoft.com/office/thememl/2012/main" name="Office Theme" id="{62F939B6-93AF-4DB8-9C6B-D6C7DFDC589F}" vid="{4A3C46E8-61CC-4603-A589-7422A47A8E4A}"/>
+    </a:ext>
+  </a:extLst>
+</a:theme>
 </file>